--- a/docs/fpga-presentation/fpga_talk.pptx
+++ b/docs/fpga-presentation/fpga_talk.pptx
@@ -37,6 +37,7 @@
     <p:sldId id="285" r:id="rId37"/>
     <p:sldId id="286" r:id="rId38"/>
     <p:sldId id="287" r:id="rId39"/>
+    <p:sldId id="288" r:id="rId40"/>
   </p:sldIdLst>
   <p:sldSz cx="12191695" cy="6858000" type="screen4x3"/>
   <p:notesSz cx="6858000" cy="9144000"/>
@@ -1443,7 +1444,7 @@
           <a:lstStyle/>
           <a:p>
             <a:r>
-              <a:t>This is the keystone slide and it is worth slowing down for. Two separate claims, kept separate. First, provenance: Intel drew a conceptual block diagram; turning those boxes into 29 synthesizable, independently testable modules with explicit control signals is an RTL partition, and that work is mine. Second, the survey: eighteen months of searching turned up only instruction-set simulators. Make the invitation genuinely — you want the counterexample if it exists. The corpus observation is not a throwaway; it is the mechanism behind the two failed attempts, and you cash it in at the end.</a:t>
+              <a:t>This is the keystone slide and it is worth slowing down for. Two separate claims, kept separate. First, provenance: Intel drew a conceptual block diagram; turning those boxes into 25 synthesizable, independently testable modules with explicit control signals is an RTL partition, and that work is mine. Second, the survey: eighteen months of searching turned up only instruction-set simulators. Make the invitation genuinely — you want the counterexample if it exists. The corpus observation is not a throwaway; it is the mechanism behind the two failed attempts, and you cash it in at the end.</a:t>
             </a:r>
           </a:p>
         </p:txBody>
@@ -1793,7 +1794,7 @@
           <a:lstStyle/>
           <a:p>
             <a:r>
-              <a:t>Bridge from the war stories to the demo. The exhaustive ALU sweep is worth a beat — 656,384 cases is every operand pair × every op × carry-in, checked against an independent model. You can do that for an 8-bit ALU; that is a real advantage of working at this scale. Then: sim-versus-silicon, which is the lesson every single one of these war stories converges on.</a:t>
+              <a:t>Bridge from the war stories to the demo. The exhaustive ALU sweep is worth a beat — 1,049,600 cases is every operand pair × every op × carry-in, checked against an independent model. You can do that for an 8-bit ALU; that is a real advantage of working at this scale. Then: sim-versus-silicon, which is the lesson every single one of these war stories converges on.</a:t>
             </a:r>
           </a:p>
         </p:txBody>
@@ -1863,7 +1864,7 @@
           <a:lstStyle/>
           <a:p>
             <a:r>
-              <a:t>Demo cheat sheet — verify before the talk. Scope: probe the phi1_out/phi2_out pins so the audience sees Part 1 made physical. Pi: L in monitor, send_hex.py, G 0040; narrate while it grinds; 49/50 digits — the 50th is the original 1970s program’s guard-byte truncation, good trivia. Calc: load, G, type the sum live. Finale: power-cycle into the b8008_basic bitstream, type a 3-line FOR/NEXT, RUN, MON, D the program region, G 1FB6, LIST. Fallback recordings ready for all four.</a:t>
+              <a:t>One paragraph per row, no deep dive. SBY: the solver proves the assertion for ALL input sequences, not sampled ones — math, not test vectors. Equivalence: the exact netlist headed for the FPGA is proven to match the RTL, so synthesis cannot silently change behavior — the 0xFF war story is why this exists. Exhaustive: every ALU input combination, every opcode, against models written from the datasheet, not from the VHDL. Mutation-tested = plant a bug, watch the checker fail, revert — a checker that cannot fail proves nothing. Anecdote: the bus monitor found a real RTL bug — two machine-cycle type codes transposed on the external bus. The fuzzer runs the same random program on the RTL core and the synthesized-netlist core and diffs the traces.</a:t>
             </a:r>
           </a:p>
         </p:txBody>
@@ -1933,7 +1934,7 @@
           <a:lstStyle/>
           <a:p>
             <a:r>
-              <a:t>Now the whole story lands in one place. 297 commits, two complete rewrites. The diagnosis in the bar is the important sentence and it is not a metaphor: ask a model to implement an 8008 and everything it has ever seen is an emulator — sequential software, one opcode at a time. So its instinct pulls that way, and for two versions I followed it. s8008 is literally an instruction-set simulator expressed in VHDL. What broke the pattern was going back to the primary source and building the picture Intel drew.</a:t>
+              <a:t>Demo cheat sheet — verify before the talk. Scope: probe the phi1_out/phi2_out pins so the audience sees Part 1 made physical. Pi: L in monitor, send_hex.py, G 0040; narrate while it grinds; 49/50 digits — the 50th is the original 1970s program’s guard-byte truncation, good trivia. Calc: load, G, type the sum live. Finale: power-cycle into the b8008_basic bitstream, type a 3-line FOR/NEXT, RUN, MON, D the program region, G 1FB6, LIST. Fallback recordings ready for all four.</a:t>
             </a:r>
           </a:p>
         </p:txBody>
@@ -2003,7 +2004,7 @@
           <a:lstStyle/>
           <a:p>
             <a:r>
-              <a:t>This is the promise from the signpost being kept. Walk it, do not read it. Row one is the least flattering to the AI and it is the one that makes the rest credible: for foundations it is a tempting shortcut that does not work. You can get a perfect explanation of a LUT and still not understand FPGAs. Row two is the honest credit — drafting is real leverage when you can read the output. Row three is the sharpest concrete example in the talk.</a:t>
+              <a:t>Now the whole story lands in one place. 367 commits, two complete rewrites. The diagnosis in the bar is the important sentence and it is not a metaphor: ask a model to implement an 8008 and everything it has ever seen is an emulator — sequential software, one opcode at a time. So its instinct pulls that way, and for two versions I followed it. s8008 is literally an instruction-set simulator expressed in VHDL. What broke the pattern was going back to the primary source and building the picture Intel drew.</a:t>
             </a:r>
           </a:p>
         </p:txBody>
@@ -2143,7 +2144,7 @@
           <a:lstStyle/>
           <a:p>
             <a:r>
-              <a:t>The payoff. The bar at the bottom is the answer to the question posed back at the signpost, and it should be said slowly. Row four is the keystone — it ties to the block-diagram slide and it is the reason the third attempt is different in kind, not just in quality. Row five is the sentence people write down: grading its homework with its own answer key. If you are short on time, cut rows one and two here; four and five carry the argument.</a:t>
+              <a:t>This is the promise from the signpost being kept. Walk it, do not read it. Row one is the least flattering to the AI and it is the one that makes the rest credible: for foundations it is a tempting shortcut that does not work. You can get a perfect explanation of a LUT and still not understand FPGAs. Row two is the honest credit — drafting is real leverage when you can read the output. Row three is the sharpest concrete example in the talk.</a:t>
             </a:r>
           </a:p>
         </p:txBody>
@@ -2213,7 +2214,7 @@
           <a:lstStyle/>
           <a:p>
             <a:r>
-              <a:t>Close on the last line — it lands, and it is true. Everything that made this project possible (simulation, regression tests, a rewritable chip, undo, and a tireless collaborator) is something the original team did not have. The six above are the transferable answer to "can you learn a hard skill this way": yes, and the conditions are specific and non-optional.</a:t>
+              <a:t>The payoff. The bar at the bottom is the answer to the question posed back at the signpost, and it should be said slowly. Row four is the keystone — it ties to the block-diagram slide and it is the reason the third attempt is different in kind, not just in quality. Row five is the sentence people write down: grading its homework with its own answer key. If you are short on time, cut rows one and two here; four and five carry the argument.</a:t>
             </a:r>
           </a:p>
         </p:txBody>
@@ -2239,6 +2240,76 @@
 </file>
 
 <file path=ppt/notesSlides/notesSlide32.xml><?xml version="1.0" encoding="utf-8"?>
+<p:notes xmlns:a="http://schemas.openxmlformats.org/drawingml/2006/main" xmlns:p="http://schemas.openxmlformats.org/presentationml/2006/main" xmlns:r="http://schemas.openxmlformats.org/officeDocument/2006/relationships">
+  <p:cSld>
+    <p:spTree>
+      <p:nvGrpSpPr>
+        <p:cNvPr id="1" name=""/>
+        <p:cNvGrpSpPr/>
+        <p:nvPr/>
+      </p:nvGrpSpPr>
+      <p:grpSpPr>
+        <a:xfrm>
+          <a:off x="0" y="0"/>
+          <a:ext cx="0" cy="0"/>
+          <a:chOff x="0" y="0"/>
+          <a:chExt cx="0" cy="0"/>
+        </a:xfrm>
+      </p:grpSpPr>
+      <p:sp>
+        <p:nvSpPr>
+          <p:cNvPr id="2" name="Slide Image Placeholder 1"/>
+          <p:cNvSpPr>
+            <a:spLocks noGrp="1"/>
+          </p:cNvSpPr>
+          <p:nvPr>
+            <p:ph type="sldImg" idx="2"/>
+          </p:nvPr>
+        </p:nvSpPr>
+        <p:spPr/>
+      </p:sp>
+      <p:sp>
+        <p:nvSpPr>
+          <p:cNvPr id="3" name="Notes Placeholder 2"/>
+          <p:cNvSpPr>
+            <a:spLocks noGrp="1"/>
+          </p:cNvSpPr>
+          <p:nvPr>
+            <p:ph type="body" idx="3" sz="quarter"/>
+          </p:nvPr>
+        </p:nvSpPr>
+        <p:spPr/>
+        <p:txBody>
+          <a:bodyPr/>
+          <a:lstStyle/>
+          <a:p>
+            <a:r>
+              <a:t>Close on the last line — it lands, and it is true. Everything that made this project possible (simulation, regression tests, a rewritable chip, undo, and a tireless collaborator) is something the original team did not have. The six above are the transferable answer to "can you learn a hard skill this way": yes, and the conditions are specific and non-optional.</a:t>
+            </a:r>
+          </a:p>
+        </p:txBody>
+      </p:sp>
+      <p:sp>
+        <p:nvSpPr>
+          <p:cNvPr id="4" name="Slide Number Placeholder 3"/>
+          <p:cNvSpPr>
+            <a:spLocks noGrp="1"/>
+          </p:cNvSpPr>
+          <p:nvPr>
+            <p:ph type="sldNum" idx="5" sz="quarter"/>
+          </p:nvPr>
+        </p:nvSpPr>
+        <p:spPr/>
+      </p:sp>
+    </p:spTree>
+  </p:cSld>
+  <p:clrMapOvr>
+    <a:masterClrMapping/>
+  </p:clrMapOvr>
+</p:notes>
+</file>
+
+<file path=ppt/notesSlides/notesSlide33.xml><?xml version="1.0" encoding="utf-8"?>
 <p:notes xmlns:a="http://schemas.openxmlformats.org/drawingml/2006/main" xmlns:p="http://schemas.openxmlformats.org/presentationml/2006/main" xmlns:r="http://schemas.openxmlformats.org/officeDocument/2006/relationships">
   <p:cSld>
     <p:spTree>
@@ -8210,7 +8281,7 @@
                 </a:solidFill>
                 <a:latin typeface="Aptos"/>
               </a:rPr>
-              <a:t>29 files</a:t>
+              <a:t>25 files</a:t>
             </a:r>
             <a:r>
               <a:rPr sz="1600" b="0">
@@ -12096,7 +12167,7 @@
                 </a:solidFill>
                 <a:latin typeface="Aptos"/>
               </a:rPr>
-              <a:t>29 files</a:t>
+              <a:t>25 files</a:t>
             </a:r>
           </a:p>
         </p:txBody>
@@ -15878,7 +15949,7 @@
                 </a:solidFill>
                 <a:latin typeface="Aptos"/>
               </a:rPr>
-              <a:t>29 independently testable modules</a:t>
+              <a:t>25 independently testable modules</a:t>
             </a:r>
             <a:r>
               <a:rPr sz="1600" b="0">
@@ -16207,7 +16278,7 @@
                 </a:solidFill>
                 <a:latin typeface="Aptos"/>
               </a:rPr>
-              <a:t>b8008 CPU core — 29 VHDL modules</a:t>
+              <a:t>b8008 CPU core — 25 VHDL modules</a:t>
             </a:r>
           </a:p>
         </p:txBody>
@@ -19922,7 +19993,7 @@
                           </a:solidFill>
                           <a:latin typeface="Aptos"/>
                         </a:rPr>
-                        <a:t>29 modules</a:t>
+                        <a:t>25 modules</a:t>
                       </a:r>
                     </a:p>
                   </a:txBody>
@@ -19968,7 +20039,7 @@
                           </a:solidFill>
                           <a:latin typeface="Aptos"/>
                         </a:rPr>
-                        <a:t>All 656,384 arithmetic cases vs a reference model</a:t>
+                        <a:t>All 1,049,600 arithmetic + logical cases vs a reference model</a:t>
                       </a:r>
                     </a:p>
                   </a:txBody>
@@ -20058,7 +20129,7 @@
                           </a:solidFill>
                           <a:latin typeface="Aptos"/>
                         </a:rPr>
-                        <a:t>28 / 28</a:t>
+                        <a:t>37 / 37</a:t>
                       </a:r>
                     </a:p>
                   </a:txBody>
@@ -20395,7 +20466,7 @@
     <p:bg>
       <p:bgPr>
         <a:solidFill>
-          <a:srgbClr val="333333"/>
+          <a:srgbClr val="F7F8FA"/>
         </a:solidFill>
         <a:effectLst/>
       </p:bgPr>
@@ -20432,11 +20503,11 @@
             <a:r>
               <a:rPr sz="1200" b="1">
                 <a:solidFill>
-                  <a:srgbClr val="FFC220"/>
-                </a:solidFill>
-                <a:latin typeface="Aptos"/>
-              </a:rPr>
-              <a:t>LIVE</a:t>
+                  <a:srgbClr val="3B3F44"/>
+                </a:solidFill>
+                <a:latin typeface="Aptos"/>
+              </a:rPr>
+              <a:t>PART 5 — PROOF</a:t>
             </a:r>
           </a:p>
         </p:txBody>
@@ -20466,11 +20537,11 @@
             <a:r>
               <a:rPr sz="3200" b="1">
                 <a:solidFill>
-                  <a:srgbClr val="F2F2F2"/>
-                </a:solidFill>
-                <a:latin typeface="Aptos"/>
-              </a:rPr>
-              <a:t>The circuit, running</a:t>
+                  <a:srgbClr val="333333"/>
+                </a:solidFill>
+                <a:latin typeface="Aptos"/>
+              </a:rPr>
+              <a:t>Beyond tests: proofs, equivalence, fuzzing</a:t>
             </a:r>
           </a:p>
         </p:txBody>
@@ -20518,41 +20589,16 @@
           </a:p>
         </p:txBody>
       </p:sp>
-      <p:pic>
-        <p:nvPicPr>
-          <p:cNvPr id="5" name="Picture 4" descr="lattice_logo_ondark.png"/>
-          <p:cNvPicPr>
-            <a:picLocks noChangeAspect="1"/>
-          </p:cNvPicPr>
-          <p:nvPr/>
-        </p:nvPicPr>
-        <p:blipFill>
-          <a:blip r:embed="rId2"/>
-          <a:stretch>
-            <a:fillRect/>
-          </a:stretch>
-        </p:blipFill>
-        <p:spPr>
-          <a:xfrm>
-            <a:off x="9982462" y="320040"/>
-            <a:ext cx="1706313" cy="310896"/>
-          </a:xfrm>
-          <a:prstGeom prst="rect">
-            <a:avLst/>
-          </a:prstGeom>
-          <a:effectLst/>
-        </p:spPr>
-      </p:pic>
-      <p:sp>
-        <p:nvSpPr>
-          <p:cNvPr id="6" name="TextBox 5"/>
+      <p:sp>
+        <p:nvSpPr>
+          <p:cNvPr id="5" name="TextBox 4"/>
           <p:cNvSpPr txBox="1"/>
           <p:nvPr/>
         </p:nvSpPr>
         <p:spPr>
           <a:xfrm>
-            <a:off x="548640" y="1828800"/>
-            <a:ext cx="6400800" cy="4023360"/>
+            <a:off x="548640" y="1554480"/>
+            <a:ext cx="11155680" cy="548640"/>
           </a:xfrm>
           <a:prstGeom prst="rect">
             <a:avLst/>
@@ -20567,280 +20613,509 @@
           <a:p>
             <a:pPr>
               <a:spcAft>
-                <a:spcPts val="1800"/>
+                <a:spcPts val="800"/>
               </a:spcAft>
             </a:pPr>
             <a:r>
-              <a:rPr sz="1700" b="0">
-                <a:solidFill>
-                  <a:srgbClr val="F2F2F2"/>
-                </a:solidFill>
-                <a:latin typeface="Aptos"/>
-              </a:rPr>
-              <a:t>•  </a:t>
-            </a:r>
-            <a:r>
-              <a:rPr sz="1700" b="1">
-                <a:solidFill>
-                  <a:srgbClr val="F2F2F2"/>
-                </a:solidFill>
-                <a:latin typeface="Aptos"/>
-              </a:rPr>
-              <a:t>The clocks</a:t>
-            </a:r>
-            <a:r>
-              <a:rPr sz="1700" b="0">
-                <a:solidFill>
-                  <a:srgbClr val="F2F2F2"/>
-                </a:solidFill>
-                <a:latin typeface="Aptos"/>
-              </a:rPr>
-              <a:t> — φ1 / φ2 on the scope, generated by the fabric</a:t>
-            </a:r>
-          </a:p>
-          <a:p>
-            <a:pPr>
-              <a:spcAft>
-                <a:spcPts val="1800"/>
-              </a:spcAft>
-            </a:pPr>
-            <a:r>
-              <a:rPr sz="1700" b="0">
-                <a:solidFill>
-                  <a:srgbClr val="F2F2F2"/>
-                </a:solidFill>
-                <a:latin typeface="Aptos"/>
-              </a:rPr>
-              <a:t>•  </a:t>
-            </a:r>
-            <a:r>
-              <a:rPr sz="1700" b="1">
-                <a:solidFill>
-                  <a:srgbClr val="F2F2F2"/>
-                </a:solidFill>
-                <a:latin typeface="Aptos"/>
-              </a:rPr>
-              <a:t>Pi to 50 digits</a:t>
-            </a:r>
-            <a:r>
-              <a:rPr sz="1700" b="0">
-                <a:solidFill>
-                  <a:srgbClr val="F2F2F2"/>
-                </a:solidFill>
-                <a:latin typeface="Aptos"/>
-              </a:rPr>
-              <a:t> — multiprecision arithmetic, ~75 s at 500 kHz</a:t>
-            </a:r>
-          </a:p>
-          <a:p>
-            <a:pPr>
-              <a:spcAft>
-                <a:spcPts val="1800"/>
-              </a:spcAft>
-            </a:pPr>
-            <a:r>
-              <a:rPr sz="1700" b="0">
-                <a:solidFill>
-                  <a:srgbClr val="F2F2F2"/>
-                </a:solidFill>
-                <a:latin typeface="Aptos"/>
-              </a:rPr>
-              <a:t>•  </a:t>
-            </a:r>
-            <a:r>
-              <a:rPr sz="1700" b="1">
-                <a:solidFill>
-                  <a:srgbClr val="F2F2F2"/>
-                </a:solidFill>
-                <a:latin typeface="Aptos"/>
-              </a:rPr>
-              <a:t>SCELBI floating-point calculator (1974)</a:t>
-            </a:r>
-            <a:r>
-              <a:rPr sz="1700" b="0">
-                <a:solidFill>
-                  <a:srgbClr val="F2F2F2"/>
-                </a:solidFill>
-                <a:latin typeface="Aptos"/>
-              </a:rPr>
-              <a:t> — </a:t>
-            </a:r>
-            <a:r>
-              <a:rPr sz="1700" b="0">
-                <a:solidFill>
-                  <a:srgbClr val="FFC220"/>
-                </a:solidFill>
-                <a:latin typeface="Aptos Mono"/>
-              </a:rPr>
-              <a:t>12.2 X 2.2 = 26.84</a:t>
-            </a:r>
-          </a:p>
-          <a:p>
-            <a:pPr>
-              <a:spcAft>
-                <a:spcPts val="1800"/>
-              </a:spcAft>
-            </a:pPr>
-            <a:r>
-              <a:rPr sz="1700" b="0">
-                <a:solidFill>
-                  <a:srgbClr val="F2F2F2"/>
-                </a:solidFill>
-                <a:latin typeface="Aptos"/>
-              </a:rPr>
-              <a:t>•  </a:t>
-            </a:r>
-            <a:r>
-              <a:rPr sz="1700" b="1">
-                <a:solidFill>
-                  <a:srgbClr val="F2F2F2"/>
-                </a:solidFill>
-                <a:latin typeface="Aptos"/>
-              </a:rPr>
-              <a:t>The finale</a:t>
-            </a:r>
-            <a:r>
-              <a:rPr sz="1700" b="0">
-                <a:solidFill>
-                  <a:srgbClr val="F2F2F2"/>
-                </a:solidFill>
-                <a:latin typeface="Aptos"/>
-              </a:rPr>
-              <a:t> — power on → BASIC → </a:t>
-            </a:r>
-            <a:r>
-              <a:rPr sz="1700" b="0">
-                <a:solidFill>
-                  <a:srgbClr val="FFC220"/>
-                </a:solidFill>
-                <a:latin typeface="Aptos Mono"/>
-              </a:rPr>
-              <a:t>MON</a:t>
-            </a:r>
-            <a:r>
-              <a:rPr sz="1700" b="0">
-                <a:solidFill>
-                  <a:srgbClr val="F2F2F2"/>
-                </a:solidFill>
-                <a:latin typeface="Aptos"/>
-              </a:rPr>
-              <a:t> → machine monitor → </a:t>
-            </a:r>
-            <a:r>
-              <a:rPr sz="1700" b="0">
-                <a:solidFill>
-                  <a:srgbClr val="FFC220"/>
-                </a:solidFill>
-                <a:latin typeface="Aptos Mono"/>
-              </a:rPr>
-              <a:t>G 1FB6</a:t>
-            </a:r>
-            <a:r>
-              <a:rPr sz="1700" b="0">
-                <a:solidFill>
-                  <a:srgbClr val="F2F2F2"/>
-                </a:solidFill>
-                <a:latin typeface="Aptos"/>
-              </a:rPr>
-              <a:t> → back in BASIC, program intact</a:t>
-            </a:r>
-          </a:p>
-        </p:txBody>
-      </p:sp>
-      <p:pic>
-        <p:nvPicPr>
-          <p:cNvPr id="7" name="Picture 6" descr="two_phase_oscope_cap_1.png"/>
-          <p:cNvPicPr>
-            <a:picLocks noChangeAspect="1"/>
-          </p:cNvPicPr>
-          <p:nvPr/>
-        </p:nvPicPr>
-        <p:blipFill>
-          <a:blip r:embed="rId3"/>
-          <a:stretch>
-            <a:fillRect/>
-          </a:stretch>
-        </p:blipFill>
-        <p:spPr>
-          <a:xfrm>
-            <a:off x="7223760" y="1828800"/>
-            <a:ext cx="3048000" cy="1828800"/>
-          </a:xfrm>
-          <a:prstGeom prst="rect">
-            <a:avLst/>
-          </a:prstGeom>
-          <a:ln w="9525">
-            <a:solidFill>
-              <a:srgbClr val="8D8D8D"/>
-            </a:solidFill>
+              <a:rPr sz="1600" b="0">
+                <a:solidFill>
+                  <a:srgbClr val="333333"/>
+                </a:solidFill>
+                <a:latin typeface="Aptos"/>
+              </a:rPr>
+              <a:t>Same open-source ecosystem as the build flow — YosysHQ tools, all running in CI on every push.</a:t>
+            </a:r>
+          </a:p>
+        </p:txBody>
+      </p:sp>
+      <p:graphicFrame>
+        <p:nvGraphicFramePr>
+          <p:cNvPr id="6" name="Table 5"/>
+          <p:cNvGraphicFramePr>
+            <a:graphicFrameLocks noGrp="1"/>
+          </p:cNvGraphicFramePr>
+          <p:nvPr/>
+        </p:nvGraphicFramePr>
+        <p:xfrm>
+          <a:off x="548640" y="2194560"/>
+          <a:ext cx="11064240" cy="3200400"/>
+        </p:xfrm>
+        <a:graphic>
+          <a:graphicData uri="http://schemas.openxmlformats.org/drawingml/2006/table">
+            <a:tbl>
+              <a:tblPr firstRow="1" bandRow="1">
+                <a:tableStyleId>{5C22544A-7EE6-4342-B048-85BDC9FD1C3A}</a:tableStyleId>
+              </a:tblPr>
+              <a:tblGrid>
+                <a:gridCol w="2286000"/>
+                <a:gridCol w="6583680"/>
+                <a:gridCol w="2194560"/>
+              </a:tblGrid>
+              <a:tr h="533400">
+                <a:tc>
+                  <a:txBody>
+                    <a:bodyPr wrap="square"/>
+                    <a:lstStyle/>
+                    <a:p>
+                      <a:r>
+                        <a:rPr sz="1350" b="1">
+                          <a:solidFill>
+                            <a:srgbClr val="FFFFFF"/>
+                          </a:solidFill>
+                          <a:latin typeface="Aptos"/>
+                        </a:rPr>
+                        <a:t>Layer</a:t>
+                      </a:r>
+                    </a:p>
+                  </a:txBody>
+                  <a:tcPr marL="109728" marR="109728" marT="36576" marB="36576" anchor="ctr">
+                    <a:solidFill>
+                      <a:srgbClr val="3B3F44"/>
+                    </a:solidFill>
+                  </a:tcPr>
+                </a:tc>
+                <a:tc>
+                  <a:txBody>
+                    <a:bodyPr wrap="square"/>
+                    <a:lstStyle/>
+                    <a:p>
+                      <a:r>
+                        <a:rPr sz="1350" b="1">
+                          <a:solidFill>
+                            <a:srgbClr val="FFFFFF"/>
+                          </a:solidFill>
+                          <a:latin typeface="Aptos"/>
+                        </a:rPr>
+                        <a:t>What it checks</a:t>
+                      </a:r>
+                    </a:p>
+                  </a:txBody>
+                  <a:tcPr marL="109728" marR="109728" marT="36576" marB="36576" anchor="ctr">
+                    <a:solidFill>
+                      <a:srgbClr val="3B3F44"/>
+                    </a:solidFill>
+                  </a:tcPr>
+                </a:tc>
+                <a:tc>
+                  <a:txBody>
+                    <a:bodyPr wrap="square"/>
+                    <a:lstStyle/>
+                    <a:p>
+                      <a:r>
+                        <a:rPr sz="1350" b="1">
+                          <a:solidFill>
+                            <a:srgbClr val="FFFFFF"/>
+                          </a:solidFill>
+                          <a:latin typeface="Aptos"/>
+                        </a:rPr>
+                        <a:t>Scale</a:t>
+                      </a:r>
+                    </a:p>
+                  </a:txBody>
+                  <a:tcPr marL="109728" marR="109728" marT="36576" marB="36576" anchor="ctr">
+                    <a:solidFill>
+                      <a:srgbClr val="3B3F44"/>
+                    </a:solidFill>
+                  </a:tcPr>
+                </a:tc>
+              </a:tr>
+              <a:tr h="533400">
+                <a:tc>
+                  <a:txBody>
+                    <a:bodyPr wrap="square"/>
+                    <a:lstStyle/>
+                    <a:p>
+                      <a:r>
+                        <a:rPr sz="1350" b="0">
+                          <a:solidFill>
+                            <a:srgbClr val="333333"/>
+                          </a:solidFill>
+                          <a:latin typeface="Aptos"/>
+                        </a:rPr>
+                        <a:t>SBY property proofs</a:t>
+                      </a:r>
+                    </a:p>
+                  </a:txBody>
+                  <a:tcPr marL="109728" marR="109728" marT="36576" marB="36576" anchor="ctr">
+                    <a:solidFill>
+                      <a:srgbClr val="FFFFFF"/>
+                    </a:solidFill>
+                  </a:tcPr>
+                </a:tc>
+                <a:tc>
+                  <a:txBody>
+                    <a:bodyPr wrap="square"/>
+                    <a:lstStyle/>
+                    <a:p>
+                      <a:r>
+                        <a:rPr sz="1350" b="0">
+                          <a:solidFill>
+                            <a:srgbClr val="333333"/>
+                          </a:solidFill>
+                          <a:latin typeface="Aptos"/>
+                        </a:rPr>
+                        <a:t>Module contracts as PSL assertions, proven by SMT solver (k-induction / bounded)</a:t>
+                      </a:r>
+                    </a:p>
+                  </a:txBody>
+                  <a:tcPr marL="109728" marR="109728" marT="36576" marB="36576" anchor="ctr">
+                    <a:solidFill>
+                      <a:srgbClr val="FFFFFF"/>
+                    </a:solidFill>
+                  </a:tcPr>
+                </a:tc>
+                <a:tc>
+                  <a:txBody>
+                    <a:bodyPr wrap="square"/>
+                    <a:lstStyle/>
+                    <a:p>
+                      <a:r>
+                        <a:rPr sz="1350" b="0">
+                          <a:solidFill>
+                            <a:srgbClr val="333333"/>
+                          </a:solidFill>
+                          <a:latin typeface="Aptos"/>
+                        </a:rPr>
+                        <a:t>11 suites</a:t>
+                      </a:r>
+                    </a:p>
+                  </a:txBody>
+                  <a:tcPr marL="109728" marR="109728" marT="36576" marB="36576" anchor="ctr">
+                    <a:solidFill>
+                      <a:srgbClr val="FFFFFF"/>
+                    </a:solidFill>
+                  </a:tcPr>
+                </a:tc>
+              </a:tr>
+              <a:tr h="533400">
+                <a:tc>
+                  <a:txBody>
+                    <a:bodyPr wrap="square"/>
+                    <a:lstStyle/>
+                    <a:p>
+                      <a:r>
+                        <a:rPr sz="1350" b="0">
+                          <a:solidFill>
+                            <a:srgbClr val="333333"/>
+                          </a:solidFill>
+                          <a:latin typeface="Aptos"/>
+                        </a:rPr>
+                        <a:t>Equivalence checks</a:t>
+                      </a:r>
+                    </a:p>
+                  </a:txBody>
+                  <a:tcPr marL="109728" marR="109728" marT="36576" marB="36576" anchor="ctr">
+                    <a:solidFill>
+                      <a:srgbClr val="EFEFEF"/>
+                    </a:solidFill>
+                  </a:tcPr>
+                </a:tc>
+                <a:tc>
+                  <a:txBody>
+                    <a:bodyPr wrap="square"/>
+                    <a:lstStyle/>
+                    <a:p>
+                      <a:r>
+                        <a:rPr sz="1350" b="0">
+                          <a:solidFill>
+                            <a:srgbClr val="333333"/>
+                          </a:solidFill>
+                          <a:latin typeface="Aptos"/>
+                        </a:rPr>
+                        <a:t>RTL vs its synthesized gate netlist (Yosys round trip)</a:t>
+                      </a:r>
+                    </a:p>
+                  </a:txBody>
+                  <a:tcPr marL="109728" marR="109728" marT="36576" marB="36576" anchor="ctr">
+                    <a:solidFill>
+                      <a:srgbClr val="EFEFEF"/>
+                    </a:solidFill>
+                  </a:tcPr>
+                </a:tc>
+                <a:tc>
+                  <a:txBody>
+                    <a:bodyPr wrap="square"/>
+                    <a:lstStyle/>
+                    <a:p>
+                      <a:r>
+                        <a:rPr sz="1350" b="0">
+                          <a:solidFill>
+                            <a:srgbClr val="333333"/>
+                          </a:solidFill>
+                          <a:latin typeface="Aptos"/>
+                        </a:rPr>
+                        <a:t>7 miters + 6 EQY</a:t>
+                      </a:r>
+                    </a:p>
+                  </a:txBody>
+                  <a:tcPr marL="109728" marR="109728" marT="36576" marB="36576" anchor="ctr">
+                    <a:solidFill>
+                      <a:srgbClr val="EFEFEF"/>
+                    </a:solidFill>
+                  </a:tcPr>
+                </a:tc>
+              </a:tr>
+              <a:tr h="533400">
+                <a:tc>
+                  <a:txBody>
+                    <a:bodyPr wrap="square"/>
+                    <a:lstStyle/>
+                    <a:p>
+                      <a:r>
+                        <a:rPr sz="1350" b="0">
+                          <a:solidFill>
+                            <a:srgbClr val="333333"/>
+                          </a:solidFill>
+                          <a:latin typeface="Aptos"/>
+                        </a:rPr>
+                        <a:t>Exhaustive sweeps</a:t>
+                      </a:r>
+                    </a:p>
+                  </a:txBody>
+                  <a:tcPr marL="109728" marR="109728" marT="36576" marB="36576" anchor="ctr">
+                    <a:solidFill>
+                      <a:srgbClr val="FFFFFF"/>
+                    </a:solidFill>
+                  </a:tcPr>
+                </a:tc>
+                <a:tc>
+                  <a:txBody>
+                    <a:bodyPr wrap="square"/>
+                    <a:lstStyle/>
+                    <a:p>
+                      <a:r>
+                        <a:rPr sz="1350" b="0">
+                          <a:solidFill>
+                            <a:srgbClr val="333333"/>
+                          </a:solidFill>
+                          <a:latin typeface="Aptos"/>
+                        </a:rPr>
+                        <a:t>ALU and instruction decoder vs independent Python models</a:t>
+                      </a:r>
+                    </a:p>
+                  </a:txBody>
+                  <a:tcPr marL="109728" marR="109728" marT="36576" marB="36576" anchor="ctr">
+                    <a:solidFill>
+                      <a:srgbClr val="FFFFFF"/>
+                    </a:solidFill>
+                  </a:tcPr>
+                </a:tc>
+                <a:tc>
+                  <a:txBody>
+                    <a:bodyPr wrap="square"/>
+                    <a:lstStyle/>
+                    <a:p>
+                      <a:r>
+                        <a:rPr sz="1350" b="0">
+                          <a:solidFill>
+                            <a:srgbClr val="333333"/>
+                          </a:solidFill>
+                          <a:latin typeface="Aptos"/>
+                        </a:rPr>
+                        <a:t>1,049,600 + 256 cases</a:t>
+                      </a:r>
+                    </a:p>
+                  </a:txBody>
+                  <a:tcPr marL="109728" marR="109728" marT="36576" marB="36576" anchor="ctr">
+                    <a:solidFill>
+                      <a:srgbClr val="FFFFFF"/>
+                    </a:solidFill>
+                  </a:tcPr>
+                </a:tc>
+              </a:tr>
+              <a:tr h="533400">
+                <a:tc>
+                  <a:txBody>
+                    <a:bodyPr wrap="square"/>
+                    <a:lstStyle/>
+                    <a:p>
+                      <a:r>
+                        <a:rPr sz="1350" b="0">
+                          <a:solidFill>
+                            <a:srgbClr val="333333"/>
+                          </a:solidFill>
+                          <a:latin typeface="Aptos"/>
+                        </a:rPr>
+                        <a:t>cocotb monitors</a:t>
+                      </a:r>
+                    </a:p>
+                  </a:txBody>
+                  <a:tcPr marL="109728" marR="109728" marT="36576" marB="36576" anchor="ctr">
+                    <a:solidFill>
+                      <a:srgbClr val="EFEFEF"/>
+                    </a:solidFill>
+                  </a:tcPr>
+                </a:tc>
+                <a:tc>
+                  <a:txBody>
+                    <a:bodyPr wrap="square"/>
+                    <a:lstStyle/>
+                    <a:p>
+                      <a:r>
+                        <a:rPr sz="1350" b="0">
+                          <a:solidFill>
+                            <a:srgbClr val="333333"/>
+                          </a:solidFill>
+                          <a:latin typeface="Aptos"/>
+                        </a:rPr>
+                        <a:t>External bus protocol on the full core; per-instruction control-signal scenarios</a:t>
+                      </a:r>
+                    </a:p>
+                  </a:txBody>
+                  <a:tcPr marL="109728" marR="109728" marT="36576" marB="36576" anchor="ctr">
+                    <a:solidFill>
+                      <a:srgbClr val="EFEFEF"/>
+                    </a:solidFill>
+                  </a:tcPr>
+                </a:tc>
+                <a:tc>
+                  <a:txBody>
+                    <a:bodyPr wrap="square"/>
+                    <a:lstStyle/>
+                    <a:p>
+                      <a:r>
+                        <a:rPr sz="1350" b="0">
+                          <a:solidFill>
+                            <a:srgbClr val="333333"/>
+                          </a:solidFill>
+                          <a:latin typeface="Aptos"/>
+                        </a:rPr>
+                        <a:t>RTL + netlist</a:t>
+                      </a:r>
+                    </a:p>
+                  </a:txBody>
+                  <a:tcPr marL="109728" marR="109728" marT="36576" marB="36576" anchor="ctr">
+                    <a:solidFill>
+                      <a:srgbClr val="EFEFEF"/>
+                    </a:solidFill>
+                  </a:tcPr>
+                </a:tc>
+              </a:tr>
+              <a:tr h="533400">
+                <a:tc>
+                  <a:txBody>
+                    <a:bodyPr wrap="square"/>
+                    <a:lstStyle/>
+                    <a:p>
+                      <a:r>
+                        <a:rPr sz="1350" b="0">
+                          <a:solidFill>
+                            <a:srgbClr val="333333"/>
+                          </a:solidFill>
+                          <a:latin typeface="Aptos"/>
+                        </a:rPr>
+                        <a:t>Differential fuzzer</a:t>
+                      </a:r>
+                    </a:p>
+                  </a:txBody>
+                  <a:tcPr marL="109728" marR="109728" marT="36576" marB="36576" anchor="ctr">
+                    <a:solidFill>
+                      <a:srgbClr val="FFFFFF"/>
+                    </a:solidFill>
+                  </a:tcPr>
+                </a:tc>
+                <a:tc>
+                  <a:txBody>
+                    <a:bodyPr wrap="square"/>
+                    <a:lstStyle/>
+                    <a:p>
+                      <a:r>
+                        <a:rPr sz="1350" b="0">
+                          <a:solidFill>
+                            <a:srgbClr val="333333"/>
+                          </a:solidFill>
+                          <a:latin typeface="Aptos"/>
+                        </a:rPr>
+                        <a:t>Random legal programs under three oracles: bus monitor, datasheet timing, RTL-vs-netlist trace diff</a:t>
+                      </a:r>
+                    </a:p>
+                  </a:txBody>
+                  <a:tcPr marL="109728" marR="109728" marT="36576" marB="36576" anchor="ctr">
+                    <a:solidFill>
+                      <a:srgbClr val="FFFFFF"/>
+                    </a:solidFill>
+                  </a:tcPr>
+                </a:tc>
+                <a:tc>
+                  <a:txBody>
+                    <a:bodyPr wrap="square"/>
+                    <a:lstStyle/>
+                    <a:p>
+                      <a:r>
+                        <a:rPr sz="1350" b="0">
+                          <a:solidFill>
+                            <a:srgbClr val="333333"/>
+                          </a:solidFill>
+                          <a:latin typeface="Aptos"/>
+                        </a:rPr>
+                        <a:t>seeded, both cores</a:t>
+                      </a:r>
+                    </a:p>
+                  </a:txBody>
+                  <a:tcPr marL="109728" marR="109728" marT="36576" marB="36576" anchor="ctr">
+                    <a:solidFill>
+                      <a:srgbClr val="FFFFFF"/>
+                    </a:solidFill>
+                  </a:tcPr>
+                </a:tc>
+              </a:tr>
+            </a:tbl>
+          </a:graphicData>
+        </a:graphic>
+      </p:graphicFrame>
+      <p:sp>
+        <p:nvSpPr>
+          <p:cNvPr id="7" name="Rectangle 6"/>
+          <p:cNvSpPr/>
+          <p:nvPr/>
+        </p:nvSpPr>
+        <p:spPr>
+          <a:xfrm>
+            <a:off x="548640" y="5623560"/>
+            <a:ext cx="11064240" cy="777240"/>
+          </a:xfrm>
+          <a:prstGeom prst="rect">
+            <a:avLst/>
+          </a:prstGeom>
+          <a:solidFill>
+            <a:srgbClr val="FFF3D3"/>
+          </a:solidFill>
+          <a:ln>
+            <a:noFill/>
           </a:ln>
           <a:effectLst/>
         </p:spPr>
-      </p:pic>
-      <p:sp>
-        <p:nvSpPr>
-          <p:cNvPr id="8" name="TextBox 7"/>
-          <p:cNvSpPr txBox="1"/>
-          <p:nvPr/>
-        </p:nvSpPr>
-        <p:spPr>
-          <a:xfrm>
-            <a:off x="7223760" y="3730752"/>
-            <a:ext cx="4480560" cy="365760"/>
-          </a:xfrm>
-          <a:prstGeom prst="rect">
-            <a:avLst/>
-          </a:prstGeom>
-          <a:noFill/>
-        </p:spPr>
-        <p:txBody>
-          <a:bodyPr wrap="square">
-            <a:spAutoFit/>
-          </a:bodyPr>
-          <a:lstStyle/>
-          <a:p>
-            <a:r>
-              <a:rPr sz="1200" i="1">
-                <a:solidFill>
-                  <a:srgbClr val="9AA0A8"/>
-                </a:solidFill>
-                <a:latin typeface="Aptos"/>
-              </a:rPr>
-              <a:t>φ1 / φ2 from the FPGA — non-overlapping, 0.8 µs and 0.6 µs</a:t>
-            </a:r>
-          </a:p>
-        </p:txBody>
-      </p:sp>
-      <p:pic>
-        <p:nvPicPr>
-          <p:cNvPr id="9" name="Picture 8" descr="tiny_os_scelbal.png"/>
-          <p:cNvPicPr>
-            <a:picLocks noChangeAspect="1"/>
-          </p:cNvPicPr>
-          <p:nvPr/>
-        </p:nvPicPr>
-        <p:blipFill>
-          <a:blip r:embed="rId4"/>
-          <a:stretch>
-            <a:fillRect/>
-          </a:stretch>
-        </p:blipFill>
-        <p:spPr>
-          <a:xfrm>
-            <a:off x="7223760" y="4160520"/>
-            <a:ext cx="3135595" cy="2194559"/>
-          </a:xfrm>
-          <a:prstGeom prst="rect">
-            <a:avLst/>
-          </a:prstGeom>
-          <a:ln w="9525">
-            <a:solidFill>
-              <a:srgbClr val="8D8D8D"/>
-            </a:solidFill>
-          </a:ln>
-          <a:effectLst/>
-        </p:spPr>
-      </p:pic>
+        <p:style>
+          <a:lnRef idx="1">
+            <a:schemeClr val="accent1"/>
+          </a:lnRef>
+          <a:fillRef idx="3">
+            <a:schemeClr val="accent1"/>
+          </a:fillRef>
+          <a:effectRef idx="2">
+            <a:schemeClr val="accent1"/>
+          </a:effectRef>
+          <a:fontRef idx="minor">
+            <a:schemeClr val="lt1"/>
+          </a:fontRef>
+        </p:style>
+        <p:txBody>
+          <a:bodyPr rtlCol="0" anchor="ctr" wrap="square" lIns="45720" rIns="45720" tIns="27432" bIns="27432"/>
+          <a:lstStyle/>
+          <a:p>
+            <a:pPr algn="ctr"/>
+            <a:r>
+              <a:rPr sz="1600" b="1">
+                <a:solidFill>
+                  <a:srgbClr val="333333"/>
+                </a:solidFill>
+                <a:latin typeface="Aptos"/>
+              </a:rPr>
+              <a:t>37 CI jobs on every push  ·  every checker mutation-tested  ·  verification plan: 102 rows, zero gaps</a:t>
+            </a:r>
+          </a:p>
+        </p:txBody>
+      </p:sp>
     </p:spTree>
   </p:cSld>
   <p:clrMapOvr>
@@ -20896,7 +21171,7 @@
                 </a:solidFill>
                 <a:latin typeface="Aptos"/>
               </a:rPr>
-              <a:t>PART 6 — HOW THIS GOT BUILT</a:t>
+              <a:t>LIVE</a:t>
             </a:r>
           </a:p>
         </p:txBody>
@@ -20930,7 +21205,7 @@
                 </a:solidFill>
                 <a:latin typeface="Aptos"/>
               </a:rPr>
-              <a:t>Three versions, eighteen months</a:t>
+              <a:t>The circuit, running</a:t>
             </a:r>
           </a:p>
         </p:txBody>
@@ -20978,16 +21253,41 @@
           </a:p>
         </p:txBody>
       </p:sp>
-      <p:sp>
-        <p:nvSpPr>
-          <p:cNvPr id="5" name="TextBox 4"/>
+      <p:pic>
+        <p:nvPicPr>
+          <p:cNvPr id="5" name="Picture 4" descr="lattice_logo_ondark.png"/>
+          <p:cNvPicPr>
+            <a:picLocks noChangeAspect="1"/>
+          </p:cNvPicPr>
+          <p:nvPr/>
+        </p:nvPicPr>
+        <p:blipFill>
+          <a:blip r:embed="rId2"/>
+          <a:stretch>
+            <a:fillRect/>
+          </a:stretch>
+        </p:blipFill>
+        <p:spPr>
+          <a:xfrm>
+            <a:off x="9982462" y="320040"/>
+            <a:ext cx="1706313" cy="310896"/>
+          </a:xfrm>
+          <a:prstGeom prst="rect">
+            <a:avLst/>
+          </a:prstGeom>
+          <a:effectLst/>
+        </p:spPr>
+      </p:pic>
+      <p:sp>
+        <p:nvSpPr>
+          <p:cNvPr id="6" name="TextBox 5"/>
           <p:cNvSpPr txBox="1"/>
           <p:nvPr/>
         </p:nvSpPr>
         <p:spPr>
           <a:xfrm>
-            <a:off x="548640" y="1371600"/>
-            <a:ext cx="11064240" cy="411480"/>
+            <a:off x="548640" y="1828800"/>
+            <a:ext cx="6400800" cy="4023360"/>
           </a:xfrm>
           <a:prstGeom prst="rect">
             <a:avLst/>
@@ -21002,699 +21302,280 @@
           <a:p>
             <a:pPr>
               <a:spcAft>
-                <a:spcPts val="800"/>
+                <a:spcPts val="1800"/>
               </a:spcAft>
             </a:pPr>
             <a:r>
-              <a:rPr sz="1600" b="0">
+              <a:rPr sz="1700" b="0">
                 <a:solidFill>
                   <a:srgbClr val="F2F2F2"/>
                 </a:solidFill>
                 <a:latin typeface="Aptos"/>
               </a:rPr>
-              <a:t>Eighteen months ago I could not read a VHDL </a:t>
-            </a:r>
-            <a:r>
-              <a:rPr sz="1600" b="0">
+              <a:t>•  </a:t>
+            </a:r>
+            <a:r>
+              <a:rPr sz="1700" b="1">
+                <a:solidFill>
+                  <a:srgbClr val="F2F2F2"/>
+                </a:solidFill>
+                <a:latin typeface="Aptos"/>
+              </a:rPr>
+              <a:t>The clocks</a:t>
+            </a:r>
+            <a:r>
+              <a:rPr sz="1700" b="0">
+                <a:solidFill>
+                  <a:srgbClr val="F2F2F2"/>
+                </a:solidFill>
+                <a:latin typeface="Aptos"/>
+              </a:rPr>
+              <a:t> — φ1 / φ2 on the scope, generated by the fabric</a:t>
+            </a:r>
+          </a:p>
+          <a:p>
+            <a:pPr>
+              <a:spcAft>
+                <a:spcPts val="1800"/>
+              </a:spcAft>
+            </a:pPr>
+            <a:r>
+              <a:rPr sz="1700" b="0">
+                <a:solidFill>
+                  <a:srgbClr val="F2F2F2"/>
+                </a:solidFill>
+                <a:latin typeface="Aptos"/>
+              </a:rPr>
+              <a:t>•  </a:t>
+            </a:r>
+            <a:r>
+              <a:rPr sz="1700" b="1">
+                <a:solidFill>
+                  <a:srgbClr val="F2F2F2"/>
+                </a:solidFill>
+                <a:latin typeface="Aptos"/>
+              </a:rPr>
+              <a:t>Pi to 50 digits</a:t>
+            </a:r>
+            <a:r>
+              <a:rPr sz="1700" b="0">
+                <a:solidFill>
+                  <a:srgbClr val="F2F2F2"/>
+                </a:solidFill>
+                <a:latin typeface="Aptos"/>
+              </a:rPr>
+              <a:t> — multiprecision arithmetic, ~75 s at 500 kHz</a:t>
+            </a:r>
+          </a:p>
+          <a:p>
+            <a:pPr>
+              <a:spcAft>
+                <a:spcPts val="1800"/>
+              </a:spcAft>
+            </a:pPr>
+            <a:r>
+              <a:rPr sz="1700" b="0">
+                <a:solidFill>
+                  <a:srgbClr val="F2F2F2"/>
+                </a:solidFill>
+                <a:latin typeface="Aptos"/>
+              </a:rPr>
+              <a:t>•  </a:t>
+            </a:r>
+            <a:r>
+              <a:rPr sz="1700" b="1">
+                <a:solidFill>
+                  <a:srgbClr val="F2F2F2"/>
+                </a:solidFill>
+                <a:latin typeface="Aptos"/>
+              </a:rPr>
+              <a:t>SCELBI floating-point calculator (1974)</a:t>
+            </a:r>
+            <a:r>
+              <a:rPr sz="1700" b="0">
+                <a:solidFill>
+                  <a:srgbClr val="F2F2F2"/>
+                </a:solidFill>
+                <a:latin typeface="Aptos"/>
+              </a:rPr>
+              <a:t> — </a:t>
+            </a:r>
+            <a:r>
+              <a:rPr sz="1700" b="0">
                 <a:solidFill>
                   <a:srgbClr val="FFC220"/>
                 </a:solidFill>
                 <a:latin typeface="Aptos Mono"/>
               </a:rPr>
-              <a:t>process</a:t>
-            </a:r>
-            <a:r>
-              <a:rPr sz="1600" b="0">
+              <a:t>12.2 X 2.2 = 26.84</a:t>
+            </a:r>
+          </a:p>
+          <a:p>
+            <a:pPr>
+              <a:spcAft>
+                <a:spcPts val="1800"/>
+              </a:spcAft>
+            </a:pPr>
+            <a:r>
+              <a:rPr sz="1700" b="0">
                 <a:solidFill>
                   <a:srgbClr val="F2F2F2"/>
                 </a:solidFill>
                 <a:latin typeface="Aptos"/>
               </a:rPr>
-              <a:t>, and had never touched an FPGA.</a:t>
-            </a:r>
-          </a:p>
-        </p:txBody>
-      </p:sp>
-      <p:sp>
-        <p:nvSpPr>
-          <p:cNvPr id="6" name="Rectangle 5"/>
-          <p:cNvSpPr/>
-          <p:nvPr/>
-        </p:nvSpPr>
-        <p:spPr>
-          <a:xfrm>
-            <a:off x="548640" y="1901952"/>
-            <a:ext cx="2560320" cy="2971800"/>
-          </a:xfrm>
-          <a:prstGeom prst="rect">
-            <a:avLst/>
-          </a:prstGeom>
-          <a:solidFill>
-            <a:srgbClr val="3B3F44"/>
-          </a:solidFill>
-          <a:ln>
-            <a:noFill/>
+              <a:t>•  </a:t>
+            </a:r>
+            <a:r>
+              <a:rPr sz="1700" b="1">
+                <a:solidFill>
+                  <a:srgbClr val="F2F2F2"/>
+                </a:solidFill>
+                <a:latin typeface="Aptos"/>
+              </a:rPr>
+              <a:t>The finale</a:t>
+            </a:r>
+            <a:r>
+              <a:rPr sz="1700" b="0">
+                <a:solidFill>
+                  <a:srgbClr val="F2F2F2"/>
+                </a:solidFill>
+                <a:latin typeface="Aptos"/>
+              </a:rPr>
+              <a:t> — power on → BASIC → </a:t>
+            </a:r>
+            <a:r>
+              <a:rPr sz="1700" b="0">
+                <a:solidFill>
+                  <a:srgbClr val="FFC220"/>
+                </a:solidFill>
+                <a:latin typeface="Aptos Mono"/>
+              </a:rPr>
+              <a:t>MON</a:t>
+            </a:r>
+            <a:r>
+              <a:rPr sz="1700" b="0">
+                <a:solidFill>
+                  <a:srgbClr val="F2F2F2"/>
+                </a:solidFill>
+                <a:latin typeface="Aptos"/>
+              </a:rPr>
+              <a:t> → machine monitor → </a:t>
+            </a:r>
+            <a:r>
+              <a:rPr sz="1700" b="0">
+                <a:solidFill>
+                  <a:srgbClr val="FFC220"/>
+                </a:solidFill>
+                <a:latin typeface="Aptos Mono"/>
+              </a:rPr>
+              <a:t>G 1FB6</a:t>
+            </a:r>
+            <a:r>
+              <a:rPr sz="1700" b="0">
+                <a:solidFill>
+                  <a:srgbClr val="F2F2F2"/>
+                </a:solidFill>
+                <a:latin typeface="Aptos"/>
+              </a:rPr>
+              <a:t> → back in BASIC, program intact</a:t>
+            </a:r>
+          </a:p>
+        </p:txBody>
+      </p:sp>
+      <p:pic>
+        <p:nvPicPr>
+          <p:cNvPr id="7" name="Picture 6" descr="two_phase_oscope_cap_1.png"/>
+          <p:cNvPicPr>
+            <a:picLocks noChangeAspect="1"/>
+          </p:cNvPicPr>
+          <p:nvPr/>
+        </p:nvPicPr>
+        <p:blipFill>
+          <a:blip r:embed="rId3"/>
+          <a:stretch>
+            <a:fillRect/>
+          </a:stretch>
+        </p:blipFill>
+        <p:spPr>
+          <a:xfrm>
+            <a:off x="7223760" y="1828800"/>
+            <a:ext cx="3048000" cy="1828800"/>
+          </a:xfrm>
+          <a:prstGeom prst="rect">
+            <a:avLst/>
+          </a:prstGeom>
+          <a:ln w="9525">
+            <a:solidFill>
+              <a:srgbClr val="8D8D8D"/>
+            </a:solidFill>
           </a:ln>
           <a:effectLst/>
         </p:spPr>
-        <p:style>
-          <a:lnRef idx="1">
-            <a:schemeClr val="accent1"/>
-          </a:lnRef>
-          <a:fillRef idx="3">
-            <a:schemeClr val="accent1"/>
-          </a:fillRef>
-          <a:effectRef idx="2">
-            <a:schemeClr val="accent1"/>
-          </a:effectRef>
-          <a:fontRef idx="minor">
-            <a:schemeClr val="lt1"/>
-          </a:fontRef>
-        </p:style>
-        <p:txBody>
-          <a:bodyPr rtlCol="0" anchor="ctr" wrap="square" lIns="164592" rIns="128016" tIns="219456"/>
-          <a:lstStyle/>
-          <a:p>
-            <a:pPr algn="l"/>
-            <a:r>
-              <a:rPr sz="1050" b="1">
-                <a:solidFill>
-                  <a:srgbClr val="FFC220"/>
-                </a:solidFill>
-                <a:latin typeface="Aptos"/>
-              </a:rPr>
-              <a:t>STEP ZERO</a:t>
-            </a:r>
-          </a:p>
-          <a:p>
-            <a:pPr algn="l">
-              <a:spcBef>
-                <a:spcPts val="700"/>
-              </a:spcBef>
-            </a:pPr>
-            <a:r>
-              <a:rPr sz="1900" b="1">
-                <a:solidFill>
-                  <a:srgbClr val="F2F2F2"/>
-                </a:solidFill>
-                <a:latin typeface="Aptos"/>
-              </a:rPr>
-              <a:t>The book</a:t>
-            </a:r>
-          </a:p>
-          <a:p>
-            <a:pPr algn="l">
-              <a:spcBef>
-                <a:spcPts val="900"/>
-              </a:spcBef>
-            </a:pPr>
-            <a:r>
-              <a:rPr sz="1200">
-                <a:solidFill>
-                  <a:srgbClr val="B6BCC4"/>
-                </a:solidFill>
-                <a:latin typeface="Aptos"/>
-              </a:rPr>
-              <a:t>Getting Started with FPGAs —
-Russell Merrick, No Starch Press.</a:t>
-            </a:r>
-          </a:p>
-          <a:p>
-            <a:pPr algn="l">
-              <a:spcBef>
-                <a:spcPts val="1100"/>
-              </a:spcBef>
-            </a:pPr>
-            <a:r>
-              <a:rPr sz="1200" b="1">
-                <a:solidFill>
-                  <a:srgbClr val="B6BCC4"/>
-                </a:solidFill>
-                <a:latin typeface="Aptos"/>
-              </a:rPr>
-              <a:t>Cover to cover before I wrote
-a line of VHDL.</a:t>
-            </a:r>
-          </a:p>
-        </p:txBody>
-      </p:sp>
-      <p:sp>
-        <p:nvSpPr>
-          <p:cNvPr id="7" name="Rectangle 6"/>
-          <p:cNvSpPr/>
-          <p:nvPr/>
-        </p:nvSpPr>
-        <p:spPr>
-          <a:xfrm>
-            <a:off x="548640" y="1901952"/>
-            <a:ext cx="2560320" cy="82296"/>
-          </a:xfrm>
-          <a:prstGeom prst="rect">
-            <a:avLst/>
-          </a:prstGeom>
-          <a:solidFill>
-            <a:srgbClr val="FFC220"/>
-          </a:solidFill>
-          <a:ln>
-            <a:noFill/>
+      </p:pic>
+      <p:sp>
+        <p:nvSpPr>
+          <p:cNvPr id="8" name="TextBox 7"/>
+          <p:cNvSpPr txBox="1"/>
+          <p:nvPr/>
+        </p:nvSpPr>
+        <p:spPr>
+          <a:xfrm>
+            <a:off x="7223760" y="3730752"/>
+            <a:ext cx="4480560" cy="365760"/>
+          </a:xfrm>
+          <a:prstGeom prst="rect">
+            <a:avLst/>
+          </a:prstGeom>
+          <a:noFill/>
+        </p:spPr>
+        <p:txBody>
+          <a:bodyPr wrap="square">
+            <a:spAutoFit/>
+          </a:bodyPr>
+          <a:lstStyle/>
+          <a:p>
+            <a:r>
+              <a:rPr sz="1200" i="1">
+                <a:solidFill>
+                  <a:srgbClr val="9AA0A8"/>
+                </a:solidFill>
+                <a:latin typeface="Aptos"/>
+              </a:rPr>
+              <a:t>φ1 / φ2 from the FPGA — non-overlapping, 0.8 µs and 0.6 µs</a:t>
+            </a:r>
+          </a:p>
+        </p:txBody>
+      </p:sp>
+      <p:pic>
+        <p:nvPicPr>
+          <p:cNvPr id="9" name="Picture 8" descr="tiny_os_scelbal.png"/>
+          <p:cNvPicPr>
+            <a:picLocks noChangeAspect="1"/>
+          </p:cNvPicPr>
+          <p:nvPr/>
+        </p:nvPicPr>
+        <p:blipFill>
+          <a:blip r:embed="rId4"/>
+          <a:stretch>
+            <a:fillRect/>
+          </a:stretch>
+        </p:blipFill>
+        <p:spPr>
+          <a:xfrm>
+            <a:off x="7223760" y="4160520"/>
+            <a:ext cx="3135595" cy="2194559"/>
+          </a:xfrm>
+          <a:prstGeom prst="rect">
+            <a:avLst/>
+          </a:prstGeom>
+          <a:ln w="9525">
+            <a:solidFill>
+              <a:srgbClr val="8D8D8D"/>
+            </a:solidFill>
           </a:ln>
           <a:effectLst/>
         </p:spPr>
-        <p:style>
-          <a:lnRef idx="1">
-            <a:schemeClr val="accent1"/>
-          </a:lnRef>
-          <a:fillRef idx="3">
-            <a:schemeClr val="accent1"/>
-          </a:fillRef>
-          <a:effectRef idx="2">
-            <a:schemeClr val="accent1"/>
-          </a:effectRef>
-          <a:fontRef idx="minor">
-            <a:schemeClr val="lt1"/>
-          </a:fontRef>
-        </p:style>
-        <p:txBody>
-          <a:bodyPr rtlCol="0" anchor="ctr"/>
-          <a:lstStyle/>
-          <a:p>
-            <a:pPr algn="ctr"/>
-          </a:p>
-        </p:txBody>
-      </p:sp>
-      <p:sp>
-        <p:nvSpPr>
-          <p:cNvPr id="8" name="Rectangle 7"/>
-          <p:cNvSpPr/>
-          <p:nvPr/>
-        </p:nvSpPr>
-        <p:spPr>
-          <a:xfrm>
-            <a:off x="3337560" y="1901952"/>
-            <a:ext cx="2560320" cy="2971800"/>
-          </a:xfrm>
-          <a:prstGeom prst="rect">
-            <a:avLst/>
-          </a:prstGeom>
-          <a:solidFill>
-            <a:srgbClr val="3B3F44"/>
-          </a:solidFill>
-          <a:ln>
-            <a:noFill/>
-          </a:ln>
-          <a:effectLst/>
-        </p:spPr>
-        <p:style>
-          <a:lnRef idx="1">
-            <a:schemeClr val="accent1"/>
-          </a:lnRef>
-          <a:fillRef idx="3">
-            <a:schemeClr val="accent1"/>
-          </a:fillRef>
-          <a:effectRef idx="2">
-            <a:schemeClr val="accent1"/>
-          </a:effectRef>
-          <a:fontRef idx="minor">
-            <a:schemeClr val="lt1"/>
-          </a:fontRef>
-        </p:style>
-        <p:txBody>
-          <a:bodyPr rtlCol="0" anchor="ctr" wrap="square" lIns="164592" rIns="128016" tIns="219456"/>
-          <a:lstStyle/>
-          <a:p>
-            <a:pPr algn="l"/>
-            <a:r>
-              <a:rPr sz="1050" b="1">
-                <a:solidFill>
-                  <a:srgbClr val="E09A95"/>
-                </a:solidFill>
-                <a:latin typeface="Aptos"/>
-              </a:rPr>
-              <a:t>VERSION 1</a:t>
-            </a:r>
-          </a:p>
-          <a:p>
-            <a:pPr algn="l">
-              <a:spcBef>
-                <a:spcPts val="700"/>
-              </a:spcBef>
-            </a:pPr>
-            <a:r>
-              <a:rPr sz="1900" b="1">
-                <a:solidFill>
-                  <a:srgbClr val="F2F2F2"/>
-                </a:solidFill>
-                <a:latin typeface="Aptos Mono"/>
-              </a:rPr>
-              <a:t>s8008</a:t>
-            </a:r>
-          </a:p>
-          <a:p>
-            <a:pPr algn="l">
-              <a:spcBef>
-                <a:spcPts val="900"/>
-              </a:spcBef>
-            </a:pPr>
-            <a:r>
-              <a:rPr sz="1200">
-                <a:solidFill>
-                  <a:srgbClr val="B6BCC4"/>
-                </a:solidFill>
-                <a:latin typeface="Aptos"/>
-              </a:rPr>
-              <a:t>Monolithic, single-cycle.
-1,500 lines in one file.</a:t>
-            </a:r>
-          </a:p>
-          <a:p>
-            <a:pPr algn="l">
-              <a:spcBef>
-                <a:spcPts val="1100"/>
-              </a:spcBef>
-            </a:pPr>
-            <a:r>
-              <a:rPr sz="1200" b="1">
-                <a:solidFill>
-                  <a:srgbClr val="E09A95"/>
-                </a:solidFill>
-                <a:latin typeface="Aptos"/>
-              </a:rPr>
-              <a:t>✗  Passed its entire simulation
-suite. ALU returned garbage
-on the board.</a:t>
-            </a:r>
-          </a:p>
-        </p:txBody>
-      </p:sp>
-      <p:sp>
-        <p:nvSpPr>
-          <p:cNvPr id="9" name="Rectangle 8"/>
-          <p:cNvSpPr/>
-          <p:nvPr/>
-        </p:nvSpPr>
-        <p:spPr>
-          <a:xfrm>
-            <a:off x="3337560" y="1901952"/>
-            <a:ext cx="2560320" cy="82296"/>
-          </a:xfrm>
-          <a:prstGeom prst="rect">
-            <a:avLst/>
-          </a:prstGeom>
-          <a:solidFill>
-            <a:srgbClr val="9B4A45"/>
-          </a:solidFill>
-          <a:ln>
-            <a:noFill/>
-          </a:ln>
-          <a:effectLst/>
-        </p:spPr>
-        <p:style>
-          <a:lnRef idx="1">
-            <a:schemeClr val="accent1"/>
-          </a:lnRef>
-          <a:fillRef idx="3">
-            <a:schemeClr val="accent1"/>
-          </a:fillRef>
-          <a:effectRef idx="2">
-            <a:schemeClr val="accent1"/>
-          </a:effectRef>
-          <a:fontRef idx="minor">
-            <a:schemeClr val="lt1"/>
-          </a:fontRef>
-        </p:style>
-        <p:txBody>
-          <a:bodyPr rtlCol="0" anchor="ctr"/>
-          <a:lstStyle/>
-          <a:p>
-            <a:pPr algn="ctr"/>
-          </a:p>
-        </p:txBody>
-      </p:sp>
-      <p:sp>
-        <p:nvSpPr>
-          <p:cNvPr id="10" name="Rectangle 9"/>
-          <p:cNvSpPr/>
-          <p:nvPr/>
-        </p:nvSpPr>
-        <p:spPr>
-          <a:xfrm>
-            <a:off x="6126479" y="1901952"/>
-            <a:ext cx="2560320" cy="2971800"/>
-          </a:xfrm>
-          <a:prstGeom prst="rect">
-            <a:avLst/>
-          </a:prstGeom>
-          <a:solidFill>
-            <a:srgbClr val="3B3F44"/>
-          </a:solidFill>
-          <a:ln>
-            <a:noFill/>
-          </a:ln>
-          <a:effectLst/>
-        </p:spPr>
-        <p:style>
-          <a:lnRef idx="1">
-            <a:schemeClr val="accent1"/>
-          </a:lnRef>
-          <a:fillRef idx="3">
-            <a:schemeClr val="accent1"/>
-          </a:fillRef>
-          <a:effectRef idx="2">
-            <a:schemeClr val="accent1"/>
-          </a:effectRef>
-          <a:fontRef idx="minor">
-            <a:schemeClr val="lt1"/>
-          </a:fontRef>
-        </p:style>
-        <p:txBody>
-          <a:bodyPr rtlCol="0" anchor="ctr" wrap="square" lIns="164592" rIns="128016" tIns="219456"/>
-          <a:lstStyle/>
-          <a:p>
-            <a:pPr algn="l"/>
-            <a:r>
-              <a:rPr sz="1050" b="1">
-                <a:solidFill>
-                  <a:srgbClr val="E09A95"/>
-                </a:solidFill>
-                <a:latin typeface="Aptos"/>
-              </a:rPr>
-              <a:t>VERSION 2</a:t>
-            </a:r>
-          </a:p>
-          <a:p>
-            <a:pPr algn="l">
-              <a:spcBef>
-                <a:spcPts val="700"/>
-              </a:spcBef>
-            </a:pPr>
-            <a:r>
-              <a:rPr sz="1900" b="1">
-                <a:solidFill>
-                  <a:srgbClr val="F2F2F2"/>
-                </a:solidFill>
-                <a:latin typeface="Aptos Mono"/>
-              </a:rPr>
-              <a:t>v8008</a:t>
-            </a:r>
-          </a:p>
-          <a:p>
-            <a:pPr algn="l">
-              <a:spcBef>
-                <a:spcPts val="900"/>
-              </a:spcBef>
-            </a:pPr>
-            <a:r>
-              <a:rPr sz="1200">
-                <a:solidFill>
-                  <a:srgbClr val="B6BCC4"/>
-                </a:solidFill>
-                <a:latin typeface="Aptos"/>
-              </a:rPr>
-              <a:t>Multi-cycle rewrite.
-Too clever, too entangled.</a:t>
-            </a:r>
-          </a:p>
-          <a:p>
-            <a:pPr algn="l">
-              <a:spcBef>
-                <a:spcPts val="1100"/>
-              </a:spcBef>
-            </a:pPr>
-            <a:r>
-              <a:rPr sz="1200" b="1">
-                <a:solidFill>
-                  <a:srgbClr val="E09A95"/>
-                </a:solidFill>
-                <a:latin typeface="Aptos"/>
-              </a:rPr>
-              <a:t>✗  Collapsed under its own
-complexity.</a:t>
-            </a:r>
-          </a:p>
-        </p:txBody>
-      </p:sp>
-      <p:sp>
-        <p:nvSpPr>
-          <p:cNvPr id="11" name="Rectangle 10"/>
-          <p:cNvSpPr/>
-          <p:nvPr/>
-        </p:nvSpPr>
-        <p:spPr>
-          <a:xfrm>
-            <a:off x="6126479" y="1901952"/>
-            <a:ext cx="2560320" cy="82296"/>
-          </a:xfrm>
-          <a:prstGeom prst="rect">
-            <a:avLst/>
-          </a:prstGeom>
-          <a:solidFill>
-            <a:srgbClr val="9B4A45"/>
-          </a:solidFill>
-          <a:ln>
-            <a:noFill/>
-          </a:ln>
-          <a:effectLst/>
-        </p:spPr>
-        <p:style>
-          <a:lnRef idx="1">
-            <a:schemeClr val="accent1"/>
-          </a:lnRef>
-          <a:fillRef idx="3">
-            <a:schemeClr val="accent1"/>
-          </a:fillRef>
-          <a:effectRef idx="2">
-            <a:schemeClr val="accent1"/>
-          </a:effectRef>
-          <a:fontRef idx="minor">
-            <a:schemeClr val="lt1"/>
-          </a:fontRef>
-        </p:style>
-        <p:txBody>
-          <a:bodyPr rtlCol="0" anchor="ctr"/>
-          <a:lstStyle/>
-          <a:p>
-            <a:pPr algn="ctr"/>
-          </a:p>
-        </p:txBody>
-      </p:sp>
-      <p:sp>
-        <p:nvSpPr>
-          <p:cNvPr id="12" name="Rectangle 11"/>
-          <p:cNvSpPr/>
-          <p:nvPr/>
-        </p:nvSpPr>
-        <p:spPr>
-          <a:xfrm>
-            <a:off x="8915400" y="1901952"/>
-            <a:ext cx="2560320" cy="2971800"/>
-          </a:xfrm>
-          <a:prstGeom prst="rect">
-            <a:avLst/>
-          </a:prstGeom>
-          <a:solidFill>
-            <a:srgbClr val="3B3F44"/>
-          </a:solidFill>
-          <a:ln>
-            <a:noFill/>
-          </a:ln>
-          <a:effectLst/>
-        </p:spPr>
-        <p:style>
-          <a:lnRef idx="1">
-            <a:schemeClr val="accent1"/>
-          </a:lnRef>
-          <a:fillRef idx="3">
-            <a:schemeClr val="accent1"/>
-          </a:fillRef>
-          <a:effectRef idx="2">
-            <a:schemeClr val="accent1"/>
-          </a:effectRef>
-          <a:fontRef idx="minor">
-            <a:schemeClr val="lt1"/>
-          </a:fontRef>
-        </p:style>
-        <p:txBody>
-          <a:bodyPr rtlCol="0" anchor="ctr" wrap="square" lIns="164592" rIns="128016" tIns="219456"/>
-          <a:lstStyle/>
-          <a:p>
-            <a:pPr algn="l"/>
-            <a:r>
-              <a:rPr sz="1050" b="1">
-                <a:solidFill>
-                  <a:srgbClr val="FFC220"/>
-                </a:solidFill>
-                <a:latin typeface="Aptos"/>
-              </a:rPr>
-              <a:t>VERSION 3</a:t>
-            </a:r>
-          </a:p>
-          <a:p>
-            <a:pPr algn="l">
-              <a:spcBef>
-                <a:spcPts val="700"/>
-              </a:spcBef>
-            </a:pPr>
-            <a:r>
-              <a:rPr sz="1900" b="1">
-                <a:solidFill>
-                  <a:srgbClr val="F2F2F2"/>
-                </a:solidFill>
-                <a:latin typeface="Aptos Mono"/>
-              </a:rPr>
-              <a:t>b8008</a:t>
-            </a:r>
-          </a:p>
-          <a:p>
-            <a:pPr algn="l">
-              <a:spcBef>
-                <a:spcPts val="900"/>
-              </a:spcBef>
-            </a:pPr>
-            <a:r>
-              <a:rPr sz="1200">
-                <a:solidFill>
-                  <a:srgbClr val="B6BCC4"/>
-                </a:solidFill>
-                <a:latin typeface="Aptos"/>
-              </a:rPr>
-              <a:t>29 dumb modules, derived from
-the 1972 block diagram.</a:t>
-            </a:r>
-          </a:p>
-          <a:p>
-            <a:pPr algn="l">
-              <a:spcBef>
-                <a:spcPts val="1100"/>
-              </a:spcBef>
-            </a:pPr>
-            <a:r>
-              <a:rPr sz="1200" b="1">
-                <a:solidFill>
-                  <a:srgbClr val="FFC220"/>
-                </a:solidFill>
-                <a:latin typeface="Aptos"/>
-              </a:rPr>
-              <a:t>✓  Silicon validated.
-46/46 on the board.</a:t>
-            </a:r>
-          </a:p>
-        </p:txBody>
-      </p:sp>
-      <p:sp>
-        <p:nvSpPr>
-          <p:cNvPr id="13" name="Rectangle 12"/>
-          <p:cNvSpPr/>
-          <p:nvPr/>
-        </p:nvSpPr>
-        <p:spPr>
-          <a:xfrm>
-            <a:off x="8915400" y="1901952"/>
-            <a:ext cx="2560320" cy="82296"/>
-          </a:xfrm>
-          <a:prstGeom prst="rect">
-            <a:avLst/>
-          </a:prstGeom>
-          <a:solidFill>
-            <a:srgbClr val="FFC220"/>
-          </a:solidFill>
-          <a:ln>
-            <a:noFill/>
-          </a:ln>
-          <a:effectLst/>
-        </p:spPr>
-        <p:style>
-          <a:lnRef idx="1">
-            <a:schemeClr val="accent1"/>
-          </a:lnRef>
-          <a:fillRef idx="3">
-            <a:schemeClr val="accent1"/>
-          </a:fillRef>
-          <a:effectRef idx="2">
-            <a:schemeClr val="accent1"/>
-          </a:effectRef>
-          <a:fontRef idx="minor">
-            <a:schemeClr val="lt1"/>
-          </a:fontRef>
-        </p:style>
-        <p:txBody>
-          <a:bodyPr rtlCol="0" anchor="ctr"/>
-          <a:lstStyle/>
-          <a:p>
-            <a:pPr algn="ctr"/>
-          </a:p>
-        </p:txBody>
-      </p:sp>
-      <p:sp>
-        <p:nvSpPr>
-          <p:cNvPr id="14" name="Rectangle 13"/>
-          <p:cNvSpPr/>
-          <p:nvPr/>
-        </p:nvSpPr>
-        <p:spPr>
-          <a:xfrm>
-            <a:off x="548640" y="5074920"/>
-            <a:ext cx="11064240" cy="1280160"/>
-          </a:xfrm>
-          <a:prstGeom prst="rect">
-            <a:avLst/>
-          </a:prstGeom>
-          <a:solidFill>
-            <a:srgbClr val="2A2D31"/>
-          </a:solidFill>
-          <a:ln>
-            <a:noFill/>
-          </a:ln>
-          <a:effectLst/>
-        </p:spPr>
-        <p:style>
-          <a:lnRef idx="1">
-            <a:schemeClr val="accent1"/>
-          </a:lnRef>
-          <a:fillRef idx="3">
-            <a:schemeClr val="accent1"/>
-          </a:fillRef>
-          <a:effectRef idx="2">
-            <a:schemeClr val="accent1"/>
-          </a:effectRef>
-          <a:fontRef idx="minor">
-            <a:schemeClr val="lt1"/>
-          </a:fontRef>
-        </p:style>
-        <p:txBody>
-          <a:bodyPr rtlCol="0" anchor="ctr" wrap="square" lIns="320040" rIns="320040"/>
-          <a:lstStyle/>
-          <a:p>
-            <a:pPr algn="ctr"/>
-            <a:r>
-              <a:rPr sz="1800" b="0">
-                <a:solidFill>
-                  <a:srgbClr val="F2F2F2"/>
-                </a:solidFill>
-                <a:latin typeface="Aptos"/>
-              </a:rPr>
-              <a:t>Both failures were the </a:t>
-            </a:r>
-            <a:r>
-              <a:rPr sz="1800" b="1">
-                <a:solidFill>
-                  <a:srgbClr val="F2F2F2"/>
-                </a:solidFill>
-                <a:latin typeface="Aptos"/>
-              </a:rPr>
-              <a:t>same</a:t>
-            </a:r>
-            <a:r>
-              <a:rPr sz="1800" b="0">
-                <a:solidFill>
-                  <a:srgbClr val="F2F2F2"/>
-                </a:solidFill>
-                <a:latin typeface="Aptos"/>
-              </a:rPr>
-              <a:t> failure: I was building the architecture the corpus knew — an instruction-set simulator written in VHDL — instead of the one the datasheet drew.</a:t>
-            </a:r>
-          </a:p>
-        </p:txBody>
-      </p:sp>
+      </p:pic>
     </p:spTree>
   </p:cSld>
   <p:clrMapOvr>
@@ -21709,7 +21590,7 @@
     <p:bg>
       <p:bgPr>
         <a:solidFill>
-          <a:srgbClr val="F7F8FA"/>
+          <a:srgbClr val="333333"/>
         </a:solidFill>
         <a:effectLst/>
       </p:bgPr>
@@ -21746,7 +21627,7 @@
             <a:r>
               <a:rPr sz="1200" b="1">
                 <a:solidFill>
-                  <a:srgbClr val="3B3F44"/>
+                  <a:srgbClr val="FFC220"/>
                 </a:solidFill>
                 <a:latin typeface="Aptos"/>
               </a:rPr>
@@ -21780,11 +21661,11 @@
             <a:r>
               <a:rPr sz="3200" b="1">
                 <a:solidFill>
-                  <a:srgbClr val="333333"/>
-                </a:solidFill>
-                <a:latin typeface="Aptos"/>
-              </a:rPr>
-              <a:t>What it did, and what I had to learn</a:t>
+                  <a:srgbClr val="F2F2F2"/>
+                </a:solidFill>
+                <a:latin typeface="Aptos"/>
+              </a:rPr>
+              <a:t>Three versions, eighteen months</a:t>
             </a:r>
           </a:p>
         </p:txBody>
@@ -21840,8 +21721,8 @@
         </p:nvSpPr>
         <p:spPr>
           <a:xfrm>
-            <a:off x="2697480" y="1627632"/>
-            <a:ext cx="4114800" cy="320040"/>
+            <a:off x="548640" y="1371600"/>
+            <a:ext cx="11064240" cy="411480"/>
           </a:xfrm>
           <a:prstGeom prst="rect">
             <a:avLst/>
@@ -21854,73 +21735,60 @@
           </a:bodyPr>
           <a:lstStyle/>
           <a:p>
-            <a:r>
-              <a:rPr sz="1100" b="1">
-                <a:solidFill>
-                  <a:srgbClr val="8D8D8D"/>
-                </a:solidFill>
-                <a:latin typeface="Aptos"/>
-              </a:rPr>
-              <a:t>WHAT THE AI DID</a:t>
-            </a:r>
-          </a:p>
-        </p:txBody>
-      </p:sp>
-      <p:sp>
-        <p:nvSpPr>
-          <p:cNvPr id="6" name="TextBox 5"/>
-          <p:cNvSpPr txBox="1"/>
-          <p:nvPr/>
-        </p:nvSpPr>
-        <p:spPr>
-          <a:xfrm>
-            <a:off x="7086600" y="1627632"/>
-            <a:ext cx="4480560" cy="320040"/>
-          </a:xfrm>
-          <a:prstGeom prst="rect">
-            <a:avLst/>
-          </a:prstGeom>
-          <a:noFill/>
-        </p:spPr>
-        <p:txBody>
-          <a:bodyPr wrap="square">
-            <a:spAutoFit/>
-          </a:bodyPr>
-          <a:lstStyle/>
-          <a:p>
-            <a:r>
-              <a:rPr sz="1100" b="1">
-                <a:solidFill>
-                  <a:srgbClr val="8A6D00"/>
-                </a:solidFill>
-                <a:latin typeface="Aptos"/>
-              </a:rPr>
-              <a:t>WHAT I HAD TO LEARN MYSELF</a:t>
-            </a:r>
-          </a:p>
-        </p:txBody>
-      </p:sp>
-      <p:sp>
-        <p:nvSpPr>
-          <p:cNvPr id="7" name="Rectangle 6"/>
+            <a:pPr>
+              <a:spcAft>
+                <a:spcPts val="800"/>
+              </a:spcAft>
+            </a:pPr>
+            <a:r>
+              <a:rPr sz="1600" b="0">
+                <a:solidFill>
+                  <a:srgbClr val="F2F2F2"/>
+                </a:solidFill>
+                <a:latin typeface="Aptos"/>
+              </a:rPr>
+              <a:t>Eighteen months ago I could not read a VHDL </a:t>
+            </a:r>
+            <a:r>
+              <a:rPr sz="1600" b="0">
+                <a:solidFill>
+                  <a:srgbClr val="FFC220"/>
+                </a:solidFill>
+                <a:latin typeface="Aptos Mono"/>
+              </a:rPr>
+              <a:t>process</a:t>
+            </a:r>
+            <a:r>
+              <a:rPr sz="1600" b="0">
+                <a:solidFill>
+                  <a:srgbClr val="F2F2F2"/>
+                </a:solidFill>
+                <a:latin typeface="Aptos"/>
+              </a:rPr>
+              <a:t>, and had never touched an FPGA.</a:t>
+            </a:r>
+          </a:p>
+        </p:txBody>
+      </p:sp>
+      <p:sp>
+        <p:nvSpPr>
+          <p:cNvPr id="6" name="Rectangle 5"/>
           <p:cNvSpPr/>
           <p:nvPr/>
         </p:nvSpPr>
         <p:spPr>
           <a:xfrm>
-            <a:off x="548640" y="2011680"/>
-            <a:ext cx="11064240" cy="1298448"/>
+            <a:off x="548640" y="1901952"/>
+            <a:ext cx="2560320" cy="2971800"/>
           </a:xfrm>
           <a:prstGeom prst="rect">
             <a:avLst/>
           </a:prstGeom>
           <a:solidFill>
-            <a:srgbClr val="FFFFFF"/>
+            <a:srgbClr val="3B3F44"/>
           </a:solidFill>
-          <a:ln w="12700">
-            <a:solidFill>
-              <a:srgbClr val="D9DDE3"/>
-            </a:solidFill>
+          <a:ln>
+            <a:noFill/>
           </a:ln>
           <a:effectLst/>
         </p:spPr>
@@ -21939,23 +21807,82 @@
           </a:fontRef>
         </p:style>
         <p:txBody>
-          <a:bodyPr rtlCol="0" anchor="ctr"/>
-          <a:lstStyle/>
-          <a:p>
-            <a:pPr algn="ctr"/>
-          </a:p>
-        </p:txBody>
-      </p:sp>
-      <p:sp>
-        <p:nvSpPr>
-          <p:cNvPr id="8" name="Rectangle 7"/>
+          <a:bodyPr rtlCol="0" anchor="ctr" wrap="square" lIns="164592" rIns="128016" tIns="219456"/>
+          <a:lstStyle/>
+          <a:p>
+            <a:pPr algn="l"/>
+            <a:r>
+              <a:rPr sz="1050" b="1">
+                <a:solidFill>
+                  <a:srgbClr val="FFC220"/>
+                </a:solidFill>
+                <a:latin typeface="Aptos"/>
+              </a:rPr>
+              <a:t>STEP ZERO</a:t>
+            </a:r>
+          </a:p>
+          <a:p>
+            <a:pPr algn="l">
+              <a:spcBef>
+                <a:spcPts val="700"/>
+              </a:spcBef>
+            </a:pPr>
+            <a:r>
+              <a:rPr sz="1900" b="1">
+                <a:solidFill>
+                  <a:srgbClr val="F2F2F2"/>
+                </a:solidFill>
+                <a:latin typeface="Aptos"/>
+              </a:rPr>
+              <a:t>The book</a:t>
+            </a:r>
+          </a:p>
+          <a:p>
+            <a:pPr algn="l">
+              <a:spcBef>
+                <a:spcPts val="900"/>
+              </a:spcBef>
+            </a:pPr>
+            <a:r>
+              <a:rPr sz="1200">
+                <a:solidFill>
+                  <a:srgbClr val="B6BCC4"/>
+                </a:solidFill>
+                <a:latin typeface="Aptos"/>
+              </a:rPr>
+              <a:t>Getting Started with FPGAs —
+Russell Merrick, No Starch Press.</a:t>
+            </a:r>
+          </a:p>
+          <a:p>
+            <a:pPr algn="l">
+              <a:spcBef>
+                <a:spcPts val="1100"/>
+              </a:spcBef>
+            </a:pPr>
+            <a:r>
+              <a:rPr sz="1200" b="1">
+                <a:solidFill>
+                  <a:srgbClr val="B6BCC4"/>
+                </a:solidFill>
+                <a:latin typeface="Aptos"/>
+              </a:rPr>
+              <a:t>Cover to cover before I wrote
+a line of VHDL.</a:t>
+            </a:r>
+          </a:p>
+        </p:txBody>
+      </p:sp>
+      <p:sp>
+        <p:nvSpPr>
+          <p:cNvPr id="7" name="Rectangle 6"/>
           <p:cNvSpPr/>
           <p:nvPr/>
         </p:nvSpPr>
         <p:spPr>
           <a:xfrm>
-            <a:off x="548640" y="2011680"/>
-            <a:ext cx="82296" cy="1298448"/>
+            <a:off x="548640" y="1901952"/>
+            <a:ext cx="2560320" cy="82296"/>
           </a:xfrm>
           <a:prstGeom prst="rect">
             <a:avLst/>
@@ -21992,145 +21919,23 @@
       </p:sp>
       <p:sp>
         <p:nvSpPr>
-          <p:cNvPr id="9" name="TextBox 8"/>
-          <p:cNvSpPr txBox="1"/>
-          <p:nvPr/>
-        </p:nvSpPr>
-        <p:spPr>
-          <a:xfrm>
-            <a:off x="777240" y="2395728"/>
-            <a:ext cx="1828800" cy="731520"/>
-          </a:xfrm>
-          <a:prstGeom prst="rect">
-            <a:avLst/>
-          </a:prstGeom>
-          <a:noFill/>
-        </p:spPr>
-        <p:txBody>
-          <a:bodyPr wrap="square">
-            <a:spAutoFit/>
-          </a:bodyPr>
-          <a:lstStyle/>
-          <a:p>
-            <a:r>
-              <a:rPr sz="1450" b="1">
-                <a:solidFill>
-                  <a:srgbClr val="333333"/>
-                </a:solidFill>
-                <a:latin typeface="Aptos"/>
-              </a:rPr>
-              <a:t>What an FPGA is</a:t>
-            </a:r>
-          </a:p>
-        </p:txBody>
-      </p:sp>
-      <p:sp>
-        <p:nvSpPr>
-          <p:cNvPr id="10" name="TextBox 9"/>
-          <p:cNvSpPr txBox="1"/>
-          <p:nvPr/>
-        </p:nvSpPr>
-        <p:spPr>
-          <a:xfrm>
-            <a:off x="2697480" y="2130552"/>
-            <a:ext cx="4206240" cy="1097280"/>
-          </a:xfrm>
-          <a:prstGeom prst="rect">
-            <a:avLst/>
-          </a:prstGeom>
-          <a:noFill/>
-        </p:spPr>
-        <p:txBody>
-          <a:bodyPr wrap="square">
-            <a:spAutoFit/>
-          </a:bodyPr>
-          <a:lstStyle/>
-          <a:p>
-            <a:r>
-              <a:rPr sz="1250" b="0">
-                <a:solidFill>
-                  <a:srgbClr val="5A6068"/>
-                </a:solidFill>
-                <a:latin typeface="Aptos"/>
-              </a:rPr>
-              <a:t>Could explain any of it, instantly, at any depth. LUTs, routing, block RAM, bitstreams — perfect answers on demand.</a:t>
-            </a:r>
-          </a:p>
-        </p:txBody>
-      </p:sp>
-      <p:sp>
-        <p:nvSpPr>
-          <p:cNvPr id="11" name="TextBox 10"/>
-          <p:cNvSpPr txBox="1"/>
-          <p:nvPr/>
-        </p:nvSpPr>
-        <p:spPr>
-          <a:xfrm>
-            <a:off x="7086600" y="2130552"/>
-            <a:ext cx="4526280" cy="1097280"/>
-          </a:xfrm>
-          <a:prstGeom prst="rect">
-            <a:avLst/>
-          </a:prstGeom>
-          <a:noFill/>
-        </p:spPr>
-        <p:txBody>
-          <a:bodyPr wrap="square">
-            <a:spAutoFit/>
-          </a:bodyPr>
-          <a:lstStyle/>
-          <a:p>
-            <a:r>
-              <a:rPr sz="1250" b="0">
-                <a:solidFill>
-                  <a:srgbClr val="333333"/>
-                </a:solidFill>
-                <a:latin typeface="Aptos"/>
-              </a:rPr>
-              <a:t>That understanding is not explanation. The book made me </a:t>
-            </a:r>
-            <a:r>
-              <a:rPr sz="1250" b="1">
-                <a:solidFill>
-                  <a:srgbClr val="333333"/>
-                </a:solidFill>
-                <a:latin typeface="Aptos"/>
-              </a:rPr>
-              <a:t>build</a:t>
-            </a:r>
-            <a:r>
-              <a:rPr sz="1250" b="0">
-                <a:solidFill>
-                  <a:srgbClr val="333333"/>
-                </a:solidFill>
-                <a:latin typeface="Aptos"/>
-              </a:rPr>
-              <a:t> the model, in sequence, with exercises. An AI would have let me skip building it — and then I would have had nothing to check its work against.</a:t>
-            </a:r>
-          </a:p>
-        </p:txBody>
-      </p:sp>
-      <p:sp>
-        <p:nvSpPr>
-          <p:cNvPr id="12" name="Rectangle 11"/>
+          <p:cNvPr id="8" name="Rectangle 7"/>
           <p:cNvSpPr/>
           <p:nvPr/>
         </p:nvSpPr>
         <p:spPr>
           <a:xfrm>
-            <a:off x="548640" y="3383280"/>
-            <a:ext cx="11064240" cy="1298448"/>
+            <a:off x="3337560" y="1901952"/>
+            <a:ext cx="2560320" cy="2971800"/>
           </a:xfrm>
           <a:prstGeom prst="rect">
             <a:avLst/>
           </a:prstGeom>
           <a:solidFill>
-            <a:srgbClr val="FFFFFF"/>
+            <a:srgbClr val="3B3F44"/>
           </a:solidFill>
-          <a:ln w="12700">
-            <a:solidFill>
-              <a:srgbClr val="D9DDE3"/>
-            </a:solidFill>
+          <a:ln>
+            <a:noFill/>
           </a:ln>
           <a:effectLst/>
         </p:spPr>
@@ -22149,10 +21954,364 @@
           </a:fontRef>
         </p:style>
         <p:txBody>
+          <a:bodyPr rtlCol="0" anchor="ctr" wrap="square" lIns="164592" rIns="128016" tIns="219456"/>
+          <a:lstStyle/>
+          <a:p>
+            <a:pPr algn="l"/>
+            <a:r>
+              <a:rPr sz="1050" b="1">
+                <a:solidFill>
+                  <a:srgbClr val="E09A95"/>
+                </a:solidFill>
+                <a:latin typeface="Aptos"/>
+              </a:rPr>
+              <a:t>VERSION 1</a:t>
+            </a:r>
+          </a:p>
+          <a:p>
+            <a:pPr algn="l">
+              <a:spcBef>
+                <a:spcPts val="700"/>
+              </a:spcBef>
+            </a:pPr>
+            <a:r>
+              <a:rPr sz="1900" b="1">
+                <a:solidFill>
+                  <a:srgbClr val="F2F2F2"/>
+                </a:solidFill>
+                <a:latin typeface="Aptos Mono"/>
+              </a:rPr>
+              <a:t>s8008</a:t>
+            </a:r>
+          </a:p>
+          <a:p>
+            <a:pPr algn="l">
+              <a:spcBef>
+                <a:spcPts val="900"/>
+              </a:spcBef>
+            </a:pPr>
+            <a:r>
+              <a:rPr sz="1200">
+                <a:solidFill>
+                  <a:srgbClr val="B6BCC4"/>
+                </a:solidFill>
+                <a:latin typeface="Aptos"/>
+              </a:rPr>
+              <a:t>Monolithic, single-cycle.
+1,500 lines in one file.</a:t>
+            </a:r>
+          </a:p>
+          <a:p>
+            <a:pPr algn="l">
+              <a:spcBef>
+                <a:spcPts val="1100"/>
+              </a:spcBef>
+            </a:pPr>
+            <a:r>
+              <a:rPr sz="1200" b="1">
+                <a:solidFill>
+                  <a:srgbClr val="E09A95"/>
+                </a:solidFill>
+                <a:latin typeface="Aptos"/>
+              </a:rPr>
+              <a:t>✗  Passed its entire simulation
+suite. ALU returned garbage
+on the board.</a:t>
+            </a:r>
+          </a:p>
+        </p:txBody>
+      </p:sp>
+      <p:sp>
+        <p:nvSpPr>
+          <p:cNvPr id="9" name="Rectangle 8"/>
+          <p:cNvSpPr/>
+          <p:nvPr/>
+        </p:nvSpPr>
+        <p:spPr>
+          <a:xfrm>
+            <a:off x="3337560" y="1901952"/>
+            <a:ext cx="2560320" cy="82296"/>
+          </a:xfrm>
+          <a:prstGeom prst="rect">
+            <a:avLst/>
+          </a:prstGeom>
+          <a:solidFill>
+            <a:srgbClr val="9B4A45"/>
+          </a:solidFill>
+          <a:ln>
+            <a:noFill/>
+          </a:ln>
+          <a:effectLst/>
+        </p:spPr>
+        <p:style>
+          <a:lnRef idx="1">
+            <a:schemeClr val="accent1"/>
+          </a:lnRef>
+          <a:fillRef idx="3">
+            <a:schemeClr val="accent1"/>
+          </a:fillRef>
+          <a:effectRef idx="2">
+            <a:schemeClr val="accent1"/>
+          </a:effectRef>
+          <a:fontRef idx="minor">
+            <a:schemeClr val="lt1"/>
+          </a:fontRef>
+        </p:style>
+        <p:txBody>
           <a:bodyPr rtlCol="0" anchor="ctr"/>
           <a:lstStyle/>
           <a:p>
             <a:pPr algn="ctr"/>
+          </a:p>
+        </p:txBody>
+      </p:sp>
+      <p:sp>
+        <p:nvSpPr>
+          <p:cNvPr id="10" name="Rectangle 9"/>
+          <p:cNvSpPr/>
+          <p:nvPr/>
+        </p:nvSpPr>
+        <p:spPr>
+          <a:xfrm>
+            <a:off x="6126479" y="1901952"/>
+            <a:ext cx="2560320" cy="2971800"/>
+          </a:xfrm>
+          <a:prstGeom prst="rect">
+            <a:avLst/>
+          </a:prstGeom>
+          <a:solidFill>
+            <a:srgbClr val="3B3F44"/>
+          </a:solidFill>
+          <a:ln>
+            <a:noFill/>
+          </a:ln>
+          <a:effectLst/>
+        </p:spPr>
+        <p:style>
+          <a:lnRef idx="1">
+            <a:schemeClr val="accent1"/>
+          </a:lnRef>
+          <a:fillRef idx="3">
+            <a:schemeClr val="accent1"/>
+          </a:fillRef>
+          <a:effectRef idx="2">
+            <a:schemeClr val="accent1"/>
+          </a:effectRef>
+          <a:fontRef idx="minor">
+            <a:schemeClr val="lt1"/>
+          </a:fontRef>
+        </p:style>
+        <p:txBody>
+          <a:bodyPr rtlCol="0" anchor="ctr" wrap="square" lIns="164592" rIns="128016" tIns="219456"/>
+          <a:lstStyle/>
+          <a:p>
+            <a:pPr algn="l"/>
+            <a:r>
+              <a:rPr sz="1050" b="1">
+                <a:solidFill>
+                  <a:srgbClr val="E09A95"/>
+                </a:solidFill>
+                <a:latin typeface="Aptos"/>
+              </a:rPr>
+              <a:t>VERSION 2</a:t>
+            </a:r>
+          </a:p>
+          <a:p>
+            <a:pPr algn="l">
+              <a:spcBef>
+                <a:spcPts val="700"/>
+              </a:spcBef>
+            </a:pPr>
+            <a:r>
+              <a:rPr sz="1900" b="1">
+                <a:solidFill>
+                  <a:srgbClr val="F2F2F2"/>
+                </a:solidFill>
+                <a:latin typeface="Aptos Mono"/>
+              </a:rPr>
+              <a:t>v8008</a:t>
+            </a:r>
+          </a:p>
+          <a:p>
+            <a:pPr algn="l">
+              <a:spcBef>
+                <a:spcPts val="900"/>
+              </a:spcBef>
+            </a:pPr>
+            <a:r>
+              <a:rPr sz="1200">
+                <a:solidFill>
+                  <a:srgbClr val="B6BCC4"/>
+                </a:solidFill>
+                <a:latin typeface="Aptos"/>
+              </a:rPr>
+              <a:t>Multi-cycle rewrite.
+Too clever, too entangled.</a:t>
+            </a:r>
+          </a:p>
+          <a:p>
+            <a:pPr algn="l">
+              <a:spcBef>
+                <a:spcPts val="1100"/>
+              </a:spcBef>
+            </a:pPr>
+            <a:r>
+              <a:rPr sz="1200" b="1">
+                <a:solidFill>
+                  <a:srgbClr val="E09A95"/>
+                </a:solidFill>
+                <a:latin typeface="Aptos"/>
+              </a:rPr>
+              <a:t>✗  Collapsed under its own
+complexity.</a:t>
+            </a:r>
+          </a:p>
+        </p:txBody>
+      </p:sp>
+      <p:sp>
+        <p:nvSpPr>
+          <p:cNvPr id="11" name="Rectangle 10"/>
+          <p:cNvSpPr/>
+          <p:nvPr/>
+        </p:nvSpPr>
+        <p:spPr>
+          <a:xfrm>
+            <a:off x="6126479" y="1901952"/>
+            <a:ext cx="2560320" cy="82296"/>
+          </a:xfrm>
+          <a:prstGeom prst="rect">
+            <a:avLst/>
+          </a:prstGeom>
+          <a:solidFill>
+            <a:srgbClr val="9B4A45"/>
+          </a:solidFill>
+          <a:ln>
+            <a:noFill/>
+          </a:ln>
+          <a:effectLst/>
+        </p:spPr>
+        <p:style>
+          <a:lnRef idx="1">
+            <a:schemeClr val="accent1"/>
+          </a:lnRef>
+          <a:fillRef idx="3">
+            <a:schemeClr val="accent1"/>
+          </a:fillRef>
+          <a:effectRef idx="2">
+            <a:schemeClr val="accent1"/>
+          </a:effectRef>
+          <a:fontRef idx="minor">
+            <a:schemeClr val="lt1"/>
+          </a:fontRef>
+        </p:style>
+        <p:txBody>
+          <a:bodyPr rtlCol="0" anchor="ctr"/>
+          <a:lstStyle/>
+          <a:p>
+            <a:pPr algn="ctr"/>
+          </a:p>
+        </p:txBody>
+      </p:sp>
+      <p:sp>
+        <p:nvSpPr>
+          <p:cNvPr id="12" name="Rectangle 11"/>
+          <p:cNvSpPr/>
+          <p:nvPr/>
+        </p:nvSpPr>
+        <p:spPr>
+          <a:xfrm>
+            <a:off x="8915400" y="1901952"/>
+            <a:ext cx="2560320" cy="2971800"/>
+          </a:xfrm>
+          <a:prstGeom prst="rect">
+            <a:avLst/>
+          </a:prstGeom>
+          <a:solidFill>
+            <a:srgbClr val="3B3F44"/>
+          </a:solidFill>
+          <a:ln>
+            <a:noFill/>
+          </a:ln>
+          <a:effectLst/>
+        </p:spPr>
+        <p:style>
+          <a:lnRef idx="1">
+            <a:schemeClr val="accent1"/>
+          </a:lnRef>
+          <a:fillRef idx="3">
+            <a:schemeClr val="accent1"/>
+          </a:fillRef>
+          <a:effectRef idx="2">
+            <a:schemeClr val="accent1"/>
+          </a:effectRef>
+          <a:fontRef idx="minor">
+            <a:schemeClr val="lt1"/>
+          </a:fontRef>
+        </p:style>
+        <p:txBody>
+          <a:bodyPr rtlCol="0" anchor="ctr" wrap="square" lIns="164592" rIns="128016" tIns="219456"/>
+          <a:lstStyle/>
+          <a:p>
+            <a:pPr algn="l"/>
+            <a:r>
+              <a:rPr sz="1050" b="1">
+                <a:solidFill>
+                  <a:srgbClr val="FFC220"/>
+                </a:solidFill>
+                <a:latin typeface="Aptos"/>
+              </a:rPr>
+              <a:t>VERSION 3</a:t>
+            </a:r>
+          </a:p>
+          <a:p>
+            <a:pPr algn="l">
+              <a:spcBef>
+                <a:spcPts val="700"/>
+              </a:spcBef>
+            </a:pPr>
+            <a:r>
+              <a:rPr sz="1900" b="1">
+                <a:solidFill>
+                  <a:srgbClr val="F2F2F2"/>
+                </a:solidFill>
+                <a:latin typeface="Aptos Mono"/>
+              </a:rPr>
+              <a:t>b8008</a:t>
+            </a:r>
+          </a:p>
+          <a:p>
+            <a:pPr algn="l">
+              <a:spcBef>
+                <a:spcPts val="900"/>
+              </a:spcBef>
+            </a:pPr>
+            <a:r>
+              <a:rPr sz="1200">
+                <a:solidFill>
+                  <a:srgbClr val="B6BCC4"/>
+                </a:solidFill>
+                <a:latin typeface="Aptos"/>
+              </a:rPr>
+              <a:t>25 dumb modules, derived from
+the 1972 block diagram.</a:t>
+            </a:r>
+          </a:p>
+          <a:p>
+            <a:pPr algn="l">
+              <a:spcBef>
+                <a:spcPts val="1100"/>
+              </a:spcBef>
+            </a:pPr>
+            <a:r>
+              <a:rPr sz="1200" b="1">
+                <a:solidFill>
+                  <a:srgbClr val="FFC220"/>
+                </a:solidFill>
+                <a:latin typeface="Aptos"/>
+              </a:rPr>
+              <a:t>✓  Silicon validated.
+46/46 on the board.</a:t>
+            </a:r>
           </a:p>
         </p:txBody>
       </p:sp>
@@ -22164,8 +22323,8 @@
         </p:nvSpPr>
         <p:spPr>
           <a:xfrm>
-            <a:off x="548640" y="3383280"/>
-            <a:ext cx="82296" cy="1298448"/>
+            <a:off x="8915400" y="1901952"/>
+            <a:ext cx="2560320" cy="82296"/>
           </a:xfrm>
           <a:prstGeom prst="rect">
             <a:avLst/>
@@ -22202,136 +22361,23 @@
       </p:sp>
       <p:sp>
         <p:nvSpPr>
-          <p:cNvPr id="14" name="TextBox 13"/>
-          <p:cNvSpPr txBox="1"/>
-          <p:nvPr/>
-        </p:nvSpPr>
-        <p:spPr>
-          <a:xfrm>
-            <a:off x="777240" y="3767328"/>
-            <a:ext cx="1828800" cy="731520"/>
-          </a:xfrm>
-          <a:prstGeom prst="rect">
-            <a:avLst/>
-          </a:prstGeom>
-          <a:noFill/>
-        </p:spPr>
-        <p:txBody>
-          <a:bodyPr wrap="square">
-            <a:spAutoFit/>
-          </a:bodyPr>
-          <a:lstStyle/>
-          <a:p>
-            <a:r>
-              <a:rPr sz="1450" b="1">
-                <a:solidFill>
-                  <a:srgbClr val="333333"/>
-                </a:solidFill>
-                <a:latin typeface="Aptos"/>
-              </a:rPr>
-              <a:t>What HDL says</a:t>
-            </a:r>
-          </a:p>
-        </p:txBody>
-      </p:sp>
-      <p:sp>
-        <p:nvSpPr>
-          <p:cNvPr id="15" name="TextBox 14"/>
-          <p:cNvSpPr txBox="1"/>
-          <p:nvPr/>
-        </p:nvSpPr>
-        <p:spPr>
-          <a:xfrm>
-            <a:off x="2697480" y="3502152"/>
-            <a:ext cx="4206240" cy="1097280"/>
-          </a:xfrm>
-          <a:prstGeom prst="rect">
-            <a:avLst/>
-          </a:prstGeom>
-          <a:noFill/>
-        </p:spPr>
-        <p:txBody>
-          <a:bodyPr wrap="square">
-            <a:spAutoFit/>
-          </a:bodyPr>
-          <a:lstStyle/>
-          <a:p>
-            <a:r>
-              <a:rPr sz="1250" b="0">
-                <a:solidFill>
-                  <a:srgbClr val="5A6068"/>
-                </a:solidFill>
-                <a:latin typeface="Aptos"/>
-              </a:rPr>
-              <a:t>Drafted most of the VHDL. Reading and critiquing code is a faster way to learn than writing from scratch — </a:t>
-            </a:r>
-            <a:r>
-              <a:rPr sz="1250" b="1">
-                <a:solidFill>
-                  <a:srgbClr val="5A6068"/>
-                </a:solidFill>
-                <a:latin typeface="Aptos"/>
-              </a:rPr>
-              <a:t>this is where it genuinely carried weight.</a:t>
-            </a:r>
-          </a:p>
-        </p:txBody>
-      </p:sp>
-      <p:sp>
-        <p:nvSpPr>
-          <p:cNvPr id="16" name="TextBox 15"/>
-          <p:cNvSpPr txBox="1"/>
-          <p:nvPr/>
-        </p:nvSpPr>
-        <p:spPr>
-          <a:xfrm>
-            <a:off x="7086600" y="3502152"/>
-            <a:ext cx="4526280" cy="1097280"/>
-          </a:xfrm>
-          <a:prstGeom prst="rect">
-            <a:avLst/>
-          </a:prstGeom>
-          <a:noFill/>
-        </p:spPr>
-        <p:txBody>
-          <a:bodyPr wrap="square">
-            <a:spAutoFit/>
-          </a:bodyPr>
-          <a:lstStyle/>
-          <a:p>
-            <a:r>
-              <a:rPr sz="1250" b="0">
-                <a:solidFill>
-                  <a:srgbClr val="333333"/>
-                </a:solidFill>
-                <a:latin typeface="Aptos"/>
-              </a:rPr>
-              <a:t>The concurrency model. Until you have it you cannot tell correct RTL from *plausible* RTL — and it produces plausible RTL all day long.</a:t>
-            </a:r>
-          </a:p>
-        </p:txBody>
-      </p:sp>
-      <p:sp>
-        <p:nvSpPr>
-          <p:cNvPr id="17" name="Rectangle 16"/>
+          <p:cNvPr id="14" name="Rectangle 13"/>
           <p:cNvSpPr/>
           <p:nvPr/>
         </p:nvSpPr>
         <p:spPr>
           <a:xfrm>
-            <a:off x="548640" y="4754880"/>
-            <a:ext cx="11064240" cy="1298448"/>
+            <a:off x="548640" y="5074920"/>
+            <a:ext cx="11064240" cy="1280160"/>
           </a:xfrm>
           <a:prstGeom prst="rect">
             <a:avLst/>
           </a:prstGeom>
           <a:solidFill>
-            <a:srgbClr val="FFFFFF"/>
+            <a:srgbClr val="2A2D31"/>
           </a:solidFill>
-          <a:ln w="12700">
-            <a:solidFill>
-              <a:srgbClr val="D9DDE3"/>
-            </a:solidFill>
+          <a:ln>
+            <a:noFill/>
           </a:ln>
           <a:effectLst/>
         </p:spPr>
@@ -22350,226 +22396,36 @@
           </a:fontRef>
         </p:style>
         <p:txBody>
-          <a:bodyPr rtlCol="0" anchor="ctr"/>
+          <a:bodyPr rtlCol="0" anchor="ctr" wrap="square" lIns="320040" rIns="320040"/>
           <a:lstStyle/>
           <a:p>
             <a:pPr algn="ctr"/>
-          </a:p>
-        </p:txBody>
-      </p:sp>
-      <p:sp>
-        <p:nvSpPr>
-          <p:cNvPr id="18" name="Rectangle 17"/>
-          <p:cNvSpPr/>
-          <p:nvPr/>
-        </p:nvSpPr>
-        <p:spPr>
-          <a:xfrm>
-            <a:off x="548640" y="4754880"/>
-            <a:ext cx="82296" cy="1298448"/>
-          </a:xfrm>
-          <a:prstGeom prst="rect">
-            <a:avLst/>
-          </a:prstGeom>
-          <a:solidFill>
-            <a:srgbClr val="FFC220"/>
-          </a:solidFill>
-          <a:ln>
-            <a:noFill/>
-          </a:ln>
-          <a:effectLst/>
-        </p:spPr>
-        <p:style>
-          <a:lnRef idx="1">
-            <a:schemeClr val="accent1"/>
-          </a:lnRef>
-          <a:fillRef idx="3">
-            <a:schemeClr val="accent1"/>
-          </a:fillRef>
-          <a:effectRef idx="2">
-            <a:schemeClr val="accent1"/>
-          </a:effectRef>
-          <a:fontRef idx="minor">
-            <a:schemeClr val="lt1"/>
-          </a:fontRef>
-        </p:style>
-        <p:txBody>
-          <a:bodyPr rtlCol="0" anchor="ctr"/>
-          <a:lstStyle/>
-          <a:p>
-            <a:pPr algn="ctr"/>
-          </a:p>
-        </p:txBody>
-      </p:sp>
-      <p:sp>
-        <p:nvSpPr>
-          <p:cNvPr id="19" name="TextBox 18"/>
-          <p:cNvSpPr txBox="1"/>
-          <p:nvPr/>
-        </p:nvSpPr>
-        <p:spPr>
-          <a:xfrm>
-            <a:off x="777240" y="5138928"/>
-            <a:ext cx="1828800" cy="731520"/>
-          </a:xfrm>
-          <a:prstGeom prst="rect">
-            <a:avLst/>
-          </a:prstGeom>
-          <a:noFill/>
-        </p:spPr>
-        <p:txBody>
-          <a:bodyPr wrap="square">
-            <a:spAutoFit/>
-          </a:bodyPr>
-          <a:lstStyle/>
-          <a:p>
-            <a:r>
-              <a:rPr sz="1450" b="1">
-                <a:solidFill>
-                  <a:srgbClr val="333333"/>
-                </a:solidFill>
-                <a:latin typeface="Aptos"/>
-              </a:rPr>
-              <a:t>Inference</a:t>
-            </a:r>
-          </a:p>
-        </p:txBody>
-      </p:sp>
-      <p:sp>
-        <p:nvSpPr>
-          <p:cNvPr id="20" name="TextBox 19"/>
-          <p:cNvSpPr txBox="1"/>
-          <p:nvPr/>
-        </p:nvSpPr>
-        <p:spPr>
-          <a:xfrm>
-            <a:off x="2697480" y="4873752"/>
-            <a:ext cx="4206240" cy="1097280"/>
-          </a:xfrm>
-          <a:prstGeom prst="rect">
-            <a:avLst/>
-          </a:prstGeom>
-          <a:noFill/>
-        </p:spPr>
-        <p:txBody>
-          <a:bodyPr wrap="square">
-            <a:spAutoFit/>
-          </a:bodyPr>
-          <a:lstStyle/>
-          <a:p>
-            <a:r>
-              <a:rPr sz="1250" b="0">
-                <a:solidFill>
-                  <a:srgbClr val="5A6068"/>
-                </a:solidFill>
-                <a:latin typeface="Aptos"/>
-              </a:rPr>
-              <a:t>Wrote the block-RAM version. Would just as happily have written the async-read version, and never mentioned the difference.</a:t>
-            </a:r>
-          </a:p>
-        </p:txBody>
-      </p:sp>
-      <p:sp>
-        <p:nvSpPr>
-          <p:cNvPr id="21" name="TextBox 20"/>
-          <p:cNvSpPr txBox="1"/>
-          <p:nvPr/>
-        </p:nvSpPr>
-        <p:spPr>
-          <a:xfrm>
-            <a:off x="7086600" y="4873752"/>
-            <a:ext cx="4526280" cy="1097280"/>
-          </a:xfrm>
-          <a:prstGeom prst="rect">
-            <a:avLst/>
-          </a:prstGeom>
-          <a:noFill/>
-        </p:spPr>
-        <p:txBody>
-          <a:bodyPr wrap="square">
-            <a:spAutoFit/>
-          </a:bodyPr>
-          <a:lstStyle/>
-          <a:p>
-            <a:r>
-              <a:rPr sz="1250" b="0">
-                <a:solidFill>
-                  <a:srgbClr val="333333"/>
-                </a:solidFill>
-                <a:latin typeface="Aptos"/>
-              </a:rPr>
-              <a:t>Which one was right — from the </a:t>
-            </a:r>
-            <a:r>
-              <a:rPr sz="1250" b="1">
-                <a:solidFill>
-                  <a:srgbClr val="333333"/>
-                </a:solidFill>
-                <a:latin typeface="Aptos"/>
-              </a:rPr>
-              <a:t>utilization report</a:t>
-            </a:r>
-            <a:r>
-              <a:rPr sz="1250" b="0">
-                <a:solidFill>
-                  <a:srgbClr val="333333"/>
-                </a:solidFill>
-                <a:latin typeface="Aptos"/>
-              </a:rPr>
-              <a:t>, not from the code. Both simulate identically. One does not fit on the chip.</a:t>
-            </a:r>
-          </a:p>
-        </p:txBody>
-      </p:sp>
-      <p:sp>
-        <p:nvSpPr>
-          <p:cNvPr id="22" name="Rectangle 21"/>
-          <p:cNvSpPr/>
-          <p:nvPr/>
-        </p:nvSpPr>
-        <p:spPr>
-          <a:xfrm>
-            <a:off x="548640" y="6181344"/>
-            <a:ext cx="11064240" cy="658368"/>
-          </a:xfrm>
-          <a:prstGeom prst="rect">
-            <a:avLst/>
-          </a:prstGeom>
-          <a:solidFill>
-            <a:srgbClr val="333333"/>
-          </a:solidFill>
-          <a:ln>
-            <a:noFill/>
-          </a:ln>
-          <a:effectLst/>
-        </p:spPr>
-        <p:style>
-          <a:lnRef idx="1">
-            <a:schemeClr val="accent1"/>
-          </a:lnRef>
-          <a:fillRef idx="3">
-            <a:schemeClr val="accent1"/>
-          </a:fillRef>
-          <a:effectRef idx="2">
-            <a:schemeClr val="accent1"/>
-          </a:effectRef>
-          <a:fontRef idx="minor">
-            <a:schemeClr val="lt1"/>
-          </a:fontRef>
-        </p:style>
-        <p:txBody>
-          <a:bodyPr rtlCol="0" anchor="ctr" wrap="square"/>
-          <a:lstStyle/>
-          <a:p>
-            <a:pPr algn="ctr"/>
-            <a:r>
-              <a:rPr sz="1700" b="0">
+            <a:r>
+              <a:rPr sz="1800" b="0">
                 <a:solidFill>
                   <a:srgbClr val="F2F2F2"/>
                 </a:solidFill>
                 <a:latin typeface="Aptos"/>
               </a:rPr>
-              <a:t>The pattern: it was fastest where I could already check it — and useless where I could not.</a:t>
+              <a:t>Both failures were the </a:t>
+            </a:r>
+            <a:r>
+              <a:rPr sz="1800" b="1">
+                <a:solidFill>
+                  <a:srgbClr val="F2F2F2"/>
+                </a:solidFill>
+                <a:latin typeface="Aptos"/>
+              </a:rPr>
+              <a:t>same</a:t>
+            </a:r>
+            <a:r>
+              <a:rPr sz="1800" b="0">
+                <a:solidFill>
+                  <a:srgbClr val="F2F2F2"/>
+                </a:solidFill>
+                <a:latin typeface="Aptos"/>
+              </a:rPr>
+              <a:t> failure: I was building the architecture the corpus knew — an instruction-set simulator written in VHDL — instead of the one the datasheet drew.</a:t>
             </a:r>
           </a:p>
         </p:txBody>
@@ -23429,7 +23285,7 @@
                 </a:solidFill>
                 <a:latin typeface="Aptos"/>
               </a:rPr>
-              <a:t>What it did, and what I had to learn  (cont.)</a:t>
+              <a:t>What it did, and what I had to learn</a:t>
             </a:r>
           </a:p>
         </p:txBody>
@@ -23553,8 +23409,8 @@
         </p:nvSpPr>
         <p:spPr>
           <a:xfrm>
-            <a:off x="548640" y="1993392"/>
-            <a:ext cx="11064240" cy="749808"/>
+            <a:off x="548640" y="2011680"/>
+            <a:ext cx="11064240" cy="1298448"/>
           </a:xfrm>
           <a:prstGeom prst="rect">
             <a:avLst/>
@@ -23599,8 +23455,8 @@
         </p:nvSpPr>
         <p:spPr>
           <a:xfrm>
-            <a:off x="548640" y="1993392"/>
-            <a:ext cx="82296" cy="749808"/>
+            <a:off x="548640" y="2011680"/>
+            <a:ext cx="82296" cy="1298448"/>
           </a:xfrm>
           <a:prstGeom prst="rect">
             <a:avLst/>
@@ -23643,8 +23499,8 @@
         </p:nvSpPr>
         <p:spPr>
           <a:xfrm>
-            <a:off x="777240" y="2139696"/>
-            <a:ext cx="1828800" cy="548640"/>
+            <a:off x="777240" y="2395728"/>
+            <a:ext cx="1828800" cy="731520"/>
           </a:xfrm>
           <a:prstGeom prst="rect">
             <a:avLst/>
@@ -23658,13 +23514,13 @@
           <a:lstStyle/>
           <a:p>
             <a:r>
-              <a:rPr sz="1350" b="1">
+              <a:rPr sz="1450" b="1">
                 <a:solidFill>
                   <a:srgbClr val="333333"/>
                 </a:solidFill>
                 <a:latin typeface="Aptos"/>
               </a:rPr>
-              <a:t>The toolchain</a:t>
+              <a:t>What an FPGA is</a:t>
             </a:r>
           </a:p>
         </p:txBody>
@@ -23677,8 +23533,8 @@
         </p:nvSpPr>
         <p:spPr>
           <a:xfrm>
-            <a:off x="2697480" y="2048256"/>
-            <a:ext cx="4206240" cy="731520"/>
+            <a:off x="2697480" y="2130552"/>
+            <a:ext cx="4206240" cy="1097280"/>
           </a:xfrm>
           <a:prstGeom prst="rect">
             <a:avLst/>
@@ -23692,13 +23548,13 @@
           <a:lstStyle/>
           <a:p>
             <a:r>
-              <a:rPr sz="1150" b="0">
+              <a:rPr sz="1250" b="0">
                 <a:solidFill>
                   <a:srgbClr val="5A6068"/>
                 </a:solidFill>
                 <a:latin typeface="Aptos"/>
               </a:rPr>
-              <a:t>Assembled the Makefile. Explained the flags.</a:t>
+              <a:t>Could explain any of it, instantly, at any depth. LUTs, routing, block RAM, bitstreams — perfect answers on demand.</a:t>
             </a:r>
           </a:p>
         </p:txBody>
@@ -23711,8 +23567,8 @@
         </p:nvSpPr>
         <p:spPr>
           <a:xfrm>
-            <a:off x="7086600" y="2048256"/>
-            <a:ext cx="4526280" cy="731520"/>
+            <a:off x="7086600" y="2130552"/>
+            <a:ext cx="4526280" cy="1097280"/>
           </a:xfrm>
           <a:prstGeom prst="rect">
             <a:avLst/>
@@ -23726,31 +23582,31 @@
           <a:lstStyle/>
           <a:p>
             <a:r>
-              <a:rPr sz="1150" b="0">
+              <a:rPr sz="1250" b="0">
                 <a:solidFill>
                   <a:srgbClr val="333333"/>
                 </a:solidFill>
                 <a:latin typeface="Aptos"/>
               </a:rPr>
-              <a:t>To read the </a:t>
-            </a:r>
-            <a:r>
-              <a:rPr sz="1150" b="1">
+              <a:t>That understanding is not explanation. The book made me </a:t>
+            </a:r>
+            <a:r>
+              <a:rPr sz="1250" b="1">
                 <a:solidFill>
                   <a:srgbClr val="333333"/>
                 </a:solidFill>
                 <a:latin typeface="Aptos"/>
               </a:rPr>
-              <a:t>reports</a:t>
-            </a:r>
-            <a:r>
-              <a:rPr sz="1150" b="0">
+              <a:t>build</a:t>
+            </a:r>
+            <a:r>
+              <a:rPr sz="1250" b="0">
                 <a:solidFill>
                   <a:srgbClr val="333333"/>
                 </a:solidFill>
                 <a:latin typeface="Aptos"/>
               </a:rPr>
-              <a:t>. Routing is two-thirds of my critical path — no model told me that; nextpnr did. The physics is not in the code, so it is not in the model.</a:t>
+              <a:t> the model, in sequence, with exercises. An AI would have let me skip building it — and then I would have had nothing to check its work against.</a:t>
             </a:r>
           </a:p>
         </p:txBody>
@@ -23763,8 +23619,8 @@
         </p:nvSpPr>
         <p:spPr>
           <a:xfrm>
-            <a:off x="548640" y="2798064"/>
-            <a:ext cx="11064240" cy="749808"/>
+            <a:off x="548640" y="3383280"/>
+            <a:ext cx="11064240" cy="1298448"/>
           </a:xfrm>
           <a:prstGeom prst="rect">
             <a:avLst/>
@@ -23809,8 +23665,8 @@
         </p:nvSpPr>
         <p:spPr>
           <a:xfrm>
-            <a:off x="548640" y="2798064"/>
-            <a:ext cx="82296" cy="749808"/>
+            <a:off x="548640" y="3383280"/>
+            <a:ext cx="82296" cy="1298448"/>
           </a:xfrm>
           <a:prstGeom prst="rect">
             <a:avLst/>
@@ -23853,8 +23709,8 @@
         </p:nvSpPr>
         <p:spPr>
           <a:xfrm>
-            <a:off x="777240" y="2944368"/>
-            <a:ext cx="1828800" cy="548640"/>
+            <a:off x="777240" y="3767328"/>
+            <a:ext cx="1828800" cy="731520"/>
           </a:xfrm>
           <a:prstGeom prst="rect">
             <a:avLst/>
@@ -23868,13 +23724,13 @@
           <a:lstStyle/>
           <a:p>
             <a:r>
-              <a:rPr sz="1350" b="1">
+              <a:rPr sz="1450" b="1">
                 <a:solidFill>
                   <a:srgbClr val="333333"/>
                 </a:solidFill>
                 <a:latin typeface="Aptos"/>
               </a:rPr>
-              <a:t>φ1 / φ2 as clocks</a:t>
+              <a:t>What HDL says</a:t>
             </a:r>
           </a:p>
         </p:txBody>
@@ -23887,8 +23743,8 @@
         </p:nvSpPr>
         <p:spPr>
           <a:xfrm>
-            <a:off x="2697480" y="2852928"/>
-            <a:ext cx="4206240" cy="731520"/>
+            <a:off x="2697480" y="3502152"/>
+            <a:ext cx="4206240" cy="1097280"/>
           </a:xfrm>
           <a:prstGeom prst="rect">
             <a:avLst/>
@@ -23902,31 +23758,22 @@
           <a:lstStyle/>
           <a:p>
             <a:r>
-              <a:rPr sz="1150" b="0">
+              <a:rPr sz="1250" b="0">
                 <a:solidFill>
                   <a:srgbClr val="5A6068"/>
                 </a:solidFill>
                 <a:latin typeface="Aptos"/>
               </a:rPr>
-              <a:t>Would write </a:t>
-            </a:r>
-            <a:r>
-              <a:rPr sz="1150" b="0">
-                <a:solidFill>
-                  <a:srgbClr val="1F9DD8"/>
-                </a:solidFill>
-                <a:latin typeface="Aptos Mono"/>
-              </a:rPr>
-              <a:t>rising_edge(phi1)</a:t>
-            </a:r>
-            <a:r>
-              <a:rPr sz="1150" b="0">
+              <a:t>Drafted most of the VHDL. Reading and critiquing code is a faster way to learn than writing from scratch — </a:t>
+            </a:r>
+            <a:r>
+              <a:rPr sz="1250" b="1">
                 <a:solidFill>
                   <a:srgbClr val="5A6068"/>
                 </a:solidFill>
                 <a:latin typeface="Aptos"/>
               </a:rPr>
-              <a:t> without hesitation. Valid VHDL. Simulates perfectly.</a:t>
+              <a:t>this is where it genuinely carried weight.</a:t>
             </a:r>
           </a:p>
         </p:txBody>
@@ -23939,8 +23786,8 @@
         </p:nvSpPr>
         <p:spPr>
           <a:xfrm>
-            <a:off x="7086600" y="2852928"/>
-            <a:ext cx="4526280" cy="731520"/>
+            <a:off x="7086600" y="3502152"/>
+            <a:ext cx="4526280" cy="1097280"/>
           </a:xfrm>
           <a:prstGeom prst="rect">
             <a:avLst/>
@@ -23954,13 +23801,13 @@
           <a:lstStyle/>
           <a:p>
             <a:r>
-              <a:rPr sz="1150" b="0">
+              <a:rPr sz="1250" b="0">
                 <a:solidFill>
                   <a:srgbClr val="333333"/>
                 </a:solidFill>
                 <a:latin typeface="Aptos"/>
               </a:rPr>
-              <a:t>That it creates a clock domain the timing engine cannot analyze. Learned from a design that would not close.</a:t>
+              <a:t>The concurrency model. Until you have it you cannot tell correct RTL from *plausible* RTL — and it produces plausible RTL all day long.</a:t>
             </a:r>
           </a:p>
         </p:txBody>
@@ -23973,8 +23820,8 @@
         </p:nvSpPr>
         <p:spPr>
           <a:xfrm>
-            <a:off x="548640" y="3602736"/>
-            <a:ext cx="11064240" cy="749808"/>
+            <a:off x="548640" y="4754880"/>
+            <a:ext cx="11064240" cy="1298448"/>
           </a:xfrm>
           <a:prstGeom prst="rect">
             <a:avLst/>
@@ -24019,8 +23866,8 @@
         </p:nvSpPr>
         <p:spPr>
           <a:xfrm>
-            <a:off x="548640" y="3602736"/>
-            <a:ext cx="82296" cy="749808"/>
+            <a:off x="548640" y="4754880"/>
+            <a:ext cx="82296" cy="1298448"/>
           </a:xfrm>
           <a:prstGeom prst="rect">
             <a:avLst/>
@@ -24063,8 +23910,8 @@
         </p:nvSpPr>
         <p:spPr>
           <a:xfrm>
-            <a:off x="777240" y="3749039"/>
-            <a:ext cx="1828800" cy="548640"/>
+            <a:off x="777240" y="5138928"/>
+            <a:ext cx="1828800" cy="731520"/>
           </a:xfrm>
           <a:prstGeom prst="rect">
             <a:avLst/>
@@ -24078,13 +23925,13 @@
           <a:lstStyle/>
           <a:p>
             <a:r>
-              <a:rPr sz="1350" b="1">
+              <a:rPr sz="1450" b="1">
                 <a:solidFill>
                   <a:srgbClr val="333333"/>
                 </a:solidFill>
                 <a:latin typeface="Aptos"/>
               </a:rPr>
-              <a:t>The 0xFF bug</a:t>
+              <a:t>Inference</a:t>
             </a:r>
           </a:p>
         </p:txBody>
@@ -24097,8 +23944,8 @@
         </p:nvSpPr>
         <p:spPr>
           <a:xfrm>
-            <a:off x="2697480" y="3657600"/>
-            <a:ext cx="4206240" cy="731520"/>
+            <a:off x="2697480" y="4873752"/>
+            <a:ext cx="4206240" cy="1097280"/>
           </a:xfrm>
           <a:prstGeom prst="rect">
             <a:avLst/>
@@ -24112,31 +23959,13 @@
           <a:lstStyle/>
           <a:p>
             <a:r>
-              <a:rPr sz="1150" b="0">
+              <a:rPr sz="1250" b="0">
                 <a:solidFill>
                   <a:srgbClr val="5A6068"/>
                 </a:solidFill>
                 <a:latin typeface="Aptos"/>
               </a:rPr>
-              <a:t>Nothing. It </a:t>
-            </a:r>
-            <a:r>
-              <a:rPr sz="1150" b="1">
-                <a:solidFill>
-                  <a:srgbClr val="5A6068"/>
-                </a:solidFill>
-                <a:latin typeface="Aptos"/>
-              </a:rPr>
-              <a:t>could not</a:t>
-            </a:r>
-            <a:r>
-              <a:rPr sz="1150" b="0">
-                <a:solidFill>
-                  <a:srgbClr val="5A6068"/>
-                </a:solidFill>
-                <a:latin typeface="Aptos"/>
-              </a:rPr>
-              <a:t> — the bug lives below the RTL, inside the synthesizer.</a:t>
+              <a:t>Wrote the block-RAM version. Would just as happily have written the async-read version, and never mentioned the difference.</a:t>
             </a:r>
           </a:p>
         </p:txBody>
@@ -24149,8 +23978,8 @@
         </p:nvSpPr>
         <p:spPr>
           <a:xfrm>
-            <a:off x="7086600" y="3657600"/>
-            <a:ext cx="4526280" cy="731520"/>
+            <a:off x="7086600" y="4873752"/>
+            <a:ext cx="4526280" cy="1097280"/>
           </a:xfrm>
           <a:prstGeom prst="rect">
             <a:avLst/>
@@ -24164,13 +23993,31 @@
           <a:lstStyle/>
           <a:p>
             <a:r>
-              <a:rPr sz="1150" b="0">
+              <a:rPr sz="1250" b="0">
                 <a:solidFill>
                   <a:srgbClr val="333333"/>
                 </a:solidFill>
                 <a:latin typeface="Aptos"/>
               </a:rPr>
-              <a:t>Three days of bisection. And that when simulation and silicon disagree, the toolchain itself is a suspect.</a:t>
+              <a:t>Which one was right — from the </a:t>
+            </a:r>
+            <a:r>
+              <a:rPr sz="1250" b="1">
+                <a:solidFill>
+                  <a:srgbClr val="333333"/>
+                </a:solidFill>
+                <a:latin typeface="Aptos"/>
+              </a:rPr>
+              <a:t>utilization report</a:t>
+            </a:r>
+            <a:r>
+              <a:rPr sz="1250" b="0">
+                <a:solidFill>
+                  <a:srgbClr val="333333"/>
+                </a:solidFill>
+                <a:latin typeface="Aptos"/>
+              </a:rPr>
+              <a:t>, not from the code. Both simulate identically. One does not fit on the chip.</a:t>
             </a:r>
           </a:p>
         </p:txBody>
@@ -24183,410 +24030,8 @@
         </p:nvSpPr>
         <p:spPr>
           <a:xfrm>
-            <a:off x="548640" y="4407408"/>
-            <a:ext cx="11064240" cy="749808"/>
-          </a:xfrm>
-          <a:prstGeom prst="rect">
-            <a:avLst/>
-          </a:prstGeom>
-          <a:solidFill>
-            <a:srgbClr val="FFFFFF"/>
-          </a:solidFill>
-          <a:ln w="12700">
-            <a:solidFill>
-              <a:srgbClr val="D9DDE3"/>
-            </a:solidFill>
-          </a:ln>
-          <a:effectLst/>
-        </p:spPr>
-        <p:style>
-          <a:lnRef idx="1">
-            <a:schemeClr val="accent1"/>
-          </a:lnRef>
-          <a:fillRef idx="3">
-            <a:schemeClr val="accent1"/>
-          </a:fillRef>
-          <a:effectRef idx="2">
-            <a:schemeClr val="accent1"/>
-          </a:effectRef>
-          <a:fontRef idx="minor">
-            <a:schemeClr val="lt1"/>
-          </a:fontRef>
-        </p:style>
-        <p:txBody>
-          <a:bodyPr rtlCol="0" anchor="ctr"/>
-          <a:lstStyle/>
-          <a:p>
-            <a:pPr algn="ctr"/>
-          </a:p>
-        </p:txBody>
-      </p:sp>
-      <p:sp>
-        <p:nvSpPr>
-          <p:cNvPr id="23" name="Rectangle 22"/>
-          <p:cNvSpPr/>
-          <p:nvPr/>
-        </p:nvSpPr>
-        <p:spPr>
-          <a:xfrm>
-            <a:off x="548640" y="4407408"/>
-            <a:ext cx="82296" cy="749808"/>
-          </a:xfrm>
-          <a:prstGeom prst="rect">
-            <a:avLst/>
-          </a:prstGeom>
-          <a:solidFill>
-            <a:srgbClr val="FFC220"/>
-          </a:solidFill>
-          <a:ln>
-            <a:noFill/>
-          </a:ln>
-          <a:effectLst/>
-        </p:spPr>
-        <p:style>
-          <a:lnRef idx="1">
-            <a:schemeClr val="accent1"/>
-          </a:lnRef>
-          <a:fillRef idx="3">
-            <a:schemeClr val="accent1"/>
-          </a:fillRef>
-          <a:effectRef idx="2">
-            <a:schemeClr val="accent1"/>
-          </a:effectRef>
-          <a:fontRef idx="minor">
-            <a:schemeClr val="lt1"/>
-          </a:fontRef>
-        </p:style>
-        <p:txBody>
-          <a:bodyPr rtlCol="0" anchor="ctr"/>
-          <a:lstStyle/>
-          <a:p>
-            <a:pPr algn="ctr"/>
-          </a:p>
-        </p:txBody>
-      </p:sp>
-      <p:sp>
-        <p:nvSpPr>
-          <p:cNvPr id="24" name="TextBox 23"/>
-          <p:cNvSpPr txBox="1"/>
-          <p:nvPr/>
-        </p:nvSpPr>
-        <p:spPr>
-          <a:xfrm>
-            <a:off x="777240" y="4553712"/>
-            <a:ext cx="1828800" cy="548640"/>
-          </a:xfrm>
-          <a:prstGeom prst="rect">
-            <a:avLst/>
-          </a:prstGeom>
-          <a:noFill/>
-        </p:spPr>
-        <p:txBody>
-          <a:bodyPr wrap="square">
-            <a:spAutoFit/>
-          </a:bodyPr>
-          <a:lstStyle/>
-          <a:p>
-            <a:r>
-              <a:rPr sz="1350" b="1">
-                <a:solidFill>
-                  <a:srgbClr val="333333"/>
-                </a:solidFill>
-                <a:latin typeface="Aptos"/>
-              </a:rPr>
-              <a:t>The architecture</a:t>
-            </a:r>
-          </a:p>
-        </p:txBody>
-      </p:sp>
-      <p:sp>
-        <p:nvSpPr>
-          <p:cNvPr id="25" name="TextBox 24"/>
-          <p:cNvSpPr txBox="1"/>
-          <p:nvPr/>
-        </p:nvSpPr>
-        <p:spPr>
-          <a:xfrm>
-            <a:off x="2697480" y="4462272"/>
-            <a:ext cx="4206240" cy="731520"/>
-          </a:xfrm>
-          <a:prstGeom prst="rect">
-            <a:avLst/>
-          </a:prstGeom>
-          <a:noFill/>
-        </p:spPr>
-        <p:txBody>
-          <a:bodyPr wrap="square">
-            <a:spAutoFit/>
-          </a:bodyPr>
-          <a:lstStyle/>
-          <a:p>
-            <a:r>
-              <a:rPr sz="1150" b="0">
-                <a:solidFill>
-                  <a:srgbClr val="5A6068"/>
-                </a:solidFill>
-                <a:latin typeface="Aptos"/>
-              </a:rPr>
-              <a:t>Pulled toward an instruction-set simulator every time, because that is all its corpus contained.</a:t>
-            </a:r>
-          </a:p>
-        </p:txBody>
-      </p:sp>
-      <p:sp>
-        <p:nvSpPr>
-          <p:cNvPr id="26" name="TextBox 25"/>
-          <p:cNvSpPr txBox="1"/>
-          <p:nvPr/>
-        </p:nvSpPr>
-        <p:spPr>
-          <a:xfrm>
-            <a:off x="7086600" y="4462272"/>
-            <a:ext cx="4526280" cy="731520"/>
-          </a:xfrm>
-          <a:prstGeom prst="rect">
-            <a:avLst/>
-          </a:prstGeom>
-          <a:noFill/>
-        </p:spPr>
-        <p:txBody>
-          <a:bodyPr wrap="square">
-            <a:spAutoFit/>
-          </a:bodyPr>
-          <a:lstStyle/>
-          <a:p>
-            <a:r>
-              <a:rPr sz="1150" b="1">
-                <a:solidFill>
-                  <a:srgbClr val="333333"/>
-                </a:solidFill>
-                <a:latin typeface="Aptos"/>
-              </a:rPr>
-              <a:t>The block diagram, from the 1972 datasheet.</a:t>
-            </a:r>
-            <a:r>
-              <a:rPr sz="1150" b="0">
-                <a:solidFill>
-                  <a:srgbClr val="333333"/>
-                </a:solidFill>
-                <a:latin typeface="Aptos"/>
-              </a:rPr>
-              <a:t> This is the one that mattered — and the one thing no model could have handed me.</a:t>
-            </a:r>
-          </a:p>
-        </p:txBody>
-      </p:sp>
-      <p:sp>
-        <p:nvSpPr>
-          <p:cNvPr id="27" name="Rectangle 26"/>
-          <p:cNvSpPr/>
-          <p:nvPr/>
-        </p:nvSpPr>
-        <p:spPr>
-          <a:xfrm>
-            <a:off x="548640" y="5212080"/>
-            <a:ext cx="11064240" cy="749808"/>
-          </a:xfrm>
-          <a:prstGeom prst="rect">
-            <a:avLst/>
-          </a:prstGeom>
-          <a:solidFill>
-            <a:srgbClr val="FFFFFF"/>
-          </a:solidFill>
-          <a:ln w="12700">
-            <a:solidFill>
-              <a:srgbClr val="D9DDE3"/>
-            </a:solidFill>
-          </a:ln>
-          <a:effectLst/>
-        </p:spPr>
-        <p:style>
-          <a:lnRef idx="1">
-            <a:schemeClr val="accent1"/>
-          </a:lnRef>
-          <a:fillRef idx="3">
-            <a:schemeClr val="accent1"/>
-          </a:fillRef>
-          <a:effectRef idx="2">
-            <a:schemeClr val="accent1"/>
-          </a:effectRef>
-          <a:fontRef idx="minor">
-            <a:schemeClr val="lt1"/>
-          </a:fontRef>
-        </p:style>
-        <p:txBody>
-          <a:bodyPr rtlCol="0" anchor="ctr"/>
-          <a:lstStyle/>
-          <a:p>
-            <a:pPr algn="ctr"/>
-          </a:p>
-        </p:txBody>
-      </p:sp>
-      <p:sp>
-        <p:nvSpPr>
-          <p:cNvPr id="28" name="Rectangle 27"/>
-          <p:cNvSpPr/>
-          <p:nvPr/>
-        </p:nvSpPr>
-        <p:spPr>
-          <a:xfrm>
-            <a:off x="548640" y="5212080"/>
-            <a:ext cx="82296" cy="749808"/>
-          </a:xfrm>
-          <a:prstGeom prst="rect">
-            <a:avLst/>
-          </a:prstGeom>
-          <a:solidFill>
-            <a:srgbClr val="FFC220"/>
-          </a:solidFill>
-          <a:ln>
-            <a:noFill/>
-          </a:ln>
-          <a:effectLst/>
-        </p:spPr>
-        <p:style>
-          <a:lnRef idx="1">
-            <a:schemeClr val="accent1"/>
-          </a:lnRef>
-          <a:fillRef idx="3">
-            <a:schemeClr val="accent1"/>
-          </a:fillRef>
-          <a:effectRef idx="2">
-            <a:schemeClr val="accent1"/>
-          </a:effectRef>
-          <a:fontRef idx="minor">
-            <a:schemeClr val="lt1"/>
-          </a:fontRef>
-        </p:style>
-        <p:txBody>
-          <a:bodyPr rtlCol="0" anchor="ctr"/>
-          <a:lstStyle/>
-          <a:p>
-            <a:pPr algn="ctr"/>
-          </a:p>
-        </p:txBody>
-      </p:sp>
-      <p:sp>
-        <p:nvSpPr>
-          <p:cNvPr id="29" name="TextBox 28"/>
-          <p:cNvSpPr txBox="1"/>
-          <p:nvPr/>
-        </p:nvSpPr>
-        <p:spPr>
-          <a:xfrm>
-            <a:off x="777240" y="5358384"/>
-            <a:ext cx="1828800" cy="548640"/>
-          </a:xfrm>
-          <a:prstGeom prst="rect">
-            <a:avLst/>
-          </a:prstGeom>
-          <a:noFill/>
-        </p:spPr>
-        <p:txBody>
-          <a:bodyPr wrap="square">
-            <a:spAutoFit/>
-          </a:bodyPr>
-          <a:lstStyle/>
-          <a:p>
-            <a:r>
-              <a:rPr sz="1350" b="1">
-                <a:solidFill>
-                  <a:srgbClr val="333333"/>
-                </a:solidFill>
-                <a:latin typeface="Aptos"/>
-              </a:rPr>
-              <a:t>Verification</a:t>
-            </a:r>
-          </a:p>
-        </p:txBody>
-      </p:sp>
-      <p:sp>
-        <p:nvSpPr>
-          <p:cNvPr id="30" name="TextBox 29"/>
-          <p:cNvSpPr txBox="1"/>
-          <p:nvPr/>
-        </p:nvSpPr>
-        <p:spPr>
-          <a:xfrm>
-            <a:off x="2697480" y="5266944"/>
-            <a:ext cx="4206240" cy="731520"/>
-          </a:xfrm>
-          <a:prstGeom prst="rect">
-            <a:avLst/>
-          </a:prstGeom>
-          <a:noFill/>
-        </p:spPr>
-        <p:txBody>
-          <a:bodyPr wrap="square">
-            <a:spAutoFit/>
-          </a:bodyPr>
-          <a:lstStyle/>
-          <a:p>
-            <a:r>
-              <a:rPr sz="1150" b="0">
-                <a:solidFill>
-                  <a:srgbClr val="5A6068"/>
-                </a:solidFill>
-                <a:latin typeface="Aptos"/>
-              </a:rPr>
-              <a:t>Wrote much of the 29 testbenches — the boring scaffolding, tirelessly.</a:t>
-            </a:r>
-          </a:p>
-        </p:txBody>
-      </p:sp>
-      <p:sp>
-        <p:nvSpPr>
-          <p:cNvPr id="31" name="TextBox 30"/>
-          <p:cNvSpPr txBox="1"/>
-          <p:nvPr/>
-        </p:nvSpPr>
-        <p:spPr>
-          <a:xfrm>
-            <a:off x="7086600" y="5266944"/>
-            <a:ext cx="4526280" cy="731520"/>
-          </a:xfrm>
-          <a:prstGeom prst="rect">
-            <a:avLst/>
-          </a:prstGeom>
-          <a:noFill/>
-        </p:spPr>
-        <p:txBody>
-          <a:bodyPr wrap="square">
-            <a:spAutoFit/>
-          </a:bodyPr>
-          <a:lstStyle/>
-          <a:p>
-            <a:r>
-              <a:rPr sz="1150" b="0">
-                <a:solidFill>
-                  <a:srgbClr val="1F9DD8"/>
-                </a:solidFill>
-                <a:latin typeface="Aptos Mono"/>
-              </a:rPr>
-              <a:t>isa.json</a:t>
-            </a:r>
-            <a:r>
-              <a:rPr sz="1150" b="0">
-                <a:solidFill>
-                  <a:srgbClr val="333333"/>
-                </a:solidFill>
-                <a:latin typeface="Aptos"/>
-              </a:rPr>
-              <a:t> and the oracle emulator, by hand from the datasheet. The spec has to come from the source, not the model — otherwise you are grading its homework with its own answer key.</a:t>
-            </a:r>
-          </a:p>
-        </p:txBody>
-      </p:sp>
-      <p:sp>
-        <p:nvSpPr>
-          <p:cNvPr id="32" name="Rectangle 31"/>
-          <p:cNvSpPr/>
-          <p:nvPr/>
-        </p:nvSpPr>
-        <p:spPr>
-          <a:xfrm>
-            <a:off x="548640" y="6062472"/>
-            <a:ext cx="11064240" cy="640080"/>
+            <a:off x="548640" y="6181344"/>
+            <a:ext cx="11064240" cy="658368"/>
           </a:xfrm>
           <a:prstGeom prst="rect">
             <a:avLst/>
@@ -24619,22 +24064,13 @@
           <a:p>
             <a:pPr algn="ctr"/>
             <a:r>
-              <a:rPr sz="1800" b="0">
+              <a:rPr sz="1700" b="0">
                 <a:solidFill>
                   <a:srgbClr val="F2F2F2"/>
                 </a:solidFill>
                 <a:latin typeface="Aptos"/>
               </a:rPr>
-              <a:t>Version three worked because by then I had learned </a:t>
-            </a:r>
-            <a:r>
-              <a:rPr sz="1800" b="1">
-                <a:solidFill>
-                  <a:srgbClr val="F2F2F2"/>
-                </a:solidFill>
-                <a:latin typeface="Aptos"/>
-              </a:rPr>
-              <a:t>the right-hand column.</a:t>
+              <a:t>The pattern: it was fastest where I could already check it — and useless where I could not.</a:t>
             </a:r>
           </a:p>
         </p:txBody>
@@ -24694,7 +24130,7 @@
                 </a:solidFill>
                 <a:latin typeface="Aptos"/>
               </a:rPr>
-              <a:t>CLOSE</a:t>
+              <a:t>PART 6 — HOW THIS GOT BUILT</a:t>
             </a:r>
           </a:p>
         </p:txBody>
@@ -24728,7 +24164,7 @@
                 </a:solidFill>
                 <a:latin typeface="Aptos"/>
               </a:rPr>
-              <a:t>What I’d tell you about learning this way</a:t>
+              <a:t>What it did, and what I had to learn  (cont.)</a:t>
             </a:r>
           </a:p>
         </p:txBody>
@@ -24778,14 +24214,82 @@
       </p:sp>
       <p:sp>
         <p:nvSpPr>
-          <p:cNvPr id="5" name="Rectangle 4"/>
+          <p:cNvPr id="5" name="TextBox 4"/>
+          <p:cNvSpPr txBox="1"/>
+          <p:nvPr/>
+        </p:nvSpPr>
+        <p:spPr>
+          <a:xfrm>
+            <a:off x="2697480" y="1627632"/>
+            <a:ext cx="4114800" cy="320040"/>
+          </a:xfrm>
+          <a:prstGeom prst="rect">
+            <a:avLst/>
+          </a:prstGeom>
+          <a:noFill/>
+        </p:spPr>
+        <p:txBody>
+          <a:bodyPr wrap="square">
+            <a:spAutoFit/>
+          </a:bodyPr>
+          <a:lstStyle/>
+          <a:p>
+            <a:r>
+              <a:rPr sz="1100" b="1">
+                <a:solidFill>
+                  <a:srgbClr val="8D8D8D"/>
+                </a:solidFill>
+                <a:latin typeface="Aptos"/>
+              </a:rPr>
+              <a:t>WHAT THE AI DID</a:t>
+            </a:r>
+          </a:p>
+        </p:txBody>
+      </p:sp>
+      <p:sp>
+        <p:nvSpPr>
+          <p:cNvPr id="6" name="TextBox 5"/>
+          <p:cNvSpPr txBox="1"/>
+          <p:nvPr/>
+        </p:nvSpPr>
+        <p:spPr>
+          <a:xfrm>
+            <a:off x="7086600" y="1627632"/>
+            <a:ext cx="4480560" cy="320040"/>
+          </a:xfrm>
+          <a:prstGeom prst="rect">
+            <a:avLst/>
+          </a:prstGeom>
+          <a:noFill/>
+        </p:spPr>
+        <p:txBody>
+          <a:bodyPr wrap="square">
+            <a:spAutoFit/>
+          </a:bodyPr>
+          <a:lstStyle/>
+          <a:p>
+            <a:r>
+              <a:rPr sz="1100" b="1">
+                <a:solidFill>
+                  <a:srgbClr val="8A6D00"/>
+                </a:solidFill>
+                <a:latin typeface="Aptos"/>
+              </a:rPr>
+              <a:t>WHAT I HAD TO LEARN MYSELF</a:t>
+            </a:r>
+          </a:p>
+        </p:txBody>
+      </p:sp>
+      <p:sp>
+        <p:nvSpPr>
+          <p:cNvPr id="7" name="Rectangle 6"/>
           <p:cNvSpPr/>
           <p:nvPr/>
         </p:nvSpPr>
         <p:spPr>
           <a:xfrm>
-            <a:off x="548640" y="1664208"/>
-            <a:ext cx="11064240" cy="694944"/>
+            <a:off x="548640" y="1993392"/>
+            <a:ext cx="11064240" cy="749808"/>
           </a:xfrm>
           <a:prstGeom prst="rect">
             <a:avLst/>
@@ -24824,14 +24328,14 @@
       </p:sp>
       <p:sp>
         <p:nvSpPr>
-          <p:cNvPr id="6" name="Rectangle 5"/>
+          <p:cNvPr id="8" name="Rectangle 7"/>
           <p:cNvSpPr/>
           <p:nvPr/>
         </p:nvSpPr>
         <p:spPr>
           <a:xfrm>
-            <a:off x="548640" y="1664208"/>
-            <a:ext cx="82296" cy="694944"/>
+            <a:off x="548640" y="1993392"/>
+            <a:ext cx="82296" cy="749808"/>
           </a:xfrm>
           <a:prstGeom prst="rect">
             <a:avLst/>
@@ -24868,14 +24372,14 @@
       </p:sp>
       <p:sp>
         <p:nvSpPr>
-          <p:cNvPr id="7" name="TextBox 6"/>
+          <p:cNvPr id="9" name="TextBox 8"/>
           <p:cNvSpPr txBox="1"/>
           <p:nvPr/>
         </p:nvSpPr>
         <p:spPr>
           <a:xfrm>
-            <a:off x="822960" y="1655064"/>
-            <a:ext cx="10607040" cy="713232"/>
+            <a:off x="777240" y="2139696"/>
+            <a:ext cx="1828800" cy="548640"/>
           </a:xfrm>
           <a:prstGeom prst="rect">
             <a:avLst/>
@@ -24889,38 +24393,113 @@
           <a:lstStyle/>
           <a:p>
             <a:r>
-              <a:rPr sz="1550" b="1">
+              <a:rPr sz="1350" b="1">
                 <a:solidFill>
                   <a:srgbClr val="333333"/>
                 </a:solidFill>
                 <a:latin typeface="Aptos"/>
               </a:rPr>
-              <a:t>Read the book first.</a:t>
-            </a:r>
-          </a:p>
-          <a:p>
-            <a:r>
-              <a:rPr sz="1200" b="0">
+              <a:t>The toolchain</a:t>
+            </a:r>
+          </a:p>
+        </p:txBody>
+      </p:sp>
+      <p:sp>
+        <p:nvSpPr>
+          <p:cNvPr id="10" name="TextBox 9"/>
+          <p:cNvSpPr txBox="1"/>
+          <p:nvPr/>
+        </p:nvSpPr>
+        <p:spPr>
+          <a:xfrm>
+            <a:off x="2697480" y="2048256"/>
+            <a:ext cx="4206240" cy="731520"/>
+          </a:xfrm>
+          <a:prstGeom prst="rect">
+            <a:avLst/>
+          </a:prstGeom>
+          <a:noFill/>
+        </p:spPr>
+        <p:txBody>
+          <a:bodyPr wrap="square">
+            <a:spAutoFit/>
+          </a:bodyPr>
+          <a:lstStyle/>
+          <a:p>
+            <a:r>
+              <a:rPr sz="1150" b="0">
                 <a:solidFill>
                   <a:srgbClr val="5A6068"/>
                 </a:solidFill>
                 <a:latin typeface="Aptos"/>
               </a:rPr>
-              <a:t>Foundations are not delegable. An AI will explain a LUT perfectly and leave you unable to check its work.</a:t>
-            </a:r>
-          </a:p>
-        </p:txBody>
-      </p:sp>
-      <p:sp>
-        <p:nvSpPr>
-          <p:cNvPr id="8" name="Rectangle 7"/>
+              <a:t>Assembled the Makefile. Explained the flags.</a:t>
+            </a:r>
+          </a:p>
+        </p:txBody>
+      </p:sp>
+      <p:sp>
+        <p:nvSpPr>
+          <p:cNvPr id="11" name="TextBox 10"/>
+          <p:cNvSpPr txBox="1"/>
+          <p:nvPr/>
+        </p:nvSpPr>
+        <p:spPr>
+          <a:xfrm>
+            <a:off x="7086600" y="2048256"/>
+            <a:ext cx="4526280" cy="731520"/>
+          </a:xfrm>
+          <a:prstGeom prst="rect">
+            <a:avLst/>
+          </a:prstGeom>
+          <a:noFill/>
+        </p:spPr>
+        <p:txBody>
+          <a:bodyPr wrap="square">
+            <a:spAutoFit/>
+          </a:bodyPr>
+          <a:lstStyle/>
+          <a:p>
+            <a:r>
+              <a:rPr sz="1150" b="0">
+                <a:solidFill>
+                  <a:srgbClr val="333333"/>
+                </a:solidFill>
+                <a:latin typeface="Aptos"/>
+              </a:rPr>
+              <a:t>To read the </a:t>
+            </a:r>
+            <a:r>
+              <a:rPr sz="1150" b="1">
+                <a:solidFill>
+                  <a:srgbClr val="333333"/>
+                </a:solidFill>
+                <a:latin typeface="Aptos"/>
+              </a:rPr>
+              <a:t>reports</a:t>
+            </a:r>
+            <a:r>
+              <a:rPr sz="1150" b="0">
+                <a:solidFill>
+                  <a:srgbClr val="333333"/>
+                </a:solidFill>
+                <a:latin typeface="Aptos"/>
+              </a:rPr>
+              <a:t>. Routing is two-thirds of my critical path — no model told me that; nextpnr did. The physics is not in the code, so it is not in the model.</a:t>
+            </a:r>
+          </a:p>
+        </p:txBody>
+      </p:sp>
+      <p:sp>
+        <p:nvSpPr>
+          <p:cNvPr id="12" name="Rectangle 11"/>
           <p:cNvSpPr/>
           <p:nvPr/>
         </p:nvSpPr>
         <p:spPr>
           <a:xfrm>
-            <a:off x="548640" y="2423160"/>
-            <a:ext cx="11064240" cy="694944"/>
+            <a:off x="548640" y="2798064"/>
+            <a:ext cx="11064240" cy="749808"/>
           </a:xfrm>
           <a:prstGeom prst="rect">
             <a:avLst/>
@@ -24959,14 +24538,14 @@
       </p:sp>
       <p:sp>
         <p:nvSpPr>
-          <p:cNvPr id="9" name="Rectangle 8"/>
+          <p:cNvPr id="13" name="Rectangle 12"/>
           <p:cNvSpPr/>
           <p:nvPr/>
         </p:nvSpPr>
         <p:spPr>
           <a:xfrm>
-            <a:off x="548640" y="2423160"/>
-            <a:ext cx="82296" cy="694944"/>
+            <a:off x="548640" y="2798064"/>
+            <a:ext cx="82296" cy="749808"/>
           </a:xfrm>
           <a:prstGeom prst="rect">
             <a:avLst/>
@@ -25003,14 +24582,14 @@
       </p:sp>
       <p:sp>
         <p:nvSpPr>
-          <p:cNvPr id="10" name="TextBox 9"/>
+          <p:cNvPr id="14" name="TextBox 13"/>
           <p:cNvSpPr txBox="1"/>
           <p:nvPr/>
         </p:nvSpPr>
         <p:spPr>
           <a:xfrm>
-            <a:off x="822960" y="2414016"/>
-            <a:ext cx="10607040" cy="713232"/>
+            <a:off x="777240" y="2944368"/>
+            <a:ext cx="1828800" cy="548640"/>
           </a:xfrm>
           <a:prstGeom prst="rect">
             <a:avLst/>
@@ -25024,38 +24603,113 @@
           <a:lstStyle/>
           <a:p>
             <a:r>
-              <a:rPr sz="1550" b="1">
+              <a:rPr sz="1350" b="1">
                 <a:solidFill>
                   <a:srgbClr val="333333"/>
                 </a:solidFill>
                 <a:latin typeface="Aptos"/>
               </a:rPr>
-              <a:t>Own the specification.</a:t>
-            </a:r>
-          </a:p>
-          <a:p>
-            <a:r>
-              <a:rPr sz="1200" b="0">
+              <a:t>φ1 / φ2 as clocks</a:t>
+            </a:r>
+          </a:p>
+        </p:txBody>
+      </p:sp>
+      <p:sp>
+        <p:nvSpPr>
+          <p:cNvPr id="15" name="TextBox 14"/>
+          <p:cNvSpPr txBox="1"/>
+          <p:nvPr/>
+        </p:nvSpPr>
+        <p:spPr>
+          <a:xfrm>
+            <a:off x="2697480" y="2852928"/>
+            <a:ext cx="4206240" cy="731520"/>
+          </a:xfrm>
+          <a:prstGeom prst="rect">
+            <a:avLst/>
+          </a:prstGeom>
+          <a:noFill/>
+        </p:spPr>
+        <p:txBody>
+          <a:bodyPr wrap="square">
+            <a:spAutoFit/>
+          </a:bodyPr>
+          <a:lstStyle/>
+          <a:p>
+            <a:r>
+              <a:rPr sz="1150" b="0">
                 <a:solidFill>
                   <a:srgbClr val="5A6068"/>
                 </a:solidFill>
                 <a:latin typeface="Aptos"/>
               </a:rPr>
-              <a:t>I transcribed every opcode’s T-state sequence from the 1972 manual by hand. The spec has to come from the primary source.</a:t>
-            </a:r>
-          </a:p>
-        </p:txBody>
-      </p:sp>
-      <p:sp>
-        <p:nvSpPr>
-          <p:cNvPr id="11" name="Rectangle 10"/>
+              <a:t>Would write </a:t>
+            </a:r>
+            <a:r>
+              <a:rPr sz="1150" b="0">
+                <a:solidFill>
+                  <a:srgbClr val="1F9DD8"/>
+                </a:solidFill>
+                <a:latin typeface="Aptos Mono"/>
+              </a:rPr>
+              <a:t>rising_edge(phi1)</a:t>
+            </a:r>
+            <a:r>
+              <a:rPr sz="1150" b="0">
+                <a:solidFill>
+                  <a:srgbClr val="5A6068"/>
+                </a:solidFill>
+                <a:latin typeface="Aptos"/>
+              </a:rPr>
+              <a:t> without hesitation. Valid VHDL. Simulates perfectly.</a:t>
+            </a:r>
+          </a:p>
+        </p:txBody>
+      </p:sp>
+      <p:sp>
+        <p:nvSpPr>
+          <p:cNvPr id="16" name="TextBox 15"/>
+          <p:cNvSpPr txBox="1"/>
+          <p:nvPr/>
+        </p:nvSpPr>
+        <p:spPr>
+          <a:xfrm>
+            <a:off x="7086600" y="2852928"/>
+            <a:ext cx="4526280" cy="731520"/>
+          </a:xfrm>
+          <a:prstGeom prst="rect">
+            <a:avLst/>
+          </a:prstGeom>
+          <a:noFill/>
+        </p:spPr>
+        <p:txBody>
+          <a:bodyPr wrap="square">
+            <a:spAutoFit/>
+          </a:bodyPr>
+          <a:lstStyle/>
+          <a:p>
+            <a:r>
+              <a:rPr sz="1150" b="0">
+                <a:solidFill>
+                  <a:srgbClr val="333333"/>
+                </a:solidFill>
+                <a:latin typeface="Aptos"/>
+              </a:rPr>
+              <a:t>That it creates a clock domain the timing engine cannot analyze. Learned from a design that would not close.</a:t>
+            </a:r>
+          </a:p>
+        </p:txBody>
+      </p:sp>
+      <p:sp>
+        <p:nvSpPr>
+          <p:cNvPr id="17" name="Rectangle 16"/>
           <p:cNvSpPr/>
           <p:nvPr/>
         </p:nvSpPr>
         <p:spPr>
           <a:xfrm>
-            <a:off x="548640" y="3182112"/>
-            <a:ext cx="11064240" cy="694944"/>
+            <a:off x="548640" y="3602736"/>
+            <a:ext cx="11064240" cy="749808"/>
           </a:xfrm>
           <a:prstGeom prst="rect">
             <a:avLst/>
@@ -25094,14 +24748,14 @@
       </p:sp>
       <p:sp>
         <p:nvSpPr>
-          <p:cNvPr id="12" name="Rectangle 11"/>
+          <p:cNvPr id="18" name="Rectangle 17"/>
           <p:cNvSpPr/>
           <p:nvPr/>
         </p:nvSpPr>
         <p:spPr>
           <a:xfrm>
-            <a:off x="548640" y="3182112"/>
-            <a:ext cx="82296" cy="694944"/>
+            <a:off x="548640" y="3602736"/>
+            <a:ext cx="82296" cy="749808"/>
           </a:xfrm>
           <a:prstGeom prst="rect">
             <a:avLst/>
@@ -25138,14 +24792,14 @@
       </p:sp>
       <p:sp>
         <p:nvSpPr>
-          <p:cNvPr id="13" name="TextBox 12"/>
+          <p:cNvPr id="19" name="TextBox 18"/>
           <p:cNvSpPr txBox="1"/>
           <p:nvPr/>
         </p:nvSpPr>
         <p:spPr>
           <a:xfrm>
-            <a:off x="822960" y="3172968"/>
-            <a:ext cx="10607040" cy="713232"/>
+            <a:off x="777240" y="3749039"/>
+            <a:ext cx="1828800" cy="548640"/>
           </a:xfrm>
           <a:prstGeom prst="rect">
             <a:avLst/>
@@ -25159,38 +24813,113 @@
           <a:lstStyle/>
           <a:p>
             <a:r>
-              <a:rPr sz="1550" b="1">
+              <a:rPr sz="1350" b="1">
                 <a:solidFill>
                   <a:srgbClr val="333333"/>
                 </a:solidFill>
                 <a:latin typeface="Aptos"/>
               </a:rPr>
-              <a:t>Derive the architecture yourself.</a:t>
-            </a:r>
-          </a:p>
-          <a:p>
-            <a:r>
-              <a:rPr sz="1200" b="0">
+              <a:t>The 0xFF bug</a:t>
+            </a:r>
+          </a:p>
+        </p:txBody>
+      </p:sp>
+      <p:sp>
+        <p:nvSpPr>
+          <p:cNvPr id="20" name="TextBox 19"/>
+          <p:cNvSpPr txBox="1"/>
+          <p:nvPr/>
+        </p:nvSpPr>
+        <p:spPr>
+          <a:xfrm>
+            <a:off x="2697480" y="3657600"/>
+            <a:ext cx="4206240" cy="731520"/>
+          </a:xfrm>
+          <a:prstGeom prst="rect">
+            <a:avLst/>
+          </a:prstGeom>
+          <a:noFill/>
+        </p:spPr>
+        <p:txBody>
+          <a:bodyPr wrap="square">
+            <a:spAutoFit/>
+          </a:bodyPr>
+          <a:lstStyle/>
+          <a:p>
+            <a:r>
+              <a:rPr sz="1150" b="0">
                 <a:solidFill>
                   <a:srgbClr val="5A6068"/>
                 </a:solidFill>
                 <a:latin typeface="Aptos"/>
               </a:rPr>
-              <a:t>Its corpus had only emulators. The block-based design came from the datasheet — and it is the thing that made version three work.</a:t>
-            </a:r>
-          </a:p>
-        </p:txBody>
-      </p:sp>
-      <p:sp>
-        <p:nvSpPr>
-          <p:cNvPr id="14" name="Rectangle 13"/>
+              <a:t>Nothing. It </a:t>
+            </a:r>
+            <a:r>
+              <a:rPr sz="1150" b="1">
+                <a:solidFill>
+                  <a:srgbClr val="5A6068"/>
+                </a:solidFill>
+                <a:latin typeface="Aptos"/>
+              </a:rPr>
+              <a:t>could not</a:t>
+            </a:r>
+            <a:r>
+              <a:rPr sz="1150" b="0">
+                <a:solidFill>
+                  <a:srgbClr val="5A6068"/>
+                </a:solidFill>
+                <a:latin typeface="Aptos"/>
+              </a:rPr>
+              <a:t> — the bug lives below the RTL, inside the synthesizer.</a:t>
+            </a:r>
+          </a:p>
+        </p:txBody>
+      </p:sp>
+      <p:sp>
+        <p:nvSpPr>
+          <p:cNvPr id="21" name="TextBox 20"/>
+          <p:cNvSpPr txBox="1"/>
+          <p:nvPr/>
+        </p:nvSpPr>
+        <p:spPr>
+          <a:xfrm>
+            <a:off x="7086600" y="3657600"/>
+            <a:ext cx="4526280" cy="731520"/>
+          </a:xfrm>
+          <a:prstGeom prst="rect">
+            <a:avLst/>
+          </a:prstGeom>
+          <a:noFill/>
+        </p:spPr>
+        <p:txBody>
+          <a:bodyPr wrap="square">
+            <a:spAutoFit/>
+          </a:bodyPr>
+          <a:lstStyle/>
+          <a:p>
+            <a:r>
+              <a:rPr sz="1150" b="0">
+                <a:solidFill>
+                  <a:srgbClr val="333333"/>
+                </a:solidFill>
+                <a:latin typeface="Aptos"/>
+              </a:rPr>
+              <a:t>Three days of bisection. And that when simulation and silicon disagree, the toolchain itself is a suspect.</a:t>
+            </a:r>
+          </a:p>
+        </p:txBody>
+      </p:sp>
+      <p:sp>
+        <p:nvSpPr>
+          <p:cNvPr id="22" name="Rectangle 21"/>
           <p:cNvSpPr/>
           <p:nvPr/>
         </p:nvSpPr>
         <p:spPr>
           <a:xfrm>
-            <a:off x="548640" y="3941063"/>
-            <a:ext cx="11064240" cy="694944"/>
+            <a:off x="548640" y="4407408"/>
+            <a:ext cx="11064240" cy="749808"/>
           </a:xfrm>
           <a:prstGeom prst="rect">
             <a:avLst/>
@@ -25229,14 +24958,14 @@
       </p:sp>
       <p:sp>
         <p:nvSpPr>
-          <p:cNvPr id="15" name="Rectangle 14"/>
+          <p:cNvPr id="23" name="Rectangle 22"/>
           <p:cNvSpPr/>
           <p:nvPr/>
         </p:nvSpPr>
         <p:spPr>
           <a:xfrm>
-            <a:off x="548640" y="3941063"/>
-            <a:ext cx="82296" cy="694944"/>
+            <a:off x="548640" y="4407408"/>
+            <a:ext cx="82296" cy="749808"/>
           </a:xfrm>
           <a:prstGeom prst="rect">
             <a:avLst/>
@@ -25273,14 +25002,14 @@
       </p:sp>
       <p:sp>
         <p:nvSpPr>
-          <p:cNvPr id="16" name="TextBox 15"/>
+          <p:cNvPr id="24" name="TextBox 23"/>
           <p:cNvSpPr txBox="1"/>
           <p:nvPr/>
         </p:nvSpPr>
         <p:spPr>
           <a:xfrm>
-            <a:off x="822960" y="3931920"/>
-            <a:ext cx="10607040" cy="713232"/>
+            <a:off x="777240" y="4553712"/>
+            <a:ext cx="1828800" cy="548640"/>
           </a:xfrm>
           <a:prstGeom prst="rect">
             <a:avLst/>
@@ -25294,38 +25023,104 @@
           <a:lstStyle/>
           <a:p>
             <a:r>
-              <a:rPr sz="1550" b="1">
+              <a:rPr sz="1350" b="1">
                 <a:solidFill>
                   <a:srgbClr val="333333"/>
                 </a:solidFill>
                 <a:latin typeface="Aptos"/>
               </a:rPr>
-              <a:t>Keep modules small enough to fully review.</a:t>
-            </a:r>
-          </a:p>
-          <a:p>
-            <a:r>
-              <a:rPr sz="1200" b="0">
+              <a:t>The architecture</a:t>
+            </a:r>
+          </a:p>
+        </p:txBody>
+      </p:sp>
+      <p:sp>
+        <p:nvSpPr>
+          <p:cNvPr id="25" name="TextBox 24"/>
+          <p:cNvSpPr txBox="1"/>
+          <p:nvPr/>
+        </p:nvSpPr>
+        <p:spPr>
+          <a:xfrm>
+            <a:off x="2697480" y="4462272"/>
+            <a:ext cx="4206240" cy="731520"/>
+          </a:xfrm>
+          <a:prstGeom prst="rect">
+            <a:avLst/>
+          </a:prstGeom>
+          <a:noFill/>
+        </p:spPr>
+        <p:txBody>
+          <a:bodyPr wrap="square">
+            <a:spAutoFit/>
+          </a:bodyPr>
+          <a:lstStyle/>
+          <a:p>
+            <a:r>
+              <a:rPr sz="1150" b="0">
                 <a:solidFill>
                   <a:srgbClr val="5A6068"/>
                 </a:solidFill>
                 <a:latin typeface="Aptos"/>
               </a:rPr>
-              <a:t>50 to 100 lines, one job. Small enough for me to check, and small enough for it to get right.</a:t>
-            </a:r>
-          </a:p>
-        </p:txBody>
-      </p:sp>
-      <p:sp>
-        <p:nvSpPr>
-          <p:cNvPr id="17" name="Rectangle 16"/>
+              <a:t>Pulled toward an instruction-set simulator every time, because that is all its corpus contained.</a:t>
+            </a:r>
+          </a:p>
+        </p:txBody>
+      </p:sp>
+      <p:sp>
+        <p:nvSpPr>
+          <p:cNvPr id="26" name="TextBox 25"/>
+          <p:cNvSpPr txBox="1"/>
+          <p:nvPr/>
+        </p:nvSpPr>
+        <p:spPr>
+          <a:xfrm>
+            <a:off x="7086600" y="4462272"/>
+            <a:ext cx="4526280" cy="731520"/>
+          </a:xfrm>
+          <a:prstGeom prst="rect">
+            <a:avLst/>
+          </a:prstGeom>
+          <a:noFill/>
+        </p:spPr>
+        <p:txBody>
+          <a:bodyPr wrap="square">
+            <a:spAutoFit/>
+          </a:bodyPr>
+          <a:lstStyle/>
+          <a:p>
+            <a:r>
+              <a:rPr sz="1150" b="1">
+                <a:solidFill>
+                  <a:srgbClr val="333333"/>
+                </a:solidFill>
+                <a:latin typeface="Aptos"/>
+              </a:rPr>
+              <a:t>The block diagram, from the 1972 datasheet.</a:t>
+            </a:r>
+            <a:r>
+              <a:rPr sz="1150" b="0">
+                <a:solidFill>
+                  <a:srgbClr val="333333"/>
+                </a:solidFill>
+                <a:latin typeface="Aptos"/>
+              </a:rPr>
+              <a:t> This is the one that mattered — and the one thing no model could have handed me.</a:t>
+            </a:r>
+          </a:p>
+        </p:txBody>
+      </p:sp>
+      <p:sp>
+        <p:nvSpPr>
+          <p:cNvPr id="27" name="Rectangle 26"/>
           <p:cNvSpPr/>
           <p:nvPr/>
         </p:nvSpPr>
         <p:spPr>
           <a:xfrm>
-            <a:off x="548640" y="4700016"/>
-            <a:ext cx="11064240" cy="694944"/>
+            <a:off x="548640" y="5212080"/>
+            <a:ext cx="11064240" cy="749808"/>
           </a:xfrm>
           <a:prstGeom prst="rect">
             <a:avLst/>
@@ -25364,14 +25159,14 @@
       </p:sp>
       <p:sp>
         <p:nvSpPr>
-          <p:cNvPr id="18" name="Rectangle 17"/>
+          <p:cNvPr id="28" name="Rectangle 27"/>
           <p:cNvSpPr/>
           <p:nvPr/>
         </p:nvSpPr>
         <p:spPr>
           <a:xfrm>
-            <a:off x="548640" y="4700016"/>
-            <a:ext cx="82296" cy="694944"/>
+            <a:off x="548640" y="5212080"/>
+            <a:ext cx="82296" cy="749808"/>
           </a:xfrm>
           <a:prstGeom prst="rect">
             <a:avLst/>
@@ -25408,14 +25203,14 @@
       </p:sp>
       <p:sp>
         <p:nvSpPr>
-          <p:cNvPr id="19" name="TextBox 18"/>
+          <p:cNvPr id="29" name="TextBox 28"/>
           <p:cNvSpPr txBox="1"/>
           <p:nvPr/>
         </p:nvSpPr>
         <p:spPr>
           <a:xfrm>
-            <a:off x="822960" y="4690872"/>
-            <a:ext cx="10607040" cy="713232"/>
+            <a:off x="777240" y="5358384"/>
+            <a:ext cx="1828800" cy="548640"/>
           </a:xfrm>
           <a:prstGeom prst="rect">
             <a:avLst/>
@@ -25429,55 +25224,302 @@
           <a:lstStyle/>
           <a:p>
             <a:r>
-              <a:rPr sz="1550" b="1">
+              <a:rPr sz="1350" b="1">
                 <a:solidFill>
                   <a:srgbClr val="333333"/>
                 </a:solidFill>
                 <a:latin typeface="Aptos"/>
               </a:rPr>
-              <a:t>Let it draft. You reject.</a:t>
-            </a:r>
-          </a:p>
-          <a:p>
-            <a:r>
-              <a:rPr sz="1200" b="0">
+              <a:t>Verification</a:t>
+            </a:r>
+          </a:p>
+        </p:txBody>
+      </p:sp>
+      <p:sp>
+        <p:nvSpPr>
+          <p:cNvPr id="30" name="TextBox 29"/>
+          <p:cNvSpPr txBox="1"/>
+          <p:nvPr/>
+        </p:nvSpPr>
+        <p:spPr>
+          <a:xfrm>
+            <a:off x="2697480" y="5266944"/>
+            <a:ext cx="4206240" cy="731520"/>
+          </a:xfrm>
+          <a:prstGeom prst="rect">
+            <a:avLst/>
+          </a:prstGeom>
+          <a:noFill/>
+        </p:spPr>
+        <p:txBody>
+          <a:bodyPr wrap="square">
+            <a:spAutoFit/>
+          </a:bodyPr>
+          <a:lstStyle/>
+          <a:p>
+            <a:r>
+              <a:rPr sz="1150" b="0">
                 <a:solidFill>
                   <a:srgbClr val="5A6068"/>
                 </a:solidFill>
                 <a:latin typeface="Aptos"/>
               </a:rPr>
-              <a:t>It made two complete rewrites </a:t>
-            </a:r>
+              <a:t>Wrote much of the testbenches — the boring scaffolding, tirelessly.</a:t>
+            </a:r>
+          </a:p>
+        </p:txBody>
+      </p:sp>
+      <p:sp>
+        <p:nvSpPr>
+          <p:cNvPr id="31" name="TextBox 30"/>
+          <p:cNvSpPr txBox="1"/>
+          <p:nvPr/>
+        </p:nvSpPr>
+        <p:spPr>
+          <a:xfrm>
+            <a:off x="7086600" y="5266944"/>
+            <a:ext cx="4526280" cy="731520"/>
+          </a:xfrm>
+          <a:prstGeom prst="rect">
+            <a:avLst/>
+          </a:prstGeom>
+          <a:noFill/>
+        </p:spPr>
+        <p:txBody>
+          <a:bodyPr wrap="square">
+            <a:spAutoFit/>
+          </a:bodyPr>
+          <a:lstStyle/>
+          <a:p>
+            <a:r>
+              <a:rPr sz="1150" b="0">
+                <a:solidFill>
+                  <a:srgbClr val="1F9DD8"/>
+                </a:solidFill>
+                <a:latin typeface="Aptos Mono"/>
+              </a:rPr>
+              <a:t>isa.json</a:t>
+            </a:r>
+            <a:r>
+              <a:rPr sz="1150" b="0">
+                <a:solidFill>
+                  <a:srgbClr val="333333"/>
+                </a:solidFill>
+                <a:latin typeface="Aptos"/>
+              </a:rPr>
+              <a:t>, transcribed by hand from the datasheet. The spec has to come from the source, not the model — otherwise you are grading its homework with its own answer key.</a:t>
+            </a:r>
+          </a:p>
+        </p:txBody>
+      </p:sp>
+      <p:sp>
+        <p:nvSpPr>
+          <p:cNvPr id="32" name="Rectangle 31"/>
+          <p:cNvSpPr/>
+          <p:nvPr/>
+        </p:nvSpPr>
+        <p:spPr>
+          <a:xfrm>
+            <a:off x="548640" y="6062472"/>
+            <a:ext cx="11064240" cy="640080"/>
+          </a:xfrm>
+          <a:prstGeom prst="rect">
+            <a:avLst/>
+          </a:prstGeom>
+          <a:solidFill>
+            <a:srgbClr val="333333"/>
+          </a:solidFill>
+          <a:ln>
+            <a:noFill/>
+          </a:ln>
+          <a:effectLst/>
+        </p:spPr>
+        <p:style>
+          <a:lnRef idx="1">
+            <a:schemeClr val="accent1"/>
+          </a:lnRef>
+          <a:fillRef idx="3">
+            <a:schemeClr val="accent1"/>
+          </a:fillRef>
+          <a:effectRef idx="2">
+            <a:schemeClr val="accent1"/>
+          </a:effectRef>
+          <a:fontRef idx="minor">
+            <a:schemeClr val="lt1"/>
+          </a:fontRef>
+        </p:style>
+        <p:txBody>
+          <a:bodyPr rtlCol="0" anchor="ctr" wrap="square"/>
+          <a:lstStyle/>
+          <a:p>
+            <a:pPr algn="ctr"/>
+            <a:r>
+              <a:rPr sz="1800" b="0">
+                <a:solidFill>
+                  <a:srgbClr val="F2F2F2"/>
+                </a:solidFill>
+                <a:latin typeface="Aptos"/>
+              </a:rPr>
+              <a:t>Version three worked because by then I had learned </a:t>
+            </a:r>
+            <a:r>
+              <a:rPr sz="1800" b="1">
+                <a:solidFill>
+                  <a:srgbClr val="F2F2F2"/>
+                </a:solidFill>
+                <a:latin typeface="Aptos"/>
+              </a:rPr>
+              <a:t>the right-hand column.</a:t>
+            </a:r>
+          </a:p>
+        </p:txBody>
+      </p:sp>
+    </p:spTree>
+  </p:cSld>
+  <p:clrMapOvr>
+    <a:masterClrMapping/>
+  </p:clrMapOvr>
+</p:sld>
+</file>
+
+<file path=ppt/slides/slide32.xml><?xml version="1.0" encoding="utf-8"?>
+<p:sld xmlns:a="http://schemas.openxmlformats.org/drawingml/2006/main" xmlns:p="http://schemas.openxmlformats.org/presentationml/2006/main" xmlns:r="http://schemas.openxmlformats.org/officeDocument/2006/relationships">
+  <p:cSld>
+    <p:bg>
+      <p:bgPr>
+        <a:solidFill>
+          <a:srgbClr val="F7F8FA"/>
+        </a:solidFill>
+        <a:effectLst/>
+      </p:bgPr>
+    </p:bg>
+    <p:spTree>
+      <p:nvGrpSpPr>
+        <p:cNvPr id="1" name=""/>
+        <p:cNvGrpSpPr/>
+        <p:nvPr/>
+      </p:nvGrpSpPr>
+      <p:grpSpPr/>
+      <p:sp>
+        <p:nvSpPr>
+          <p:cNvPr id="2" name="TextBox 1"/>
+          <p:cNvSpPr txBox="1"/>
+          <p:nvPr/>
+        </p:nvSpPr>
+        <p:spPr>
+          <a:xfrm>
+            <a:off x="502920" y="292608"/>
+            <a:ext cx="7315200" cy="320040"/>
+          </a:xfrm>
+          <a:prstGeom prst="rect">
+            <a:avLst/>
+          </a:prstGeom>
+          <a:noFill/>
+        </p:spPr>
+        <p:txBody>
+          <a:bodyPr wrap="square">
+            <a:spAutoFit/>
+          </a:bodyPr>
+          <a:lstStyle/>
+          <a:p>
             <a:r>
               <a:rPr sz="1200" b="1">
                 <a:solidFill>
-                  <a:srgbClr val="5A6068"/>
-                </a:solidFill>
-                <a:latin typeface="Aptos"/>
-              </a:rPr>
-              <a:t>affordable</a:t>
-            </a:r>
-            <a:r>
-              <a:rPr sz="1200" b="0">
-                <a:solidFill>
-                  <a:srgbClr val="5A6068"/>
-                </a:solidFill>
-                <a:latin typeface="Aptos"/>
-              </a:rPr>
-              <a:t> — without that I would have shipped version one’s architecture and lived with it.</a:t>
-            </a:r>
-          </a:p>
-        </p:txBody>
-      </p:sp>
-      <p:sp>
-        <p:nvSpPr>
-          <p:cNvPr id="20" name="Rectangle 19"/>
+                  <a:srgbClr val="3B3F44"/>
+                </a:solidFill>
+                <a:latin typeface="Aptos"/>
+              </a:rPr>
+              <a:t>CLOSE</a:t>
+            </a:r>
+          </a:p>
+        </p:txBody>
+      </p:sp>
+      <p:sp>
+        <p:nvSpPr>
+          <p:cNvPr id="3" name="TextBox 2"/>
+          <p:cNvSpPr txBox="1"/>
+          <p:nvPr/>
+        </p:nvSpPr>
+        <p:spPr>
+          <a:xfrm>
+            <a:off x="502920" y="566928"/>
+            <a:ext cx="11155680" cy="914400"/>
+          </a:xfrm>
+          <a:prstGeom prst="rect">
+            <a:avLst/>
+          </a:prstGeom>
+          <a:noFill/>
+        </p:spPr>
+        <p:txBody>
+          <a:bodyPr wrap="square">
+            <a:spAutoFit/>
+          </a:bodyPr>
+          <a:lstStyle/>
+          <a:p>
+            <a:r>
+              <a:rPr sz="3200" b="1">
+                <a:solidFill>
+                  <a:srgbClr val="333333"/>
+                </a:solidFill>
+                <a:latin typeface="Aptos"/>
+              </a:rPr>
+              <a:t>What I’d tell you about learning this way</a:t>
+            </a:r>
+          </a:p>
+        </p:txBody>
+      </p:sp>
+      <p:sp>
+        <p:nvSpPr>
+          <p:cNvPr id="4" name="Rectangle 3"/>
           <p:cNvSpPr/>
           <p:nvPr/>
         </p:nvSpPr>
         <p:spPr>
           <a:xfrm>
-            <a:off x="548640" y="5458968"/>
+            <a:off x="548640" y="1280160"/>
+            <a:ext cx="1463040" cy="50800"/>
+          </a:xfrm>
+          <a:prstGeom prst="rect">
+            <a:avLst/>
+          </a:prstGeom>
+          <a:solidFill>
+            <a:srgbClr val="FFC220"/>
+          </a:solidFill>
+          <a:ln>
+            <a:noFill/>
+          </a:ln>
+        </p:spPr>
+        <p:style>
+          <a:lnRef idx="1">
+            <a:schemeClr val="accent1"/>
+          </a:lnRef>
+          <a:fillRef idx="3">
+            <a:schemeClr val="accent1"/>
+          </a:fillRef>
+          <a:effectRef idx="2">
+            <a:schemeClr val="accent1"/>
+          </a:effectRef>
+          <a:fontRef idx="minor">
+            <a:schemeClr val="lt1"/>
+          </a:fontRef>
+        </p:style>
+        <p:txBody>
+          <a:bodyPr rtlCol="0" anchor="ctr"/>
+          <a:lstStyle/>
+          <a:p>
+            <a:pPr algn="ctr"/>
+          </a:p>
+        </p:txBody>
+      </p:sp>
+      <p:sp>
+        <p:nvSpPr>
+          <p:cNvPr id="5" name="Rectangle 4"/>
+          <p:cNvSpPr/>
+          <p:nvPr/>
+        </p:nvSpPr>
+        <p:spPr>
+          <a:xfrm>
+            <a:off x="548640" y="1664208"/>
             <a:ext cx="11064240" cy="694944"/>
           </a:xfrm>
           <a:prstGeom prst="rect">
@@ -25517,6 +25559,699 @@
       </p:sp>
       <p:sp>
         <p:nvSpPr>
+          <p:cNvPr id="6" name="Rectangle 5"/>
+          <p:cNvSpPr/>
+          <p:nvPr/>
+        </p:nvSpPr>
+        <p:spPr>
+          <a:xfrm>
+            <a:off x="548640" y="1664208"/>
+            <a:ext cx="82296" cy="694944"/>
+          </a:xfrm>
+          <a:prstGeom prst="rect">
+            <a:avLst/>
+          </a:prstGeom>
+          <a:solidFill>
+            <a:srgbClr val="FFC220"/>
+          </a:solidFill>
+          <a:ln>
+            <a:noFill/>
+          </a:ln>
+          <a:effectLst/>
+        </p:spPr>
+        <p:style>
+          <a:lnRef idx="1">
+            <a:schemeClr val="accent1"/>
+          </a:lnRef>
+          <a:fillRef idx="3">
+            <a:schemeClr val="accent1"/>
+          </a:fillRef>
+          <a:effectRef idx="2">
+            <a:schemeClr val="accent1"/>
+          </a:effectRef>
+          <a:fontRef idx="minor">
+            <a:schemeClr val="lt1"/>
+          </a:fontRef>
+        </p:style>
+        <p:txBody>
+          <a:bodyPr rtlCol="0" anchor="ctr"/>
+          <a:lstStyle/>
+          <a:p>
+            <a:pPr algn="ctr"/>
+          </a:p>
+        </p:txBody>
+      </p:sp>
+      <p:sp>
+        <p:nvSpPr>
+          <p:cNvPr id="7" name="TextBox 6"/>
+          <p:cNvSpPr txBox="1"/>
+          <p:nvPr/>
+        </p:nvSpPr>
+        <p:spPr>
+          <a:xfrm>
+            <a:off x="822960" y="1655064"/>
+            <a:ext cx="10607040" cy="713232"/>
+          </a:xfrm>
+          <a:prstGeom prst="rect">
+            <a:avLst/>
+          </a:prstGeom>
+          <a:noFill/>
+        </p:spPr>
+        <p:txBody>
+          <a:bodyPr wrap="square">
+            <a:spAutoFit/>
+          </a:bodyPr>
+          <a:lstStyle/>
+          <a:p>
+            <a:r>
+              <a:rPr sz="1550" b="1">
+                <a:solidFill>
+                  <a:srgbClr val="333333"/>
+                </a:solidFill>
+                <a:latin typeface="Aptos"/>
+              </a:rPr>
+              <a:t>Read the book first.</a:t>
+            </a:r>
+          </a:p>
+          <a:p>
+            <a:r>
+              <a:rPr sz="1200" b="0">
+                <a:solidFill>
+                  <a:srgbClr val="5A6068"/>
+                </a:solidFill>
+                <a:latin typeface="Aptos"/>
+              </a:rPr>
+              <a:t>Foundations are not delegable. An AI will explain a LUT perfectly and leave you unable to check its work.</a:t>
+            </a:r>
+          </a:p>
+        </p:txBody>
+      </p:sp>
+      <p:sp>
+        <p:nvSpPr>
+          <p:cNvPr id="8" name="Rectangle 7"/>
+          <p:cNvSpPr/>
+          <p:nvPr/>
+        </p:nvSpPr>
+        <p:spPr>
+          <a:xfrm>
+            <a:off x="548640" y="2423160"/>
+            <a:ext cx="11064240" cy="694944"/>
+          </a:xfrm>
+          <a:prstGeom prst="rect">
+            <a:avLst/>
+          </a:prstGeom>
+          <a:solidFill>
+            <a:srgbClr val="FFFFFF"/>
+          </a:solidFill>
+          <a:ln w="12700">
+            <a:solidFill>
+              <a:srgbClr val="D9DDE3"/>
+            </a:solidFill>
+          </a:ln>
+          <a:effectLst/>
+        </p:spPr>
+        <p:style>
+          <a:lnRef idx="1">
+            <a:schemeClr val="accent1"/>
+          </a:lnRef>
+          <a:fillRef idx="3">
+            <a:schemeClr val="accent1"/>
+          </a:fillRef>
+          <a:effectRef idx="2">
+            <a:schemeClr val="accent1"/>
+          </a:effectRef>
+          <a:fontRef idx="minor">
+            <a:schemeClr val="lt1"/>
+          </a:fontRef>
+        </p:style>
+        <p:txBody>
+          <a:bodyPr rtlCol="0" anchor="ctr"/>
+          <a:lstStyle/>
+          <a:p>
+            <a:pPr algn="ctr"/>
+          </a:p>
+        </p:txBody>
+      </p:sp>
+      <p:sp>
+        <p:nvSpPr>
+          <p:cNvPr id="9" name="Rectangle 8"/>
+          <p:cNvSpPr/>
+          <p:nvPr/>
+        </p:nvSpPr>
+        <p:spPr>
+          <a:xfrm>
+            <a:off x="548640" y="2423160"/>
+            <a:ext cx="82296" cy="694944"/>
+          </a:xfrm>
+          <a:prstGeom prst="rect">
+            <a:avLst/>
+          </a:prstGeom>
+          <a:solidFill>
+            <a:srgbClr val="FFC220"/>
+          </a:solidFill>
+          <a:ln>
+            <a:noFill/>
+          </a:ln>
+          <a:effectLst/>
+        </p:spPr>
+        <p:style>
+          <a:lnRef idx="1">
+            <a:schemeClr val="accent1"/>
+          </a:lnRef>
+          <a:fillRef idx="3">
+            <a:schemeClr val="accent1"/>
+          </a:fillRef>
+          <a:effectRef idx="2">
+            <a:schemeClr val="accent1"/>
+          </a:effectRef>
+          <a:fontRef idx="minor">
+            <a:schemeClr val="lt1"/>
+          </a:fontRef>
+        </p:style>
+        <p:txBody>
+          <a:bodyPr rtlCol="0" anchor="ctr"/>
+          <a:lstStyle/>
+          <a:p>
+            <a:pPr algn="ctr"/>
+          </a:p>
+        </p:txBody>
+      </p:sp>
+      <p:sp>
+        <p:nvSpPr>
+          <p:cNvPr id="10" name="TextBox 9"/>
+          <p:cNvSpPr txBox="1"/>
+          <p:nvPr/>
+        </p:nvSpPr>
+        <p:spPr>
+          <a:xfrm>
+            <a:off x="822960" y="2414016"/>
+            <a:ext cx="10607040" cy="713232"/>
+          </a:xfrm>
+          <a:prstGeom prst="rect">
+            <a:avLst/>
+          </a:prstGeom>
+          <a:noFill/>
+        </p:spPr>
+        <p:txBody>
+          <a:bodyPr wrap="square">
+            <a:spAutoFit/>
+          </a:bodyPr>
+          <a:lstStyle/>
+          <a:p>
+            <a:r>
+              <a:rPr sz="1550" b="1">
+                <a:solidFill>
+                  <a:srgbClr val="333333"/>
+                </a:solidFill>
+                <a:latin typeface="Aptos"/>
+              </a:rPr>
+              <a:t>Own the specification.</a:t>
+            </a:r>
+          </a:p>
+          <a:p>
+            <a:r>
+              <a:rPr sz="1200" b="0">
+                <a:solidFill>
+                  <a:srgbClr val="5A6068"/>
+                </a:solidFill>
+                <a:latin typeface="Aptos"/>
+              </a:rPr>
+              <a:t>I transcribed every opcode’s T-state sequence from the 1972 manual by hand. The spec has to come from the primary source.</a:t>
+            </a:r>
+          </a:p>
+        </p:txBody>
+      </p:sp>
+      <p:sp>
+        <p:nvSpPr>
+          <p:cNvPr id="11" name="Rectangle 10"/>
+          <p:cNvSpPr/>
+          <p:nvPr/>
+        </p:nvSpPr>
+        <p:spPr>
+          <a:xfrm>
+            <a:off x="548640" y="3182112"/>
+            <a:ext cx="11064240" cy="694944"/>
+          </a:xfrm>
+          <a:prstGeom prst="rect">
+            <a:avLst/>
+          </a:prstGeom>
+          <a:solidFill>
+            <a:srgbClr val="FFFFFF"/>
+          </a:solidFill>
+          <a:ln w="12700">
+            <a:solidFill>
+              <a:srgbClr val="D9DDE3"/>
+            </a:solidFill>
+          </a:ln>
+          <a:effectLst/>
+        </p:spPr>
+        <p:style>
+          <a:lnRef idx="1">
+            <a:schemeClr val="accent1"/>
+          </a:lnRef>
+          <a:fillRef idx="3">
+            <a:schemeClr val="accent1"/>
+          </a:fillRef>
+          <a:effectRef idx="2">
+            <a:schemeClr val="accent1"/>
+          </a:effectRef>
+          <a:fontRef idx="minor">
+            <a:schemeClr val="lt1"/>
+          </a:fontRef>
+        </p:style>
+        <p:txBody>
+          <a:bodyPr rtlCol="0" anchor="ctr"/>
+          <a:lstStyle/>
+          <a:p>
+            <a:pPr algn="ctr"/>
+          </a:p>
+        </p:txBody>
+      </p:sp>
+      <p:sp>
+        <p:nvSpPr>
+          <p:cNvPr id="12" name="Rectangle 11"/>
+          <p:cNvSpPr/>
+          <p:nvPr/>
+        </p:nvSpPr>
+        <p:spPr>
+          <a:xfrm>
+            <a:off x="548640" y="3182112"/>
+            <a:ext cx="82296" cy="694944"/>
+          </a:xfrm>
+          <a:prstGeom prst="rect">
+            <a:avLst/>
+          </a:prstGeom>
+          <a:solidFill>
+            <a:srgbClr val="FFC220"/>
+          </a:solidFill>
+          <a:ln>
+            <a:noFill/>
+          </a:ln>
+          <a:effectLst/>
+        </p:spPr>
+        <p:style>
+          <a:lnRef idx="1">
+            <a:schemeClr val="accent1"/>
+          </a:lnRef>
+          <a:fillRef idx="3">
+            <a:schemeClr val="accent1"/>
+          </a:fillRef>
+          <a:effectRef idx="2">
+            <a:schemeClr val="accent1"/>
+          </a:effectRef>
+          <a:fontRef idx="minor">
+            <a:schemeClr val="lt1"/>
+          </a:fontRef>
+        </p:style>
+        <p:txBody>
+          <a:bodyPr rtlCol="0" anchor="ctr"/>
+          <a:lstStyle/>
+          <a:p>
+            <a:pPr algn="ctr"/>
+          </a:p>
+        </p:txBody>
+      </p:sp>
+      <p:sp>
+        <p:nvSpPr>
+          <p:cNvPr id="13" name="TextBox 12"/>
+          <p:cNvSpPr txBox="1"/>
+          <p:nvPr/>
+        </p:nvSpPr>
+        <p:spPr>
+          <a:xfrm>
+            <a:off x="822960" y="3172968"/>
+            <a:ext cx="10607040" cy="713232"/>
+          </a:xfrm>
+          <a:prstGeom prst="rect">
+            <a:avLst/>
+          </a:prstGeom>
+          <a:noFill/>
+        </p:spPr>
+        <p:txBody>
+          <a:bodyPr wrap="square">
+            <a:spAutoFit/>
+          </a:bodyPr>
+          <a:lstStyle/>
+          <a:p>
+            <a:r>
+              <a:rPr sz="1550" b="1">
+                <a:solidFill>
+                  <a:srgbClr val="333333"/>
+                </a:solidFill>
+                <a:latin typeface="Aptos"/>
+              </a:rPr>
+              <a:t>Derive the architecture yourself.</a:t>
+            </a:r>
+          </a:p>
+          <a:p>
+            <a:r>
+              <a:rPr sz="1200" b="0">
+                <a:solidFill>
+                  <a:srgbClr val="5A6068"/>
+                </a:solidFill>
+                <a:latin typeface="Aptos"/>
+              </a:rPr>
+              <a:t>Its corpus had only emulators. The block-based design came from the datasheet — and it is the thing that made version three work.</a:t>
+            </a:r>
+          </a:p>
+        </p:txBody>
+      </p:sp>
+      <p:sp>
+        <p:nvSpPr>
+          <p:cNvPr id="14" name="Rectangle 13"/>
+          <p:cNvSpPr/>
+          <p:nvPr/>
+        </p:nvSpPr>
+        <p:spPr>
+          <a:xfrm>
+            <a:off x="548640" y="3941063"/>
+            <a:ext cx="11064240" cy="694944"/>
+          </a:xfrm>
+          <a:prstGeom prst="rect">
+            <a:avLst/>
+          </a:prstGeom>
+          <a:solidFill>
+            <a:srgbClr val="FFFFFF"/>
+          </a:solidFill>
+          <a:ln w="12700">
+            <a:solidFill>
+              <a:srgbClr val="D9DDE3"/>
+            </a:solidFill>
+          </a:ln>
+          <a:effectLst/>
+        </p:spPr>
+        <p:style>
+          <a:lnRef idx="1">
+            <a:schemeClr val="accent1"/>
+          </a:lnRef>
+          <a:fillRef idx="3">
+            <a:schemeClr val="accent1"/>
+          </a:fillRef>
+          <a:effectRef idx="2">
+            <a:schemeClr val="accent1"/>
+          </a:effectRef>
+          <a:fontRef idx="minor">
+            <a:schemeClr val="lt1"/>
+          </a:fontRef>
+        </p:style>
+        <p:txBody>
+          <a:bodyPr rtlCol="0" anchor="ctr"/>
+          <a:lstStyle/>
+          <a:p>
+            <a:pPr algn="ctr"/>
+          </a:p>
+        </p:txBody>
+      </p:sp>
+      <p:sp>
+        <p:nvSpPr>
+          <p:cNvPr id="15" name="Rectangle 14"/>
+          <p:cNvSpPr/>
+          <p:nvPr/>
+        </p:nvSpPr>
+        <p:spPr>
+          <a:xfrm>
+            <a:off x="548640" y="3941063"/>
+            <a:ext cx="82296" cy="694944"/>
+          </a:xfrm>
+          <a:prstGeom prst="rect">
+            <a:avLst/>
+          </a:prstGeom>
+          <a:solidFill>
+            <a:srgbClr val="FFC220"/>
+          </a:solidFill>
+          <a:ln>
+            <a:noFill/>
+          </a:ln>
+          <a:effectLst/>
+        </p:spPr>
+        <p:style>
+          <a:lnRef idx="1">
+            <a:schemeClr val="accent1"/>
+          </a:lnRef>
+          <a:fillRef idx="3">
+            <a:schemeClr val="accent1"/>
+          </a:fillRef>
+          <a:effectRef idx="2">
+            <a:schemeClr val="accent1"/>
+          </a:effectRef>
+          <a:fontRef idx="minor">
+            <a:schemeClr val="lt1"/>
+          </a:fontRef>
+        </p:style>
+        <p:txBody>
+          <a:bodyPr rtlCol="0" anchor="ctr"/>
+          <a:lstStyle/>
+          <a:p>
+            <a:pPr algn="ctr"/>
+          </a:p>
+        </p:txBody>
+      </p:sp>
+      <p:sp>
+        <p:nvSpPr>
+          <p:cNvPr id="16" name="TextBox 15"/>
+          <p:cNvSpPr txBox="1"/>
+          <p:nvPr/>
+        </p:nvSpPr>
+        <p:spPr>
+          <a:xfrm>
+            <a:off x="822960" y="3931920"/>
+            <a:ext cx="10607040" cy="713232"/>
+          </a:xfrm>
+          <a:prstGeom prst="rect">
+            <a:avLst/>
+          </a:prstGeom>
+          <a:noFill/>
+        </p:spPr>
+        <p:txBody>
+          <a:bodyPr wrap="square">
+            <a:spAutoFit/>
+          </a:bodyPr>
+          <a:lstStyle/>
+          <a:p>
+            <a:r>
+              <a:rPr sz="1550" b="1">
+                <a:solidFill>
+                  <a:srgbClr val="333333"/>
+                </a:solidFill>
+                <a:latin typeface="Aptos"/>
+              </a:rPr>
+              <a:t>Keep modules small enough to fully review.</a:t>
+            </a:r>
+          </a:p>
+          <a:p>
+            <a:r>
+              <a:rPr sz="1200" b="0">
+                <a:solidFill>
+                  <a:srgbClr val="5A6068"/>
+                </a:solidFill>
+                <a:latin typeface="Aptos"/>
+              </a:rPr>
+              <a:t>50 to 100 lines, one job. Small enough for me to check, and small enough for it to get right.</a:t>
+            </a:r>
+          </a:p>
+        </p:txBody>
+      </p:sp>
+      <p:sp>
+        <p:nvSpPr>
+          <p:cNvPr id="17" name="Rectangle 16"/>
+          <p:cNvSpPr/>
+          <p:nvPr/>
+        </p:nvSpPr>
+        <p:spPr>
+          <a:xfrm>
+            <a:off x="548640" y="4700016"/>
+            <a:ext cx="11064240" cy="694944"/>
+          </a:xfrm>
+          <a:prstGeom prst="rect">
+            <a:avLst/>
+          </a:prstGeom>
+          <a:solidFill>
+            <a:srgbClr val="FFFFFF"/>
+          </a:solidFill>
+          <a:ln w="12700">
+            <a:solidFill>
+              <a:srgbClr val="D9DDE3"/>
+            </a:solidFill>
+          </a:ln>
+          <a:effectLst/>
+        </p:spPr>
+        <p:style>
+          <a:lnRef idx="1">
+            <a:schemeClr val="accent1"/>
+          </a:lnRef>
+          <a:fillRef idx="3">
+            <a:schemeClr val="accent1"/>
+          </a:fillRef>
+          <a:effectRef idx="2">
+            <a:schemeClr val="accent1"/>
+          </a:effectRef>
+          <a:fontRef idx="minor">
+            <a:schemeClr val="lt1"/>
+          </a:fontRef>
+        </p:style>
+        <p:txBody>
+          <a:bodyPr rtlCol="0" anchor="ctr"/>
+          <a:lstStyle/>
+          <a:p>
+            <a:pPr algn="ctr"/>
+          </a:p>
+        </p:txBody>
+      </p:sp>
+      <p:sp>
+        <p:nvSpPr>
+          <p:cNvPr id="18" name="Rectangle 17"/>
+          <p:cNvSpPr/>
+          <p:nvPr/>
+        </p:nvSpPr>
+        <p:spPr>
+          <a:xfrm>
+            <a:off x="548640" y="4700016"/>
+            <a:ext cx="82296" cy="694944"/>
+          </a:xfrm>
+          <a:prstGeom prst="rect">
+            <a:avLst/>
+          </a:prstGeom>
+          <a:solidFill>
+            <a:srgbClr val="FFC220"/>
+          </a:solidFill>
+          <a:ln>
+            <a:noFill/>
+          </a:ln>
+          <a:effectLst/>
+        </p:spPr>
+        <p:style>
+          <a:lnRef idx="1">
+            <a:schemeClr val="accent1"/>
+          </a:lnRef>
+          <a:fillRef idx="3">
+            <a:schemeClr val="accent1"/>
+          </a:fillRef>
+          <a:effectRef idx="2">
+            <a:schemeClr val="accent1"/>
+          </a:effectRef>
+          <a:fontRef idx="minor">
+            <a:schemeClr val="lt1"/>
+          </a:fontRef>
+        </p:style>
+        <p:txBody>
+          <a:bodyPr rtlCol="0" anchor="ctr"/>
+          <a:lstStyle/>
+          <a:p>
+            <a:pPr algn="ctr"/>
+          </a:p>
+        </p:txBody>
+      </p:sp>
+      <p:sp>
+        <p:nvSpPr>
+          <p:cNvPr id="19" name="TextBox 18"/>
+          <p:cNvSpPr txBox="1"/>
+          <p:nvPr/>
+        </p:nvSpPr>
+        <p:spPr>
+          <a:xfrm>
+            <a:off x="822960" y="4690872"/>
+            <a:ext cx="10607040" cy="713232"/>
+          </a:xfrm>
+          <a:prstGeom prst="rect">
+            <a:avLst/>
+          </a:prstGeom>
+          <a:noFill/>
+        </p:spPr>
+        <p:txBody>
+          <a:bodyPr wrap="square">
+            <a:spAutoFit/>
+          </a:bodyPr>
+          <a:lstStyle/>
+          <a:p>
+            <a:r>
+              <a:rPr sz="1550" b="1">
+                <a:solidFill>
+                  <a:srgbClr val="333333"/>
+                </a:solidFill>
+                <a:latin typeface="Aptos"/>
+              </a:rPr>
+              <a:t>Let it draft. You reject.</a:t>
+            </a:r>
+          </a:p>
+          <a:p>
+            <a:r>
+              <a:rPr sz="1200" b="0">
+                <a:solidFill>
+                  <a:srgbClr val="5A6068"/>
+                </a:solidFill>
+                <a:latin typeface="Aptos"/>
+              </a:rPr>
+              <a:t>It made two complete rewrites </a:t>
+            </a:r>
+            <a:r>
+              <a:rPr sz="1200" b="1">
+                <a:solidFill>
+                  <a:srgbClr val="5A6068"/>
+                </a:solidFill>
+                <a:latin typeface="Aptos"/>
+              </a:rPr>
+              <a:t>affordable</a:t>
+            </a:r>
+            <a:r>
+              <a:rPr sz="1200" b="0">
+                <a:solidFill>
+                  <a:srgbClr val="5A6068"/>
+                </a:solidFill>
+                <a:latin typeface="Aptos"/>
+              </a:rPr>
+              <a:t> — without that I would have shipped version one’s architecture and lived with it.</a:t>
+            </a:r>
+          </a:p>
+        </p:txBody>
+      </p:sp>
+      <p:sp>
+        <p:nvSpPr>
+          <p:cNvPr id="20" name="Rectangle 19"/>
+          <p:cNvSpPr/>
+          <p:nvPr/>
+        </p:nvSpPr>
+        <p:spPr>
+          <a:xfrm>
+            <a:off x="548640" y="5458968"/>
+            <a:ext cx="11064240" cy="694944"/>
+          </a:xfrm>
+          <a:prstGeom prst="rect">
+            <a:avLst/>
+          </a:prstGeom>
+          <a:solidFill>
+            <a:srgbClr val="FFFFFF"/>
+          </a:solidFill>
+          <a:ln w="12700">
+            <a:solidFill>
+              <a:srgbClr val="D9DDE3"/>
+            </a:solidFill>
+          </a:ln>
+          <a:effectLst/>
+        </p:spPr>
+        <p:style>
+          <a:lnRef idx="1">
+            <a:schemeClr val="accent1"/>
+          </a:lnRef>
+          <a:fillRef idx="3">
+            <a:schemeClr val="accent1"/>
+          </a:fillRef>
+          <a:effectRef idx="2">
+            <a:schemeClr val="accent1"/>
+          </a:effectRef>
+          <a:fontRef idx="minor">
+            <a:schemeClr val="lt1"/>
+          </a:fontRef>
+        </p:style>
+        <p:txBody>
+          <a:bodyPr rtlCol="0" anchor="ctr"/>
+          <a:lstStyle/>
+          <a:p>
+            <a:pPr algn="ctr"/>
+          </a:p>
+        </p:txBody>
+      </p:sp>
+      <p:sp>
+        <p:nvSpPr>
           <p:cNvPr id="21" name="Rectangle 20"/>
           <p:cNvSpPr/>
           <p:nvPr/>
@@ -25665,7 +26400,7 @@
 </p:sld>
 </file>
 
-<file path=ppt/slides/slide32.xml><?xml version="1.0" encoding="utf-8"?>
+<file path=ppt/slides/slide33.xml><?xml version="1.0" encoding="utf-8"?>
 <p:sld xmlns:a="http://schemas.openxmlformats.org/drawingml/2006/main" xmlns:p="http://schemas.openxmlformats.org/presentationml/2006/main" xmlns:r="http://schemas.openxmlformats.org/officeDocument/2006/relationships">
   <p:cSld>
     <p:bg>

--- a/docs/fpga-presentation/fpga_talk.pptx
+++ b/docs/fpga-presentation/fpga_talk.pptx
@@ -4,45 +4,42 @@
   <p:sldMasterIdLst>
     <p:sldMasterId id="2147483648" r:id="rId1"/>
   </p:sldMasterIdLst>
-  <p:notesMasterIdLst>
-    <p:notesMasterId r:id="rId35"/>
-  </p:notesMasterIdLst>
   <p:sldIdLst>
-    <p:sldId id="256" r:id="rId2"/>
-    <p:sldId id="257" r:id="rId3"/>
-    <p:sldId id="258" r:id="rId4"/>
-    <p:sldId id="259" r:id="rId5"/>
-    <p:sldId id="260" r:id="rId6"/>
-    <p:sldId id="261" r:id="rId7"/>
-    <p:sldId id="262" r:id="rId8"/>
-    <p:sldId id="263" r:id="rId9"/>
-    <p:sldId id="264" r:id="rId10"/>
-    <p:sldId id="265" r:id="rId11"/>
-    <p:sldId id="266" r:id="rId12"/>
-    <p:sldId id="267" r:id="rId13"/>
-    <p:sldId id="268" r:id="rId14"/>
-    <p:sldId id="269" r:id="rId15"/>
-    <p:sldId id="270" r:id="rId16"/>
-    <p:sldId id="271" r:id="rId17"/>
-    <p:sldId id="272" r:id="rId18"/>
-    <p:sldId id="273" r:id="rId19"/>
-    <p:sldId id="274" r:id="rId20"/>
-    <p:sldId id="275" r:id="rId21"/>
-    <p:sldId id="276" r:id="rId22"/>
-    <p:sldId id="277" r:id="rId23"/>
-    <p:sldId id="278" r:id="rId24"/>
-    <p:sldId id="279" r:id="rId25"/>
-    <p:sldId id="280" r:id="rId26"/>
-    <p:sldId id="281" r:id="rId27"/>
-    <p:sldId id="282" r:id="rId28"/>
-    <p:sldId id="283" r:id="rId29"/>
-    <p:sldId id="284" r:id="rId30"/>
-    <p:sldId id="285" r:id="rId31"/>
-    <p:sldId id="286" r:id="rId32"/>
-    <p:sldId id="287" r:id="rId33"/>
-    <p:sldId id="288" r:id="rId34"/>
+    <p:sldId id="256" r:id="rId7"/>
+    <p:sldId id="257" r:id="rId9"/>
+    <p:sldId id="258" r:id="rId10"/>
+    <p:sldId id="259" r:id="rId11"/>
+    <p:sldId id="260" r:id="rId12"/>
+    <p:sldId id="261" r:id="rId13"/>
+    <p:sldId id="262" r:id="rId14"/>
+    <p:sldId id="263" r:id="rId15"/>
+    <p:sldId id="264" r:id="rId16"/>
+    <p:sldId id="265" r:id="rId17"/>
+    <p:sldId id="266" r:id="rId18"/>
+    <p:sldId id="267" r:id="rId19"/>
+    <p:sldId id="268" r:id="rId20"/>
+    <p:sldId id="269" r:id="rId21"/>
+    <p:sldId id="270" r:id="rId22"/>
+    <p:sldId id="271" r:id="rId23"/>
+    <p:sldId id="272" r:id="rId24"/>
+    <p:sldId id="273" r:id="rId25"/>
+    <p:sldId id="274" r:id="rId26"/>
+    <p:sldId id="275" r:id="rId27"/>
+    <p:sldId id="276" r:id="rId28"/>
+    <p:sldId id="277" r:id="rId29"/>
+    <p:sldId id="278" r:id="rId30"/>
+    <p:sldId id="279" r:id="rId31"/>
+    <p:sldId id="280" r:id="rId32"/>
+    <p:sldId id="281" r:id="rId33"/>
+    <p:sldId id="282" r:id="rId34"/>
+    <p:sldId id="283" r:id="rId35"/>
+    <p:sldId id="284" r:id="rId36"/>
+    <p:sldId id="285" r:id="rId37"/>
+    <p:sldId id="286" r:id="rId38"/>
+    <p:sldId id="287" r:id="rId39"/>
+    <p:sldId id="288" r:id="rId40"/>
   </p:sldIdLst>
-  <p:sldSz cx="12192000" cy="6858000"/>
+  <p:sldSz cx="12191695" cy="6858000" type="screen4x3"/>
   <p:notesSz cx="6858000" cy="9144000"/>
   <p:defaultTextStyle>
     <a:defPPr>
@@ -139,27 +136,11 @@
       </a:defRPr>
     </a:lvl9pPr>
   </p:defaultTextStyle>
-  <p:extLst>
-    <p:ext uri="{EFAFB233-063F-42B5-8137-9DF3F51BA10A}">
-      <p15:sldGuideLst xmlns:p15="http://schemas.microsoft.com/office/powerpoint/2012/main">
-        <p15:guide id="1" orient="horz" pos="2160">
-          <p15:clr>
-            <a:srgbClr val="A4A3A4"/>
-          </p15:clr>
-        </p15:guide>
-        <p15:guide id="2" pos="2880">
-          <p15:clr>
-            <a:srgbClr val="A4A3A4"/>
-          </p15:clr>
-        </p15:guide>
-      </p15:sldGuideLst>
-    </p:ext>
-  </p:extLst>
 </p:presentation>
 </file>
 
 <file path=ppt/notesMasters/notesMaster1.xml><?xml version="1.0" encoding="utf-8"?>
-<p:notesMaster xmlns:a="http://schemas.openxmlformats.org/drawingml/2006/main" xmlns:r="http://schemas.openxmlformats.org/officeDocument/2006/relationships" xmlns:p="http://schemas.openxmlformats.org/presentationml/2006/main">
+<p:notesMaster xmlns:a="http://schemas.openxmlformats.org/drawingml/2006/main" xmlns:p="http://schemas.openxmlformats.org/presentationml/2006/main" xmlns:r="http://schemas.openxmlformats.org/officeDocument/2006/relationships">
   <p:cSld>
     <p:bg>
       <p:bgRef idx="1001">
@@ -180,16 +161,241 @@
           <a:chExt cx="0" cy="0"/>
         </a:xfrm>
       </p:grpSpPr>
+      <p:sp>
+        <p:nvSpPr>
+          <p:cNvPr id="2" name="Header Placeholder 1"/>
+          <p:cNvSpPr>
+            <a:spLocks noGrp="1"/>
+          </p:cNvSpPr>
+          <p:nvPr>
+            <p:ph type="hdr" sz="quarter"/>
+          </p:nvPr>
+        </p:nvSpPr>
+        <p:spPr>
+          <a:xfrm>
+            <a:off x="0" y="0"/>
+            <a:ext cx="2971800" cy="457200"/>
+          </a:xfrm>
+          <a:prstGeom prst="rect">
+            <a:avLst/>
+          </a:prstGeom>
+        </p:spPr>
+        <p:txBody>
+          <a:bodyPr vert="horz" lIns="91440" tIns="45720" rIns="91440" bIns="45720" rtlCol="0"/>
+          <a:lstStyle>
+            <a:lvl1pPr algn="l">
+              <a:defRPr sz="1200"/>
+            </a:lvl1pPr>
+          </a:lstStyle>
+          <a:p>
+            <a:endParaRPr lang="en-US"/>
+          </a:p>
+        </p:txBody>
+      </p:sp>
+      <p:sp>
+        <p:nvSpPr>
+          <p:cNvPr id="3" name="Date Placeholder 2"/>
+          <p:cNvSpPr>
+            <a:spLocks noGrp="1"/>
+          </p:cNvSpPr>
+          <p:nvPr>
+            <p:ph type="dt" idx="1"/>
+          </p:nvPr>
+        </p:nvSpPr>
+        <p:spPr>
+          <a:xfrm>
+            <a:off x="3884613" y="0"/>
+            <a:ext cx="2971800" cy="457200"/>
+          </a:xfrm>
+          <a:prstGeom prst="rect">
+            <a:avLst/>
+          </a:prstGeom>
+        </p:spPr>
+        <p:txBody>
+          <a:bodyPr vert="horz" lIns="91440" tIns="45720" rIns="91440" bIns="45720" rtlCol="0"/>
+          <a:lstStyle>
+            <a:lvl1pPr algn="r">
+              <a:defRPr sz="1200"/>
+            </a:lvl1pPr>
+          </a:lstStyle>
+          <a:p>
+            <a:fld id="{0F89C1C7-3DCD-1040-A9CF-14679D8B5DDD}" type="datetimeFigureOut">
+              <a:rPr lang="en-US" smtClean="0"/>
+              <a:t>10/17/16</a:t>
+            </a:fld>
+            <a:endParaRPr lang="en-US"/>
+          </a:p>
+        </p:txBody>
+      </p:sp>
+      <p:sp>
+        <p:nvSpPr>
+          <p:cNvPr id="4" name="Slide Image Placeholder 3"/>
+          <p:cNvSpPr>
+            <a:spLocks noGrp="1" noRot="1" noChangeAspect="1"/>
+          </p:cNvSpPr>
+          <p:nvPr>
+            <p:ph type="sldImg" idx="2"/>
+          </p:nvPr>
+        </p:nvSpPr>
+        <p:spPr>
+          <a:xfrm>
+            <a:off x="1143000" y="685800"/>
+            <a:ext cx="4572000" cy="3429000"/>
+          </a:xfrm>
+          <a:prstGeom prst="rect">
+            <a:avLst/>
+          </a:prstGeom>
+          <a:noFill/>
+          <a:ln w="12700">
+            <a:solidFill>
+              <a:prstClr val="black"/>
+            </a:solidFill>
+          </a:ln>
+        </p:spPr>
+        <p:txBody>
+          <a:bodyPr vert="horz" lIns="91440" tIns="45720" rIns="91440" bIns="45720" rtlCol="0" anchor="ctr"/>
+          <a:lstStyle/>
+          <a:p>
+            <a:endParaRPr lang="en-US"/>
+          </a:p>
+        </p:txBody>
+      </p:sp>
+      <p:sp>
+        <p:nvSpPr>
+          <p:cNvPr id="5" name="Notes Placeholder 4"/>
+          <p:cNvSpPr>
+            <a:spLocks noGrp="1"/>
+          </p:cNvSpPr>
+          <p:nvPr>
+            <p:ph type="body" sz="quarter" idx="3"/>
+          </p:nvPr>
+        </p:nvSpPr>
+        <p:spPr>
+          <a:xfrm>
+            <a:off x="685800" y="4343400"/>
+            <a:ext cx="5486400" cy="4114800"/>
+          </a:xfrm>
+          <a:prstGeom prst="rect">
+            <a:avLst/>
+          </a:prstGeom>
+        </p:spPr>
+        <p:txBody>
+          <a:bodyPr vert="horz" lIns="91440" tIns="45720" rIns="91440" bIns="45720" rtlCol="0"/>
+          <a:lstStyle/>
+          <a:p>
+            <a:pPr lvl="0"/>
+            <a:r>
+              <a:rPr lang="en-US" smtClean="0"/>
+              <a:t>Click to edit Master text styles</a:t>
+            </a:r>
+          </a:p>
+          <a:p>
+            <a:pPr lvl="1"/>
+            <a:r>
+              <a:rPr lang="en-US" smtClean="0"/>
+              <a:t>Second level</a:t>
+            </a:r>
+          </a:p>
+          <a:p>
+            <a:pPr lvl="2"/>
+            <a:r>
+              <a:rPr lang="en-US" smtClean="0"/>
+              <a:t>Third level</a:t>
+            </a:r>
+          </a:p>
+          <a:p>
+            <a:pPr lvl="3"/>
+            <a:r>
+              <a:rPr lang="en-US" smtClean="0"/>
+              <a:t>Fourth level</a:t>
+            </a:r>
+          </a:p>
+          <a:p>
+            <a:pPr lvl="4"/>
+            <a:r>
+              <a:rPr lang="en-US" smtClean="0"/>
+              <a:t>Fifth level</a:t>
+            </a:r>
+            <a:endParaRPr lang="en-US"/>
+          </a:p>
+        </p:txBody>
+      </p:sp>
+      <p:sp>
+        <p:nvSpPr>
+          <p:cNvPr id="6" name="Footer Placeholder 5"/>
+          <p:cNvSpPr>
+            <a:spLocks noGrp="1"/>
+          </p:cNvSpPr>
+          <p:nvPr>
+            <p:ph type="ftr" sz="quarter" idx="4"/>
+          </p:nvPr>
+        </p:nvSpPr>
+        <p:spPr>
+          <a:xfrm>
+            <a:off x="0" y="8685213"/>
+            <a:ext cx="2971800" cy="457200"/>
+          </a:xfrm>
+          <a:prstGeom prst="rect">
+            <a:avLst/>
+          </a:prstGeom>
+        </p:spPr>
+        <p:txBody>
+          <a:bodyPr vert="horz" lIns="91440" tIns="45720" rIns="91440" bIns="45720" rtlCol="0" anchor="b"/>
+          <a:lstStyle>
+            <a:lvl1pPr algn="l">
+              <a:defRPr sz="1200"/>
+            </a:lvl1pPr>
+          </a:lstStyle>
+          <a:p>
+            <a:endParaRPr lang="en-US"/>
+          </a:p>
+        </p:txBody>
+      </p:sp>
+      <p:sp>
+        <p:nvSpPr>
+          <p:cNvPr id="7" name="Slide Number Placeholder 6"/>
+          <p:cNvSpPr>
+            <a:spLocks noGrp="1"/>
+          </p:cNvSpPr>
+          <p:nvPr>
+            <p:ph type="sldNum" sz="quarter" idx="5"/>
+          </p:nvPr>
+        </p:nvSpPr>
+        <p:spPr>
+          <a:xfrm>
+            <a:off x="3884613" y="8685213"/>
+            <a:ext cx="2971800" cy="457200"/>
+          </a:xfrm>
+          <a:prstGeom prst="rect">
+            <a:avLst/>
+          </a:prstGeom>
+        </p:spPr>
+        <p:txBody>
+          <a:bodyPr vert="horz" lIns="91440" tIns="45720" rIns="91440" bIns="45720" rtlCol="0" anchor="b"/>
+          <a:lstStyle>
+            <a:lvl1pPr algn="r">
+              <a:defRPr sz="1200"/>
+            </a:lvl1pPr>
+          </a:lstStyle>
+          <a:p>
+            <a:fld id="{BB5E49A5-4136-284D-997B-48E1D791AD67}" type="slidenum">
+              <a:rPr lang="en-US" smtClean="0"/>
+              <a:t>‹#›</a:t>
+            </a:fld>
+            <a:endParaRPr lang="en-US"/>
+          </a:p>
+        </p:txBody>
+      </p:sp>
     </p:spTree>
     <p:extLst>
       <p:ext uri="{BB962C8B-B14F-4D97-AF65-F5344CB8AC3E}">
-        <p14:creationId xmlns:p14="http://schemas.microsoft.com/office/powerpoint/2010/main" val="4081596788"/>
+        <p14:creationId xmlns:p14="http://schemas.microsoft.com/office/powerpoint/2010/main" val="2623252185"/>
       </p:ext>
     </p:extLst>
   </p:cSld>
   <p:clrMap bg1="lt1" tx1="dk1" bg2="lt2" tx2="dk2" accent1="accent1" accent2="accent2" accent3="accent3" accent4="accent4" accent5="accent5" accent6="accent6" hlink="hlink" folHlink="folHlink"/>
   <p:notesStyle>
-    <a:lvl1pPr marL="0" algn="l" defTabSz="914400" rtl="0" eaLnBrk="1" latinLnBrk="0" hangingPunct="1">
+    <a:lvl1pPr marL="0" algn="l" defTabSz="457200" rtl="0" eaLnBrk="1" latinLnBrk="0" hangingPunct="1">
       <a:defRPr sz="1200" kern="1200">
         <a:solidFill>
           <a:schemeClr val="tx1"/>
@@ -199,7 +405,7 @@
         <a:cs typeface="+mn-cs"/>
       </a:defRPr>
     </a:lvl1pPr>
-    <a:lvl2pPr marL="457200" algn="l" defTabSz="914400" rtl="0" eaLnBrk="1" latinLnBrk="0" hangingPunct="1">
+    <a:lvl2pPr marL="457200" algn="l" defTabSz="457200" rtl="0" eaLnBrk="1" latinLnBrk="0" hangingPunct="1">
       <a:defRPr sz="1200" kern="1200">
         <a:solidFill>
           <a:schemeClr val="tx1"/>
@@ -209,7 +415,7 @@
         <a:cs typeface="+mn-cs"/>
       </a:defRPr>
     </a:lvl2pPr>
-    <a:lvl3pPr marL="914400" algn="l" defTabSz="914400" rtl="0" eaLnBrk="1" latinLnBrk="0" hangingPunct="1">
+    <a:lvl3pPr marL="914400" algn="l" defTabSz="457200" rtl="0" eaLnBrk="1" latinLnBrk="0" hangingPunct="1">
       <a:defRPr sz="1200" kern="1200">
         <a:solidFill>
           <a:schemeClr val="tx1"/>
@@ -219,7 +425,7 @@
         <a:cs typeface="+mn-cs"/>
       </a:defRPr>
     </a:lvl3pPr>
-    <a:lvl4pPr marL="1371600" algn="l" defTabSz="914400" rtl="0" eaLnBrk="1" latinLnBrk="0" hangingPunct="1">
+    <a:lvl4pPr marL="1371600" algn="l" defTabSz="457200" rtl="0" eaLnBrk="1" latinLnBrk="0" hangingPunct="1">
       <a:defRPr sz="1200" kern="1200">
         <a:solidFill>
           <a:schemeClr val="tx1"/>
@@ -229,7 +435,7 @@
         <a:cs typeface="+mn-cs"/>
       </a:defRPr>
     </a:lvl4pPr>
-    <a:lvl5pPr marL="1828800" algn="l" defTabSz="914400" rtl="0" eaLnBrk="1" latinLnBrk="0" hangingPunct="1">
+    <a:lvl5pPr marL="1828800" algn="l" defTabSz="457200" rtl="0" eaLnBrk="1" latinLnBrk="0" hangingPunct="1">
       <a:defRPr sz="1200" kern="1200">
         <a:solidFill>
           <a:schemeClr val="tx1"/>
@@ -239,7 +445,7 @@
         <a:cs typeface="+mn-cs"/>
       </a:defRPr>
     </a:lvl5pPr>
-    <a:lvl6pPr marL="2286000" algn="l" defTabSz="914400" rtl="0" eaLnBrk="1" latinLnBrk="0" hangingPunct="1">
+    <a:lvl6pPr marL="2286000" algn="l" defTabSz="457200" rtl="0" eaLnBrk="1" latinLnBrk="0" hangingPunct="1">
       <a:defRPr sz="1200" kern="1200">
         <a:solidFill>
           <a:schemeClr val="tx1"/>
@@ -249,7 +455,7 @@
         <a:cs typeface="+mn-cs"/>
       </a:defRPr>
     </a:lvl6pPr>
-    <a:lvl7pPr marL="2743200" algn="l" defTabSz="914400" rtl="0" eaLnBrk="1" latinLnBrk="0" hangingPunct="1">
+    <a:lvl7pPr marL="2743200" algn="l" defTabSz="457200" rtl="0" eaLnBrk="1" latinLnBrk="0" hangingPunct="1">
       <a:defRPr sz="1200" kern="1200">
         <a:solidFill>
           <a:schemeClr val="tx1"/>
@@ -259,7 +465,7 @@
         <a:cs typeface="+mn-cs"/>
       </a:defRPr>
     </a:lvl7pPr>
-    <a:lvl8pPr marL="3200400" algn="l" defTabSz="914400" rtl="0" eaLnBrk="1" latinLnBrk="0" hangingPunct="1">
+    <a:lvl8pPr marL="3200400" algn="l" defTabSz="457200" rtl="0" eaLnBrk="1" latinLnBrk="0" hangingPunct="1">
       <a:defRPr sz="1200" kern="1200">
         <a:solidFill>
           <a:schemeClr val="tx1"/>
@@ -269,7 +475,7 @@
         <a:cs typeface="+mn-cs"/>
       </a:defRPr>
     </a:lvl8pPr>
-    <a:lvl9pPr marL="3657600" algn="l" defTabSz="914400" rtl="0" eaLnBrk="1" latinLnBrk="0" hangingPunct="1">
+    <a:lvl9pPr marL="3657600" algn="l" defTabSz="457200" rtl="0" eaLnBrk="1" latinLnBrk="0" hangingPunct="1">
       <a:defRPr sz="1200" kern="1200">
         <a:solidFill>
           <a:schemeClr val="tx1"/>
@@ -284,7 +490,7 @@
 </file>
 
 <file path=ppt/notesSlides/notesSlide1.xml><?xml version="1.0" encoding="utf-8"?>
-<p:notes xmlns:a="http://schemas.openxmlformats.org/drawingml/2006/main" xmlns:r="http://schemas.openxmlformats.org/officeDocument/2006/relationships" xmlns:p="http://schemas.openxmlformats.org/presentationml/2006/main">
+<p:notes xmlns:a="http://schemas.openxmlformats.org/drawingml/2006/main" xmlns:p="http://schemas.openxmlformats.org/presentationml/2006/main" xmlns:r="http://schemas.openxmlformats.org/officeDocument/2006/relationships">
   <p:cSld>
     <p:spTree>
       <p:nvGrpSpPr>
@@ -304,7 +510,7 @@
         <p:nvSpPr>
           <p:cNvPr id="2" name="Slide Image Placeholder 1"/>
           <p:cNvSpPr>
-            <a:spLocks noGrp="1" noRot="1" noChangeAspect="1"/>
+            <a:spLocks noGrp="1"/>
           </p:cNvSpPr>
           <p:nvPr>
             <p:ph type="sldImg" idx="2"/>
@@ -319,7 +525,7 @@
             <a:spLocks noGrp="1"/>
           </p:cNvSpPr>
           <p:nvPr>
-            <p:ph type="body" sz="quarter" idx="3"/>
+            <p:ph type="body" idx="3" sz="quarter"/>
           </p:nvPr>
         </p:nvSpPr>
         <p:spPr/>
@@ -340,7 +546,7 @@
             <a:spLocks noGrp="1"/>
           </p:cNvSpPr>
           <p:nvPr>
-            <p:ph type="sldNum" sz="quarter" idx="5"/>
+            <p:ph type="sldNum" idx="5" sz="quarter"/>
           </p:nvPr>
         </p:nvSpPr>
         <p:spPr/>
@@ -354,7 +560,7 @@
 </file>
 
 <file path=ppt/notesSlides/notesSlide10.xml><?xml version="1.0" encoding="utf-8"?>
-<p:notes xmlns:a="http://schemas.openxmlformats.org/drawingml/2006/main" xmlns:r="http://schemas.openxmlformats.org/officeDocument/2006/relationships" xmlns:p="http://schemas.openxmlformats.org/presentationml/2006/main">
+<p:notes xmlns:a="http://schemas.openxmlformats.org/drawingml/2006/main" xmlns:p="http://schemas.openxmlformats.org/presentationml/2006/main" xmlns:r="http://schemas.openxmlformats.org/officeDocument/2006/relationships">
   <p:cSld>
     <p:spTree>
       <p:nvGrpSpPr>
@@ -374,7 +580,7 @@
         <p:nvSpPr>
           <p:cNvPr id="2" name="Slide Image Placeholder 1"/>
           <p:cNvSpPr>
-            <a:spLocks noGrp="1" noRot="1" noChangeAspect="1"/>
+            <a:spLocks noGrp="1"/>
           </p:cNvSpPr>
           <p:nvPr>
             <p:ph type="sldImg" idx="2"/>
@@ -389,7 +595,7 @@
             <a:spLocks noGrp="1"/>
           </p:cNvSpPr>
           <p:nvPr>
-            <p:ph type="body" sz="quarter" idx="3"/>
+            <p:ph type="body" idx="3" sz="quarter"/>
           </p:nvPr>
         </p:nvSpPr>
         <p:spPr/>
@@ -410,7 +616,7 @@
             <a:spLocks noGrp="1"/>
           </p:cNvSpPr>
           <p:nvPr>
-            <p:ph type="sldNum" sz="quarter" idx="5"/>
+            <p:ph type="sldNum" idx="5" sz="quarter"/>
           </p:nvPr>
         </p:nvSpPr>
         <p:spPr/>
@@ -424,7 +630,7 @@
 </file>
 
 <file path=ppt/notesSlides/notesSlide11.xml><?xml version="1.0" encoding="utf-8"?>
-<p:notes xmlns:a="http://schemas.openxmlformats.org/drawingml/2006/main" xmlns:r="http://schemas.openxmlformats.org/officeDocument/2006/relationships" xmlns:p="http://schemas.openxmlformats.org/presentationml/2006/main">
+<p:notes xmlns:a="http://schemas.openxmlformats.org/drawingml/2006/main" xmlns:p="http://schemas.openxmlformats.org/presentationml/2006/main" xmlns:r="http://schemas.openxmlformats.org/officeDocument/2006/relationships">
   <p:cSld>
     <p:spTree>
       <p:nvGrpSpPr>
@@ -444,7 +650,7 @@
         <p:nvSpPr>
           <p:cNvPr id="2" name="Slide Image Placeholder 1"/>
           <p:cNvSpPr>
-            <a:spLocks noGrp="1" noRot="1" noChangeAspect="1"/>
+            <a:spLocks noGrp="1"/>
           </p:cNvSpPr>
           <p:nvPr>
             <p:ph type="sldImg" idx="2"/>
@@ -459,7 +665,7 @@
             <a:spLocks noGrp="1"/>
           </p:cNvSpPr>
           <p:nvPr>
-            <p:ph type="body" sz="quarter" idx="3"/>
+            <p:ph type="body" idx="3" sz="quarter"/>
           </p:nvPr>
         </p:nvSpPr>
         <p:spPr/>
@@ -480,7 +686,7 @@
             <a:spLocks noGrp="1"/>
           </p:cNvSpPr>
           <p:nvPr>
-            <p:ph type="sldNum" sz="quarter" idx="5"/>
+            <p:ph type="sldNum" idx="5" sz="quarter"/>
           </p:nvPr>
         </p:nvSpPr>
         <p:spPr/>
@@ -494,7 +700,7 @@
 </file>
 
 <file path=ppt/notesSlides/notesSlide12.xml><?xml version="1.0" encoding="utf-8"?>
-<p:notes xmlns:a="http://schemas.openxmlformats.org/drawingml/2006/main" xmlns:r="http://schemas.openxmlformats.org/officeDocument/2006/relationships" xmlns:p="http://schemas.openxmlformats.org/presentationml/2006/main">
+<p:notes xmlns:a="http://schemas.openxmlformats.org/drawingml/2006/main" xmlns:p="http://schemas.openxmlformats.org/presentationml/2006/main" xmlns:r="http://schemas.openxmlformats.org/officeDocument/2006/relationships">
   <p:cSld>
     <p:spTree>
       <p:nvGrpSpPr>
@@ -514,7 +720,7 @@
         <p:nvSpPr>
           <p:cNvPr id="2" name="Slide Image Placeholder 1"/>
           <p:cNvSpPr>
-            <a:spLocks noGrp="1" noRot="1" noChangeAspect="1"/>
+            <a:spLocks noGrp="1"/>
           </p:cNvSpPr>
           <p:nvPr>
             <p:ph type="sldImg" idx="2"/>
@@ -529,7 +735,7 @@
             <a:spLocks noGrp="1"/>
           </p:cNvSpPr>
           <p:nvPr>
-            <p:ph type="body" sz="quarter" idx="3"/>
+            <p:ph type="body" idx="3" sz="quarter"/>
           </p:nvPr>
         </p:nvSpPr>
         <p:spPr/>
@@ -550,7 +756,7 @@
             <a:spLocks noGrp="1"/>
           </p:cNvSpPr>
           <p:nvPr>
-            <p:ph type="sldNum" sz="quarter" idx="5"/>
+            <p:ph type="sldNum" idx="5" sz="quarter"/>
           </p:nvPr>
         </p:nvSpPr>
         <p:spPr/>
@@ -564,7 +770,7 @@
 </file>
 
 <file path=ppt/notesSlides/notesSlide13.xml><?xml version="1.0" encoding="utf-8"?>
-<p:notes xmlns:a="http://schemas.openxmlformats.org/drawingml/2006/main" xmlns:r="http://schemas.openxmlformats.org/officeDocument/2006/relationships" xmlns:p="http://schemas.openxmlformats.org/presentationml/2006/main">
+<p:notes xmlns:a="http://schemas.openxmlformats.org/drawingml/2006/main" xmlns:p="http://schemas.openxmlformats.org/presentationml/2006/main" xmlns:r="http://schemas.openxmlformats.org/officeDocument/2006/relationships">
   <p:cSld>
     <p:spTree>
       <p:nvGrpSpPr>
@@ -584,7 +790,7 @@
         <p:nvSpPr>
           <p:cNvPr id="2" name="Slide Image Placeholder 1"/>
           <p:cNvSpPr>
-            <a:spLocks noGrp="1" noRot="1" noChangeAspect="1"/>
+            <a:spLocks noGrp="1"/>
           </p:cNvSpPr>
           <p:nvPr>
             <p:ph type="sldImg" idx="2"/>
@@ -599,7 +805,7 @@
             <a:spLocks noGrp="1"/>
           </p:cNvSpPr>
           <p:nvPr>
-            <p:ph type="body" sz="quarter" idx="3"/>
+            <p:ph type="body" idx="3" sz="quarter"/>
           </p:nvPr>
         </p:nvSpPr>
         <p:spPr/>
@@ -620,7 +826,7 @@
             <a:spLocks noGrp="1"/>
           </p:cNvSpPr>
           <p:nvPr>
-            <p:ph type="sldNum" sz="quarter" idx="5"/>
+            <p:ph type="sldNum" idx="5" sz="quarter"/>
           </p:nvPr>
         </p:nvSpPr>
         <p:spPr/>
@@ -634,7 +840,7 @@
 </file>
 
 <file path=ppt/notesSlides/notesSlide14.xml><?xml version="1.0" encoding="utf-8"?>
-<p:notes xmlns:a="http://schemas.openxmlformats.org/drawingml/2006/main" xmlns:r="http://schemas.openxmlformats.org/officeDocument/2006/relationships" xmlns:p="http://schemas.openxmlformats.org/presentationml/2006/main">
+<p:notes xmlns:a="http://schemas.openxmlformats.org/drawingml/2006/main" xmlns:p="http://schemas.openxmlformats.org/presentationml/2006/main" xmlns:r="http://schemas.openxmlformats.org/officeDocument/2006/relationships">
   <p:cSld>
     <p:spTree>
       <p:nvGrpSpPr>
@@ -654,7 +860,7 @@
         <p:nvSpPr>
           <p:cNvPr id="2" name="Slide Image Placeholder 1"/>
           <p:cNvSpPr>
-            <a:spLocks noGrp="1" noRot="1" noChangeAspect="1"/>
+            <a:spLocks noGrp="1"/>
           </p:cNvSpPr>
           <p:nvPr>
             <p:ph type="sldImg" idx="2"/>
@@ -669,7 +875,7 @@
             <a:spLocks noGrp="1"/>
           </p:cNvSpPr>
           <p:nvPr>
-            <p:ph type="body" sz="quarter" idx="3"/>
+            <p:ph type="body" idx="3" sz="quarter"/>
           </p:nvPr>
         </p:nvSpPr>
         <p:spPr/>
@@ -690,7 +896,7 @@
             <a:spLocks noGrp="1"/>
           </p:cNvSpPr>
           <p:nvPr>
-            <p:ph type="sldNum" sz="quarter" idx="5"/>
+            <p:ph type="sldNum" idx="5" sz="quarter"/>
           </p:nvPr>
         </p:nvSpPr>
         <p:spPr/>
@@ -704,7 +910,7 @@
 </file>
 
 <file path=ppt/notesSlides/notesSlide15.xml><?xml version="1.0" encoding="utf-8"?>
-<p:notes xmlns:a="http://schemas.openxmlformats.org/drawingml/2006/main" xmlns:r="http://schemas.openxmlformats.org/officeDocument/2006/relationships" xmlns:p="http://schemas.openxmlformats.org/presentationml/2006/main">
+<p:notes xmlns:a="http://schemas.openxmlformats.org/drawingml/2006/main" xmlns:p="http://schemas.openxmlformats.org/presentationml/2006/main" xmlns:r="http://schemas.openxmlformats.org/officeDocument/2006/relationships">
   <p:cSld>
     <p:spTree>
       <p:nvGrpSpPr>
@@ -724,7 +930,7 @@
         <p:nvSpPr>
           <p:cNvPr id="2" name="Slide Image Placeholder 1"/>
           <p:cNvSpPr>
-            <a:spLocks noGrp="1" noRot="1" noChangeAspect="1"/>
+            <a:spLocks noGrp="1"/>
           </p:cNvSpPr>
           <p:nvPr>
             <p:ph type="sldImg" idx="2"/>
@@ -739,7 +945,7 @@
             <a:spLocks noGrp="1"/>
           </p:cNvSpPr>
           <p:nvPr>
-            <p:ph type="body" sz="quarter" idx="3"/>
+            <p:ph type="body" idx="3" sz="quarter"/>
           </p:nvPr>
         </p:nvSpPr>
         <p:spPr/>
@@ -760,7 +966,7 @@
             <a:spLocks noGrp="1"/>
           </p:cNvSpPr>
           <p:nvPr>
-            <p:ph type="sldNum" sz="quarter" idx="5"/>
+            <p:ph type="sldNum" idx="5" sz="quarter"/>
           </p:nvPr>
         </p:nvSpPr>
         <p:spPr/>
@@ -774,7 +980,7 @@
 </file>
 
 <file path=ppt/notesSlides/notesSlide16.xml><?xml version="1.0" encoding="utf-8"?>
-<p:notes xmlns:a="http://schemas.openxmlformats.org/drawingml/2006/main" xmlns:r="http://schemas.openxmlformats.org/officeDocument/2006/relationships" xmlns:p="http://schemas.openxmlformats.org/presentationml/2006/main">
+<p:notes xmlns:a="http://schemas.openxmlformats.org/drawingml/2006/main" xmlns:p="http://schemas.openxmlformats.org/presentationml/2006/main" xmlns:r="http://schemas.openxmlformats.org/officeDocument/2006/relationships">
   <p:cSld>
     <p:spTree>
       <p:nvGrpSpPr>
@@ -794,7 +1000,7 @@
         <p:nvSpPr>
           <p:cNvPr id="2" name="Slide Image Placeholder 1"/>
           <p:cNvSpPr>
-            <a:spLocks noGrp="1" noRot="1" noChangeAspect="1"/>
+            <a:spLocks noGrp="1"/>
           </p:cNvSpPr>
           <p:nvPr>
             <p:ph type="sldImg" idx="2"/>
@@ -809,7 +1015,7 @@
             <a:spLocks noGrp="1"/>
           </p:cNvSpPr>
           <p:nvPr>
-            <p:ph type="body" sz="quarter" idx="3"/>
+            <p:ph type="body" idx="3" sz="quarter"/>
           </p:nvPr>
         </p:nvSpPr>
         <p:spPr/>
@@ -830,7 +1036,7 @@
             <a:spLocks noGrp="1"/>
           </p:cNvSpPr>
           <p:nvPr>
-            <p:ph type="sldNum" sz="quarter" idx="5"/>
+            <p:ph type="sldNum" idx="5" sz="quarter"/>
           </p:nvPr>
         </p:nvSpPr>
         <p:spPr/>
@@ -844,7 +1050,7 @@
 </file>
 
 <file path=ppt/notesSlides/notesSlide17.xml><?xml version="1.0" encoding="utf-8"?>
-<p:notes xmlns:a="http://schemas.openxmlformats.org/drawingml/2006/main" xmlns:r="http://schemas.openxmlformats.org/officeDocument/2006/relationships" xmlns:p="http://schemas.openxmlformats.org/presentationml/2006/main">
+<p:notes xmlns:a="http://schemas.openxmlformats.org/drawingml/2006/main" xmlns:p="http://schemas.openxmlformats.org/presentationml/2006/main" xmlns:r="http://schemas.openxmlformats.org/officeDocument/2006/relationships">
   <p:cSld>
     <p:spTree>
       <p:nvGrpSpPr>
@@ -864,7 +1070,7 @@
         <p:nvSpPr>
           <p:cNvPr id="2" name="Slide Image Placeholder 1"/>
           <p:cNvSpPr>
-            <a:spLocks noGrp="1" noRot="1" noChangeAspect="1"/>
+            <a:spLocks noGrp="1"/>
           </p:cNvSpPr>
           <p:nvPr>
             <p:ph type="sldImg" idx="2"/>
@@ -879,7 +1085,7 @@
             <a:spLocks noGrp="1"/>
           </p:cNvSpPr>
           <p:nvPr>
-            <p:ph type="body" sz="quarter" idx="3"/>
+            <p:ph type="body" idx="3" sz="quarter"/>
           </p:nvPr>
         </p:nvSpPr>
         <p:spPr/>
@@ -900,7 +1106,7 @@
             <a:spLocks noGrp="1"/>
           </p:cNvSpPr>
           <p:nvPr>
-            <p:ph type="sldNum" sz="quarter" idx="5"/>
+            <p:ph type="sldNum" idx="5" sz="quarter"/>
           </p:nvPr>
         </p:nvSpPr>
         <p:spPr/>
@@ -914,7 +1120,7 @@
 </file>
 
 <file path=ppt/notesSlides/notesSlide18.xml><?xml version="1.0" encoding="utf-8"?>
-<p:notes xmlns:a="http://schemas.openxmlformats.org/drawingml/2006/main" xmlns:r="http://schemas.openxmlformats.org/officeDocument/2006/relationships" xmlns:p="http://schemas.openxmlformats.org/presentationml/2006/main">
+<p:notes xmlns:a="http://schemas.openxmlformats.org/drawingml/2006/main" xmlns:p="http://schemas.openxmlformats.org/presentationml/2006/main" xmlns:r="http://schemas.openxmlformats.org/officeDocument/2006/relationships">
   <p:cSld>
     <p:spTree>
       <p:nvGrpSpPr>
@@ -934,7 +1140,7 @@
         <p:nvSpPr>
           <p:cNvPr id="2" name="Slide Image Placeholder 1"/>
           <p:cNvSpPr>
-            <a:spLocks noGrp="1" noRot="1" noChangeAspect="1"/>
+            <a:spLocks noGrp="1"/>
           </p:cNvSpPr>
           <p:nvPr>
             <p:ph type="sldImg" idx="2"/>
@@ -949,7 +1155,7 @@
             <a:spLocks noGrp="1"/>
           </p:cNvSpPr>
           <p:nvPr>
-            <p:ph type="body" sz="quarter" idx="3"/>
+            <p:ph type="body" idx="3" sz="quarter"/>
           </p:nvPr>
         </p:nvSpPr>
         <p:spPr/>
@@ -970,7 +1176,7 @@
             <a:spLocks noGrp="1"/>
           </p:cNvSpPr>
           <p:nvPr>
-            <p:ph type="sldNum" sz="quarter" idx="5"/>
+            <p:ph type="sldNum" idx="5" sz="quarter"/>
           </p:nvPr>
         </p:nvSpPr>
         <p:spPr/>
@@ -984,7 +1190,7 @@
 </file>
 
 <file path=ppt/notesSlides/notesSlide19.xml><?xml version="1.0" encoding="utf-8"?>
-<p:notes xmlns:a="http://schemas.openxmlformats.org/drawingml/2006/main" xmlns:r="http://schemas.openxmlformats.org/officeDocument/2006/relationships" xmlns:p="http://schemas.openxmlformats.org/presentationml/2006/main">
+<p:notes xmlns:a="http://schemas.openxmlformats.org/drawingml/2006/main" xmlns:p="http://schemas.openxmlformats.org/presentationml/2006/main" xmlns:r="http://schemas.openxmlformats.org/officeDocument/2006/relationships">
   <p:cSld>
     <p:spTree>
       <p:nvGrpSpPr>
@@ -1004,7 +1210,7 @@
         <p:nvSpPr>
           <p:cNvPr id="2" name="Slide Image Placeholder 1"/>
           <p:cNvSpPr>
-            <a:spLocks noGrp="1" noRot="1" noChangeAspect="1"/>
+            <a:spLocks noGrp="1"/>
           </p:cNvSpPr>
           <p:nvPr>
             <p:ph type="sldImg" idx="2"/>
@@ -1019,7 +1225,7 @@
             <a:spLocks noGrp="1"/>
           </p:cNvSpPr>
           <p:nvPr>
-            <p:ph type="body" sz="quarter" idx="3"/>
+            <p:ph type="body" idx="3" sz="quarter"/>
           </p:nvPr>
         </p:nvSpPr>
         <p:spPr/>
@@ -1040,7 +1246,7 @@
             <a:spLocks noGrp="1"/>
           </p:cNvSpPr>
           <p:nvPr>
-            <p:ph type="sldNum" sz="quarter" idx="5"/>
+            <p:ph type="sldNum" idx="5" sz="quarter"/>
           </p:nvPr>
         </p:nvSpPr>
         <p:spPr/>
@@ -1054,7 +1260,7 @@
 </file>
 
 <file path=ppt/notesSlides/notesSlide2.xml><?xml version="1.0" encoding="utf-8"?>
-<p:notes xmlns:a="http://schemas.openxmlformats.org/drawingml/2006/main" xmlns:r="http://schemas.openxmlformats.org/officeDocument/2006/relationships" xmlns:p="http://schemas.openxmlformats.org/presentationml/2006/main">
+<p:notes xmlns:a="http://schemas.openxmlformats.org/drawingml/2006/main" xmlns:p="http://schemas.openxmlformats.org/presentationml/2006/main" xmlns:r="http://schemas.openxmlformats.org/officeDocument/2006/relationships">
   <p:cSld>
     <p:spTree>
       <p:nvGrpSpPr>
@@ -1074,7 +1280,7 @@
         <p:nvSpPr>
           <p:cNvPr id="2" name="Slide Image Placeholder 1"/>
           <p:cNvSpPr>
-            <a:spLocks noGrp="1" noRot="1" noChangeAspect="1"/>
+            <a:spLocks noGrp="1"/>
           </p:cNvSpPr>
           <p:nvPr>
             <p:ph type="sldImg" idx="2"/>
@@ -1089,7 +1295,7 @@
             <a:spLocks noGrp="1"/>
           </p:cNvSpPr>
           <p:nvPr>
-            <p:ph type="body" sz="quarter" idx="3"/>
+            <p:ph type="body" idx="3" sz="quarter"/>
           </p:nvPr>
         </p:nvSpPr>
         <p:spPr/>
@@ -1110,7 +1316,7 @@
             <a:spLocks noGrp="1"/>
           </p:cNvSpPr>
           <p:nvPr>
-            <p:ph type="sldNum" sz="quarter" idx="5"/>
+            <p:ph type="sldNum" idx="5" sz="quarter"/>
           </p:nvPr>
         </p:nvSpPr>
         <p:spPr/>
@@ -1124,7 +1330,7 @@
 </file>
 
 <file path=ppt/notesSlides/notesSlide20.xml><?xml version="1.0" encoding="utf-8"?>
-<p:notes xmlns:a="http://schemas.openxmlformats.org/drawingml/2006/main" xmlns:r="http://schemas.openxmlformats.org/officeDocument/2006/relationships" xmlns:p="http://schemas.openxmlformats.org/presentationml/2006/main">
+<p:notes xmlns:a="http://schemas.openxmlformats.org/drawingml/2006/main" xmlns:p="http://schemas.openxmlformats.org/presentationml/2006/main" xmlns:r="http://schemas.openxmlformats.org/officeDocument/2006/relationships">
   <p:cSld>
     <p:spTree>
       <p:nvGrpSpPr>
@@ -1144,7 +1350,7 @@
         <p:nvSpPr>
           <p:cNvPr id="2" name="Slide Image Placeholder 1"/>
           <p:cNvSpPr>
-            <a:spLocks noGrp="1" noRot="1" noChangeAspect="1"/>
+            <a:spLocks noGrp="1"/>
           </p:cNvSpPr>
           <p:nvPr>
             <p:ph type="sldImg" idx="2"/>
@@ -1159,7 +1365,7 @@
             <a:spLocks noGrp="1"/>
           </p:cNvSpPr>
           <p:nvPr>
-            <p:ph type="body" sz="quarter" idx="3"/>
+            <p:ph type="body" idx="3" sz="quarter"/>
           </p:nvPr>
         </p:nvSpPr>
         <p:spPr/>
@@ -1180,7 +1386,7 @@
             <a:spLocks noGrp="1"/>
           </p:cNvSpPr>
           <p:nvPr>
-            <p:ph type="sldNum" sz="quarter" idx="5"/>
+            <p:ph type="sldNum" idx="5" sz="quarter"/>
           </p:nvPr>
         </p:nvSpPr>
         <p:spPr/>
@@ -1194,7 +1400,7 @@
 </file>
 
 <file path=ppt/notesSlides/notesSlide21.xml><?xml version="1.0" encoding="utf-8"?>
-<p:notes xmlns:a="http://schemas.openxmlformats.org/drawingml/2006/main" xmlns:r="http://schemas.openxmlformats.org/officeDocument/2006/relationships" xmlns:p="http://schemas.openxmlformats.org/presentationml/2006/main">
+<p:notes xmlns:a="http://schemas.openxmlformats.org/drawingml/2006/main" xmlns:p="http://schemas.openxmlformats.org/presentationml/2006/main" xmlns:r="http://schemas.openxmlformats.org/officeDocument/2006/relationships">
   <p:cSld>
     <p:spTree>
       <p:nvGrpSpPr>
@@ -1214,7 +1420,7 @@
         <p:nvSpPr>
           <p:cNvPr id="2" name="Slide Image Placeholder 1"/>
           <p:cNvSpPr>
-            <a:spLocks noGrp="1" noRot="1" noChangeAspect="1"/>
+            <a:spLocks noGrp="1"/>
           </p:cNvSpPr>
           <p:nvPr>
             <p:ph type="sldImg" idx="2"/>
@@ -1229,7 +1435,7 @@
             <a:spLocks noGrp="1"/>
           </p:cNvSpPr>
           <p:nvPr>
-            <p:ph type="body" sz="quarter" idx="3"/>
+            <p:ph type="body" idx="3" sz="quarter"/>
           </p:nvPr>
         </p:nvSpPr>
         <p:spPr/>
@@ -1250,7 +1456,7 @@
             <a:spLocks noGrp="1"/>
           </p:cNvSpPr>
           <p:nvPr>
-            <p:ph type="sldNum" sz="quarter" idx="5"/>
+            <p:ph type="sldNum" idx="5" sz="quarter"/>
           </p:nvPr>
         </p:nvSpPr>
         <p:spPr/>
@@ -1264,7 +1470,7 @@
 </file>
 
 <file path=ppt/notesSlides/notesSlide22.xml><?xml version="1.0" encoding="utf-8"?>
-<p:notes xmlns:a="http://schemas.openxmlformats.org/drawingml/2006/main" xmlns:r="http://schemas.openxmlformats.org/officeDocument/2006/relationships" xmlns:p="http://schemas.openxmlformats.org/presentationml/2006/main">
+<p:notes xmlns:a="http://schemas.openxmlformats.org/drawingml/2006/main" xmlns:p="http://schemas.openxmlformats.org/presentationml/2006/main" xmlns:r="http://schemas.openxmlformats.org/officeDocument/2006/relationships">
   <p:cSld>
     <p:spTree>
       <p:nvGrpSpPr>
@@ -1284,7 +1490,7 @@
         <p:nvSpPr>
           <p:cNvPr id="2" name="Slide Image Placeholder 1"/>
           <p:cNvSpPr>
-            <a:spLocks noGrp="1" noRot="1" noChangeAspect="1"/>
+            <a:spLocks noGrp="1"/>
           </p:cNvSpPr>
           <p:nvPr>
             <p:ph type="sldImg" idx="2"/>
@@ -1299,7 +1505,7 @@
             <a:spLocks noGrp="1"/>
           </p:cNvSpPr>
           <p:nvPr>
-            <p:ph type="body" sz="quarter" idx="3"/>
+            <p:ph type="body" idx="3" sz="quarter"/>
           </p:nvPr>
         </p:nvSpPr>
         <p:spPr/>
@@ -1320,7 +1526,7 @@
             <a:spLocks noGrp="1"/>
           </p:cNvSpPr>
           <p:nvPr>
-            <p:ph type="sldNum" sz="quarter" idx="5"/>
+            <p:ph type="sldNum" idx="5" sz="quarter"/>
           </p:nvPr>
         </p:nvSpPr>
         <p:spPr/>
@@ -1334,7 +1540,7 @@
 </file>
 
 <file path=ppt/notesSlides/notesSlide23.xml><?xml version="1.0" encoding="utf-8"?>
-<p:notes xmlns:a="http://schemas.openxmlformats.org/drawingml/2006/main" xmlns:r="http://schemas.openxmlformats.org/officeDocument/2006/relationships" xmlns:p="http://schemas.openxmlformats.org/presentationml/2006/main">
+<p:notes xmlns:a="http://schemas.openxmlformats.org/drawingml/2006/main" xmlns:p="http://schemas.openxmlformats.org/presentationml/2006/main" xmlns:r="http://schemas.openxmlformats.org/officeDocument/2006/relationships">
   <p:cSld>
     <p:spTree>
       <p:nvGrpSpPr>
@@ -1354,7 +1560,7 @@
         <p:nvSpPr>
           <p:cNvPr id="2" name="Slide Image Placeholder 1"/>
           <p:cNvSpPr>
-            <a:spLocks noGrp="1" noRot="1" noChangeAspect="1"/>
+            <a:spLocks noGrp="1"/>
           </p:cNvSpPr>
           <p:nvPr>
             <p:ph type="sldImg" idx="2"/>
@@ -1369,7 +1575,7 @@
             <a:spLocks noGrp="1"/>
           </p:cNvSpPr>
           <p:nvPr>
-            <p:ph type="body" sz="quarter" idx="3"/>
+            <p:ph type="body" idx="3" sz="quarter"/>
           </p:nvPr>
         </p:nvSpPr>
         <p:spPr/>
@@ -1390,7 +1596,7 @@
             <a:spLocks noGrp="1"/>
           </p:cNvSpPr>
           <p:nvPr>
-            <p:ph type="sldNum" sz="quarter" idx="5"/>
+            <p:ph type="sldNum" idx="5" sz="quarter"/>
           </p:nvPr>
         </p:nvSpPr>
         <p:spPr/>
@@ -1404,7 +1610,7 @@
 </file>
 
 <file path=ppt/notesSlides/notesSlide24.xml><?xml version="1.0" encoding="utf-8"?>
-<p:notes xmlns:a="http://schemas.openxmlformats.org/drawingml/2006/main" xmlns:r="http://schemas.openxmlformats.org/officeDocument/2006/relationships" xmlns:p="http://schemas.openxmlformats.org/presentationml/2006/main">
+<p:notes xmlns:a="http://schemas.openxmlformats.org/drawingml/2006/main" xmlns:p="http://schemas.openxmlformats.org/presentationml/2006/main" xmlns:r="http://schemas.openxmlformats.org/officeDocument/2006/relationships">
   <p:cSld>
     <p:spTree>
       <p:nvGrpSpPr>
@@ -1424,7 +1630,7 @@
         <p:nvSpPr>
           <p:cNvPr id="2" name="Slide Image Placeholder 1"/>
           <p:cNvSpPr>
-            <a:spLocks noGrp="1" noRot="1" noChangeAspect="1"/>
+            <a:spLocks noGrp="1"/>
           </p:cNvSpPr>
           <p:nvPr>
             <p:ph type="sldImg" idx="2"/>
@@ -1439,7 +1645,7 @@
             <a:spLocks noGrp="1"/>
           </p:cNvSpPr>
           <p:nvPr>
-            <p:ph type="body" sz="quarter" idx="3"/>
+            <p:ph type="body" idx="3" sz="quarter"/>
           </p:nvPr>
         </p:nvSpPr>
         <p:spPr/>
@@ -1460,7 +1666,7 @@
             <a:spLocks noGrp="1"/>
           </p:cNvSpPr>
           <p:nvPr>
-            <p:ph type="sldNum" sz="quarter" idx="5"/>
+            <p:ph type="sldNum" idx="5" sz="quarter"/>
           </p:nvPr>
         </p:nvSpPr>
         <p:spPr/>
@@ -1474,7 +1680,7 @@
 </file>
 
 <file path=ppt/notesSlides/notesSlide25.xml><?xml version="1.0" encoding="utf-8"?>
-<p:notes xmlns:a="http://schemas.openxmlformats.org/drawingml/2006/main" xmlns:r="http://schemas.openxmlformats.org/officeDocument/2006/relationships" xmlns:p="http://schemas.openxmlformats.org/presentationml/2006/main">
+<p:notes xmlns:a="http://schemas.openxmlformats.org/drawingml/2006/main" xmlns:p="http://schemas.openxmlformats.org/presentationml/2006/main" xmlns:r="http://schemas.openxmlformats.org/officeDocument/2006/relationships">
   <p:cSld>
     <p:spTree>
       <p:nvGrpSpPr>
@@ -1494,7 +1700,7 @@
         <p:nvSpPr>
           <p:cNvPr id="2" name="Slide Image Placeholder 1"/>
           <p:cNvSpPr>
-            <a:spLocks noGrp="1" noRot="1" noChangeAspect="1"/>
+            <a:spLocks noGrp="1"/>
           </p:cNvSpPr>
           <p:nvPr>
             <p:ph type="sldImg" idx="2"/>
@@ -1509,7 +1715,7 @@
             <a:spLocks noGrp="1"/>
           </p:cNvSpPr>
           <p:nvPr>
-            <p:ph type="body" sz="quarter" idx="3"/>
+            <p:ph type="body" idx="3" sz="quarter"/>
           </p:nvPr>
         </p:nvSpPr>
         <p:spPr/>
@@ -1530,7 +1736,7 @@
             <a:spLocks noGrp="1"/>
           </p:cNvSpPr>
           <p:nvPr>
-            <p:ph type="sldNum" sz="quarter" idx="5"/>
+            <p:ph type="sldNum" idx="5" sz="quarter"/>
           </p:nvPr>
         </p:nvSpPr>
         <p:spPr/>
@@ -1544,7 +1750,7 @@
 </file>
 
 <file path=ppt/notesSlides/notesSlide26.xml><?xml version="1.0" encoding="utf-8"?>
-<p:notes xmlns:a="http://schemas.openxmlformats.org/drawingml/2006/main" xmlns:r="http://schemas.openxmlformats.org/officeDocument/2006/relationships" xmlns:p="http://schemas.openxmlformats.org/presentationml/2006/main">
+<p:notes xmlns:a="http://schemas.openxmlformats.org/drawingml/2006/main" xmlns:p="http://schemas.openxmlformats.org/presentationml/2006/main" xmlns:r="http://schemas.openxmlformats.org/officeDocument/2006/relationships">
   <p:cSld>
     <p:spTree>
       <p:nvGrpSpPr>
@@ -1564,7 +1770,7 @@
         <p:nvSpPr>
           <p:cNvPr id="2" name="Slide Image Placeholder 1"/>
           <p:cNvSpPr>
-            <a:spLocks noGrp="1" noRot="1" noChangeAspect="1"/>
+            <a:spLocks noGrp="1"/>
           </p:cNvSpPr>
           <p:nvPr>
             <p:ph type="sldImg" idx="2"/>
@@ -1579,7 +1785,7 @@
             <a:spLocks noGrp="1"/>
           </p:cNvSpPr>
           <p:nvPr>
-            <p:ph type="body" sz="quarter" idx="3"/>
+            <p:ph type="body" idx="3" sz="quarter"/>
           </p:nvPr>
         </p:nvSpPr>
         <p:spPr/>
@@ -1600,7 +1806,7 @@
             <a:spLocks noGrp="1"/>
           </p:cNvSpPr>
           <p:nvPr>
-            <p:ph type="sldNum" sz="quarter" idx="5"/>
+            <p:ph type="sldNum" idx="5" sz="quarter"/>
           </p:nvPr>
         </p:nvSpPr>
         <p:spPr/>
@@ -1614,7 +1820,7 @@
 </file>
 
 <file path=ppt/notesSlides/notesSlide27.xml><?xml version="1.0" encoding="utf-8"?>
-<p:notes xmlns:a="http://schemas.openxmlformats.org/drawingml/2006/main" xmlns:r="http://schemas.openxmlformats.org/officeDocument/2006/relationships" xmlns:p="http://schemas.openxmlformats.org/presentationml/2006/main">
+<p:notes xmlns:a="http://schemas.openxmlformats.org/drawingml/2006/main" xmlns:p="http://schemas.openxmlformats.org/presentationml/2006/main" xmlns:r="http://schemas.openxmlformats.org/officeDocument/2006/relationships">
   <p:cSld>
     <p:spTree>
       <p:nvGrpSpPr>
@@ -1634,7 +1840,7 @@
         <p:nvSpPr>
           <p:cNvPr id="2" name="Slide Image Placeholder 1"/>
           <p:cNvSpPr>
-            <a:spLocks noGrp="1" noRot="1" noChangeAspect="1"/>
+            <a:spLocks noGrp="1"/>
           </p:cNvSpPr>
           <p:nvPr>
             <p:ph type="sldImg" idx="2"/>
@@ -1649,7 +1855,7 @@
             <a:spLocks noGrp="1"/>
           </p:cNvSpPr>
           <p:nvPr>
-            <p:ph type="body" sz="quarter" idx="3"/>
+            <p:ph type="body" idx="3" sz="quarter"/>
           </p:nvPr>
         </p:nvSpPr>
         <p:spPr/>
@@ -1670,7 +1876,7 @@
             <a:spLocks noGrp="1"/>
           </p:cNvSpPr>
           <p:nvPr>
-            <p:ph type="sldNum" sz="quarter" idx="5"/>
+            <p:ph type="sldNum" idx="5" sz="quarter"/>
           </p:nvPr>
         </p:nvSpPr>
         <p:spPr/>
@@ -1684,7 +1890,7 @@
 </file>
 
 <file path=ppt/notesSlides/notesSlide28.xml><?xml version="1.0" encoding="utf-8"?>
-<p:notes xmlns:a="http://schemas.openxmlformats.org/drawingml/2006/main" xmlns:r="http://schemas.openxmlformats.org/officeDocument/2006/relationships" xmlns:p="http://schemas.openxmlformats.org/presentationml/2006/main">
+<p:notes xmlns:a="http://schemas.openxmlformats.org/drawingml/2006/main" xmlns:p="http://schemas.openxmlformats.org/presentationml/2006/main" xmlns:r="http://schemas.openxmlformats.org/officeDocument/2006/relationships">
   <p:cSld>
     <p:spTree>
       <p:nvGrpSpPr>
@@ -1704,7 +1910,7 @@
         <p:nvSpPr>
           <p:cNvPr id="2" name="Slide Image Placeholder 1"/>
           <p:cNvSpPr>
-            <a:spLocks noGrp="1" noRot="1" noChangeAspect="1"/>
+            <a:spLocks noGrp="1"/>
           </p:cNvSpPr>
           <p:nvPr>
             <p:ph type="sldImg" idx="2"/>
@@ -1719,7 +1925,7 @@
             <a:spLocks noGrp="1"/>
           </p:cNvSpPr>
           <p:nvPr>
-            <p:ph type="body" sz="quarter" idx="3"/>
+            <p:ph type="body" idx="3" sz="quarter"/>
           </p:nvPr>
         </p:nvSpPr>
         <p:spPr/>
@@ -1728,7 +1934,7 @@
           <a:lstStyle/>
           <a:p>
             <a:r>
-              <a:t>Demo cheat sheet — verify before the talk. Scope: probe the phi1_out/phi2_out pins so the audience sees Part 1 made physical. Pi: L in monitor, send_hex.py, G 0040; narrate while it grinds; 49/50 digits — the 50th is the original 1970s program’s guard-byte truncation, good trivia. Calc: load, G, type the sum live. Finale: power-cycle into the b8008_basic bitstream, type a 3-line FOR/NEXT, RUN, MON, D the program region, G 1FB6, LIST. Fallback recordings ready for all four.</a:t>
+              <a:t>Demo cheat sheet — verify before the talk. Scope: probe the phi1_out/phi2_out pins so the audience sees Part 1 made physical. Pi: L in monitor, send_hex.py, G 2040; narrate while it grinds; 49/50 digits — the 50th is the original 1970s program’s guard-byte truncation, good trivia. Calc: load, G, type the sum live. Finale: power-cycle into the b8008_basic bitstream, type a 3-line FOR/NEXT, RUN, MON, D the program region, G 1FB6, LIST. Fallback recordings ready for all four.</a:t>
             </a:r>
           </a:p>
         </p:txBody>
@@ -1740,7 +1946,7 @@
             <a:spLocks noGrp="1"/>
           </p:cNvSpPr>
           <p:nvPr>
-            <p:ph type="sldNum" sz="quarter" idx="5"/>
+            <p:ph type="sldNum" idx="5" sz="quarter"/>
           </p:nvPr>
         </p:nvSpPr>
         <p:spPr/>
@@ -1754,7 +1960,7 @@
 </file>
 
 <file path=ppt/notesSlides/notesSlide29.xml><?xml version="1.0" encoding="utf-8"?>
-<p:notes xmlns:a="http://schemas.openxmlformats.org/drawingml/2006/main" xmlns:r="http://schemas.openxmlformats.org/officeDocument/2006/relationships" xmlns:p="http://schemas.openxmlformats.org/presentationml/2006/main">
+<p:notes xmlns:a="http://schemas.openxmlformats.org/drawingml/2006/main" xmlns:p="http://schemas.openxmlformats.org/presentationml/2006/main" xmlns:r="http://schemas.openxmlformats.org/officeDocument/2006/relationships">
   <p:cSld>
     <p:spTree>
       <p:nvGrpSpPr>
@@ -1774,7 +1980,7 @@
         <p:nvSpPr>
           <p:cNvPr id="2" name="Slide Image Placeholder 1"/>
           <p:cNvSpPr>
-            <a:spLocks noGrp="1" noRot="1" noChangeAspect="1"/>
+            <a:spLocks noGrp="1"/>
           </p:cNvSpPr>
           <p:nvPr>
             <p:ph type="sldImg" idx="2"/>
@@ -1789,7 +1995,7 @@
             <a:spLocks noGrp="1"/>
           </p:cNvSpPr>
           <p:nvPr>
-            <p:ph type="body" sz="quarter" idx="3"/>
+            <p:ph type="body" idx="3" sz="quarter"/>
           </p:nvPr>
         </p:nvSpPr>
         <p:spPr/>
@@ -1810,7 +2016,7 @@
             <a:spLocks noGrp="1"/>
           </p:cNvSpPr>
           <p:nvPr>
-            <p:ph type="sldNum" sz="quarter" idx="5"/>
+            <p:ph type="sldNum" idx="5" sz="quarter"/>
           </p:nvPr>
         </p:nvSpPr>
         <p:spPr/>
@@ -1824,7 +2030,7 @@
 </file>
 
 <file path=ppt/notesSlides/notesSlide3.xml><?xml version="1.0" encoding="utf-8"?>
-<p:notes xmlns:a="http://schemas.openxmlformats.org/drawingml/2006/main" xmlns:r="http://schemas.openxmlformats.org/officeDocument/2006/relationships" xmlns:p="http://schemas.openxmlformats.org/presentationml/2006/main">
+<p:notes xmlns:a="http://schemas.openxmlformats.org/drawingml/2006/main" xmlns:p="http://schemas.openxmlformats.org/presentationml/2006/main" xmlns:r="http://schemas.openxmlformats.org/officeDocument/2006/relationships">
   <p:cSld>
     <p:spTree>
       <p:nvGrpSpPr>
@@ -1844,7 +2050,7 @@
         <p:nvSpPr>
           <p:cNvPr id="2" name="Slide Image Placeholder 1"/>
           <p:cNvSpPr>
-            <a:spLocks noGrp="1" noRot="1" noChangeAspect="1"/>
+            <a:spLocks noGrp="1"/>
           </p:cNvSpPr>
           <p:nvPr>
             <p:ph type="sldImg" idx="2"/>
@@ -1859,7 +2065,7 @@
             <a:spLocks noGrp="1"/>
           </p:cNvSpPr>
           <p:nvPr>
-            <p:ph type="body" sz="quarter" idx="3"/>
+            <p:ph type="body" idx="3" sz="quarter"/>
           </p:nvPr>
         </p:nvSpPr>
         <p:spPr/>
@@ -1880,7 +2086,7 @@
             <a:spLocks noGrp="1"/>
           </p:cNvSpPr>
           <p:nvPr>
-            <p:ph type="sldNum" sz="quarter" idx="5"/>
+            <p:ph type="sldNum" idx="5" sz="quarter"/>
           </p:nvPr>
         </p:nvSpPr>
         <p:spPr/>
@@ -1894,7 +2100,7 @@
 </file>
 
 <file path=ppt/notesSlides/notesSlide30.xml><?xml version="1.0" encoding="utf-8"?>
-<p:notes xmlns:a="http://schemas.openxmlformats.org/drawingml/2006/main" xmlns:r="http://schemas.openxmlformats.org/officeDocument/2006/relationships" xmlns:p="http://schemas.openxmlformats.org/presentationml/2006/main">
+<p:notes xmlns:a="http://schemas.openxmlformats.org/drawingml/2006/main" xmlns:p="http://schemas.openxmlformats.org/presentationml/2006/main" xmlns:r="http://schemas.openxmlformats.org/officeDocument/2006/relationships">
   <p:cSld>
     <p:spTree>
       <p:nvGrpSpPr>
@@ -1914,7 +2120,7 @@
         <p:nvSpPr>
           <p:cNvPr id="2" name="Slide Image Placeholder 1"/>
           <p:cNvSpPr>
-            <a:spLocks noGrp="1" noRot="1" noChangeAspect="1"/>
+            <a:spLocks noGrp="1"/>
           </p:cNvSpPr>
           <p:nvPr>
             <p:ph type="sldImg" idx="2"/>
@@ -1929,7 +2135,7 @@
             <a:spLocks noGrp="1"/>
           </p:cNvSpPr>
           <p:nvPr>
-            <p:ph type="body" sz="quarter" idx="3"/>
+            <p:ph type="body" idx="3" sz="quarter"/>
           </p:nvPr>
         </p:nvSpPr>
         <p:spPr/>
@@ -1950,7 +2156,7 @@
             <a:spLocks noGrp="1"/>
           </p:cNvSpPr>
           <p:nvPr>
-            <p:ph type="sldNum" sz="quarter" idx="5"/>
+            <p:ph type="sldNum" idx="5" sz="quarter"/>
           </p:nvPr>
         </p:nvSpPr>
         <p:spPr/>
@@ -1964,7 +2170,7 @@
 </file>
 
 <file path=ppt/notesSlides/notesSlide31.xml><?xml version="1.0" encoding="utf-8"?>
-<p:notes xmlns:a="http://schemas.openxmlformats.org/drawingml/2006/main" xmlns:r="http://schemas.openxmlformats.org/officeDocument/2006/relationships" xmlns:p="http://schemas.openxmlformats.org/presentationml/2006/main">
+<p:notes xmlns:a="http://schemas.openxmlformats.org/drawingml/2006/main" xmlns:p="http://schemas.openxmlformats.org/presentationml/2006/main" xmlns:r="http://schemas.openxmlformats.org/officeDocument/2006/relationships">
   <p:cSld>
     <p:spTree>
       <p:nvGrpSpPr>
@@ -1984,7 +2190,7 @@
         <p:nvSpPr>
           <p:cNvPr id="2" name="Slide Image Placeholder 1"/>
           <p:cNvSpPr>
-            <a:spLocks noGrp="1" noRot="1" noChangeAspect="1"/>
+            <a:spLocks noGrp="1"/>
           </p:cNvSpPr>
           <p:nvPr>
             <p:ph type="sldImg" idx="2"/>
@@ -1999,7 +2205,7 @@
             <a:spLocks noGrp="1"/>
           </p:cNvSpPr>
           <p:nvPr>
-            <p:ph type="body" sz="quarter" idx="3"/>
+            <p:ph type="body" idx="3" sz="quarter"/>
           </p:nvPr>
         </p:nvSpPr>
         <p:spPr/>
@@ -2020,7 +2226,7 @@
             <a:spLocks noGrp="1"/>
           </p:cNvSpPr>
           <p:nvPr>
-            <p:ph type="sldNum" sz="quarter" idx="5"/>
+            <p:ph type="sldNum" idx="5" sz="quarter"/>
           </p:nvPr>
         </p:nvSpPr>
         <p:spPr/>
@@ -2034,7 +2240,7 @@
 </file>
 
 <file path=ppt/notesSlides/notesSlide32.xml><?xml version="1.0" encoding="utf-8"?>
-<p:notes xmlns:a="http://schemas.openxmlformats.org/drawingml/2006/main" xmlns:r="http://schemas.openxmlformats.org/officeDocument/2006/relationships" xmlns:p="http://schemas.openxmlformats.org/presentationml/2006/main">
+<p:notes xmlns:a="http://schemas.openxmlformats.org/drawingml/2006/main" xmlns:p="http://schemas.openxmlformats.org/presentationml/2006/main" xmlns:r="http://schemas.openxmlformats.org/officeDocument/2006/relationships">
   <p:cSld>
     <p:spTree>
       <p:nvGrpSpPr>
@@ -2054,7 +2260,7 @@
         <p:nvSpPr>
           <p:cNvPr id="2" name="Slide Image Placeholder 1"/>
           <p:cNvSpPr>
-            <a:spLocks noGrp="1" noRot="1" noChangeAspect="1"/>
+            <a:spLocks noGrp="1"/>
           </p:cNvSpPr>
           <p:nvPr>
             <p:ph type="sldImg" idx="2"/>
@@ -2069,7 +2275,7 @@
             <a:spLocks noGrp="1"/>
           </p:cNvSpPr>
           <p:nvPr>
-            <p:ph type="body" sz="quarter" idx="3"/>
+            <p:ph type="body" idx="3" sz="quarter"/>
           </p:nvPr>
         </p:nvSpPr>
         <p:spPr/>
@@ -2090,7 +2296,7 @@
             <a:spLocks noGrp="1"/>
           </p:cNvSpPr>
           <p:nvPr>
-            <p:ph type="sldNum" sz="quarter" idx="5"/>
+            <p:ph type="sldNum" idx="5" sz="quarter"/>
           </p:nvPr>
         </p:nvSpPr>
         <p:spPr/>
@@ -2104,7 +2310,7 @@
 </file>
 
 <file path=ppt/notesSlides/notesSlide33.xml><?xml version="1.0" encoding="utf-8"?>
-<p:notes xmlns:a="http://schemas.openxmlformats.org/drawingml/2006/main" xmlns:r="http://schemas.openxmlformats.org/officeDocument/2006/relationships" xmlns:p="http://schemas.openxmlformats.org/presentationml/2006/main">
+<p:notes xmlns:a="http://schemas.openxmlformats.org/drawingml/2006/main" xmlns:p="http://schemas.openxmlformats.org/presentationml/2006/main" xmlns:r="http://schemas.openxmlformats.org/officeDocument/2006/relationships">
   <p:cSld>
     <p:spTree>
       <p:nvGrpSpPr>
@@ -2124,7 +2330,7 @@
         <p:nvSpPr>
           <p:cNvPr id="2" name="Slide Image Placeholder 1"/>
           <p:cNvSpPr>
-            <a:spLocks noGrp="1" noRot="1" noChangeAspect="1"/>
+            <a:spLocks noGrp="1"/>
           </p:cNvSpPr>
           <p:nvPr>
             <p:ph type="sldImg" idx="2"/>
@@ -2139,7 +2345,7 @@
             <a:spLocks noGrp="1"/>
           </p:cNvSpPr>
           <p:nvPr>
-            <p:ph type="body" sz="quarter" idx="3"/>
+            <p:ph type="body" idx="3" sz="quarter"/>
           </p:nvPr>
         </p:nvSpPr>
         <p:spPr/>
@@ -2148,7 +2354,7 @@
           <a:lstStyle/>
           <a:p>
             <a:r>
-              <a:t>Fill in the repo URL when public. Likely questions: "why not Verilog/SystemVerilog" (taste + type strictness), "why not a Xilinx board" (open toolchain), "how much did the AI actually write" (most of the VHDL drafts; all of the specification, verification, and rejection was mine), "could you run it faster" (yes — 190× headroom — but then the period software’s timing loops break).</a:t>
+              <a:t>Fill in the repo URL when public. Likely questions: "why not Verilog/SystemVerilog" (taste + type strictness), "why not a Xilinx board" (open toolchain), "how much did the AI actually write" (most of the VHDL drafts; all of the specification, verification, and rejection was mine), "could you run it faster" (yes — 230× headroom — but then the period software’s timing loops break).</a:t>
             </a:r>
           </a:p>
         </p:txBody>
@@ -2160,7 +2366,7 @@
             <a:spLocks noGrp="1"/>
           </p:cNvSpPr>
           <p:nvPr>
-            <p:ph type="sldNum" sz="quarter" idx="5"/>
+            <p:ph type="sldNum" idx="5" sz="quarter"/>
           </p:nvPr>
         </p:nvSpPr>
         <p:spPr/>
@@ -2174,7 +2380,7 @@
 </file>
 
 <file path=ppt/notesSlides/notesSlide4.xml><?xml version="1.0" encoding="utf-8"?>
-<p:notes xmlns:a="http://schemas.openxmlformats.org/drawingml/2006/main" xmlns:r="http://schemas.openxmlformats.org/officeDocument/2006/relationships" xmlns:p="http://schemas.openxmlformats.org/presentationml/2006/main">
+<p:notes xmlns:a="http://schemas.openxmlformats.org/drawingml/2006/main" xmlns:p="http://schemas.openxmlformats.org/presentationml/2006/main" xmlns:r="http://schemas.openxmlformats.org/officeDocument/2006/relationships">
   <p:cSld>
     <p:spTree>
       <p:nvGrpSpPr>
@@ -2194,7 +2400,7 @@
         <p:nvSpPr>
           <p:cNvPr id="2" name="Slide Image Placeholder 1"/>
           <p:cNvSpPr>
-            <a:spLocks noGrp="1" noRot="1" noChangeAspect="1"/>
+            <a:spLocks noGrp="1"/>
           </p:cNvSpPr>
           <p:nvPr>
             <p:ph type="sldImg" idx="2"/>
@@ -2209,7 +2415,7 @@
             <a:spLocks noGrp="1"/>
           </p:cNvSpPr>
           <p:nvPr>
-            <p:ph type="body" sz="quarter" idx="3"/>
+            <p:ph type="body" idx="3" sz="quarter"/>
           </p:nvPr>
         </p:nvSpPr>
         <p:spPr/>
@@ -2230,7 +2436,7 @@
             <a:spLocks noGrp="1"/>
           </p:cNvSpPr>
           <p:nvPr>
-            <p:ph type="sldNum" sz="quarter" idx="5"/>
+            <p:ph type="sldNum" idx="5" sz="quarter"/>
           </p:nvPr>
         </p:nvSpPr>
         <p:spPr/>
@@ -2244,7 +2450,7 @@
 </file>
 
 <file path=ppt/notesSlides/notesSlide5.xml><?xml version="1.0" encoding="utf-8"?>
-<p:notes xmlns:a="http://schemas.openxmlformats.org/drawingml/2006/main" xmlns:r="http://schemas.openxmlformats.org/officeDocument/2006/relationships" xmlns:p="http://schemas.openxmlformats.org/presentationml/2006/main">
+<p:notes xmlns:a="http://schemas.openxmlformats.org/drawingml/2006/main" xmlns:p="http://schemas.openxmlformats.org/presentationml/2006/main" xmlns:r="http://schemas.openxmlformats.org/officeDocument/2006/relationships">
   <p:cSld>
     <p:spTree>
       <p:nvGrpSpPr>
@@ -2264,7 +2470,7 @@
         <p:nvSpPr>
           <p:cNvPr id="2" name="Slide Image Placeholder 1"/>
           <p:cNvSpPr>
-            <a:spLocks noGrp="1" noRot="1" noChangeAspect="1"/>
+            <a:spLocks noGrp="1"/>
           </p:cNvSpPr>
           <p:nvPr>
             <p:ph type="sldImg" idx="2"/>
@@ -2279,7 +2485,7 @@
             <a:spLocks noGrp="1"/>
           </p:cNvSpPr>
           <p:nvPr>
-            <p:ph type="body" sz="quarter" idx="3"/>
+            <p:ph type="body" idx="3" sz="quarter"/>
           </p:nvPr>
         </p:nvSpPr>
         <p:spPr/>
@@ -2300,7 +2506,7 @@
             <a:spLocks noGrp="1"/>
           </p:cNvSpPr>
           <p:nvPr>
-            <p:ph type="sldNum" sz="quarter" idx="5"/>
+            <p:ph type="sldNum" idx="5" sz="quarter"/>
           </p:nvPr>
         </p:nvSpPr>
         <p:spPr/>
@@ -2314,7 +2520,7 @@
 </file>
 
 <file path=ppt/notesSlides/notesSlide6.xml><?xml version="1.0" encoding="utf-8"?>
-<p:notes xmlns:a="http://schemas.openxmlformats.org/drawingml/2006/main" xmlns:r="http://schemas.openxmlformats.org/officeDocument/2006/relationships" xmlns:p="http://schemas.openxmlformats.org/presentationml/2006/main">
+<p:notes xmlns:a="http://schemas.openxmlformats.org/drawingml/2006/main" xmlns:p="http://schemas.openxmlformats.org/presentationml/2006/main" xmlns:r="http://schemas.openxmlformats.org/officeDocument/2006/relationships">
   <p:cSld>
     <p:spTree>
       <p:nvGrpSpPr>
@@ -2334,7 +2540,7 @@
         <p:nvSpPr>
           <p:cNvPr id="2" name="Slide Image Placeholder 1"/>
           <p:cNvSpPr>
-            <a:spLocks noGrp="1" noRot="1" noChangeAspect="1"/>
+            <a:spLocks noGrp="1"/>
           </p:cNvSpPr>
           <p:nvPr>
             <p:ph type="sldImg" idx="2"/>
@@ -2349,7 +2555,7 @@
             <a:spLocks noGrp="1"/>
           </p:cNvSpPr>
           <p:nvPr>
-            <p:ph type="body" sz="quarter" idx="3"/>
+            <p:ph type="body" idx="3" sz="quarter"/>
           </p:nvPr>
         </p:nvSpPr>
         <p:spPr/>
@@ -2370,7 +2576,7 @@
             <a:spLocks noGrp="1"/>
           </p:cNvSpPr>
           <p:nvPr>
-            <p:ph type="sldNum" sz="quarter" idx="5"/>
+            <p:ph type="sldNum" idx="5" sz="quarter"/>
           </p:nvPr>
         </p:nvSpPr>
         <p:spPr/>
@@ -2384,7 +2590,7 @@
 </file>
 
 <file path=ppt/notesSlides/notesSlide7.xml><?xml version="1.0" encoding="utf-8"?>
-<p:notes xmlns:a="http://schemas.openxmlformats.org/drawingml/2006/main" xmlns:r="http://schemas.openxmlformats.org/officeDocument/2006/relationships" xmlns:p="http://schemas.openxmlformats.org/presentationml/2006/main">
+<p:notes xmlns:a="http://schemas.openxmlformats.org/drawingml/2006/main" xmlns:p="http://schemas.openxmlformats.org/presentationml/2006/main" xmlns:r="http://schemas.openxmlformats.org/officeDocument/2006/relationships">
   <p:cSld>
     <p:spTree>
       <p:nvGrpSpPr>
@@ -2404,7 +2610,7 @@
         <p:nvSpPr>
           <p:cNvPr id="2" name="Slide Image Placeholder 1"/>
           <p:cNvSpPr>
-            <a:spLocks noGrp="1" noRot="1" noChangeAspect="1"/>
+            <a:spLocks noGrp="1"/>
           </p:cNvSpPr>
           <p:nvPr>
             <p:ph type="sldImg" idx="2"/>
@@ -2419,7 +2625,7 @@
             <a:spLocks noGrp="1"/>
           </p:cNvSpPr>
           <p:nvPr>
-            <p:ph type="body" sz="quarter" idx="3"/>
+            <p:ph type="body" idx="3" sz="quarter"/>
           </p:nvPr>
         </p:nvSpPr>
         <p:spPr/>
@@ -2440,7 +2646,7 @@
             <a:spLocks noGrp="1"/>
           </p:cNvSpPr>
           <p:nvPr>
-            <p:ph type="sldNum" sz="quarter" idx="5"/>
+            <p:ph type="sldNum" idx="5" sz="quarter"/>
           </p:nvPr>
         </p:nvSpPr>
         <p:spPr/>
@@ -2454,7 +2660,7 @@
 </file>
 
 <file path=ppt/notesSlides/notesSlide8.xml><?xml version="1.0" encoding="utf-8"?>
-<p:notes xmlns:a="http://schemas.openxmlformats.org/drawingml/2006/main" xmlns:r="http://schemas.openxmlformats.org/officeDocument/2006/relationships" xmlns:p="http://schemas.openxmlformats.org/presentationml/2006/main">
+<p:notes xmlns:a="http://schemas.openxmlformats.org/drawingml/2006/main" xmlns:p="http://schemas.openxmlformats.org/presentationml/2006/main" xmlns:r="http://schemas.openxmlformats.org/officeDocument/2006/relationships">
   <p:cSld>
     <p:spTree>
       <p:nvGrpSpPr>
@@ -2474,7 +2680,7 @@
         <p:nvSpPr>
           <p:cNvPr id="2" name="Slide Image Placeholder 1"/>
           <p:cNvSpPr>
-            <a:spLocks noGrp="1" noRot="1" noChangeAspect="1"/>
+            <a:spLocks noGrp="1"/>
           </p:cNvSpPr>
           <p:nvPr>
             <p:ph type="sldImg" idx="2"/>
@@ -2489,7 +2695,7 @@
             <a:spLocks noGrp="1"/>
           </p:cNvSpPr>
           <p:nvPr>
-            <p:ph type="body" sz="quarter" idx="3"/>
+            <p:ph type="body" idx="3" sz="quarter"/>
           </p:nvPr>
         </p:nvSpPr>
         <p:spPr/>
@@ -2510,7 +2716,7 @@
             <a:spLocks noGrp="1"/>
           </p:cNvSpPr>
           <p:nvPr>
-            <p:ph type="sldNum" sz="quarter" idx="5"/>
+            <p:ph type="sldNum" idx="5" sz="quarter"/>
           </p:nvPr>
         </p:nvSpPr>
         <p:spPr/>
@@ -2524,7 +2730,7 @@
 </file>
 
 <file path=ppt/notesSlides/notesSlide9.xml><?xml version="1.0" encoding="utf-8"?>
-<p:notes xmlns:a="http://schemas.openxmlformats.org/drawingml/2006/main" xmlns:r="http://schemas.openxmlformats.org/officeDocument/2006/relationships" xmlns:p="http://schemas.openxmlformats.org/presentationml/2006/main">
+<p:notes xmlns:a="http://schemas.openxmlformats.org/drawingml/2006/main" xmlns:p="http://schemas.openxmlformats.org/presentationml/2006/main" xmlns:r="http://schemas.openxmlformats.org/officeDocument/2006/relationships">
   <p:cSld>
     <p:spTree>
       <p:nvGrpSpPr>
@@ -2544,7 +2750,7 @@
         <p:nvSpPr>
           <p:cNvPr id="2" name="Slide Image Placeholder 1"/>
           <p:cNvSpPr>
-            <a:spLocks noGrp="1" noRot="1" noChangeAspect="1"/>
+            <a:spLocks noGrp="1"/>
           </p:cNvSpPr>
           <p:nvPr>
             <p:ph type="sldImg" idx="2"/>
@@ -2559,7 +2765,7 @@
             <a:spLocks noGrp="1"/>
           </p:cNvSpPr>
           <p:nvPr>
-            <p:ph type="body" sz="quarter" idx="3"/>
+            <p:ph type="body" idx="3" sz="quarter"/>
           </p:nvPr>
         </p:nvSpPr>
         <p:spPr/>
@@ -2580,7 +2786,7 @@
             <a:spLocks noGrp="1"/>
           </p:cNvSpPr>
           <p:nvPr>
-            <p:ph type="sldNum" sz="quarter" idx="5"/>
+            <p:ph type="sldNum" idx="5" sz="quarter"/>
           </p:nvPr>
         </p:nvSpPr>
         <p:spPr/>
@@ -2631,9 +2837,10 @@
           <a:lstStyle/>
           <a:p>
             <a:r>
-              <a:rPr lang="en-US"/>
+              <a:rPr lang="en-US" smtClean="0"/>
               <a:t>Click to edit Master title style</a:t>
             </a:r>
+            <a:endParaRPr lang="en-US"/>
           </a:p>
         </p:txBody>
       </p:sp>
@@ -2749,9 +2956,10 @@
           </a:lstStyle>
           <a:p>
             <a:r>
-              <a:rPr lang="en-US"/>
+              <a:rPr lang="en-US" smtClean="0"/>
               <a:t>Click to edit Master subtitle style</a:t>
             </a:r>
+            <a:endParaRPr lang="en-US"/>
           </a:p>
         </p:txBody>
       </p:sp>
@@ -2772,7 +2980,7 @@
           <a:p>
             <a:fld id="{5BCAD085-E8A6-8845-BD4E-CB4CCA059FC4}" type="datetimeFigureOut">
               <a:rPr lang="en-US" smtClean="0"/>
-              <a:t>8/9/26</a:t>
+              <a:t>1/27/13</a:t>
             </a:fld>
             <a:endParaRPr lang="en-US"/>
           </a:p>
@@ -2866,9 +3074,10 @@
           <a:lstStyle/>
           <a:p>
             <a:r>
-              <a:rPr lang="en-US"/>
+              <a:rPr lang="en-US" smtClean="0"/>
               <a:t>Click to edit Master title style</a:t>
             </a:r>
+            <a:endParaRPr lang="en-US"/>
           </a:p>
         </p:txBody>
       </p:sp>
@@ -2889,37 +3098,38 @@
           <a:p>
             <a:pPr lvl="0"/>
             <a:r>
-              <a:rPr lang="en-US"/>
+              <a:rPr lang="en-US" smtClean="0"/>
               <a:t>Click to edit Master text styles</a:t>
             </a:r>
           </a:p>
           <a:p>
             <a:pPr lvl="1"/>
             <a:r>
-              <a:rPr lang="en-US"/>
+              <a:rPr lang="en-US" smtClean="0"/>
               <a:t>Second level</a:t>
             </a:r>
           </a:p>
           <a:p>
             <a:pPr lvl="2"/>
             <a:r>
-              <a:rPr lang="en-US"/>
+              <a:rPr lang="en-US" smtClean="0"/>
               <a:t>Third level</a:t>
             </a:r>
           </a:p>
           <a:p>
             <a:pPr lvl="3"/>
             <a:r>
-              <a:rPr lang="en-US"/>
+              <a:rPr lang="en-US" smtClean="0"/>
               <a:t>Fourth level</a:t>
             </a:r>
           </a:p>
           <a:p>
             <a:pPr lvl="4"/>
             <a:r>
-              <a:rPr lang="en-US"/>
+              <a:rPr lang="en-US" smtClean="0"/>
               <a:t>Fifth level</a:t>
             </a:r>
+            <a:endParaRPr lang="en-US"/>
           </a:p>
         </p:txBody>
       </p:sp>
@@ -2940,7 +3150,7 @@
           <a:p>
             <a:fld id="{5BCAD085-E8A6-8845-BD4E-CB4CCA059FC4}" type="datetimeFigureOut">
               <a:rPr lang="en-US" smtClean="0"/>
-              <a:t>8/9/26</a:t>
+              <a:t>1/27/13</a:t>
             </a:fld>
             <a:endParaRPr lang="en-US"/>
           </a:p>
@@ -3039,9 +3249,10 @@
           <a:lstStyle/>
           <a:p>
             <a:r>
-              <a:rPr lang="en-US"/>
+              <a:rPr lang="en-US" smtClean="0"/>
               <a:t>Click to edit Master title style</a:t>
             </a:r>
+            <a:endParaRPr lang="en-US"/>
           </a:p>
         </p:txBody>
       </p:sp>
@@ -3067,37 +3278,38 @@
           <a:p>
             <a:pPr lvl="0"/>
             <a:r>
-              <a:rPr lang="en-US"/>
+              <a:rPr lang="en-US" smtClean="0"/>
               <a:t>Click to edit Master text styles</a:t>
             </a:r>
           </a:p>
           <a:p>
             <a:pPr lvl="1"/>
             <a:r>
-              <a:rPr lang="en-US"/>
+              <a:rPr lang="en-US" smtClean="0"/>
               <a:t>Second level</a:t>
             </a:r>
           </a:p>
           <a:p>
             <a:pPr lvl="2"/>
             <a:r>
-              <a:rPr lang="en-US"/>
+              <a:rPr lang="en-US" smtClean="0"/>
               <a:t>Third level</a:t>
             </a:r>
           </a:p>
           <a:p>
             <a:pPr lvl="3"/>
             <a:r>
-              <a:rPr lang="en-US"/>
+              <a:rPr lang="en-US" smtClean="0"/>
               <a:t>Fourth level</a:t>
             </a:r>
           </a:p>
           <a:p>
             <a:pPr lvl="4"/>
             <a:r>
-              <a:rPr lang="en-US"/>
+              <a:rPr lang="en-US" smtClean="0"/>
               <a:t>Fifth level</a:t>
             </a:r>
+            <a:endParaRPr lang="en-US"/>
           </a:p>
         </p:txBody>
       </p:sp>
@@ -3118,7 +3330,7 @@
           <a:p>
             <a:fld id="{5BCAD085-E8A6-8845-BD4E-CB4CCA059FC4}" type="datetimeFigureOut">
               <a:rPr lang="en-US" smtClean="0"/>
-              <a:t>8/9/26</a:t>
+              <a:t>1/27/13</a:t>
             </a:fld>
             <a:endParaRPr lang="en-US"/>
           </a:p>
@@ -3212,9 +3424,10 @@
           <a:lstStyle/>
           <a:p>
             <a:r>
-              <a:rPr lang="en-US"/>
+              <a:rPr lang="en-US" smtClean="0"/>
               <a:t>Click to edit Master title style</a:t>
             </a:r>
+            <a:endParaRPr lang="en-US"/>
           </a:p>
         </p:txBody>
       </p:sp>
@@ -3235,37 +3448,38 @@
           <a:p>
             <a:pPr lvl="0"/>
             <a:r>
-              <a:rPr lang="en-US"/>
+              <a:rPr lang="en-US" smtClean="0"/>
               <a:t>Click to edit Master text styles</a:t>
             </a:r>
           </a:p>
           <a:p>
             <a:pPr lvl="1"/>
             <a:r>
-              <a:rPr lang="en-US"/>
+              <a:rPr lang="en-US" smtClean="0"/>
               <a:t>Second level</a:t>
             </a:r>
           </a:p>
           <a:p>
             <a:pPr lvl="2"/>
             <a:r>
-              <a:rPr lang="en-US"/>
+              <a:rPr lang="en-US" smtClean="0"/>
               <a:t>Third level</a:t>
             </a:r>
           </a:p>
           <a:p>
             <a:pPr lvl="3"/>
             <a:r>
-              <a:rPr lang="en-US"/>
+              <a:rPr lang="en-US" smtClean="0"/>
               <a:t>Fourth level</a:t>
             </a:r>
           </a:p>
           <a:p>
             <a:pPr lvl="4"/>
             <a:r>
-              <a:rPr lang="en-US"/>
+              <a:rPr lang="en-US" smtClean="0"/>
               <a:t>Fifth level</a:t>
             </a:r>
+            <a:endParaRPr lang="en-US"/>
           </a:p>
         </p:txBody>
       </p:sp>
@@ -3286,7 +3500,7 @@
           <a:p>
             <a:fld id="{5BCAD085-E8A6-8845-BD4E-CB4CCA059FC4}" type="datetimeFigureOut">
               <a:rPr lang="en-US" smtClean="0"/>
-              <a:t>8/9/26</a:t>
+              <a:t>1/27/13</a:t>
             </a:fld>
             <a:endParaRPr lang="en-US"/>
           </a:p>
@@ -3389,9 +3603,10 @@
           </a:lstStyle>
           <a:p>
             <a:r>
-              <a:rPr lang="en-US"/>
+              <a:rPr lang="en-US" smtClean="0"/>
               <a:t>Click to edit Master title style</a:t>
             </a:r>
+            <a:endParaRPr lang="en-US"/>
           </a:p>
         </p:txBody>
       </p:sp>
@@ -3508,7 +3723,7 @@
           <a:p>
             <a:pPr lvl="0"/>
             <a:r>
-              <a:rPr lang="en-US"/>
+              <a:rPr lang="en-US" smtClean="0"/>
               <a:t>Click to edit Master text styles</a:t>
             </a:r>
           </a:p>
@@ -3531,7 +3746,7 @@
           <a:p>
             <a:fld id="{5BCAD085-E8A6-8845-BD4E-CB4CCA059FC4}" type="datetimeFigureOut">
               <a:rPr lang="en-US" smtClean="0"/>
-              <a:t>8/9/26</a:t>
+              <a:t>1/27/13</a:t>
             </a:fld>
             <a:endParaRPr lang="en-US"/>
           </a:p>
@@ -3625,9 +3840,10 @@
           <a:lstStyle/>
           <a:p>
             <a:r>
-              <a:rPr lang="en-US"/>
+              <a:rPr lang="en-US" smtClean="0"/>
               <a:t>Click to edit Master title style</a:t>
             </a:r>
+            <a:endParaRPr lang="en-US"/>
           </a:p>
         </p:txBody>
       </p:sp>
@@ -3681,37 +3897,38 @@
           <a:p>
             <a:pPr lvl="0"/>
             <a:r>
-              <a:rPr lang="en-US"/>
+              <a:rPr lang="en-US" smtClean="0"/>
               <a:t>Click to edit Master text styles</a:t>
             </a:r>
           </a:p>
           <a:p>
             <a:pPr lvl="1"/>
             <a:r>
-              <a:rPr lang="en-US"/>
+              <a:rPr lang="en-US" smtClean="0"/>
               <a:t>Second level</a:t>
             </a:r>
           </a:p>
           <a:p>
             <a:pPr lvl="2"/>
             <a:r>
-              <a:rPr lang="en-US"/>
+              <a:rPr lang="en-US" smtClean="0"/>
               <a:t>Third level</a:t>
             </a:r>
           </a:p>
           <a:p>
             <a:pPr lvl="3"/>
             <a:r>
-              <a:rPr lang="en-US"/>
+              <a:rPr lang="en-US" smtClean="0"/>
               <a:t>Fourth level</a:t>
             </a:r>
           </a:p>
           <a:p>
             <a:pPr lvl="4"/>
             <a:r>
-              <a:rPr lang="en-US"/>
+              <a:rPr lang="en-US" smtClean="0"/>
               <a:t>Fifth level</a:t>
             </a:r>
+            <a:endParaRPr lang="en-US"/>
           </a:p>
         </p:txBody>
       </p:sp>
@@ -3765,37 +3982,38 @@
           <a:p>
             <a:pPr lvl="0"/>
             <a:r>
-              <a:rPr lang="en-US"/>
+              <a:rPr lang="en-US" smtClean="0"/>
               <a:t>Click to edit Master text styles</a:t>
             </a:r>
           </a:p>
           <a:p>
             <a:pPr lvl="1"/>
             <a:r>
-              <a:rPr lang="en-US"/>
+              <a:rPr lang="en-US" smtClean="0"/>
               <a:t>Second level</a:t>
             </a:r>
           </a:p>
           <a:p>
             <a:pPr lvl="2"/>
             <a:r>
-              <a:rPr lang="en-US"/>
+              <a:rPr lang="en-US" smtClean="0"/>
               <a:t>Third level</a:t>
             </a:r>
           </a:p>
           <a:p>
             <a:pPr lvl="3"/>
             <a:r>
-              <a:rPr lang="en-US"/>
+              <a:rPr lang="en-US" smtClean="0"/>
               <a:t>Fourth level</a:t>
             </a:r>
           </a:p>
           <a:p>
             <a:pPr lvl="4"/>
             <a:r>
-              <a:rPr lang="en-US"/>
+              <a:rPr lang="en-US" smtClean="0"/>
               <a:t>Fifth level</a:t>
             </a:r>
+            <a:endParaRPr lang="en-US"/>
           </a:p>
         </p:txBody>
       </p:sp>
@@ -3816,7 +4034,7 @@
           <a:p>
             <a:fld id="{5BCAD085-E8A6-8845-BD4E-CB4CCA059FC4}" type="datetimeFigureOut">
               <a:rPr lang="en-US" smtClean="0"/>
-              <a:t>8/9/26</a:t>
+              <a:t>1/27/13</a:t>
             </a:fld>
             <a:endParaRPr lang="en-US"/>
           </a:p>
@@ -3914,9 +4132,10 @@
           </a:lstStyle>
           <a:p>
             <a:r>
-              <a:rPr lang="en-US"/>
+              <a:rPr lang="en-US" smtClean="0"/>
               <a:t>Click to edit Master title style</a:t>
             </a:r>
+            <a:endParaRPr lang="en-US"/>
           </a:p>
         </p:txBody>
       </p:sp>
@@ -3979,7 +4198,7 @@
           <a:p>
             <a:pPr lvl="0"/>
             <a:r>
-              <a:rPr lang="en-US"/>
+              <a:rPr lang="en-US" smtClean="0"/>
               <a:t>Click to edit Master text styles</a:t>
             </a:r>
           </a:p>
@@ -4035,37 +4254,38 @@
           <a:p>
             <a:pPr lvl="0"/>
             <a:r>
-              <a:rPr lang="en-US"/>
+              <a:rPr lang="en-US" smtClean="0"/>
               <a:t>Click to edit Master text styles</a:t>
             </a:r>
           </a:p>
           <a:p>
             <a:pPr lvl="1"/>
             <a:r>
-              <a:rPr lang="en-US"/>
+              <a:rPr lang="en-US" smtClean="0"/>
               <a:t>Second level</a:t>
             </a:r>
           </a:p>
           <a:p>
             <a:pPr lvl="2"/>
             <a:r>
-              <a:rPr lang="en-US"/>
+              <a:rPr lang="en-US" smtClean="0"/>
               <a:t>Third level</a:t>
             </a:r>
           </a:p>
           <a:p>
             <a:pPr lvl="3"/>
             <a:r>
-              <a:rPr lang="en-US"/>
+              <a:rPr lang="en-US" smtClean="0"/>
               <a:t>Fourth level</a:t>
             </a:r>
           </a:p>
           <a:p>
             <a:pPr lvl="4"/>
             <a:r>
-              <a:rPr lang="en-US"/>
+              <a:rPr lang="en-US" smtClean="0"/>
               <a:t>Fifth level</a:t>
             </a:r>
+            <a:endParaRPr lang="en-US"/>
           </a:p>
         </p:txBody>
       </p:sp>
@@ -4128,7 +4348,7 @@
           <a:p>
             <a:pPr lvl="0"/>
             <a:r>
-              <a:rPr lang="en-US"/>
+              <a:rPr lang="en-US" smtClean="0"/>
               <a:t>Click to edit Master text styles</a:t>
             </a:r>
           </a:p>
@@ -4184,37 +4404,38 @@
           <a:p>
             <a:pPr lvl="0"/>
             <a:r>
-              <a:rPr lang="en-US"/>
+              <a:rPr lang="en-US" smtClean="0"/>
               <a:t>Click to edit Master text styles</a:t>
             </a:r>
           </a:p>
           <a:p>
             <a:pPr lvl="1"/>
             <a:r>
-              <a:rPr lang="en-US"/>
+              <a:rPr lang="en-US" smtClean="0"/>
               <a:t>Second level</a:t>
             </a:r>
           </a:p>
           <a:p>
             <a:pPr lvl="2"/>
             <a:r>
-              <a:rPr lang="en-US"/>
+              <a:rPr lang="en-US" smtClean="0"/>
               <a:t>Third level</a:t>
             </a:r>
           </a:p>
           <a:p>
             <a:pPr lvl="3"/>
             <a:r>
-              <a:rPr lang="en-US"/>
+              <a:rPr lang="en-US" smtClean="0"/>
               <a:t>Fourth level</a:t>
             </a:r>
           </a:p>
           <a:p>
             <a:pPr lvl="4"/>
             <a:r>
-              <a:rPr lang="en-US"/>
+              <a:rPr lang="en-US" smtClean="0"/>
               <a:t>Fifth level</a:t>
             </a:r>
+            <a:endParaRPr lang="en-US"/>
           </a:p>
         </p:txBody>
       </p:sp>
@@ -4235,7 +4456,7 @@
           <a:p>
             <a:fld id="{5BCAD085-E8A6-8845-BD4E-CB4CCA059FC4}" type="datetimeFigureOut">
               <a:rPr lang="en-US" smtClean="0"/>
-              <a:t>8/9/26</a:t>
+              <a:t>1/27/13</a:t>
             </a:fld>
             <a:endParaRPr lang="en-US"/>
           </a:p>
@@ -4329,9 +4550,10 @@
           <a:lstStyle/>
           <a:p>
             <a:r>
-              <a:rPr lang="en-US"/>
+              <a:rPr lang="en-US" smtClean="0"/>
               <a:t>Click to edit Master title style</a:t>
             </a:r>
+            <a:endParaRPr lang="en-US"/>
           </a:p>
         </p:txBody>
       </p:sp>
@@ -4352,7 +4574,7 @@
           <a:p>
             <a:fld id="{5BCAD085-E8A6-8845-BD4E-CB4CCA059FC4}" type="datetimeFigureOut">
               <a:rPr lang="en-US" smtClean="0"/>
-              <a:t>8/9/26</a:t>
+              <a:t>1/27/13</a:t>
             </a:fld>
             <a:endParaRPr lang="en-US"/>
           </a:p>
@@ -4447,7 +4669,7 @@
           <a:p>
             <a:fld id="{5BCAD085-E8A6-8845-BD4E-CB4CCA059FC4}" type="datetimeFigureOut">
               <a:rPr lang="en-US" smtClean="0"/>
-              <a:t>8/9/26</a:t>
+              <a:t>1/27/13</a:t>
             </a:fld>
             <a:endParaRPr lang="en-US"/>
           </a:p>
@@ -4550,9 +4772,10 @@
           </a:lstStyle>
           <a:p>
             <a:r>
-              <a:rPr lang="en-US"/>
+              <a:rPr lang="en-US" smtClean="0"/>
               <a:t>Click to edit Master title style</a:t>
             </a:r>
+            <a:endParaRPr lang="en-US"/>
           </a:p>
         </p:txBody>
       </p:sp>
@@ -4606,37 +4829,38 @@
           <a:p>
             <a:pPr lvl="0"/>
             <a:r>
-              <a:rPr lang="en-US"/>
+              <a:rPr lang="en-US" smtClean="0"/>
               <a:t>Click to edit Master text styles</a:t>
             </a:r>
           </a:p>
           <a:p>
             <a:pPr lvl="1"/>
             <a:r>
-              <a:rPr lang="en-US"/>
+              <a:rPr lang="en-US" smtClean="0"/>
               <a:t>Second level</a:t>
             </a:r>
           </a:p>
           <a:p>
             <a:pPr lvl="2"/>
             <a:r>
-              <a:rPr lang="en-US"/>
+              <a:rPr lang="en-US" smtClean="0"/>
               <a:t>Third level</a:t>
             </a:r>
           </a:p>
           <a:p>
             <a:pPr lvl="3"/>
             <a:r>
-              <a:rPr lang="en-US"/>
+              <a:rPr lang="en-US" smtClean="0"/>
               <a:t>Fourth level</a:t>
             </a:r>
           </a:p>
           <a:p>
             <a:pPr lvl="4"/>
             <a:r>
-              <a:rPr lang="en-US"/>
+              <a:rPr lang="en-US" smtClean="0"/>
               <a:t>Fifth level</a:t>
             </a:r>
+            <a:endParaRPr lang="en-US"/>
           </a:p>
         </p:txBody>
       </p:sp>
@@ -4699,7 +4923,7 @@
           <a:p>
             <a:pPr lvl="0"/>
             <a:r>
-              <a:rPr lang="en-US"/>
+              <a:rPr lang="en-US" smtClean="0"/>
               <a:t>Click to edit Master text styles</a:t>
             </a:r>
           </a:p>
@@ -4722,7 +4946,7 @@
           <a:p>
             <a:fld id="{5BCAD085-E8A6-8845-BD4E-CB4CCA059FC4}" type="datetimeFigureOut">
               <a:rPr lang="en-US" smtClean="0"/>
-              <a:t>8/9/26</a:t>
+              <a:t>1/27/13</a:t>
             </a:fld>
             <a:endParaRPr lang="en-US"/>
           </a:p>
@@ -4825,9 +5049,10 @@
           </a:lstStyle>
           <a:p>
             <a:r>
-              <a:rPr lang="en-US"/>
+              <a:rPr lang="en-US" smtClean="0"/>
               <a:t>Click to edit Master title style</a:t>
             </a:r>
+            <a:endParaRPr lang="en-US"/>
           </a:p>
         </p:txBody>
       </p:sp>
@@ -4951,7 +5176,7 @@
           <a:p>
             <a:pPr lvl="0"/>
             <a:r>
-              <a:rPr lang="en-US"/>
+              <a:rPr lang="en-US" smtClean="0"/>
               <a:t>Click to edit Master text styles</a:t>
             </a:r>
           </a:p>
@@ -4974,7 +5199,7 @@
           <a:p>
             <a:fld id="{5BCAD085-E8A6-8845-BD4E-CB4CCA059FC4}" type="datetimeFigureOut">
               <a:rPr lang="en-US" smtClean="0"/>
-              <a:t>8/9/26</a:t>
+              <a:t>1/27/13</a:t>
             </a:fld>
             <a:endParaRPr lang="en-US"/>
           </a:p>
@@ -5083,9 +5308,10 @@
           <a:lstStyle/>
           <a:p>
             <a:r>
-              <a:rPr lang="en-US"/>
+              <a:rPr lang="en-US" smtClean="0"/>
               <a:t>Click to edit Master title style</a:t>
             </a:r>
+            <a:endParaRPr lang="en-US"/>
           </a:p>
         </p:txBody>
       </p:sp>
@@ -5116,37 +5342,38 @@
           <a:p>
             <a:pPr lvl="0"/>
             <a:r>
-              <a:rPr lang="en-US"/>
+              <a:rPr lang="en-US" smtClean="0"/>
               <a:t>Click to edit Master text styles</a:t>
             </a:r>
           </a:p>
           <a:p>
             <a:pPr lvl="1"/>
             <a:r>
-              <a:rPr lang="en-US"/>
+              <a:rPr lang="en-US" smtClean="0"/>
               <a:t>Second level</a:t>
             </a:r>
           </a:p>
           <a:p>
             <a:pPr lvl="2"/>
             <a:r>
-              <a:rPr lang="en-US"/>
+              <a:rPr lang="en-US" smtClean="0"/>
               <a:t>Third level</a:t>
             </a:r>
           </a:p>
           <a:p>
             <a:pPr lvl="3"/>
             <a:r>
-              <a:rPr lang="en-US"/>
+              <a:rPr lang="en-US" smtClean="0"/>
               <a:t>Fourth level</a:t>
             </a:r>
           </a:p>
           <a:p>
             <a:pPr lvl="4"/>
             <a:r>
-              <a:rPr lang="en-US"/>
+              <a:rPr lang="en-US" smtClean="0"/>
               <a:t>Fifth level</a:t>
             </a:r>
+            <a:endParaRPr lang="en-US"/>
           </a:p>
         </p:txBody>
       </p:sp>
@@ -5185,7 +5412,7 @@
           <a:p>
             <a:fld id="{5BCAD085-E8A6-8845-BD4E-CB4CCA059FC4}" type="datetimeFigureOut">
               <a:rPr lang="en-US" smtClean="0"/>
-              <a:t>8/9/26</a:t>
+              <a:t>1/27/13</a:t>
             </a:fld>
             <a:endParaRPr lang="en-US"/>
           </a:p>
@@ -5544,7 +5771,7 @@
 </file>
 
 <file path=ppt/slides/slide1.xml><?xml version="1.0" encoding="utf-8"?>
-<p:sld xmlns:a="http://schemas.openxmlformats.org/drawingml/2006/main" xmlns:r="http://schemas.openxmlformats.org/officeDocument/2006/relationships" xmlns:p="http://schemas.openxmlformats.org/presentationml/2006/main">
+<p:sld xmlns:a="http://schemas.openxmlformats.org/drawingml/2006/main" xmlns:p="http://schemas.openxmlformats.org/presentationml/2006/main" xmlns:r="http://schemas.openxmlformats.org/officeDocument/2006/relationships">
   <p:cSld>
     <p:bg>
       <p:bgPr>
@@ -5560,14 +5787,7 @@
         <p:cNvGrpSpPr/>
         <p:nvPr/>
       </p:nvGrpSpPr>
-      <p:grpSpPr>
-        <a:xfrm>
-          <a:off x="0" y="0"/>
-          <a:ext cx="0" cy="0"/>
-          <a:chOff x="0" y="0"/>
-          <a:chExt cx="0" cy="0"/>
-        </a:xfrm>
-      </p:grpSpPr>
+      <p:grpSpPr/>
       <p:sp>
         <p:nvSpPr>
           <p:cNvPr id="2" name="TextBox 1"/>
@@ -5693,7 +5913,6 @@
           <a:lstStyle/>
           <a:p>
             <a:pPr algn="ctr"/>
-            <a:endParaRPr/>
           </a:p>
         </p:txBody>
       </p:sp>
@@ -5706,7 +5925,7 @@
           <p:nvPr/>
         </p:nvPicPr>
         <p:blipFill>
-          <a:blip r:embed="rId3"/>
+          <a:blip r:embed="rId2"/>
           <a:stretch>
             <a:fillRect/>
           </a:stretch>
@@ -5731,7 +5950,7 @@
           <p:nvPr/>
         </p:nvPicPr>
         <p:blipFill>
-          <a:blip r:embed="rId4"/>
+          <a:blip r:embed="rId3"/>
           <a:stretch>
             <a:fillRect/>
           </a:stretch>
@@ -5795,7 +6014,7 @@
 </file>
 
 <file path=ppt/slides/slide10.xml><?xml version="1.0" encoding="utf-8"?>
-<p:sld xmlns:a="http://schemas.openxmlformats.org/drawingml/2006/main" xmlns:r="http://schemas.openxmlformats.org/officeDocument/2006/relationships" xmlns:p="http://schemas.openxmlformats.org/presentationml/2006/main">
+<p:sld xmlns:a="http://schemas.openxmlformats.org/drawingml/2006/main" xmlns:p="http://schemas.openxmlformats.org/presentationml/2006/main" xmlns:r="http://schemas.openxmlformats.org/officeDocument/2006/relationships">
   <p:cSld>
     <p:bg>
       <p:bgPr>
@@ -5811,14 +6030,7 @@
         <p:cNvGrpSpPr/>
         <p:nvPr/>
       </p:nvGrpSpPr>
-      <p:grpSpPr>
-        <a:xfrm>
-          <a:off x="0" y="0"/>
-          <a:ext cx="0" cy="0"/>
-          <a:chOff x="0" y="0"/>
-          <a:chExt cx="0" cy="0"/>
-        </a:xfrm>
-      </p:grpSpPr>
+      <p:grpSpPr/>
       <p:sp>
         <p:nvSpPr>
           <p:cNvPr id="2" name="TextBox 1"/>
@@ -5927,7 +6139,6 @@
           <a:lstStyle/>
           <a:p>
             <a:pPr algn="ctr"/>
-            <a:endParaRPr/>
           </a:p>
         </p:txBody>
       </p:sp>
@@ -6009,7 +6220,7 @@
           </a:fontRef>
         </p:style>
         <p:txBody>
-          <a:bodyPr wrap="square" lIns="256032" tIns="228600" rIns="182880" rtlCol="0" anchor="ctr"/>
+          <a:bodyPr rtlCol="0" anchor="ctr" wrap="square" lIns="256032" rIns="182880" tIns="228600"/>
           <a:lstStyle/>
           <a:p>
             <a:pPr algn="l"/>
@@ -6100,7 +6311,6 @@
           <a:lstStyle/>
           <a:p>
             <a:pPr algn="ctr"/>
-            <a:endParaRPr/>
           </a:p>
         </p:txBody>
       </p:sp>
@@ -6143,7 +6353,7 @@
           </a:fontRef>
         </p:style>
         <p:txBody>
-          <a:bodyPr wrap="square" lIns="256032" tIns="228600" rIns="182880" rtlCol="0" anchor="ctr"/>
+          <a:bodyPr rtlCol="0" anchor="ctr" wrap="square" lIns="256032" rIns="182880" tIns="228600"/>
           <a:lstStyle/>
           <a:p>
             <a:pPr algn="l"/>
@@ -6262,7 +6472,6 @@
           <a:lstStyle/>
           <a:p>
             <a:pPr algn="ctr"/>
-            <a:endParaRPr/>
           </a:p>
         </p:txBody>
       </p:sp>
@@ -6305,7 +6514,7 @@
           </a:fontRef>
         </p:style>
         <p:txBody>
-          <a:bodyPr wrap="square" lIns="256032" tIns="228600" rIns="182880" rtlCol="0" anchor="ctr"/>
+          <a:bodyPr rtlCol="0" anchor="ctr" wrap="square" lIns="256032" rIns="182880" tIns="228600"/>
           <a:lstStyle/>
           <a:p>
             <a:pPr algn="l"/>
@@ -6397,7 +6606,6 @@
           <a:lstStyle/>
           <a:p>
             <a:pPr algn="ctr"/>
-            <a:endParaRPr/>
           </a:p>
         </p:txBody>
       </p:sp>
@@ -6438,7 +6646,7 @@
           </a:fontRef>
         </p:style>
         <p:txBody>
-          <a:bodyPr wrap="square" rtlCol="0" anchor="ctr"/>
+          <a:bodyPr rtlCol="0" anchor="ctr" wrap="square"/>
           <a:lstStyle/>
           <a:p>
             <a:pPr algn="ctr"/>
@@ -6463,7 +6671,7 @@
 </file>
 
 <file path=ppt/slides/slide11.xml><?xml version="1.0" encoding="utf-8"?>
-<p:sld xmlns:a="http://schemas.openxmlformats.org/drawingml/2006/main" xmlns:r="http://schemas.openxmlformats.org/officeDocument/2006/relationships" xmlns:p="http://schemas.openxmlformats.org/presentationml/2006/main">
+<p:sld xmlns:a="http://schemas.openxmlformats.org/drawingml/2006/main" xmlns:p="http://schemas.openxmlformats.org/presentationml/2006/main" xmlns:r="http://schemas.openxmlformats.org/officeDocument/2006/relationships">
   <p:cSld>
     <p:bg>
       <p:bgPr>
@@ -6479,14 +6687,7 @@
         <p:cNvGrpSpPr/>
         <p:nvPr/>
       </p:nvGrpSpPr>
-      <p:grpSpPr>
-        <a:xfrm>
-          <a:off x="0" y="0"/>
-          <a:ext cx="0" cy="0"/>
-          <a:chOff x="0" y="0"/>
-          <a:chExt cx="0" cy="0"/>
-        </a:xfrm>
-      </p:grpSpPr>
+      <p:grpSpPr/>
       <p:sp>
         <p:nvSpPr>
           <p:cNvPr id="2" name="TextBox 1"/>
@@ -6595,7 +6796,6 @@
           <a:lstStyle/>
           <a:p>
             <a:pPr algn="ctr"/>
-            <a:endParaRPr/>
           </a:p>
         </p:txBody>
       </p:sp>
@@ -6636,7 +6836,7 @@
           </a:fontRef>
         </p:style>
         <p:txBody>
-          <a:bodyPr wrap="none" lIns="201168" tIns="137160" rIns="137160" bIns="109728" rtlCol="0" anchor="ctr"/>
+          <a:bodyPr rtlCol="0" anchor="ctr" wrap="none" lIns="201168" tIns="137160" rIns="137160" bIns="109728"/>
           <a:lstStyle/>
           <a:p>
             <a:pPr algn="ctr">
@@ -6853,7 +7053,7 @@
           </a:fontRef>
         </p:style>
         <p:txBody>
-          <a:bodyPr wrap="none" lIns="201168" tIns="137160" rIns="137160" bIns="109728" rtlCol="0" anchor="ctr"/>
+          <a:bodyPr rtlCol="0" anchor="ctr" wrap="none" lIns="201168" tIns="137160" rIns="137160" bIns="109728"/>
           <a:lstStyle/>
           <a:p>
             <a:pPr algn="ctr">
@@ -7126,7 +7326,7 @@
 </file>
 
 <file path=ppt/slides/slide12.xml><?xml version="1.0" encoding="utf-8"?>
-<p:sld xmlns:a="http://schemas.openxmlformats.org/drawingml/2006/main" xmlns:r="http://schemas.openxmlformats.org/officeDocument/2006/relationships" xmlns:p="http://schemas.openxmlformats.org/presentationml/2006/main">
+<p:sld xmlns:a="http://schemas.openxmlformats.org/drawingml/2006/main" xmlns:p="http://schemas.openxmlformats.org/presentationml/2006/main" xmlns:r="http://schemas.openxmlformats.org/officeDocument/2006/relationships">
   <p:cSld>
     <p:bg>
       <p:bgPr>
@@ -7142,14 +7342,7 @@
         <p:cNvGrpSpPr/>
         <p:nvPr/>
       </p:nvGrpSpPr>
-      <p:grpSpPr>
-        <a:xfrm>
-          <a:off x="0" y="0"/>
-          <a:ext cx="0" cy="0"/>
-          <a:chOff x="0" y="0"/>
-          <a:chExt cx="0" cy="0"/>
-        </a:xfrm>
-      </p:grpSpPr>
+      <p:grpSpPr/>
       <p:sp>
         <p:nvSpPr>
           <p:cNvPr id="2" name="TextBox 1"/>
@@ -7258,7 +7451,6 @@
           <a:lstStyle/>
           <a:p>
             <a:pPr algn="ctr"/>
-            <a:endParaRPr/>
           </a:p>
         </p:txBody>
       </p:sp>
@@ -7303,7 +7495,6 @@
           <a:lstStyle/>
           <a:p>
             <a:pPr algn="ctr"/>
-            <a:endParaRPr/>
           </a:p>
         </p:txBody>
       </p:sp>
@@ -7389,7 +7580,7 @@
           </a:fontRef>
         </p:style>
         <p:txBody>
-          <a:bodyPr wrap="none" lIns="201168" tIns="137160" rIns="137160" bIns="109728" rtlCol="0" anchor="ctr"/>
+          <a:bodyPr rtlCol="0" anchor="ctr" wrap="none" lIns="201168" tIns="137160" rIns="137160" bIns="109728"/>
           <a:lstStyle/>
           <a:p>
             <a:pPr algn="ctr">
@@ -7445,12 +7636,12 @@
                 <a:spcPts val="0"/>
               </a:spcAft>
             </a:pPr>
-            <a:endParaRPr sz="1250">
-              <a:solidFill>
-                <a:srgbClr val="F2F2F2"/>
-              </a:solidFill>
-              <a:latin typeface="Aptos Mono"/>
-            </a:endParaRPr>
+            <a:r>
+              <a:rPr sz="1250">
+                <a:latin typeface="Aptos Mono"/>
+              </a:rPr>
+              <a:t/>
+            </a:r>
           </a:p>
           <a:p>
             <a:pPr>
@@ -7527,7 +7718,6 @@
           <a:lstStyle/>
           <a:p>
             <a:pPr algn="ctr"/>
-            <a:endParaRPr/>
           </a:p>
         </p:txBody>
       </p:sp>
@@ -7613,7 +7803,7 @@
           </a:fontRef>
         </p:style>
         <p:txBody>
-          <a:bodyPr wrap="none" lIns="201168" tIns="137160" rIns="137160" bIns="109728" rtlCol="0" anchor="ctr"/>
+          <a:bodyPr rtlCol="0" anchor="ctr" wrap="none" lIns="201168" tIns="137160" rIns="137160" bIns="109728"/>
           <a:lstStyle/>
           <a:p>
             <a:pPr algn="ctr">
@@ -7802,7 +7992,6 @@
           <a:lstStyle/>
           <a:p>
             <a:pPr algn="ctr"/>
-            <a:endParaRPr/>
           </a:p>
         </p:txBody>
       </p:sp>
@@ -7888,7 +8077,7 @@
           </a:fontRef>
         </p:style>
         <p:txBody>
-          <a:bodyPr wrap="none" lIns="201168" tIns="137160" rIns="137160" bIns="109728" rtlCol="0" anchor="ctr"/>
+          <a:bodyPr rtlCol="0" anchor="ctr" wrap="none" lIns="201168" tIns="137160" rIns="137160" bIns="109728"/>
           <a:lstStyle/>
           <a:p>
             <a:pPr algn="ctr">
@@ -8008,12 +8197,12 @@
                 <a:spcPts val="0"/>
               </a:spcAft>
             </a:pPr>
-            <a:endParaRPr sz="1250">
-              <a:solidFill>
-                <a:srgbClr val="F2F2F2"/>
-              </a:solidFill>
-              <a:latin typeface="Aptos Mono"/>
-            </a:endParaRPr>
+            <a:r>
+              <a:rPr sz="1250">
+                <a:latin typeface="Aptos Mono"/>
+              </a:rPr>
+              <a:t/>
+            </a:r>
           </a:p>
           <a:p>
             <a:pPr>
@@ -8115,7 +8304,7 @@
 </file>
 
 <file path=ppt/slides/slide13.xml><?xml version="1.0" encoding="utf-8"?>
-<p:sld xmlns:a="http://schemas.openxmlformats.org/drawingml/2006/main" xmlns:r="http://schemas.openxmlformats.org/officeDocument/2006/relationships" xmlns:p="http://schemas.openxmlformats.org/presentationml/2006/main">
+<p:sld xmlns:a="http://schemas.openxmlformats.org/drawingml/2006/main" xmlns:p="http://schemas.openxmlformats.org/presentationml/2006/main" xmlns:r="http://schemas.openxmlformats.org/officeDocument/2006/relationships">
   <p:cSld>
     <p:bg>
       <p:bgPr>
@@ -8131,14 +8320,7 @@
         <p:cNvGrpSpPr/>
         <p:nvPr/>
       </p:nvGrpSpPr>
-      <p:grpSpPr>
-        <a:xfrm>
-          <a:off x="0" y="0"/>
-          <a:ext cx="0" cy="0"/>
-          <a:chOff x="0" y="0"/>
-          <a:chExt cx="0" cy="0"/>
-        </a:xfrm>
-      </p:grpSpPr>
+      <p:grpSpPr/>
       <p:sp>
         <p:nvSpPr>
           <p:cNvPr id="2" name="TextBox 1"/>
@@ -8247,7 +8429,6 @@
           <a:lstStyle/>
           <a:p>
             <a:pPr algn="ctr"/>
-            <a:endParaRPr/>
           </a:p>
         </p:txBody>
       </p:sp>
@@ -8288,7 +8469,7 @@
           </a:fontRef>
         </p:style>
         <p:txBody>
-          <a:bodyPr wrap="none" lIns="201168" tIns="137160" rIns="137160" bIns="109728" rtlCol="0" anchor="ctr"/>
+          <a:bodyPr rtlCol="0" anchor="ctr" wrap="none" lIns="201168" tIns="137160" rIns="137160" bIns="109728"/>
           <a:lstStyle/>
           <a:p>
             <a:pPr algn="ctr">
@@ -8408,12 +8589,12 @@
                 <a:spcPts val="0"/>
               </a:spcAft>
             </a:pPr>
-            <a:endParaRPr sz="1300">
-              <a:solidFill>
-                <a:srgbClr val="F2F2F2"/>
-              </a:solidFill>
-              <a:latin typeface="Aptos Mono"/>
-            </a:endParaRPr>
+            <a:r>
+              <a:rPr sz="1300">
+                <a:latin typeface="Aptos Mono"/>
+              </a:rPr>
+              <a:t/>
+            </a:r>
           </a:p>
           <a:p>
             <a:pPr>
@@ -8762,7 +8943,7 @@
           </a:fontRef>
         </p:style>
         <p:txBody>
-          <a:bodyPr wrap="square" rtlCol="0" anchor="ctr"/>
+          <a:bodyPr rtlCol="0" anchor="ctr" wrap="square"/>
           <a:lstStyle/>
           <a:p>
             <a:pPr algn="ctr"/>
@@ -8805,7 +8986,7 @@
 </file>
 
 <file path=ppt/slides/slide14.xml><?xml version="1.0" encoding="utf-8"?>
-<p:sld xmlns:a="http://schemas.openxmlformats.org/drawingml/2006/main" xmlns:r="http://schemas.openxmlformats.org/officeDocument/2006/relationships" xmlns:p="http://schemas.openxmlformats.org/presentationml/2006/main">
+<p:sld xmlns:a="http://schemas.openxmlformats.org/drawingml/2006/main" xmlns:p="http://schemas.openxmlformats.org/presentationml/2006/main" xmlns:r="http://schemas.openxmlformats.org/officeDocument/2006/relationships">
   <p:cSld>
     <p:bg>
       <p:bgPr>
@@ -8821,14 +9002,7 @@
         <p:cNvGrpSpPr/>
         <p:nvPr/>
       </p:nvGrpSpPr>
-      <p:grpSpPr>
-        <a:xfrm>
-          <a:off x="0" y="0"/>
-          <a:ext cx="0" cy="0"/>
-          <a:chOff x="0" y="0"/>
-          <a:chExt cx="0" cy="0"/>
-        </a:xfrm>
-      </p:grpSpPr>
+      <p:grpSpPr/>
       <p:sp>
         <p:nvSpPr>
           <p:cNvPr id="2" name="TextBox 1"/>
@@ -8937,7 +9111,6 @@
           <a:lstStyle/>
           <a:p>
             <a:pPr algn="ctr"/>
-            <a:endParaRPr/>
           </a:p>
         </p:txBody>
       </p:sp>
@@ -8984,7 +9157,6 @@
           <a:lstStyle/>
           <a:p>
             <a:pPr algn="ctr"/>
-            <a:endParaRPr/>
           </a:p>
         </p:txBody>
       </p:sp>
@@ -9029,7 +9201,6 @@
           <a:lstStyle/>
           <a:p>
             <a:pPr algn="ctr"/>
-            <a:endParaRPr/>
           </a:p>
         </p:txBody>
       </p:sp>
@@ -9232,7 +9403,6 @@
           <a:lstStyle/>
           <a:p>
             <a:pPr algn="ctr"/>
-            <a:endParaRPr/>
           </a:p>
         </p:txBody>
       </p:sp>
@@ -9277,7 +9447,6 @@
           <a:lstStyle/>
           <a:p>
             <a:pPr algn="ctr"/>
-            <a:endParaRPr/>
           </a:p>
         </p:txBody>
       </p:sp>
@@ -9444,7 +9613,6 @@
           <a:lstStyle/>
           <a:p>
             <a:pPr algn="ctr"/>
-            <a:endParaRPr/>
           </a:p>
         </p:txBody>
       </p:sp>
@@ -9489,7 +9657,6 @@
           <a:lstStyle/>
           <a:p>
             <a:pPr algn="ctr"/>
-            <a:endParaRPr/>
           </a:p>
         </p:txBody>
       </p:sp>
@@ -9708,7 +9875,7 @@
 </file>
 
 <file path=ppt/slides/slide15.xml><?xml version="1.0" encoding="utf-8"?>
-<p:sld xmlns:a="http://schemas.openxmlformats.org/drawingml/2006/main" xmlns:r="http://schemas.openxmlformats.org/officeDocument/2006/relationships" xmlns:p="http://schemas.openxmlformats.org/presentationml/2006/main">
+<p:sld xmlns:a="http://schemas.openxmlformats.org/drawingml/2006/main" xmlns:p="http://schemas.openxmlformats.org/presentationml/2006/main" xmlns:r="http://schemas.openxmlformats.org/officeDocument/2006/relationships">
   <p:cSld>
     <p:bg>
       <p:bgPr>
@@ -9724,14 +9891,7 @@
         <p:cNvGrpSpPr/>
         <p:nvPr/>
       </p:nvGrpSpPr>
-      <p:grpSpPr>
-        <a:xfrm>
-          <a:off x="0" y="0"/>
-          <a:ext cx="0" cy="0"/>
-          <a:chOff x="0" y="0"/>
-          <a:chExt cx="0" cy="0"/>
-        </a:xfrm>
-      </p:grpSpPr>
+      <p:grpSpPr/>
       <p:sp>
         <p:nvSpPr>
           <p:cNvPr id="2" name="TextBox 1"/>
@@ -9840,7 +10000,6 @@
           <a:lstStyle/>
           <a:p>
             <a:pPr algn="ctr"/>
-            <a:endParaRPr/>
           </a:p>
         </p:txBody>
       </p:sp>
@@ -9881,7 +10040,7 @@
           </a:fontRef>
         </p:style>
         <p:txBody>
-          <a:bodyPr wrap="square" lIns="45720" tIns="27432" rIns="45720" bIns="27432" rtlCol="0" anchor="ctr"/>
+          <a:bodyPr rtlCol="0" anchor="ctr" wrap="square" lIns="45720" rIns="45720" tIns="27432" bIns="27432"/>
           <a:lstStyle/>
           <a:p>
             <a:pPr algn="ctr"/>
@@ -9934,7 +10093,7 @@
           </a:fontRef>
         </p:style>
         <p:txBody>
-          <a:bodyPr wrap="none" lIns="201168" tIns="137160" rIns="137160" bIns="109728" rtlCol="0" anchor="ctr"/>
+          <a:bodyPr rtlCol="0" anchor="ctr" wrap="none" lIns="201168" tIns="137160" rIns="137160" bIns="109728"/>
           <a:lstStyle/>
           <a:p>
             <a:pPr algn="ctr">
@@ -10062,7 +10221,7 @@
           </a:fontRef>
         </p:style>
         <p:txBody>
-          <a:bodyPr wrap="square" lIns="45720" tIns="27432" rIns="45720" bIns="27432" rtlCol="0" anchor="ctr"/>
+          <a:bodyPr rtlCol="0" anchor="ctr" wrap="square" lIns="45720" rIns="45720" tIns="27432" bIns="27432"/>
           <a:lstStyle/>
           <a:p>
             <a:pPr algn="ctr"/>
@@ -10115,7 +10274,7 @@
           </a:fontRef>
         </p:style>
         <p:txBody>
-          <a:bodyPr wrap="none" lIns="201168" tIns="137160" rIns="137160" bIns="109728" rtlCol="0" anchor="ctr"/>
+          <a:bodyPr rtlCol="0" anchor="ctr" wrap="none" lIns="201168" tIns="137160" rIns="137160" bIns="109728"/>
           <a:lstStyle/>
           <a:p>
             <a:pPr algn="ctr">
@@ -10243,7 +10402,7 @@
           </a:fontRef>
         </p:style>
         <p:txBody>
-          <a:bodyPr wrap="square" lIns="45720" tIns="27432" rIns="45720" bIns="27432" rtlCol="0" anchor="ctr"/>
+          <a:bodyPr rtlCol="0" anchor="ctr" wrap="square" lIns="45720" rIns="45720" tIns="27432" bIns="27432"/>
           <a:lstStyle/>
           <a:p>
             <a:pPr algn="ctr"/>
@@ -10296,7 +10455,7 @@
           </a:fontRef>
         </p:style>
         <p:txBody>
-          <a:bodyPr wrap="none" lIns="201168" tIns="137160" rIns="137160" bIns="109728" rtlCol="0" anchor="ctr"/>
+          <a:bodyPr rtlCol="0" anchor="ctr" wrap="none" lIns="201168" tIns="137160" rIns="137160" bIns="109728"/>
           <a:lstStyle/>
           <a:p>
             <a:pPr algn="ctr">
@@ -10440,7 +10599,7 @@
           </a:fontRef>
         </p:style>
         <p:txBody>
-          <a:bodyPr wrap="square" lIns="45720" tIns="27432" rIns="45720" bIns="27432" rtlCol="0" anchor="ctr"/>
+          <a:bodyPr rtlCol="0" anchor="ctr" wrap="square" lIns="45720" rIns="45720" tIns="27432" bIns="27432"/>
           <a:lstStyle/>
           <a:p>
             <a:pPr algn="ctr"/>
@@ -10493,7 +10652,7 @@
           </a:fontRef>
         </p:style>
         <p:txBody>
-          <a:bodyPr wrap="none" lIns="201168" tIns="137160" rIns="137160" bIns="109728" rtlCol="0" anchor="ctr"/>
+          <a:bodyPr rtlCol="0" anchor="ctr" wrap="none" lIns="201168" tIns="137160" rIns="137160" bIns="109728"/>
           <a:lstStyle/>
           <a:p>
             <a:pPr algn="ctr">
@@ -10586,7 +10745,7 @@
           </a:fontRef>
         </p:style>
         <p:txBody>
-          <a:bodyPr wrap="square" rtlCol="0" anchor="ctr"/>
+          <a:bodyPr rtlCol="0" anchor="ctr" wrap="square"/>
           <a:lstStyle/>
           <a:p>
             <a:pPr algn="ctr"/>
@@ -10611,7 +10770,7 @@
 </file>
 
 <file path=ppt/slides/slide16.xml><?xml version="1.0" encoding="utf-8"?>
-<p:sld xmlns:a="http://schemas.openxmlformats.org/drawingml/2006/main" xmlns:r="http://schemas.openxmlformats.org/officeDocument/2006/relationships" xmlns:p="http://schemas.openxmlformats.org/presentationml/2006/main">
+<p:sld xmlns:a="http://schemas.openxmlformats.org/drawingml/2006/main" xmlns:p="http://schemas.openxmlformats.org/presentationml/2006/main" xmlns:r="http://schemas.openxmlformats.org/officeDocument/2006/relationships">
   <p:cSld>
     <p:bg>
       <p:bgPr>
@@ -10627,14 +10786,7 @@
         <p:cNvGrpSpPr/>
         <p:nvPr/>
       </p:nvGrpSpPr>
-      <p:grpSpPr>
-        <a:xfrm>
-          <a:off x="0" y="0"/>
-          <a:ext cx="0" cy="0"/>
-          <a:chOff x="0" y="0"/>
-          <a:chExt cx="0" cy="0"/>
-        </a:xfrm>
-      </p:grpSpPr>
+      <p:grpSpPr/>
       <p:sp>
         <p:nvSpPr>
           <p:cNvPr id="2" name="TextBox 1"/>
@@ -10743,7 +10895,6 @@
           <a:lstStyle/>
           <a:p>
             <a:pPr algn="ctr"/>
-            <a:endParaRPr/>
           </a:p>
         </p:txBody>
       </p:sp>
@@ -10756,7 +10907,7 @@
           <p:nvPr/>
         </p:nvPicPr>
         <p:blipFill>
-          <a:blip r:embed="rId3"/>
+          <a:blip r:embed="rId2"/>
           <a:stretch>
             <a:fillRect/>
           </a:stretch>
@@ -10809,7 +10960,7 @@
           </a:fontRef>
         </p:style>
         <p:txBody>
-          <a:bodyPr wrap="square" lIns="45720" tIns="27432" rIns="45720" bIns="27432" rtlCol="0" anchor="ctr"/>
+          <a:bodyPr rtlCol="0" anchor="ctr" wrap="square" lIns="45720" rIns="45720" tIns="27432" bIns="27432"/>
           <a:lstStyle/>
           <a:p>
             <a:pPr algn="ctr"/>
@@ -10899,7 +11050,7 @@
           </a:fontRef>
         </p:style>
         <p:txBody>
-          <a:bodyPr wrap="square" lIns="45720" tIns="27432" rIns="45720" bIns="27432" rtlCol="0" anchor="ctr"/>
+          <a:bodyPr rtlCol="0" anchor="ctr" wrap="square" lIns="45720" rIns="45720" tIns="27432" bIns="27432"/>
           <a:lstStyle/>
           <a:p>
             <a:pPr algn="ctr"/>
@@ -10989,7 +11140,7 @@
           </a:fontRef>
         </p:style>
         <p:txBody>
-          <a:bodyPr wrap="square" lIns="45720" tIns="27432" rIns="45720" bIns="27432" rtlCol="0" anchor="ctr"/>
+          <a:bodyPr rtlCol="0" anchor="ctr" wrap="square" lIns="45720" rIns="45720" tIns="27432" bIns="27432"/>
           <a:lstStyle/>
           <a:p>
             <a:pPr algn="ctr"/>
@@ -11079,7 +11230,7 @@
           </a:fontRef>
         </p:style>
         <p:txBody>
-          <a:bodyPr wrap="square" lIns="45720" tIns="27432" rIns="45720" bIns="27432" rtlCol="0" anchor="ctr"/>
+          <a:bodyPr rtlCol="0" anchor="ctr" wrap="square" lIns="45720" rIns="45720" tIns="27432" bIns="27432"/>
           <a:lstStyle/>
           <a:p>
             <a:pPr algn="ctr"/>
@@ -11169,7 +11320,7 @@
           </a:fontRef>
         </p:style>
         <p:txBody>
-          <a:bodyPr wrap="square" lIns="45720" tIns="27432" rIns="45720" bIns="27432" rtlCol="0" anchor="ctr"/>
+          <a:bodyPr rtlCol="0" anchor="ctr" wrap="square" lIns="45720" rIns="45720" tIns="27432" bIns="27432"/>
           <a:lstStyle/>
           <a:p>
             <a:pPr algn="ctr"/>
@@ -11259,7 +11410,7 @@
           </a:fontRef>
         </p:style>
         <p:txBody>
-          <a:bodyPr wrap="square" lIns="45720" tIns="27432" rIns="45720" bIns="27432" rtlCol="0" anchor="ctr"/>
+          <a:bodyPr rtlCol="0" anchor="ctr" wrap="square" lIns="45720" rIns="45720" tIns="27432" bIns="27432"/>
           <a:lstStyle/>
           <a:p>
             <a:pPr algn="ctr"/>
@@ -11570,7 +11721,7 @@
           </a:fontRef>
         </p:style>
         <p:txBody>
-          <a:bodyPr wrap="none" lIns="201168" tIns="137160" rIns="137160" bIns="109728" rtlCol="0" anchor="ctr"/>
+          <a:bodyPr rtlCol="0" anchor="ctr" wrap="none" lIns="201168" tIns="137160" rIns="137160" bIns="109728"/>
           <a:lstStyle/>
           <a:p>
             <a:pPr algn="ctr">
@@ -11768,7 +11919,7 @@
 </file>
 
 <file path=ppt/slides/slide17.xml><?xml version="1.0" encoding="utf-8"?>
-<p:sld xmlns:a="http://schemas.openxmlformats.org/drawingml/2006/main" xmlns:r="http://schemas.openxmlformats.org/officeDocument/2006/relationships" xmlns:p="http://schemas.openxmlformats.org/presentationml/2006/main">
+<p:sld xmlns:a="http://schemas.openxmlformats.org/drawingml/2006/main" xmlns:p="http://schemas.openxmlformats.org/presentationml/2006/main" xmlns:r="http://schemas.openxmlformats.org/officeDocument/2006/relationships">
   <p:cSld>
     <p:bg>
       <p:bgPr>
@@ -11784,14 +11935,7 @@
         <p:cNvGrpSpPr/>
         <p:nvPr/>
       </p:nvGrpSpPr>
-      <p:grpSpPr>
-        <a:xfrm>
-          <a:off x="0" y="0"/>
-          <a:ext cx="0" cy="0"/>
-          <a:chOff x="0" y="0"/>
-          <a:chExt cx="0" cy="0"/>
-        </a:xfrm>
-      </p:grpSpPr>
+      <p:grpSpPr/>
       <p:sp>
         <p:nvSpPr>
           <p:cNvPr id="2" name="TextBox 1"/>
@@ -11900,7 +12044,6 @@
           <a:lstStyle/>
           <a:p>
             <a:pPr algn="ctr"/>
-            <a:endParaRPr/>
           </a:p>
         </p:txBody>
       </p:sp>
@@ -11947,7 +12090,6 @@
           <a:lstStyle/>
           <a:p>
             <a:pPr algn="ctr"/>
-            <a:endParaRPr/>
           </a:p>
         </p:txBody>
       </p:sp>
@@ -11992,7 +12134,6 @@
           <a:lstStyle/>
           <a:p>
             <a:pPr algn="ctr"/>
-            <a:endParaRPr/>
           </a:p>
         </p:txBody>
       </p:sp>
@@ -12162,7 +12303,6 @@
           <a:lstStyle/>
           <a:p>
             <a:pPr algn="ctr"/>
-            <a:endParaRPr/>
           </a:p>
         </p:txBody>
       </p:sp>
@@ -12207,7 +12347,6 @@
           <a:lstStyle/>
           <a:p>
             <a:pPr algn="ctr"/>
-            <a:endParaRPr/>
           </a:p>
         </p:txBody>
       </p:sp>
@@ -12371,7 +12510,7 @@
           </a:fontRef>
         </p:style>
         <p:txBody>
-          <a:bodyPr wrap="square" lIns="274320" rIns="274320" rtlCol="0" anchor="ctr"/>
+          <a:bodyPr rtlCol="0" anchor="ctr" wrap="square" lIns="274320" rIns="274320"/>
           <a:lstStyle/>
           <a:p>
             <a:pPr algn="ctr"/>
@@ -12396,7 +12535,7 @@
 </file>
 
 <file path=ppt/slides/slide18.xml><?xml version="1.0" encoding="utf-8"?>
-<p:sld xmlns:a="http://schemas.openxmlformats.org/drawingml/2006/main" xmlns:r="http://schemas.openxmlformats.org/officeDocument/2006/relationships" xmlns:p="http://schemas.openxmlformats.org/presentationml/2006/main">
+<p:sld xmlns:a="http://schemas.openxmlformats.org/drawingml/2006/main" xmlns:p="http://schemas.openxmlformats.org/presentationml/2006/main" xmlns:r="http://schemas.openxmlformats.org/officeDocument/2006/relationships">
   <p:cSld>
     <p:bg>
       <p:bgPr>
@@ -12412,14 +12551,7 @@
         <p:cNvGrpSpPr/>
         <p:nvPr/>
       </p:nvGrpSpPr>
-      <p:grpSpPr>
-        <a:xfrm>
-          <a:off x="0" y="0"/>
-          <a:ext cx="0" cy="0"/>
-          <a:chOff x="0" y="0"/>
-          <a:chExt cx="0" cy="0"/>
-        </a:xfrm>
-      </p:grpSpPr>
+      <p:grpSpPr/>
       <p:sp>
         <p:nvSpPr>
           <p:cNvPr id="2" name="TextBox 1"/>
@@ -12528,7 +12660,6 @@
           <a:lstStyle/>
           <a:p>
             <a:pPr algn="ctr"/>
-            <a:endParaRPr/>
           </a:p>
         </p:txBody>
       </p:sp>
@@ -12626,7 +12757,7 @@
           </a:fontRef>
         </p:style>
         <p:txBody>
-          <a:bodyPr wrap="none" lIns="201168" tIns="137160" rIns="137160" bIns="109728" rtlCol="0" anchor="ctr"/>
+          <a:bodyPr rtlCol="0" anchor="ctr" wrap="none" lIns="201168" tIns="137160" rIns="137160" bIns="109728"/>
           <a:lstStyle/>
           <a:p>
             <a:pPr algn="ctr">
@@ -12746,12 +12877,12 @@
                 <a:spcPts val="0"/>
               </a:spcAft>
             </a:pPr>
-            <a:endParaRPr sz="1300">
-              <a:solidFill>
-                <a:srgbClr val="F2F2F2"/>
-              </a:solidFill>
-              <a:latin typeface="Aptos Mono"/>
-            </a:endParaRPr>
+            <a:r>
+              <a:rPr sz="1300">
+                <a:latin typeface="Aptos Mono"/>
+              </a:rPr>
+              <a:t/>
+            </a:r>
           </a:p>
           <a:p>
             <a:pPr>
@@ -12992,7 +13123,7 @@
           </a:fontRef>
         </p:style>
         <p:txBody>
-          <a:bodyPr wrap="square" rtlCol="0" anchor="ctr"/>
+          <a:bodyPr rtlCol="0" anchor="ctr" wrap="square"/>
           <a:lstStyle/>
           <a:p>
             <a:pPr algn="ctr"/>
@@ -13035,7 +13166,7 @@
 </file>
 
 <file path=ppt/slides/slide19.xml><?xml version="1.0" encoding="utf-8"?>
-<p:sld xmlns:a="http://schemas.openxmlformats.org/drawingml/2006/main" xmlns:r="http://schemas.openxmlformats.org/officeDocument/2006/relationships" xmlns:p="http://schemas.openxmlformats.org/presentationml/2006/main">
+<p:sld xmlns:a="http://schemas.openxmlformats.org/drawingml/2006/main" xmlns:p="http://schemas.openxmlformats.org/presentationml/2006/main" xmlns:r="http://schemas.openxmlformats.org/officeDocument/2006/relationships">
   <p:cSld>
     <p:bg>
       <p:bgPr>
@@ -13051,14 +13182,7 @@
         <p:cNvGrpSpPr/>
         <p:nvPr/>
       </p:nvGrpSpPr>
-      <p:grpSpPr>
-        <a:xfrm>
-          <a:off x="0" y="0"/>
-          <a:ext cx="0" cy="0"/>
-          <a:chOff x="0" y="0"/>
-          <a:chExt cx="0" cy="0"/>
-        </a:xfrm>
-      </p:grpSpPr>
+      <p:grpSpPr/>
       <p:sp>
         <p:nvSpPr>
           <p:cNvPr id="2" name="TextBox 1"/>
@@ -13167,7 +13291,6 @@
           <a:lstStyle/>
           <a:p>
             <a:pPr algn="ctr"/>
-            <a:endParaRPr/>
           </a:p>
         </p:txBody>
       </p:sp>
@@ -13208,7 +13331,7 @@
           </a:fontRef>
         </p:style>
         <p:txBody>
-          <a:bodyPr wrap="none" lIns="201168" tIns="137160" rIns="137160" bIns="109728" rtlCol="0" anchor="ctr"/>
+          <a:bodyPr rtlCol="0" anchor="ctr" wrap="none" lIns="201168" tIns="137160" rIns="137160" bIns="109728"/>
           <a:lstStyle/>
           <a:p>
             <a:pPr algn="ctr">
@@ -13542,7 +13665,6 @@
           <a:lstStyle/>
           <a:p>
             <a:pPr algn="ctr"/>
-            <a:endParaRPr/>
           </a:p>
         </p:txBody>
       </p:sp>
@@ -13675,7 +13797,6 @@
           <a:lstStyle/>
           <a:p>
             <a:pPr algn="ctr"/>
-            <a:endParaRPr/>
           </a:p>
         </p:txBody>
       </p:sp>
@@ -13756,7 +13877,7 @@
 </file>
 
 <file path=ppt/slides/slide2.xml><?xml version="1.0" encoding="utf-8"?>
-<p:sld xmlns:a="http://schemas.openxmlformats.org/drawingml/2006/main" xmlns:r="http://schemas.openxmlformats.org/officeDocument/2006/relationships" xmlns:p="http://schemas.openxmlformats.org/presentationml/2006/main">
+<p:sld xmlns:a="http://schemas.openxmlformats.org/drawingml/2006/main" xmlns:p="http://schemas.openxmlformats.org/presentationml/2006/main" xmlns:r="http://schemas.openxmlformats.org/officeDocument/2006/relationships">
   <p:cSld>
     <p:bg>
       <p:bgPr>
@@ -13772,14 +13893,7 @@
         <p:cNvGrpSpPr/>
         <p:nvPr/>
       </p:nvGrpSpPr>
-      <p:grpSpPr>
-        <a:xfrm>
-          <a:off x="0" y="0"/>
-          <a:ext cx="0" cy="0"/>
-          <a:chOff x="0" y="0"/>
-          <a:chExt cx="0" cy="0"/>
-        </a:xfrm>
-      </p:grpSpPr>
+      <p:grpSpPr/>
       <p:sp>
         <p:nvSpPr>
           <p:cNvPr id="2" name="TextBox 1"/>
@@ -13888,7 +14002,6 @@
           <a:lstStyle/>
           <a:p>
             <a:pPr algn="ctr"/>
-            <a:endParaRPr/>
           </a:p>
         </p:txBody>
       </p:sp>
@@ -13931,7 +14044,7 @@
           </a:fontRef>
         </p:style>
         <p:txBody>
-          <a:bodyPr wrap="square" lIns="182880" tIns="237744" rIns="128016" rtlCol="0" anchor="ctr"/>
+          <a:bodyPr rtlCol="0" anchor="ctr" wrap="square" lIns="182880" rIns="128016" tIns="237744"/>
           <a:lstStyle/>
           <a:p>
             <a:pPr algn="l"/>
@@ -14024,7 +14137,6 @@
           <a:lstStyle/>
           <a:p>
             <a:pPr algn="ctr"/>
-            <a:endParaRPr/>
           </a:p>
         </p:txBody>
       </p:sp>
@@ -14067,7 +14179,7 @@
           </a:fontRef>
         </p:style>
         <p:txBody>
-          <a:bodyPr wrap="square" lIns="182880" tIns="237744" rIns="128016" rtlCol="0" anchor="ctr"/>
+          <a:bodyPr rtlCol="0" anchor="ctr" wrap="square" lIns="182880" rIns="128016" tIns="237744"/>
           <a:lstStyle/>
           <a:p>
             <a:pPr algn="l"/>
@@ -14160,7 +14272,6 @@
           <a:lstStyle/>
           <a:p>
             <a:pPr algn="ctr"/>
-            <a:endParaRPr/>
           </a:p>
         </p:txBody>
       </p:sp>
@@ -14203,7 +14314,7 @@
           </a:fontRef>
         </p:style>
         <p:txBody>
-          <a:bodyPr wrap="square" lIns="182880" tIns="237744" rIns="128016" rtlCol="0" anchor="ctr"/>
+          <a:bodyPr rtlCol="0" anchor="ctr" wrap="square" lIns="182880" rIns="128016" tIns="237744"/>
           <a:lstStyle/>
           <a:p>
             <a:pPr algn="l"/>
@@ -14296,7 +14407,6 @@
           <a:lstStyle/>
           <a:p>
             <a:pPr algn="ctr"/>
-            <a:endParaRPr/>
           </a:p>
         </p:txBody>
       </p:sp>
@@ -14339,7 +14449,7 @@
           </a:fontRef>
         </p:style>
         <p:txBody>
-          <a:bodyPr wrap="square" lIns="182880" tIns="237744" rIns="128016" rtlCol="0" anchor="ctr"/>
+          <a:bodyPr rtlCol="0" anchor="ctr" wrap="square" lIns="182880" rIns="128016" tIns="237744"/>
           <a:lstStyle/>
           <a:p>
             <a:pPr algn="l"/>
@@ -14432,7 +14542,6 @@
           <a:lstStyle/>
           <a:p>
             <a:pPr algn="ctr"/>
-            <a:endParaRPr/>
           </a:p>
         </p:txBody>
       </p:sp>
@@ -14475,7 +14584,7 @@
           </a:fontRef>
         </p:style>
         <p:txBody>
-          <a:bodyPr wrap="square" lIns="182880" tIns="237744" rIns="128016" rtlCol="0" anchor="ctr"/>
+          <a:bodyPr rtlCol="0" anchor="ctr" wrap="square" lIns="182880" rIns="128016" tIns="237744"/>
           <a:lstStyle/>
           <a:p>
             <a:pPr algn="l"/>
@@ -14568,7 +14677,6 @@
           <a:lstStyle/>
           <a:p>
             <a:pPr algn="ctr"/>
-            <a:endParaRPr/>
           </a:p>
         </p:txBody>
       </p:sp>
@@ -14620,7 +14728,7 @@
 </file>
 
 <file path=ppt/slides/slide20.xml><?xml version="1.0" encoding="utf-8"?>
-<p:sld xmlns:a="http://schemas.openxmlformats.org/drawingml/2006/main" xmlns:r="http://schemas.openxmlformats.org/officeDocument/2006/relationships" xmlns:p="http://schemas.openxmlformats.org/presentationml/2006/main">
+<p:sld xmlns:a="http://schemas.openxmlformats.org/drawingml/2006/main" xmlns:p="http://schemas.openxmlformats.org/presentationml/2006/main" xmlns:r="http://schemas.openxmlformats.org/officeDocument/2006/relationships">
   <p:cSld>
     <p:bg>
       <p:bgPr>
@@ -14636,14 +14744,7 @@
         <p:cNvGrpSpPr/>
         <p:nvPr/>
       </p:nvGrpSpPr>
-      <p:grpSpPr>
-        <a:xfrm>
-          <a:off x="0" y="0"/>
-          <a:ext cx="0" cy="0"/>
-          <a:chOff x="0" y="0"/>
-          <a:chExt cx="0" cy="0"/>
-        </a:xfrm>
-      </p:grpSpPr>
+      <p:grpSpPr/>
       <p:sp>
         <p:nvSpPr>
           <p:cNvPr id="2" name="TextBox 1"/>
@@ -14752,7 +14853,6 @@
           <a:lstStyle/>
           <a:p>
             <a:pPr algn="ctr"/>
-            <a:endParaRPr/>
           </a:p>
         </p:txBody>
       </p:sp>
@@ -14775,39 +14875,15 @@
                 <a:tableStyleId>{5C22544A-7EE6-4342-B048-85BDC9FD1C3A}</a:tableStyleId>
               </a:tblPr>
               <a:tblGrid>
-                <a:gridCol w="2651760">
-                  <a:extLst>
-                    <a:ext uri="{9D8B030D-6E8A-4147-A177-3AD203B41FA5}">
-                      <a16:colId xmlns:a16="http://schemas.microsoft.com/office/drawing/2014/main" val="20000"/>
-                    </a:ext>
-                  </a:extLst>
-                </a:gridCol>
-                <a:gridCol w="1371600">
-                  <a:extLst>
-                    <a:ext uri="{9D8B030D-6E8A-4147-A177-3AD203B41FA5}">
-                      <a16:colId xmlns:a16="http://schemas.microsoft.com/office/drawing/2014/main" val="20001"/>
-                    </a:ext>
-                  </a:extLst>
-                </a:gridCol>
-                <a:gridCol w="1463040">
-                  <a:extLst>
-                    <a:ext uri="{9D8B030D-6E8A-4147-A177-3AD203B41FA5}">
-                      <a16:colId xmlns:a16="http://schemas.microsoft.com/office/drawing/2014/main" val="20002"/>
-                    </a:ext>
-                  </a:extLst>
-                </a:gridCol>
-                <a:gridCol w="1280160">
-                  <a:extLst>
-                    <a:ext uri="{9D8B030D-6E8A-4147-A177-3AD203B41FA5}">
-                      <a16:colId xmlns:a16="http://schemas.microsoft.com/office/drawing/2014/main" val="20003"/>
-                    </a:ext>
-                  </a:extLst>
-                </a:gridCol>
+                <a:gridCol w="2651760"/>
+                <a:gridCol w="1371600"/>
+                <a:gridCol w="1463040"/>
+                <a:gridCol w="1280160"/>
               </a:tblGrid>
               <a:tr h="502920">
                 <a:tc>
                   <a:txBody>
-                    <a:bodyPr/>
+                    <a:bodyPr wrap="square"/>
                     <a:lstStyle/>
                     <a:p>
                       <a:r>
@@ -14829,7 +14905,7 @@
                 </a:tc>
                 <a:tc>
                   <a:txBody>
-                    <a:bodyPr/>
+                    <a:bodyPr wrap="square"/>
                     <a:lstStyle/>
                     <a:p>
                       <a:r>
@@ -14851,7 +14927,7 @@
                 </a:tc>
                 <a:tc>
                   <a:txBody>
-                    <a:bodyPr/>
+                    <a:bodyPr wrap="square"/>
                     <a:lstStyle/>
                     <a:p>
                       <a:r>
@@ -14873,7 +14949,7 @@
                 </a:tc>
                 <a:tc>
                   <a:txBody>
-                    <a:bodyPr/>
+                    <a:bodyPr wrap="square"/>
                     <a:lstStyle/>
                     <a:p>
                       <a:r>
@@ -14893,16 +14969,11 @@
                     </a:solidFill>
                   </a:tcPr>
                 </a:tc>
-                <a:extLst>
-                  <a:ext uri="{0D108BD9-81ED-4DB2-BD59-A6C34878D82A}">
-                    <a16:rowId xmlns:a16="http://schemas.microsoft.com/office/drawing/2014/main" val="10000"/>
-                  </a:ext>
-                </a:extLst>
               </a:tr>
               <a:tr h="502920">
                 <a:tc>
                   <a:txBody>
-                    <a:bodyPr/>
+                    <a:bodyPr wrap="square"/>
                     <a:lstStyle/>
                     <a:p>
                       <a:r>
@@ -14924,7 +14995,7 @@
                 </a:tc>
                 <a:tc>
                   <a:txBody>
-                    <a:bodyPr/>
+                    <a:bodyPr wrap="square"/>
                     <a:lstStyle/>
                     <a:p>
                       <a:r>
@@ -14946,7 +15017,7 @@
                 </a:tc>
                 <a:tc>
                   <a:txBody>
-                    <a:bodyPr/>
+                    <a:bodyPr wrap="square"/>
                     <a:lstStyle/>
                     <a:p>
                       <a:r>
@@ -14968,7 +15039,7 @@
                 </a:tc>
                 <a:tc>
                   <a:txBody>
-                    <a:bodyPr/>
+                    <a:bodyPr wrap="square"/>
                     <a:lstStyle/>
                     <a:p>
                       <a:r>
@@ -14988,16 +15059,11 @@
                     </a:solidFill>
                   </a:tcPr>
                 </a:tc>
-                <a:extLst>
-                  <a:ext uri="{0D108BD9-81ED-4DB2-BD59-A6C34878D82A}">
-                    <a16:rowId xmlns:a16="http://schemas.microsoft.com/office/drawing/2014/main" val="10001"/>
-                  </a:ext>
-                </a:extLst>
               </a:tr>
               <a:tr h="502920">
                 <a:tc>
                   <a:txBody>
-                    <a:bodyPr/>
+                    <a:bodyPr wrap="square"/>
                     <a:lstStyle/>
                     <a:p>
                       <a:r>
@@ -15019,7 +15085,7 @@
                 </a:tc>
                 <a:tc>
                   <a:txBody>
-                    <a:bodyPr/>
+                    <a:bodyPr wrap="square"/>
                     <a:lstStyle/>
                     <a:p>
                       <a:r>
@@ -15041,7 +15107,7 @@
                 </a:tc>
                 <a:tc>
                   <a:txBody>
-                    <a:bodyPr/>
+                    <a:bodyPr wrap="square"/>
                     <a:lstStyle/>
                     <a:p>
                       <a:r>
@@ -15063,7 +15129,7 @@
                 </a:tc>
                 <a:tc>
                   <a:txBody>
-                    <a:bodyPr/>
+                    <a:bodyPr wrap="square"/>
                     <a:lstStyle/>
                     <a:p>
                       <a:r>
@@ -15083,16 +15149,11 @@
                     </a:solidFill>
                   </a:tcPr>
                 </a:tc>
-                <a:extLst>
-                  <a:ext uri="{0D108BD9-81ED-4DB2-BD59-A6C34878D82A}">
-                    <a16:rowId xmlns:a16="http://schemas.microsoft.com/office/drawing/2014/main" val="10002"/>
-                  </a:ext>
-                </a:extLst>
               </a:tr>
               <a:tr h="502920">
                 <a:tc>
                   <a:txBody>
-                    <a:bodyPr/>
+                    <a:bodyPr wrap="square"/>
                     <a:lstStyle/>
                     <a:p>
                       <a:r>
@@ -15114,7 +15175,7 @@
                 </a:tc>
                 <a:tc>
                   <a:txBody>
-                    <a:bodyPr/>
+                    <a:bodyPr wrap="square"/>
                     <a:lstStyle/>
                     <a:p>
                       <a:r>
@@ -15136,7 +15197,7 @@
                 </a:tc>
                 <a:tc>
                   <a:txBody>
-                    <a:bodyPr/>
+                    <a:bodyPr wrap="square"/>
                     <a:lstStyle/>
                     <a:p>
                       <a:r>
@@ -15158,7 +15219,7 @@
                 </a:tc>
                 <a:tc>
                   <a:txBody>
-                    <a:bodyPr/>
+                    <a:bodyPr wrap="square"/>
                     <a:lstStyle/>
                     <a:p>
                       <a:r>
@@ -15178,16 +15239,11 @@
                     </a:solidFill>
                   </a:tcPr>
                 </a:tc>
-                <a:extLst>
-                  <a:ext uri="{0D108BD9-81ED-4DB2-BD59-A6C34878D82A}">
-                    <a16:rowId xmlns:a16="http://schemas.microsoft.com/office/drawing/2014/main" val="10003"/>
-                  </a:ext>
-                </a:extLst>
               </a:tr>
               <a:tr h="502920">
                 <a:tc>
                   <a:txBody>
-                    <a:bodyPr/>
+                    <a:bodyPr wrap="square"/>
                     <a:lstStyle/>
                     <a:p>
                       <a:r>
@@ -15209,7 +15265,7 @@
                 </a:tc>
                 <a:tc>
                   <a:txBody>
-                    <a:bodyPr/>
+                    <a:bodyPr wrap="square"/>
                     <a:lstStyle/>
                     <a:p>
                       <a:r>
@@ -15231,7 +15287,7 @@
                 </a:tc>
                 <a:tc>
                   <a:txBody>
-                    <a:bodyPr/>
+                    <a:bodyPr wrap="square"/>
                     <a:lstStyle/>
                     <a:p>
                       <a:r>
@@ -15253,7 +15309,7 @@
                 </a:tc>
                 <a:tc>
                   <a:txBody>
-                    <a:bodyPr/>
+                    <a:bodyPr wrap="square"/>
                     <a:lstStyle/>
                     <a:p>
                       <a:r>
@@ -15273,16 +15329,11 @@
                     </a:solidFill>
                   </a:tcPr>
                 </a:tc>
-                <a:extLst>
-                  <a:ext uri="{0D108BD9-81ED-4DB2-BD59-A6C34878D82A}">
-                    <a16:rowId xmlns:a16="http://schemas.microsoft.com/office/drawing/2014/main" val="10004"/>
-                  </a:ext>
-                </a:extLst>
               </a:tr>
               <a:tr h="502920">
                 <a:tc>
                   <a:txBody>
-                    <a:bodyPr/>
+                    <a:bodyPr wrap="square"/>
                     <a:lstStyle/>
                     <a:p>
                       <a:r>
@@ -15304,7 +15355,7 @@
                 </a:tc>
                 <a:tc>
                   <a:txBody>
-                    <a:bodyPr/>
+                    <a:bodyPr wrap="square"/>
                     <a:lstStyle/>
                     <a:p>
                       <a:r>
@@ -15326,7 +15377,7 @@
                 </a:tc>
                 <a:tc>
                   <a:txBody>
-                    <a:bodyPr/>
+                    <a:bodyPr wrap="square"/>
                     <a:lstStyle/>
                     <a:p>
                       <a:r>
@@ -15348,7 +15399,7 @@
                 </a:tc>
                 <a:tc>
                   <a:txBody>
-                    <a:bodyPr/>
+                    <a:bodyPr wrap="square"/>
                     <a:lstStyle/>
                     <a:p>
                       <a:r>
@@ -15368,11 +15419,6 @@
                     </a:solidFill>
                   </a:tcPr>
                 </a:tc>
-                <a:extLst>
-                  <a:ext uri="{0D108BD9-81ED-4DB2-BD59-A6C34878D82A}">
-                    <a16:rowId xmlns:a16="http://schemas.microsoft.com/office/drawing/2014/main" val="10005"/>
-                  </a:ext>
-                </a:extLst>
               </a:tr>
             </a:tbl>
           </a:graphicData>
@@ -15451,7 +15497,7 @@
           </a:fontRef>
         </p:style>
         <p:txBody>
-          <a:bodyPr wrap="square" lIns="73152" rIns="73152" rtlCol="0" anchor="ctr"/>
+          <a:bodyPr rtlCol="0" anchor="ctr" wrap="square" lIns="73152" rIns="73152"/>
           <a:lstStyle/>
           <a:p>
             <a:pPr algn="ctr"/>
@@ -15524,7 +15570,6 @@
           <a:lstStyle/>
           <a:p>
             <a:pPr algn="ctr"/>
-            <a:endParaRPr/>
           </a:p>
         </p:txBody>
       </p:sp>
@@ -15644,7 +15689,7 @@
 </file>
 
 <file path=ppt/slides/slide21.xml><?xml version="1.0" encoding="utf-8"?>
-<p:sld xmlns:a="http://schemas.openxmlformats.org/drawingml/2006/main" xmlns:r="http://schemas.openxmlformats.org/officeDocument/2006/relationships" xmlns:p="http://schemas.openxmlformats.org/presentationml/2006/main">
+<p:sld xmlns:a="http://schemas.openxmlformats.org/drawingml/2006/main" xmlns:p="http://schemas.openxmlformats.org/presentationml/2006/main" xmlns:r="http://schemas.openxmlformats.org/officeDocument/2006/relationships">
   <p:cSld>
     <p:bg>
       <p:bgPr>
@@ -15660,14 +15705,7 @@
         <p:cNvGrpSpPr/>
         <p:nvPr/>
       </p:nvGrpSpPr>
-      <p:grpSpPr>
-        <a:xfrm>
-          <a:off x="0" y="0"/>
-          <a:ext cx="0" cy="0"/>
-          <a:chOff x="0" y="0"/>
-          <a:chExt cx="0" cy="0"/>
-        </a:xfrm>
-      </p:grpSpPr>
+      <p:grpSpPr/>
       <p:sp>
         <p:nvSpPr>
           <p:cNvPr id="2" name="TextBox 1"/>
@@ -15776,7 +15814,6 @@
           <a:lstStyle/>
           <a:p>
             <a:pPr algn="ctr"/>
-            <a:endParaRPr/>
           </a:p>
         </p:txBody>
       </p:sp>
@@ -15789,7 +15826,7 @@
           <p:nvPr/>
         </p:nvPicPr>
         <p:blipFill>
-          <a:blip r:embed="rId3"/>
+          <a:blip r:embed="rId2"/>
           <a:stretch>
             <a:fillRect/>
           </a:stretch>
@@ -15963,7 +16000,7 @@
           </a:fontRef>
         </p:style>
         <p:txBody>
-          <a:bodyPr wrap="square" lIns="320040" tIns="164592" rIns="320040" rtlCol="0" anchor="ctr"/>
+          <a:bodyPr rtlCol="0" anchor="ctr" wrap="square" lIns="320040" rIns="320040" tIns="164592"/>
           <a:lstStyle/>
           <a:p>
             <a:pPr algn="ctr"/>
@@ -16038,7 +16075,7 @@
 </file>
 
 <file path=ppt/slides/slide22.xml><?xml version="1.0" encoding="utf-8"?>
-<p:sld xmlns:a="http://schemas.openxmlformats.org/drawingml/2006/main" xmlns:r="http://schemas.openxmlformats.org/officeDocument/2006/relationships" xmlns:p="http://schemas.openxmlformats.org/presentationml/2006/main">
+<p:sld xmlns:a="http://schemas.openxmlformats.org/drawingml/2006/main" xmlns:p="http://schemas.openxmlformats.org/presentationml/2006/main" xmlns:r="http://schemas.openxmlformats.org/officeDocument/2006/relationships">
   <p:cSld>
     <p:bg>
       <p:bgPr>
@@ -16054,14 +16091,7 @@
         <p:cNvGrpSpPr/>
         <p:nvPr/>
       </p:nvGrpSpPr>
-      <p:grpSpPr>
-        <a:xfrm>
-          <a:off x="0" y="0"/>
-          <a:ext cx="0" cy="0"/>
-          <a:chOff x="0" y="0"/>
-          <a:chExt cx="0" cy="0"/>
-        </a:xfrm>
-      </p:grpSpPr>
+      <p:grpSpPr/>
       <p:sp>
         <p:nvSpPr>
           <p:cNvPr id="2" name="TextBox 1"/>
@@ -16170,7 +16200,6 @@
           <a:lstStyle/>
           <a:p>
             <a:pPr algn="ctr"/>
-            <a:endParaRPr/>
           </a:p>
         </p:txBody>
       </p:sp>
@@ -16217,7 +16246,6 @@
           <a:lstStyle/>
           <a:p>
             <a:pPr algn="ctr"/>
-            <a:endParaRPr/>
           </a:p>
         </p:txBody>
       </p:sp>
@@ -16294,7 +16322,7 @@
           </a:fontRef>
         </p:style>
         <p:txBody>
-          <a:bodyPr wrap="square" lIns="45720" tIns="27432" rIns="45720" bIns="27432" rtlCol="0" anchor="ctr"/>
+          <a:bodyPr rtlCol="0" anchor="ctr" wrap="square" lIns="45720" rIns="45720" tIns="27432" bIns="27432"/>
           <a:lstStyle/>
           <a:p>
             <a:pPr algn="ctr"/>
@@ -16361,7 +16389,7 @@
           </a:fontRef>
         </p:style>
         <p:txBody>
-          <a:bodyPr wrap="square" lIns="45720" tIns="27432" rIns="45720" bIns="27432" rtlCol="0" anchor="ctr"/>
+          <a:bodyPr rtlCol="0" anchor="ctr" wrap="square" lIns="45720" rIns="45720" tIns="27432" bIns="27432"/>
           <a:lstStyle/>
           <a:p>
             <a:pPr algn="ctr"/>
@@ -16428,7 +16456,7 @@
           </a:fontRef>
         </p:style>
         <p:txBody>
-          <a:bodyPr wrap="square" lIns="45720" tIns="27432" rIns="45720" bIns="27432" rtlCol="0" anchor="ctr"/>
+          <a:bodyPr rtlCol="0" anchor="ctr" wrap="square" lIns="45720" rIns="45720" tIns="27432" bIns="27432"/>
           <a:lstStyle/>
           <a:p>
             <a:pPr algn="ctr"/>
@@ -16495,7 +16523,7 @@
           </a:fontRef>
         </p:style>
         <p:txBody>
-          <a:bodyPr wrap="square" lIns="45720" tIns="27432" rIns="45720" bIns="27432" rtlCol="0" anchor="ctr"/>
+          <a:bodyPr rtlCol="0" anchor="ctr" wrap="square" lIns="45720" rIns="45720" tIns="27432" bIns="27432"/>
           <a:lstStyle/>
           <a:p>
             <a:pPr algn="ctr"/>
@@ -16562,7 +16590,7 @@
           </a:fontRef>
         </p:style>
         <p:txBody>
-          <a:bodyPr wrap="square" lIns="45720" tIns="27432" rIns="45720" bIns="27432" rtlCol="0" anchor="ctr"/>
+          <a:bodyPr rtlCol="0" anchor="ctr" wrap="square" lIns="45720" rIns="45720" tIns="27432" bIns="27432"/>
           <a:lstStyle/>
           <a:p>
             <a:pPr algn="ctr"/>
@@ -16629,7 +16657,7 @@
           </a:fontRef>
         </p:style>
         <p:txBody>
-          <a:bodyPr wrap="square" lIns="45720" tIns="27432" rIns="45720" bIns="27432" rtlCol="0" anchor="ctr"/>
+          <a:bodyPr rtlCol="0" anchor="ctr" wrap="square" lIns="45720" rIns="45720" tIns="27432" bIns="27432"/>
           <a:lstStyle/>
           <a:p>
             <a:pPr algn="ctr"/>
@@ -16696,7 +16724,7 @@
           </a:fontRef>
         </p:style>
         <p:txBody>
-          <a:bodyPr wrap="square" lIns="45720" tIns="27432" rIns="45720" bIns="27432" rtlCol="0" anchor="ctr"/>
+          <a:bodyPr rtlCol="0" anchor="ctr" wrap="square" lIns="45720" rIns="45720" tIns="27432" bIns="27432"/>
           <a:lstStyle/>
           <a:p>
             <a:pPr algn="ctr"/>
@@ -16763,7 +16791,7 @@
           </a:fontRef>
         </p:style>
         <p:txBody>
-          <a:bodyPr wrap="square" lIns="45720" tIns="27432" rIns="45720" bIns="27432" rtlCol="0" anchor="ctr"/>
+          <a:bodyPr rtlCol="0" anchor="ctr" wrap="square" lIns="45720" rIns="45720" tIns="27432" bIns="27432"/>
           <a:lstStyle/>
           <a:p>
             <a:pPr algn="ctr"/>
@@ -16830,7 +16858,7 @@
           </a:fontRef>
         </p:style>
         <p:txBody>
-          <a:bodyPr wrap="square" lIns="45720" tIns="27432" rIns="45720" bIns="27432" rtlCol="0" anchor="ctr"/>
+          <a:bodyPr rtlCol="0" anchor="ctr" wrap="square" lIns="45720" rIns="45720" tIns="27432" bIns="27432"/>
           <a:lstStyle/>
           <a:p>
             <a:pPr algn="ctr"/>
@@ -16885,7 +16913,7 @@
           </a:fontRef>
         </p:style>
         <p:txBody>
-          <a:bodyPr wrap="square" lIns="137160" rtlCol="0" anchor="ctr"/>
+          <a:bodyPr rtlCol="0" anchor="ctr" wrap="square" lIns="137160"/>
           <a:lstStyle/>
           <a:p>
             <a:pPr algn="l"/>
@@ -16949,7 +16977,7 @@
           </a:fontRef>
         </p:style>
         <p:txBody>
-          <a:bodyPr wrap="square" lIns="137160" rtlCol="0" anchor="ctr"/>
+          <a:bodyPr rtlCol="0" anchor="ctr" wrap="square" lIns="137160"/>
           <a:lstStyle/>
           <a:p>
             <a:pPr algn="l"/>
@@ -17013,7 +17041,7 @@
           </a:fontRef>
         </p:style>
         <p:txBody>
-          <a:bodyPr wrap="square" lIns="137160" rtlCol="0" anchor="ctr"/>
+          <a:bodyPr rtlCol="0" anchor="ctr" wrap="square" lIns="137160"/>
           <a:lstStyle/>
           <a:p>
             <a:pPr algn="l"/>
@@ -17077,7 +17105,7 @@
           </a:fontRef>
         </p:style>
         <p:txBody>
-          <a:bodyPr wrap="square" lIns="137160" rtlCol="0" anchor="ctr"/>
+          <a:bodyPr rtlCol="0" anchor="ctr" wrap="square" lIns="137160"/>
           <a:lstStyle/>
           <a:p>
             <a:pPr algn="l"/>
@@ -17141,7 +17169,7 @@
           </a:fontRef>
         </p:style>
         <p:txBody>
-          <a:bodyPr wrap="square" lIns="137160" rtlCol="0" anchor="ctr"/>
+          <a:bodyPr rtlCol="0" anchor="ctr" wrap="square" lIns="137160"/>
           <a:lstStyle/>
           <a:p>
             <a:pPr algn="l"/>
@@ -17205,7 +17233,7 @@
           </a:fontRef>
         </p:style>
         <p:txBody>
-          <a:bodyPr wrap="square" lIns="137160" rtlCol="0" anchor="ctr"/>
+          <a:bodyPr rtlCol="0" anchor="ctr" wrap="square" lIns="137160"/>
           <a:lstStyle/>
           <a:p>
             <a:pPr algn="l"/>
@@ -17269,7 +17297,7 @@
           </a:fontRef>
         </p:style>
         <p:txBody>
-          <a:bodyPr wrap="square" lIns="137160" rtlCol="0" anchor="ctr"/>
+          <a:bodyPr rtlCol="0" anchor="ctr" wrap="square" lIns="137160"/>
           <a:lstStyle/>
           <a:p>
             <a:pPr algn="l"/>
@@ -17331,7 +17359,7 @@
           </a:fontRef>
         </p:style>
         <p:txBody>
-          <a:bodyPr wrap="square" rtlCol="0" anchor="ctr"/>
+          <a:bodyPr rtlCol="0" anchor="ctr" wrap="square"/>
           <a:lstStyle/>
           <a:p>
             <a:pPr algn="ctr"/>
@@ -17356,7 +17384,7 @@
 </file>
 
 <file path=ppt/slides/slide23.xml><?xml version="1.0" encoding="utf-8"?>
-<p:sld xmlns:a="http://schemas.openxmlformats.org/drawingml/2006/main" xmlns:r="http://schemas.openxmlformats.org/officeDocument/2006/relationships" xmlns:p="http://schemas.openxmlformats.org/presentationml/2006/main">
+<p:sld xmlns:a="http://schemas.openxmlformats.org/drawingml/2006/main" xmlns:p="http://schemas.openxmlformats.org/presentationml/2006/main" xmlns:r="http://schemas.openxmlformats.org/officeDocument/2006/relationships">
   <p:cSld>
     <p:bg>
       <p:bgPr>
@@ -17372,14 +17400,7 @@
         <p:cNvGrpSpPr/>
         <p:nvPr/>
       </p:nvGrpSpPr>
-      <p:grpSpPr>
-        <a:xfrm>
-          <a:off x="0" y="0"/>
-          <a:ext cx="0" cy="0"/>
-          <a:chOff x="0" y="0"/>
-          <a:chExt cx="0" cy="0"/>
-        </a:xfrm>
-      </p:grpSpPr>
+      <p:grpSpPr/>
       <p:sp>
         <p:nvSpPr>
           <p:cNvPr id="2" name="TextBox 1"/>
@@ -17488,7 +17509,6 @@
           <a:lstStyle/>
           <a:p>
             <a:pPr algn="ctr"/>
-            <a:endParaRPr/>
           </a:p>
         </p:txBody>
       </p:sp>
@@ -17626,7 +17646,6 @@
           <a:lstStyle/>
           <a:p>
             <a:pPr algn="ctr"/>
-            <a:endParaRPr/>
           </a:p>
         </p:txBody>
       </p:sp>
@@ -17671,7 +17690,6 @@
           <a:lstStyle/>
           <a:p>
             <a:pPr algn="ctr"/>
-            <a:endParaRPr/>
           </a:p>
         </p:txBody>
       </p:sp>
@@ -17868,7 +17886,7 @@
           </a:fontRef>
         </p:style>
         <p:txBody>
-          <a:bodyPr wrap="none" lIns="201168" tIns="137160" rIns="137160" bIns="109728" rtlCol="0" anchor="ctr"/>
+          <a:bodyPr rtlCol="0" anchor="ctr" wrap="none" lIns="201168" tIns="137160" rIns="137160" bIns="109728"/>
           <a:lstStyle/>
           <a:p>
             <a:pPr algn="ctr">
@@ -18021,7 +18039,7 @@
           </a:fontRef>
         </p:style>
         <p:txBody>
-          <a:bodyPr wrap="none" lIns="201168" tIns="137160" rIns="137160" bIns="109728" rtlCol="0" anchor="ctr"/>
+          <a:bodyPr rtlCol="0" anchor="ctr" wrap="none" lIns="201168" tIns="137160" rIns="137160" bIns="109728"/>
           <a:lstStyle/>
           <a:p>
             <a:pPr algn="ctr">
@@ -18130,7 +18148,7 @@
 </file>
 
 <file path=ppt/slides/slide24.xml><?xml version="1.0" encoding="utf-8"?>
-<p:sld xmlns:a="http://schemas.openxmlformats.org/drawingml/2006/main" xmlns:r="http://schemas.openxmlformats.org/officeDocument/2006/relationships" xmlns:p="http://schemas.openxmlformats.org/presentationml/2006/main">
+<p:sld xmlns:a="http://schemas.openxmlformats.org/drawingml/2006/main" xmlns:p="http://schemas.openxmlformats.org/presentationml/2006/main" xmlns:r="http://schemas.openxmlformats.org/officeDocument/2006/relationships">
   <p:cSld>
     <p:bg>
       <p:bgPr>
@@ -18146,14 +18164,7 @@
         <p:cNvGrpSpPr/>
         <p:nvPr/>
       </p:nvGrpSpPr>
-      <p:grpSpPr>
-        <a:xfrm>
-          <a:off x="0" y="0"/>
-          <a:ext cx="0" cy="0"/>
-          <a:chOff x="0" y="0"/>
-          <a:chExt cx="0" cy="0"/>
-        </a:xfrm>
-      </p:grpSpPr>
+      <p:grpSpPr/>
       <p:sp>
         <p:nvSpPr>
           <p:cNvPr id="2" name="TextBox 1"/>
@@ -18262,7 +18273,6 @@
           <a:lstStyle/>
           <a:p>
             <a:pPr algn="ctr"/>
-            <a:endParaRPr/>
           </a:p>
         </p:txBody>
       </p:sp>
@@ -18303,7 +18313,7 @@
           </a:fontRef>
         </p:style>
         <p:txBody>
-          <a:bodyPr wrap="square" lIns="45720" tIns="27432" rIns="45720" bIns="27432" rtlCol="0" anchor="ctr"/>
+          <a:bodyPr rtlCol="0" anchor="ctr" wrap="square" lIns="45720" rIns="45720" tIns="27432" bIns="27432"/>
           <a:lstStyle/>
           <a:p>
             <a:pPr algn="ctr"/>
@@ -18399,7 +18409,7 @@
           </a:fontRef>
         </p:style>
         <p:txBody>
-          <a:bodyPr wrap="square" lIns="45720" tIns="27432" rIns="45720" bIns="27432" rtlCol="0" anchor="ctr"/>
+          <a:bodyPr rtlCol="0" anchor="ctr" wrap="square" lIns="45720" rIns="45720" tIns="27432" bIns="27432"/>
           <a:lstStyle/>
           <a:p>
             <a:pPr algn="ctr"/>
@@ -18486,7 +18496,7 @@
           </a:fontRef>
         </p:style>
         <p:txBody>
-          <a:bodyPr wrap="square" lIns="45720" tIns="27432" rIns="45720" bIns="27432" rtlCol="0" anchor="ctr"/>
+          <a:bodyPr rtlCol="0" anchor="ctr" wrap="square" lIns="45720" rIns="45720" tIns="27432" bIns="27432"/>
           <a:lstStyle/>
           <a:p>
             <a:pPr algn="ctr"/>
@@ -18573,7 +18583,7 @@
           </a:fontRef>
         </p:style>
         <p:txBody>
-          <a:bodyPr wrap="square" lIns="45720" tIns="27432" rIns="45720" bIns="27432" rtlCol="0" anchor="ctr"/>
+          <a:bodyPr rtlCol="0" anchor="ctr" wrap="square" lIns="45720" rIns="45720" tIns="27432" bIns="27432"/>
           <a:lstStyle/>
           <a:p>
             <a:pPr algn="ctr"/>
@@ -18678,7 +18688,7 @@
           </a:fontRef>
         </p:style>
         <p:txBody>
-          <a:bodyPr wrap="square" lIns="45720" tIns="27432" rIns="45720" bIns="27432" rtlCol="0" anchor="ctr"/>
+          <a:bodyPr rtlCol="0" anchor="ctr" wrap="square" lIns="45720" rIns="45720" tIns="27432" bIns="27432"/>
           <a:lstStyle/>
           <a:p>
             <a:pPr algn="ctr"/>
@@ -18801,7 +18811,7 @@
           </a:fontRef>
         </p:style>
         <p:txBody>
-          <a:bodyPr wrap="square" rtlCol="0" anchor="ctr"/>
+          <a:bodyPr rtlCol="0" anchor="ctr" wrap="square"/>
           <a:lstStyle/>
           <a:p>
             <a:pPr algn="ctr"/>
@@ -18844,7 +18854,7 @@
 </file>
 
 <file path=ppt/slides/slide25.xml><?xml version="1.0" encoding="utf-8"?>
-<p:sld xmlns:a="http://schemas.openxmlformats.org/drawingml/2006/main" xmlns:r="http://schemas.openxmlformats.org/officeDocument/2006/relationships" xmlns:p="http://schemas.openxmlformats.org/presentationml/2006/main">
+<p:sld xmlns:a="http://schemas.openxmlformats.org/drawingml/2006/main" xmlns:p="http://schemas.openxmlformats.org/presentationml/2006/main" xmlns:r="http://schemas.openxmlformats.org/officeDocument/2006/relationships">
   <p:cSld>
     <p:bg>
       <p:bgPr>
@@ -18860,14 +18870,7 @@
         <p:cNvGrpSpPr/>
         <p:nvPr/>
       </p:nvGrpSpPr>
-      <p:grpSpPr>
-        <a:xfrm>
-          <a:off x="0" y="0"/>
-          <a:ext cx="0" cy="0"/>
-          <a:chOff x="0" y="0"/>
-          <a:chExt cx="0" cy="0"/>
-        </a:xfrm>
-      </p:grpSpPr>
+      <p:grpSpPr/>
       <p:sp>
         <p:nvSpPr>
           <p:cNvPr id="2" name="TextBox 1"/>
@@ -18976,7 +18979,6 @@
           <a:lstStyle/>
           <a:p>
             <a:pPr algn="ctr"/>
-            <a:endParaRPr/>
           </a:p>
         </p:txBody>
       </p:sp>
@@ -19058,7 +19060,7 @@
           </a:fontRef>
         </p:style>
         <p:txBody>
-          <a:bodyPr wrap="square" lIns="45720" tIns="27432" rIns="45720" bIns="27432" rtlCol="0" anchor="ctr"/>
+          <a:bodyPr rtlCol="0" anchor="ctr" wrap="square" lIns="45720" rIns="45720" tIns="27432" bIns="27432"/>
           <a:lstStyle/>
           <a:p>
             <a:pPr algn="ctr"/>
@@ -19150,7 +19152,7 @@
           </a:fontRef>
         </p:style>
         <p:txBody>
-          <a:bodyPr wrap="square" lIns="45720" tIns="27432" rIns="45720" bIns="27432" rtlCol="0" anchor="ctr"/>
+          <a:bodyPr rtlCol="0" anchor="ctr" wrap="square" lIns="45720" rIns="45720" tIns="27432" bIns="27432"/>
           <a:lstStyle/>
           <a:p>
             <a:pPr algn="ctr"/>
@@ -19242,7 +19244,7 @@
           </a:fontRef>
         </p:style>
         <p:txBody>
-          <a:bodyPr wrap="square" lIns="45720" tIns="27432" rIns="45720" bIns="27432" rtlCol="0" anchor="ctr"/>
+          <a:bodyPr rtlCol="0" anchor="ctr" wrap="square" lIns="45720" rIns="45720" tIns="27432" bIns="27432"/>
           <a:lstStyle/>
           <a:p>
             <a:pPr algn="ctr"/>
@@ -19346,7 +19348,7 @@
           </a:fontRef>
         </p:style>
         <p:txBody>
-          <a:bodyPr wrap="square" lIns="45720" tIns="27432" rIns="45720" bIns="27432" rtlCol="0" anchor="ctr"/>
+          <a:bodyPr rtlCol="0" anchor="ctr" wrap="square" lIns="45720" rIns="45720" tIns="27432" bIns="27432"/>
           <a:lstStyle/>
           <a:p>
             <a:pPr algn="ctr"/>
@@ -19438,7 +19440,7 @@
           </a:fontRef>
         </p:style>
         <p:txBody>
-          <a:bodyPr wrap="square" lIns="45720" tIns="27432" rIns="45720" bIns="27432" rtlCol="0" anchor="ctr"/>
+          <a:bodyPr rtlCol="0" anchor="ctr" wrap="square" lIns="45720" rIns="45720" tIns="27432" bIns="27432"/>
           <a:lstStyle/>
           <a:p>
             <a:pPr algn="ctr"/>
@@ -19613,7 +19615,6 @@
           <a:lstStyle/>
           <a:p>
             <a:pPr algn="ctr"/>
-            <a:endParaRPr/>
           </a:p>
         </p:txBody>
       </p:sp>
@@ -19677,7 +19678,7 @@
 </file>
 
 <file path=ppt/slides/slide26.xml><?xml version="1.0" encoding="utf-8"?>
-<p:sld xmlns:a="http://schemas.openxmlformats.org/drawingml/2006/main" xmlns:r="http://schemas.openxmlformats.org/officeDocument/2006/relationships" xmlns:p="http://schemas.openxmlformats.org/presentationml/2006/main">
+<p:sld xmlns:a="http://schemas.openxmlformats.org/drawingml/2006/main" xmlns:p="http://schemas.openxmlformats.org/presentationml/2006/main" xmlns:r="http://schemas.openxmlformats.org/officeDocument/2006/relationships">
   <p:cSld>
     <p:bg>
       <p:bgPr>
@@ -19693,14 +19694,7 @@
         <p:cNvGrpSpPr/>
         <p:nvPr/>
       </p:nvGrpSpPr>
-      <p:grpSpPr>
-        <a:xfrm>
-          <a:off x="0" y="0"/>
-          <a:ext cx="0" cy="0"/>
-          <a:chOff x="0" y="0"/>
-          <a:chExt cx="0" cy="0"/>
-        </a:xfrm>
-      </p:grpSpPr>
+      <p:grpSpPr/>
       <p:sp>
         <p:nvSpPr>
           <p:cNvPr id="2" name="TextBox 1"/>
@@ -19809,7 +19803,6 @@
           <a:lstStyle/>
           <a:p>
             <a:pPr algn="ctr"/>
-            <a:endParaRPr/>
           </a:p>
         </p:txBody>
       </p:sp>
@@ -19871,32 +19864,14 @@
                 <a:tableStyleId>{5C22544A-7EE6-4342-B048-85BDC9FD1C3A}</a:tableStyleId>
               </a:tblPr>
               <a:tblGrid>
-                <a:gridCol w="2651760">
-                  <a:extLst>
-                    <a:ext uri="{9D8B030D-6E8A-4147-A177-3AD203B41FA5}">
-                      <a16:colId xmlns:a16="http://schemas.microsoft.com/office/drawing/2014/main" val="20000"/>
-                    </a:ext>
-                  </a:extLst>
-                </a:gridCol>
-                <a:gridCol w="3108960">
-                  <a:extLst>
-                    <a:ext uri="{9D8B030D-6E8A-4147-A177-3AD203B41FA5}">
-                      <a16:colId xmlns:a16="http://schemas.microsoft.com/office/drawing/2014/main" val="20001"/>
-                    </a:ext>
-                  </a:extLst>
-                </a:gridCol>
-                <a:gridCol w="1097280">
-                  <a:extLst>
-                    <a:ext uri="{9D8B030D-6E8A-4147-A177-3AD203B41FA5}">
-                      <a16:colId xmlns:a16="http://schemas.microsoft.com/office/drawing/2014/main" val="20002"/>
-                    </a:ext>
-                  </a:extLst>
-                </a:gridCol>
+                <a:gridCol w="2651760"/>
+                <a:gridCol w="3108960"/>
+                <a:gridCol w="1097280"/>
               </a:tblGrid>
               <a:tr h="502920">
                 <a:tc>
                   <a:txBody>
-                    <a:bodyPr/>
+                    <a:bodyPr wrap="square"/>
                     <a:lstStyle/>
                     <a:p>
                       <a:r>
@@ -19918,7 +19893,7 @@
                 </a:tc>
                 <a:tc>
                   <a:txBody>
-                    <a:bodyPr/>
+                    <a:bodyPr wrap="square"/>
                     <a:lstStyle/>
                     <a:p>
                       <a:r>
@@ -19940,7 +19915,7 @@
                 </a:tc>
                 <a:tc>
                   <a:txBody>
-                    <a:bodyPr/>
+                    <a:bodyPr wrap="square"/>
                     <a:lstStyle/>
                     <a:p>
                       <a:r>
@@ -19960,16 +19935,11 @@
                     </a:solidFill>
                   </a:tcPr>
                 </a:tc>
-                <a:extLst>
-                  <a:ext uri="{0D108BD9-81ED-4DB2-BD59-A6C34878D82A}">
-                    <a16:rowId xmlns:a16="http://schemas.microsoft.com/office/drawing/2014/main" val="10000"/>
-                  </a:ext>
-                </a:extLst>
               </a:tr>
               <a:tr h="502920">
                 <a:tc>
                   <a:txBody>
-                    <a:bodyPr/>
+                    <a:bodyPr wrap="square"/>
                     <a:lstStyle/>
                     <a:p>
                       <a:r>
@@ -19991,7 +19961,7 @@
                 </a:tc>
                 <a:tc>
                   <a:txBody>
-                    <a:bodyPr/>
+                    <a:bodyPr wrap="square"/>
                     <a:lstStyle/>
                     <a:p>
                       <a:r>
@@ -20013,7 +19983,7 @@
                 </a:tc>
                 <a:tc>
                   <a:txBody>
-                    <a:bodyPr/>
+                    <a:bodyPr wrap="square"/>
                     <a:lstStyle/>
                     <a:p>
                       <a:r>
@@ -20033,16 +20003,11 @@
                     </a:solidFill>
                   </a:tcPr>
                 </a:tc>
-                <a:extLst>
-                  <a:ext uri="{0D108BD9-81ED-4DB2-BD59-A6C34878D82A}">
-                    <a16:rowId xmlns:a16="http://schemas.microsoft.com/office/drawing/2014/main" val="10001"/>
-                  </a:ext>
-                </a:extLst>
               </a:tr>
               <a:tr h="502920">
                 <a:tc>
                   <a:txBody>
-                    <a:bodyPr/>
+                    <a:bodyPr wrap="square"/>
                     <a:lstStyle/>
                     <a:p>
                       <a:r>
@@ -20064,7 +20029,7 @@
                 </a:tc>
                 <a:tc>
                   <a:txBody>
-                    <a:bodyPr/>
+                    <a:bodyPr wrap="square"/>
                     <a:lstStyle/>
                     <a:p>
                       <a:r>
@@ -20086,7 +20051,7 @@
                 </a:tc>
                 <a:tc>
                   <a:txBody>
-                    <a:bodyPr/>
+                    <a:bodyPr wrap="square"/>
                     <a:lstStyle/>
                     <a:p>
                       <a:r>
@@ -20106,16 +20071,11 @@
                     </a:solidFill>
                   </a:tcPr>
                 </a:tc>
-                <a:extLst>
-                  <a:ext uri="{0D108BD9-81ED-4DB2-BD59-A6C34878D82A}">
-                    <a16:rowId xmlns:a16="http://schemas.microsoft.com/office/drawing/2014/main" val="10002"/>
-                  </a:ext>
-                </a:extLst>
               </a:tr>
               <a:tr h="502920">
                 <a:tc>
                   <a:txBody>
-                    <a:bodyPr/>
+                    <a:bodyPr wrap="square"/>
                     <a:lstStyle/>
                     <a:p>
                       <a:r>
@@ -20137,7 +20097,7 @@
                 </a:tc>
                 <a:tc>
                   <a:txBody>
-                    <a:bodyPr/>
+                    <a:bodyPr wrap="square"/>
                     <a:lstStyle/>
                     <a:p>
                       <a:r>
@@ -20159,7 +20119,7 @@
                 </a:tc>
                 <a:tc>
                   <a:txBody>
-                    <a:bodyPr/>
+                    <a:bodyPr wrap="square"/>
                     <a:lstStyle/>
                     <a:p>
                       <a:r>
@@ -20179,16 +20139,11 @@
                     </a:solidFill>
                   </a:tcPr>
                 </a:tc>
-                <a:extLst>
-                  <a:ext uri="{0D108BD9-81ED-4DB2-BD59-A6C34878D82A}">
-                    <a16:rowId xmlns:a16="http://schemas.microsoft.com/office/drawing/2014/main" val="10003"/>
-                  </a:ext>
-                </a:extLst>
               </a:tr>
               <a:tr h="502920">
                 <a:tc>
                   <a:txBody>
-                    <a:bodyPr/>
+                    <a:bodyPr wrap="square"/>
                     <a:lstStyle/>
                     <a:p>
                       <a:r>
@@ -20210,7 +20165,7 @@
                 </a:tc>
                 <a:tc>
                   <a:txBody>
-                    <a:bodyPr/>
+                    <a:bodyPr wrap="square"/>
                     <a:lstStyle/>
                     <a:p>
                       <a:r>
@@ -20232,7 +20187,7 @@
                 </a:tc>
                 <a:tc>
                   <a:txBody>
-                    <a:bodyPr/>
+                    <a:bodyPr wrap="square"/>
                     <a:lstStyle/>
                     <a:p>
                       <a:r>
@@ -20252,16 +20207,11 @@
                     </a:solidFill>
                   </a:tcPr>
                 </a:tc>
-                <a:extLst>
-                  <a:ext uri="{0D108BD9-81ED-4DB2-BD59-A6C34878D82A}">
-                    <a16:rowId xmlns:a16="http://schemas.microsoft.com/office/drawing/2014/main" val="10004"/>
-                  </a:ext>
-                </a:extLst>
               </a:tr>
               <a:tr h="502920">
                 <a:tc>
                   <a:txBody>
-                    <a:bodyPr/>
+                    <a:bodyPr wrap="square"/>
                     <a:lstStyle/>
                     <a:p>
                       <a:r>
@@ -20292,7 +20242,7 @@
                 </a:tc>
                 <a:tc>
                   <a:txBody>
-                    <a:bodyPr/>
+                    <a:bodyPr wrap="square"/>
                     <a:lstStyle/>
                     <a:p>
                       <a:r>
@@ -20314,7 +20264,7 @@
                 </a:tc>
                 <a:tc>
                   <a:txBody>
-                    <a:bodyPr/>
+                    <a:bodyPr wrap="square"/>
                     <a:lstStyle/>
                     <a:p>
                       <a:r>
@@ -20334,11 +20284,6 @@
                     </a:solidFill>
                   </a:tcPr>
                 </a:tc>
-                <a:extLst>
-                  <a:ext uri="{0D108BD9-81ED-4DB2-BD59-A6C34878D82A}">
-                    <a16:rowId xmlns:a16="http://schemas.microsoft.com/office/drawing/2014/main" val="10005"/>
-                  </a:ext>
-                </a:extLst>
               </a:tr>
             </a:tbl>
           </a:graphicData>
@@ -20385,7 +20330,6 @@
           <a:lstStyle/>
           <a:p>
             <a:pPr algn="ctr"/>
-            <a:endParaRPr/>
           </a:p>
         </p:txBody>
       </p:sp>
@@ -20517,7 +20461,7 @@
 </file>
 
 <file path=ppt/slides/slide27.xml><?xml version="1.0" encoding="utf-8"?>
-<p:sld xmlns:a="http://schemas.openxmlformats.org/drawingml/2006/main" xmlns:r="http://schemas.openxmlformats.org/officeDocument/2006/relationships" xmlns:p="http://schemas.openxmlformats.org/presentationml/2006/main">
+<p:sld xmlns:a="http://schemas.openxmlformats.org/drawingml/2006/main" xmlns:p="http://schemas.openxmlformats.org/presentationml/2006/main" xmlns:r="http://schemas.openxmlformats.org/officeDocument/2006/relationships">
   <p:cSld>
     <p:bg>
       <p:bgPr>
@@ -20533,14 +20477,7 @@
         <p:cNvGrpSpPr/>
         <p:nvPr/>
       </p:nvGrpSpPr>
-      <p:grpSpPr>
-        <a:xfrm>
-          <a:off x="0" y="0"/>
-          <a:ext cx="0" cy="0"/>
-          <a:chOff x="0" y="0"/>
-          <a:chExt cx="0" cy="0"/>
-        </a:xfrm>
-      </p:grpSpPr>
+      <p:grpSpPr/>
       <p:sp>
         <p:nvSpPr>
           <p:cNvPr id="2" name="TextBox 1"/>
@@ -20649,7 +20586,6 @@
           <a:lstStyle/>
           <a:p>
             <a:pPr algn="ctr"/>
-            <a:endParaRPr/>
           </a:p>
         </p:txBody>
       </p:sp>
@@ -20711,32 +20647,14 @@
                 <a:tableStyleId>{5C22544A-7EE6-4342-B048-85BDC9FD1C3A}</a:tableStyleId>
               </a:tblPr>
               <a:tblGrid>
-                <a:gridCol w="2286000">
-                  <a:extLst>
-                    <a:ext uri="{9D8B030D-6E8A-4147-A177-3AD203B41FA5}">
-                      <a16:colId xmlns:a16="http://schemas.microsoft.com/office/drawing/2014/main" val="20000"/>
-                    </a:ext>
-                  </a:extLst>
-                </a:gridCol>
-                <a:gridCol w="6583680">
-                  <a:extLst>
-                    <a:ext uri="{9D8B030D-6E8A-4147-A177-3AD203B41FA5}">
-                      <a16:colId xmlns:a16="http://schemas.microsoft.com/office/drawing/2014/main" val="20001"/>
-                    </a:ext>
-                  </a:extLst>
-                </a:gridCol>
-                <a:gridCol w="2194560">
-                  <a:extLst>
-                    <a:ext uri="{9D8B030D-6E8A-4147-A177-3AD203B41FA5}">
-                      <a16:colId xmlns:a16="http://schemas.microsoft.com/office/drawing/2014/main" val="20002"/>
-                    </a:ext>
-                  </a:extLst>
-                </a:gridCol>
+                <a:gridCol w="2286000"/>
+                <a:gridCol w="6583680"/>
+                <a:gridCol w="2194560"/>
               </a:tblGrid>
               <a:tr h="533400">
                 <a:tc>
                   <a:txBody>
-                    <a:bodyPr/>
+                    <a:bodyPr wrap="square"/>
                     <a:lstStyle/>
                     <a:p>
                       <a:r>
@@ -20758,7 +20676,7 @@
                 </a:tc>
                 <a:tc>
                   <a:txBody>
-                    <a:bodyPr/>
+                    <a:bodyPr wrap="square"/>
                     <a:lstStyle/>
                     <a:p>
                       <a:r>
@@ -20780,7 +20698,7 @@
                 </a:tc>
                 <a:tc>
                   <a:txBody>
-                    <a:bodyPr/>
+                    <a:bodyPr wrap="square"/>
                     <a:lstStyle/>
                     <a:p>
                       <a:r>
@@ -20800,16 +20718,11 @@
                     </a:solidFill>
                   </a:tcPr>
                 </a:tc>
-                <a:extLst>
-                  <a:ext uri="{0D108BD9-81ED-4DB2-BD59-A6C34878D82A}">
-                    <a16:rowId xmlns:a16="http://schemas.microsoft.com/office/drawing/2014/main" val="10000"/>
-                  </a:ext>
-                </a:extLst>
               </a:tr>
               <a:tr h="533400">
                 <a:tc>
                   <a:txBody>
-                    <a:bodyPr/>
+                    <a:bodyPr wrap="square"/>
                     <a:lstStyle/>
                     <a:p>
                       <a:r>
@@ -20831,7 +20744,7 @@
                 </a:tc>
                 <a:tc>
                   <a:txBody>
-                    <a:bodyPr/>
+                    <a:bodyPr wrap="square"/>
                     <a:lstStyle/>
                     <a:p>
                       <a:r>
@@ -20853,7 +20766,7 @@
                 </a:tc>
                 <a:tc>
                   <a:txBody>
-                    <a:bodyPr/>
+                    <a:bodyPr wrap="square"/>
                     <a:lstStyle/>
                     <a:p>
                       <a:r>
@@ -20873,16 +20786,11 @@
                     </a:solidFill>
                   </a:tcPr>
                 </a:tc>
-                <a:extLst>
-                  <a:ext uri="{0D108BD9-81ED-4DB2-BD59-A6C34878D82A}">
-                    <a16:rowId xmlns:a16="http://schemas.microsoft.com/office/drawing/2014/main" val="10001"/>
-                  </a:ext>
-                </a:extLst>
               </a:tr>
               <a:tr h="533400">
                 <a:tc>
                   <a:txBody>
-                    <a:bodyPr/>
+                    <a:bodyPr wrap="square"/>
                     <a:lstStyle/>
                     <a:p>
                       <a:r>
@@ -20904,7 +20812,7 @@
                 </a:tc>
                 <a:tc>
                   <a:txBody>
-                    <a:bodyPr/>
+                    <a:bodyPr wrap="square"/>
                     <a:lstStyle/>
                     <a:p>
                       <a:r>
@@ -20926,7 +20834,7 @@
                 </a:tc>
                 <a:tc>
                   <a:txBody>
-                    <a:bodyPr/>
+                    <a:bodyPr wrap="square"/>
                     <a:lstStyle/>
                     <a:p>
                       <a:r>
@@ -20946,16 +20854,11 @@
                     </a:solidFill>
                   </a:tcPr>
                 </a:tc>
-                <a:extLst>
-                  <a:ext uri="{0D108BD9-81ED-4DB2-BD59-A6C34878D82A}">
-                    <a16:rowId xmlns:a16="http://schemas.microsoft.com/office/drawing/2014/main" val="10002"/>
-                  </a:ext>
-                </a:extLst>
               </a:tr>
               <a:tr h="533400">
                 <a:tc>
                   <a:txBody>
-                    <a:bodyPr/>
+                    <a:bodyPr wrap="square"/>
                     <a:lstStyle/>
                     <a:p>
                       <a:r>
@@ -20977,7 +20880,7 @@
                 </a:tc>
                 <a:tc>
                   <a:txBody>
-                    <a:bodyPr/>
+                    <a:bodyPr wrap="square"/>
                     <a:lstStyle/>
                     <a:p>
                       <a:r>
@@ -20999,7 +20902,7 @@
                 </a:tc>
                 <a:tc>
                   <a:txBody>
-                    <a:bodyPr/>
+                    <a:bodyPr wrap="square"/>
                     <a:lstStyle/>
                     <a:p>
                       <a:r>
@@ -21019,16 +20922,11 @@
                     </a:solidFill>
                   </a:tcPr>
                 </a:tc>
-                <a:extLst>
-                  <a:ext uri="{0D108BD9-81ED-4DB2-BD59-A6C34878D82A}">
-                    <a16:rowId xmlns:a16="http://schemas.microsoft.com/office/drawing/2014/main" val="10003"/>
-                  </a:ext>
-                </a:extLst>
               </a:tr>
               <a:tr h="533400">
                 <a:tc>
                   <a:txBody>
-                    <a:bodyPr/>
+                    <a:bodyPr wrap="square"/>
                     <a:lstStyle/>
                     <a:p>
                       <a:r>
@@ -21050,7 +20948,7 @@
                 </a:tc>
                 <a:tc>
                   <a:txBody>
-                    <a:bodyPr/>
+                    <a:bodyPr wrap="square"/>
                     <a:lstStyle/>
                     <a:p>
                       <a:r>
@@ -21072,7 +20970,7 @@
                 </a:tc>
                 <a:tc>
                   <a:txBody>
-                    <a:bodyPr/>
+                    <a:bodyPr wrap="square"/>
                     <a:lstStyle/>
                     <a:p>
                       <a:r>
@@ -21092,16 +20990,11 @@
                     </a:solidFill>
                   </a:tcPr>
                 </a:tc>
-                <a:extLst>
-                  <a:ext uri="{0D108BD9-81ED-4DB2-BD59-A6C34878D82A}">
-                    <a16:rowId xmlns:a16="http://schemas.microsoft.com/office/drawing/2014/main" val="10004"/>
-                  </a:ext>
-                </a:extLst>
               </a:tr>
               <a:tr h="533400">
                 <a:tc>
                   <a:txBody>
-                    <a:bodyPr/>
+                    <a:bodyPr wrap="square"/>
                     <a:lstStyle/>
                     <a:p>
                       <a:r>
@@ -21123,7 +21016,7 @@
                 </a:tc>
                 <a:tc>
                   <a:txBody>
-                    <a:bodyPr/>
+                    <a:bodyPr wrap="square"/>
                     <a:lstStyle/>
                     <a:p>
                       <a:r>
@@ -21145,7 +21038,7 @@
                 </a:tc>
                 <a:tc>
                   <a:txBody>
-                    <a:bodyPr/>
+                    <a:bodyPr wrap="square"/>
                     <a:lstStyle/>
                     <a:p>
                       <a:r>
@@ -21165,11 +21058,6 @@
                     </a:solidFill>
                   </a:tcPr>
                 </a:tc>
-                <a:extLst>
-                  <a:ext uri="{0D108BD9-81ED-4DB2-BD59-A6C34878D82A}">
-                    <a16:rowId xmlns:a16="http://schemas.microsoft.com/office/drawing/2014/main" val="10005"/>
-                  </a:ext>
-                </a:extLst>
               </a:tr>
             </a:tbl>
           </a:graphicData>
@@ -21212,7 +21100,7 @@
           </a:fontRef>
         </p:style>
         <p:txBody>
-          <a:bodyPr wrap="square" lIns="45720" tIns="27432" rIns="45720" bIns="27432" rtlCol="0" anchor="ctr"/>
+          <a:bodyPr rtlCol="0" anchor="ctr" wrap="square" lIns="45720" rIns="45720" tIns="27432" bIns="27432"/>
           <a:lstStyle/>
           <a:p>
             <a:pPr algn="ctr"/>
@@ -21237,7 +21125,7 @@
 </file>
 
 <file path=ppt/slides/slide28.xml><?xml version="1.0" encoding="utf-8"?>
-<p:sld xmlns:a="http://schemas.openxmlformats.org/drawingml/2006/main" xmlns:r="http://schemas.openxmlformats.org/officeDocument/2006/relationships" xmlns:p="http://schemas.openxmlformats.org/presentationml/2006/main">
+<p:sld xmlns:a="http://schemas.openxmlformats.org/drawingml/2006/main" xmlns:p="http://schemas.openxmlformats.org/presentationml/2006/main" xmlns:r="http://schemas.openxmlformats.org/officeDocument/2006/relationships">
   <p:cSld>
     <p:bg>
       <p:bgPr>
@@ -21253,14 +21141,7 @@
         <p:cNvGrpSpPr/>
         <p:nvPr/>
       </p:nvGrpSpPr>
-      <p:grpSpPr>
-        <a:xfrm>
-          <a:off x="0" y="0"/>
-          <a:ext cx="0" cy="0"/>
-          <a:chOff x="0" y="0"/>
-          <a:chExt cx="0" cy="0"/>
-        </a:xfrm>
-      </p:grpSpPr>
+      <p:grpSpPr/>
       <p:sp>
         <p:nvSpPr>
           <p:cNvPr id="2" name="TextBox 1"/>
@@ -21369,13 +21250,241 @@
           <a:lstStyle/>
           <a:p>
             <a:pPr algn="ctr"/>
-            <a:endParaRPr/>
           </a:p>
         </p:txBody>
       </p:sp>
       <p:pic>
         <p:nvPicPr>
           <p:cNvPr id="5" name="Picture 4" descr="lattice_logo_ondark.png"/>
+          <p:cNvPicPr>
+            <a:picLocks noChangeAspect="1"/>
+          </p:cNvPicPr>
+          <p:nvPr/>
+        </p:nvPicPr>
+        <p:blipFill>
+          <a:blip r:embed="rId2"/>
+          <a:stretch>
+            <a:fillRect/>
+          </a:stretch>
+        </p:blipFill>
+        <p:spPr>
+          <a:xfrm>
+            <a:off x="9982462" y="320040"/>
+            <a:ext cx="1706313" cy="310896"/>
+          </a:xfrm>
+          <a:prstGeom prst="rect">
+            <a:avLst/>
+          </a:prstGeom>
+          <a:effectLst/>
+        </p:spPr>
+      </p:pic>
+      <p:sp>
+        <p:nvSpPr>
+          <p:cNvPr id="6" name="TextBox 5"/>
+          <p:cNvSpPr txBox="1"/>
+          <p:nvPr/>
+        </p:nvSpPr>
+        <p:spPr>
+          <a:xfrm>
+            <a:off x="548640" y="1828800"/>
+            <a:ext cx="6400800" cy="4023360"/>
+          </a:xfrm>
+          <a:prstGeom prst="rect">
+            <a:avLst/>
+          </a:prstGeom>
+          <a:noFill/>
+        </p:spPr>
+        <p:txBody>
+          <a:bodyPr wrap="square">
+            <a:spAutoFit/>
+          </a:bodyPr>
+          <a:lstStyle/>
+          <a:p>
+            <a:pPr>
+              <a:spcAft>
+                <a:spcPts val="1800"/>
+              </a:spcAft>
+            </a:pPr>
+            <a:r>
+              <a:rPr sz="1700" b="0">
+                <a:solidFill>
+                  <a:srgbClr val="F2F2F2"/>
+                </a:solidFill>
+                <a:latin typeface="Aptos"/>
+              </a:rPr>
+              <a:t>•  </a:t>
+            </a:r>
+            <a:r>
+              <a:rPr sz="1700" b="1">
+                <a:solidFill>
+                  <a:srgbClr val="F2F2F2"/>
+                </a:solidFill>
+                <a:latin typeface="Aptos"/>
+              </a:rPr>
+              <a:t>The clocks</a:t>
+            </a:r>
+            <a:r>
+              <a:rPr sz="1700" b="0">
+                <a:solidFill>
+                  <a:srgbClr val="F2F2F2"/>
+                </a:solidFill>
+                <a:latin typeface="Aptos"/>
+              </a:rPr>
+              <a:t> — φ1 / φ2 on the scope, generated by the fabric</a:t>
+            </a:r>
+          </a:p>
+          <a:p>
+            <a:pPr>
+              <a:spcAft>
+                <a:spcPts val="1800"/>
+              </a:spcAft>
+            </a:pPr>
+            <a:r>
+              <a:rPr sz="1700" b="0">
+                <a:solidFill>
+                  <a:srgbClr val="F2F2F2"/>
+                </a:solidFill>
+                <a:latin typeface="Aptos"/>
+              </a:rPr>
+              <a:t>•  </a:t>
+            </a:r>
+            <a:r>
+              <a:rPr sz="1700" b="1">
+                <a:solidFill>
+                  <a:srgbClr val="F2F2F2"/>
+                </a:solidFill>
+                <a:latin typeface="Aptos"/>
+              </a:rPr>
+              <a:t>Pi to 50 digits</a:t>
+            </a:r>
+            <a:r>
+              <a:rPr sz="1700" b="0">
+                <a:solidFill>
+                  <a:srgbClr val="F2F2F2"/>
+                </a:solidFill>
+                <a:latin typeface="Aptos"/>
+              </a:rPr>
+              <a:t> — multiprecision arithmetic, ~75 s at 500 kHz</a:t>
+            </a:r>
+          </a:p>
+          <a:p>
+            <a:pPr>
+              <a:spcAft>
+                <a:spcPts val="1800"/>
+              </a:spcAft>
+            </a:pPr>
+            <a:r>
+              <a:rPr sz="1700" b="0">
+                <a:solidFill>
+                  <a:srgbClr val="F2F2F2"/>
+                </a:solidFill>
+                <a:latin typeface="Aptos"/>
+              </a:rPr>
+              <a:t>•  </a:t>
+            </a:r>
+            <a:r>
+              <a:rPr sz="1700" b="1">
+                <a:solidFill>
+                  <a:srgbClr val="F2F2F2"/>
+                </a:solidFill>
+                <a:latin typeface="Aptos"/>
+              </a:rPr>
+              <a:t>SCELBI floating-point calculator (1974)</a:t>
+            </a:r>
+            <a:r>
+              <a:rPr sz="1700" b="0">
+                <a:solidFill>
+                  <a:srgbClr val="F2F2F2"/>
+                </a:solidFill>
+                <a:latin typeface="Aptos"/>
+              </a:rPr>
+              <a:t> — </a:t>
+            </a:r>
+            <a:r>
+              <a:rPr sz="1700" b="0">
+                <a:solidFill>
+                  <a:srgbClr val="FFC220"/>
+                </a:solidFill>
+                <a:latin typeface="Aptos Mono"/>
+              </a:rPr>
+              <a:t>12.2 X 2.2 = 26.84</a:t>
+            </a:r>
+          </a:p>
+          <a:p>
+            <a:pPr>
+              <a:spcAft>
+                <a:spcPts val="1800"/>
+              </a:spcAft>
+            </a:pPr>
+            <a:r>
+              <a:rPr sz="1700" b="0">
+                <a:solidFill>
+                  <a:srgbClr val="F2F2F2"/>
+                </a:solidFill>
+                <a:latin typeface="Aptos"/>
+              </a:rPr>
+              <a:t>•  </a:t>
+            </a:r>
+            <a:r>
+              <a:rPr sz="1700" b="1">
+                <a:solidFill>
+                  <a:srgbClr val="F2F2F2"/>
+                </a:solidFill>
+                <a:latin typeface="Aptos"/>
+              </a:rPr>
+              <a:t>The finale</a:t>
+            </a:r>
+            <a:r>
+              <a:rPr sz="1700" b="0">
+                <a:solidFill>
+                  <a:srgbClr val="F2F2F2"/>
+                </a:solidFill>
+                <a:latin typeface="Aptos"/>
+              </a:rPr>
+              <a:t> — power on → BASIC → </a:t>
+            </a:r>
+            <a:r>
+              <a:rPr sz="1700" b="0">
+                <a:solidFill>
+                  <a:srgbClr val="FFC220"/>
+                </a:solidFill>
+                <a:latin typeface="Aptos Mono"/>
+              </a:rPr>
+              <a:t>MON</a:t>
+            </a:r>
+            <a:r>
+              <a:rPr sz="1700" b="0">
+                <a:solidFill>
+                  <a:srgbClr val="F2F2F2"/>
+                </a:solidFill>
+                <a:latin typeface="Aptos"/>
+              </a:rPr>
+              <a:t> → machine monitor → </a:t>
+            </a:r>
+            <a:r>
+              <a:rPr sz="1700" b="0">
+                <a:solidFill>
+                  <a:srgbClr val="FFC220"/>
+                </a:solidFill>
+                <a:latin typeface="Aptos Mono"/>
+              </a:rPr>
+              <a:t>G 1FB6</a:t>
+            </a:r>
+            <a:r>
+              <a:rPr sz="1700" b="0">
+                <a:solidFill>
+                  <a:srgbClr val="F2F2F2"/>
+                </a:solidFill>
+                <a:latin typeface="Aptos"/>
+              </a:rPr>
+              <a:t> → back in BASIC, program intact</a:t>
+            </a:r>
+          </a:p>
+        </p:txBody>
+      </p:sp>
+      <p:pic>
+        <p:nvPicPr>
+          <p:cNvPr id="7" name="Picture 6" descr="two_phase_oscope_cap_1.png"/>
           <p:cNvPicPr>
             <a:picLocks noChangeAspect="1"/>
           </p:cNvPicPr>
@@ -21389,235 +21498,6 @@
         </p:blipFill>
         <p:spPr>
           <a:xfrm>
-            <a:off x="9982462" y="320040"/>
-            <a:ext cx="1706313" cy="310896"/>
-          </a:xfrm>
-          <a:prstGeom prst="rect">
-            <a:avLst/>
-          </a:prstGeom>
-          <a:effectLst/>
-        </p:spPr>
-      </p:pic>
-      <p:sp>
-        <p:nvSpPr>
-          <p:cNvPr id="6" name="TextBox 5"/>
-          <p:cNvSpPr txBox="1"/>
-          <p:nvPr/>
-        </p:nvSpPr>
-        <p:spPr>
-          <a:xfrm>
-            <a:off x="548640" y="1828800"/>
-            <a:ext cx="6400800" cy="4023360"/>
-          </a:xfrm>
-          <a:prstGeom prst="rect">
-            <a:avLst/>
-          </a:prstGeom>
-          <a:noFill/>
-        </p:spPr>
-        <p:txBody>
-          <a:bodyPr wrap="square">
-            <a:spAutoFit/>
-          </a:bodyPr>
-          <a:lstStyle/>
-          <a:p>
-            <a:pPr>
-              <a:spcAft>
-                <a:spcPts val="1800"/>
-              </a:spcAft>
-            </a:pPr>
-            <a:r>
-              <a:rPr sz="1700" b="0">
-                <a:solidFill>
-                  <a:srgbClr val="F2F2F2"/>
-                </a:solidFill>
-                <a:latin typeface="Aptos"/>
-              </a:rPr>
-              <a:t>•  </a:t>
-            </a:r>
-            <a:r>
-              <a:rPr sz="1700" b="1">
-                <a:solidFill>
-                  <a:srgbClr val="F2F2F2"/>
-                </a:solidFill>
-                <a:latin typeface="Aptos"/>
-              </a:rPr>
-              <a:t>The clocks</a:t>
-            </a:r>
-            <a:r>
-              <a:rPr sz="1700" b="0">
-                <a:solidFill>
-                  <a:srgbClr val="F2F2F2"/>
-                </a:solidFill>
-                <a:latin typeface="Aptos"/>
-              </a:rPr>
-              <a:t> — φ1 / φ2 on the scope, generated by the fabric</a:t>
-            </a:r>
-          </a:p>
-          <a:p>
-            <a:pPr>
-              <a:spcAft>
-                <a:spcPts val="1800"/>
-              </a:spcAft>
-            </a:pPr>
-            <a:r>
-              <a:rPr sz="1700" b="0">
-                <a:solidFill>
-                  <a:srgbClr val="F2F2F2"/>
-                </a:solidFill>
-                <a:latin typeface="Aptos"/>
-              </a:rPr>
-              <a:t>•  </a:t>
-            </a:r>
-            <a:r>
-              <a:rPr sz="1700" b="1">
-                <a:solidFill>
-                  <a:srgbClr val="F2F2F2"/>
-                </a:solidFill>
-                <a:latin typeface="Aptos"/>
-              </a:rPr>
-              <a:t>Pi to 50 digits</a:t>
-            </a:r>
-            <a:r>
-              <a:rPr sz="1700" b="0">
-                <a:solidFill>
-                  <a:srgbClr val="F2F2F2"/>
-                </a:solidFill>
-                <a:latin typeface="Aptos"/>
-              </a:rPr>
-              <a:t> — multiprecision arithmetic, ~75 s at 500 kHz</a:t>
-            </a:r>
-          </a:p>
-          <a:p>
-            <a:pPr>
-              <a:spcAft>
-                <a:spcPts val="1800"/>
-              </a:spcAft>
-            </a:pPr>
-            <a:r>
-              <a:rPr sz="1700" b="0">
-                <a:solidFill>
-                  <a:srgbClr val="F2F2F2"/>
-                </a:solidFill>
-                <a:latin typeface="Aptos"/>
-              </a:rPr>
-              <a:t>•  </a:t>
-            </a:r>
-            <a:r>
-              <a:rPr sz="1700" b="1">
-                <a:solidFill>
-                  <a:srgbClr val="F2F2F2"/>
-                </a:solidFill>
-                <a:latin typeface="Aptos"/>
-              </a:rPr>
-              <a:t>SCELBI floating-point calculator (1974)</a:t>
-            </a:r>
-            <a:r>
-              <a:rPr sz="1700" b="0">
-                <a:solidFill>
-                  <a:srgbClr val="F2F2F2"/>
-                </a:solidFill>
-                <a:latin typeface="Aptos"/>
-              </a:rPr>
-              <a:t> — </a:t>
-            </a:r>
-            <a:r>
-              <a:rPr sz="1700" b="0">
-                <a:solidFill>
-                  <a:srgbClr val="FFC220"/>
-                </a:solidFill>
-                <a:latin typeface="Aptos Mono"/>
-              </a:rPr>
-              <a:t>12.2 X 2.2 = 26.84</a:t>
-            </a:r>
-          </a:p>
-          <a:p>
-            <a:pPr>
-              <a:spcAft>
-                <a:spcPts val="1800"/>
-              </a:spcAft>
-            </a:pPr>
-            <a:r>
-              <a:rPr sz="1700" b="0">
-                <a:solidFill>
-                  <a:srgbClr val="F2F2F2"/>
-                </a:solidFill>
-                <a:latin typeface="Aptos"/>
-              </a:rPr>
-              <a:t>•  </a:t>
-            </a:r>
-            <a:r>
-              <a:rPr sz="1700" b="1">
-                <a:solidFill>
-                  <a:srgbClr val="F2F2F2"/>
-                </a:solidFill>
-                <a:latin typeface="Aptos"/>
-              </a:rPr>
-              <a:t>The finale</a:t>
-            </a:r>
-            <a:r>
-              <a:rPr sz="1700" b="0">
-                <a:solidFill>
-                  <a:srgbClr val="F2F2F2"/>
-                </a:solidFill>
-                <a:latin typeface="Aptos"/>
-              </a:rPr>
-              <a:t> — power on → BASIC → </a:t>
-            </a:r>
-            <a:r>
-              <a:rPr sz="1700" b="0">
-                <a:solidFill>
-                  <a:srgbClr val="FFC220"/>
-                </a:solidFill>
-                <a:latin typeface="Aptos Mono"/>
-              </a:rPr>
-              <a:t>MON</a:t>
-            </a:r>
-            <a:r>
-              <a:rPr sz="1700" b="0">
-                <a:solidFill>
-                  <a:srgbClr val="F2F2F2"/>
-                </a:solidFill>
-                <a:latin typeface="Aptos"/>
-              </a:rPr>
-              <a:t> → machine monitor → </a:t>
-            </a:r>
-            <a:r>
-              <a:rPr sz="1700" b="0">
-                <a:solidFill>
-                  <a:srgbClr val="FFC220"/>
-                </a:solidFill>
-                <a:latin typeface="Aptos Mono"/>
-              </a:rPr>
-              <a:t>G 1FB6</a:t>
-            </a:r>
-            <a:r>
-              <a:rPr sz="1700" b="0">
-                <a:solidFill>
-                  <a:srgbClr val="F2F2F2"/>
-                </a:solidFill>
-                <a:latin typeface="Aptos"/>
-              </a:rPr>
-              <a:t> → back in BASIC, program intact</a:t>
-            </a:r>
-          </a:p>
-        </p:txBody>
-      </p:sp>
-      <p:pic>
-        <p:nvPicPr>
-          <p:cNvPr id="7" name="Picture 6" descr="two_phase_oscope_cap_1.png"/>
-          <p:cNvPicPr>
-            <a:picLocks noChangeAspect="1"/>
-          </p:cNvPicPr>
-          <p:nvPr/>
-        </p:nvPicPr>
-        <p:blipFill>
-          <a:blip r:embed="rId4"/>
-          <a:stretch>
-            <a:fillRect/>
-          </a:stretch>
-        </p:blipFill>
-        <p:spPr>
-          <a:xfrm>
             <a:off x="7223760" y="1828800"/>
             <a:ext cx="3048000" cy="1828800"/>
           </a:xfrm>
@@ -21675,7 +21555,7 @@
           <p:nvPr/>
         </p:nvPicPr>
         <p:blipFill>
-          <a:blip r:embed="rId5"/>
+          <a:blip r:embed="rId4"/>
           <a:stretch>
             <a:fillRect/>
           </a:stretch>
@@ -21705,7 +21585,7 @@
 </file>
 
 <file path=ppt/slides/slide29.xml><?xml version="1.0" encoding="utf-8"?>
-<p:sld xmlns:a="http://schemas.openxmlformats.org/drawingml/2006/main" xmlns:r="http://schemas.openxmlformats.org/officeDocument/2006/relationships" xmlns:p="http://schemas.openxmlformats.org/presentationml/2006/main">
+<p:sld xmlns:a="http://schemas.openxmlformats.org/drawingml/2006/main" xmlns:p="http://schemas.openxmlformats.org/presentationml/2006/main" xmlns:r="http://schemas.openxmlformats.org/officeDocument/2006/relationships">
   <p:cSld>
     <p:bg>
       <p:bgPr>
@@ -21721,14 +21601,7 @@
         <p:cNvGrpSpPr/>
         <p:nvPr/>
       </p:nvGrpSpPr>
-      <p:grpSpPr>
-        <a:xfrm>
-          <a:off x="0" y="0"/>
-          <a:ext cx="0" cy="0"/>
-          <a:chOff x="0" y="0"/>
-          <a:chExt cx="0" cy="0"/>
-        </a:xfrm>
-      </p:grpSpPr>
+      <p:grpSpPr/>
       <p:sp>
         <p:nvSpPr>
           <p:cNvPr id="2" name="TextBox 1"/>
@@ -21837,7 +21710,6 @@
           <a:lstStyle/>
           <a:p>
             <a:pPr algn="ctr"/>
-            <a:endParaRPr/>
           </a:p>
         </p:txBody>
       </p:sp>
@@ -21850,7 +21722,7 @@
         <p:spPr>
           <a:xfrm>
             <a:off x="548640" y="1371600"/>
-            <a:ext cx="11064240" cy="584775"/>
+            <a:ext cx="11064240" cy="585216"/>
           </a:xfrm>
           <a:prstGeom prst="rect">
             <a:avLst/>
@@ -21869,7 +21741,7 @@
               </a:spcAft>
             </a:pPr>
             <a:r>
-              <a:rPr sz="1600" b="0" dirty="0">
+              <a:rPr sz="1600" b="0">
                 <a:solidFill>
                   <a:srgbClr val="F2F2F2"/>
                 </a:solidFill>
@@ -21878,7 +21750,7 @@
               <a:t>Eighteen months ago I could not read a VHDL </a:t>
             </a:r>
             <a:r>
-              <a:rPr sz="1600" b="0" dirty="0">
+              <a:rPr sz="1600" b="0">
                 <a:solidFill>
                   <a:srgbClr val="FFC220"/>
                 </a:solidFill>
@@ -21887,7 +21759,7 @@
               <a:t>process</a:t>
             </a:r>
             <a:r>
-              <a:rPr sz="1600" b="0" dirty="0">
+              <a:rPr sz="1600" b="0">
                 <a:solidFill>
                   <a:srgbClr val="F2F2F2"/>
                 </a:solidFill>
@@ -21896,34 +21768,16 @@
               <a:t>. </a:t>
             </a:r>
             <a:r>
-              <a:rPr sz="1600" b="1" dirty="0">
+              <a:rPr sz="1600" b="1">
                 <a:solidFill>
                   <a:srgbClr val="F2F2F2"/>
                 </a:solidFill>
                 <a:latin typeface="Aptos"/>
               </a:rPr>
-              <a:t>Most of the VHDL here was </a:t>
-            </a:r>
-            <a:r>
-              <a:rPr sz="1600" b="1" u="sng" dirty="0">
-                <a:solidFill>
-                  <a:srgbClr val="F2F2F2"/>
-                </a:solidFill>
-                <a:latin typeface="Aptos"/>
-              </a:rPr>
-              <a:t>drafted</a:t>
-            </a:r>
-            <a:r>
-              <a:rPr sz="1600" b="1" dirty="0">
-                <a:solidFill>
-                  <a:srgbClr val="F2F2F2"/>
-                </a:solidFill>
-                <a:latin typeface="Aptos"/>
-              </a:rPr>
-              <a:t> by AI</a:t>
-            </a:r>
-            <a:r>
-              <a:rPr sz="1600" b="0" dirty="0">
+              <a:t>Most of the VHDL here was drafted by AI</a:t>
+            </a:r>
+            <a:r>
+              <a:rPr sz="1600" b="0">
                 <a:solidFill>
                   <a:srgbClr val="F2F2F2"/>
                 </a:solidFill>
@@ -21971,7 +21825,7 @@
           </a:fontRef>
         </p:style>
         <p:txBody>
-          <a:bodyPr wrap="square" lIns="164592" tIns="219456" rIns="128016" rtlCol="0" anchor="ctr"/>
+          <a:bodyPr rtlCol="0" anchor="ctr" wrap="square" lIns="164592" rIns="128016" tIns="219456"/>
           <a:lstStyle/>
           <a:p>
             <a:pPr algn="l"/>
@@ -22078,7 +21932,6 @@
           <a:lstStyle/>
           <a:p>
             <a:pPr algn="ctr"/>
-            <a:endParaRPr/>
           </a:p>
         </p:txBody>
       </p:sp>
@@ -22119,7 +21972,7 @@
           </a:fontRef>
         </p:style>
         <p:txBody>
-          <a:bodyPr wrap="square" lIns="164592" tIns="219456" rIns="128016" rtlCol="0" anchor="ctr"/>
+          <a:bodyPr rtlCol="0" anchor="ctr" wrap="square" lIns="164592" rIns="128016" tIns="219456"/>
           <a:lstStyle/>
           <a:p>
             <a:pPr algn="l"/>
@@ -22227,7 +22080,6 @@
           <a:lstStyle/>
           <a:p>
             <a:pPr algn="ctr"/>
-            <a:endParaRPr/>
           </a:p>
         </p:txBody>
       </p:sp>
@@ -22268,7 +22120,7 @@
           </a:fontRef>
         </p:style>
         <p:txBody>
-          <a:bodyPr wrap="square" lIns="164592" tIns="219456" rIns="128016" rtlCol="0" anchor="ctr"/>
+          <a:bodyPr rtlCol="0" anchor="ctr" wrap="square" lIns="164592" rIns="128016" tIns="219456"/>
           <a:lstStyle/>
           <a:p>
             <a:pPr algn="l"/>
@@ -22375,7 +22227,6 @@
           <a:lstStyle/>
           <a:p>
             <a:pPr algn="ctr"/>
-            <a:endParaRPr/>
           </a:p>
         </p:txBody>
       </p:sp>
@@ -22416,7 +22267,7 @@
           </a:fontRef>
         </p:style>
         <p:txBody>
-          <a:bodyPr wrap="square" lIns="164592" tIns="219456" rIns="128016" rtlCol="0" anchor="ctr"/>
+          <a:bodyPr rtlCol="0" anchor="ctr" wrap="square" lIns="164592" rIns="128016" tIns="219456"/>
           <a:lstStyle/>
           <a:p>
             <a:pPr algn="l"/>
@@ -22523,7 +22374,6 @@
           <a:lstStyle/>
           <a:p>
             <a:pPr algn="ctr"/>
-            <a:endParaRPr/>
           </a:p>
         </p:txBody>
       </p:sp>
@@ -22564,7 +22414,7 @@
           </a:fontRef>
         </p:style>
         <p:txBody>
-          <a:bodyPr wrap="square" lIns="320040" rIns="320040" rtlCol="0" anchor="ctr"/>
+          <a:bodyPr rtlCol="0" anchor="ctr" wrap="square" lIns="320040" rIns="320040"/>
           <a:lstStyle/>
           <a:p>
             <a:pPr algn="ctr"/>
@@ -22607,7 +22457,7 @@
 </file>
 
 <file path=ppt/slides/slide3.xml><?xml version="1.0" encoding="utf-8"?>
-<p:sld xmlns:a="http://schemas.openxmlformats.org/drawingml/2006/main" xmlns:r="http://schemas.openxmlformats.org/officeDocument/2006/relationships" xmlns:p="http://schemas.openxmlformats.org/presentationml/2006/main">
+<p:sld xmlns:a="http://schemas.openxmlformats.org/drawingml/2006/main" xmlns:p="http://schemas.openxmlformats.org/presentationml/2006/main" xmlns:r="http://schemas.openxmlformats.org/officeDocument/2006/relationships">
   <p:cSld>
     <p:bg>
       <p:bgPr>
@@ -22623,14 +22473,7 @@
         <p:cNvGrpSpPr/>
         <p:nvPr/>
       </p:nvGrpSpPr>
-      <p:grpSpPr>
-        <a:xfrm>
-          <a:off x="0" y="0"/>
-          <a:ext cx="0" cy="0"/>
-          <a:chOff x="0" y="0"/>
-          <a:chExt cx="0" cy="0"/>
-        </a:xfrm>
-      </p:grpSpPr>
+      <p:grpSpPr/>
       <p:sp>
         <p:nvSpPr>
           <p:cNvPr id="2" name="TextBox 1"/>
@@ -22739,7 +22582,6 @@
           <a:lstStyle/>
           <a:p>
             <a:pPr algn="ctr"/>
-            <a:endParaRPr/>
           </a:p>
         </p:txBody>
       </p:sp>
@@ -22762,43 +22604,17 @@
                 <a:tableStyleId>{5C22544A-7EE6-4342-B048-85BDC9FD1C3A}</a:tableStyleId>
               </a:tblPr>
               <a:tblGrid>
-                <a:gridCol w="1737360">
-                  <a:extLst>
-                    <a:ext uri="{9D8B030D-6E8A-4147-A177-3AD203B41FA5}">
-                      <a16:colId xmlns:a16="http://schemas.microsoft.com/office/drawing/2014/main" val="20000"/>
-                    </a:ext>
-                  </a:extLst>
-                </a:gridCol>
-                <a:gridCol w="2834640">
-                  <a:extLst>
-                    <a:ext uri="{9D8B030D-6E8A-4147-A177-3AD203B41FA5}">
-                      <a16:colId xmlns:a16="http://schemas.microsoft.com/office/drawing/2014/main" val="20001"/>
-                    </a:ext>
-                  </a:extLst>
-                </a:gridCol>
-                <a:gridCol w="3291840">
-                  <a:extLst>
-                    <a:ext uri="{9D8B030D-6E8A-4147-A177-3AD203B41FA5}">
-                      <a16:colId xmlns:a16="http://schemas.microsoft.com/office/drawing/2014/main" val="20002"/>
-                    </a:ext>
-                  </a:extLst>
-                </a:gridCol>
-                <a:gridCol w="3200400">
-                  <a:extLst>
-                    <a:ext uri="{9D8B030D-6E8A-4147-A177-3AD203B41FA5}">
-                      <a16:colId xmlns:a16="http://schemas.microsoft.com/office/drawing/2014/main" val="20003"/>
-                    </a:ext>
-                  </a:extLst>
-                </a:gridCol>
+                <a:gridCol w="1737360"/>
+                <a:gridCol w="2834640"/>
+                <a:gridCol w="3291840"/>
+                <a:gridCol w="3200400"/>
               </a:tblGrid>
               <a:tr h="487680">
                 <a:tc>
                   <a:txBody>
-                    <a:bodyPr/>
+                    <a:bodyPr wrap="square"/>
                     <a:lstStyle/>
-                    <a:p>
-                      <a:endParaRPr/>
-                    </a:p>
+                    <a:p/>
                   </a:txBody>
                   <a:tcPr marL="109728" marR="109728" marT="36576" marB="36576" anchor="ctr">
                     <a:solidFill>
@@ -22808,7 +22624,7 @@
                 </a:tc>
                 <a:tc>
                   <a:txBody>
-                    <a:bodyPr/>
+                    <a:bodyPr wrap="square"/>
                     <a:lstStyle/>
                     <a:p>
                       <a:r>
@@ -22830,7 +22646,7 @@
                 </a:tc>
                 <a:tc>
                   <a:txBody>
-                    <a:bodyPr/>
+                    <a:bodyPr wrap="square"/>
                     <a:lstStyle/>
                     <a:p>
                       <a:r>
@@ -22852,7 +22668,7 @@
                 </a:tc>
                 <a:tc>
                   <a:txBody>
-                    <a:bodyPr/>
+                    <a:bodyPr wrap="square"/>
                     <a:lstStyle/>
                     <a:p>
                       <a:r>
@@ -22872,16 +22688,11 @@
                     </a:solidFill>
                   </a:tcPr>
                 </a:tc>
-                <a:extLst>
-                  <a:ext uri="{0D108BD9-81ED-4DB2-BD59-A6C34878D82A}">
-                    <a16:rowId xmlns:a16="http://schemas.microsoft.com/office/drawing/2014/main" val="10000"/>
-                  </a:ext>
-                </a:extLst>
               </a:tr>
               <a:tr h="487680">
                 <a:tc>
                   <a:txBody>
-                    <a:bodyPr/>
+                    <a:bodyPr wrap="square"/>
                     <a:lstStyle/>
                     <a:p>
                       <a:r>
@@ -22903,7 +22714,7 @@
                 </a:tc>
                 <a:tc>
                   <a:txBody>
-                    <a:bodyPr/>
+                    <a:bodyPr wrap="square"/>
                     <a:lstStyle/>
                     <a:p>
                       <a:r>
@@ -22925,7 +22736,7 @@
                 </a:tc>
                 <a:tc>
                   <a:txBody>
-                    <a:bodyPr/>
+                    <a:bodyPr wrap="square"/>
                     <a:lstStyle/>
                     <a:p>
                       <a:r>
@@ -22947,7 +22758,7 @@
                 </a:tc>
                 <a:tc>
                   <a:txBody>
-                    <a:bodyPr/>
+                    <a:bodyPr wrap="square"/>
                     <a:lstStyle/>
                     <a:p>
                       <a:r>
@@ -22967,16 +22778,11 @@
                     </a:solidFill>
                   </a:tcPr>
                 </a:tc>
-                <a:extLst>
-                  <a:ext uri="{0D108BD9-81ED-4DB2-BD59-A6C34878D82A}">
-                    <a16:rowId xmlns:a16="http://schemas.microsoft.com/office/drawing/2014/main" val="10001"/>
-                  </a:ext>
-                </a:extLst>
               </a:tr>
               <a:tr h="487680">
                 <a:tc>
                   <a:txBody>
-                    <a:bodyPr/>
+                    <a:bodyPr wrap="square"/>
                     <a:lstStyle/>
                     <a:p>
                       <a:r>
@@ -22998,7 +22804,7 @@
                 </a:tc>
                 <a:tc>
                   <a:txBody>
-                    <a:bodyPr/>
+                    <a:bodyPr wrap="square"/>
                     <a:lstStyle/>
                     <a:p>
                       <a:r>
@@ -23020,7 +22826,7 @@
                 </a:tc>
                 <a:tc>
                   <a:txBody>
-                    <a:bodyPr/>
+                    <a:bodyPr wrap="square"/>
                     <a:lstStyle/>
                     <a:p>
                       <a:r>
@@ -23042,7 +22848,7 @@
                 </a:tc>
                 <a:tc>
                   <a:txBody>
-                    <a:bodyPr/>
+                    <a:bodyPr wrap="square"/>
                     <a:lstStyle/>
                     <a:p>
                       <a:r>
@@ -23062,16 +22868,11 @@
                     </a:solidFill>
                   </a:tcPr>
                 </a:tc>
-                <a:extLst>
-                  <a:ext uri="{0D108BD9-81ED-4DB2-BD59-A6C34878D82A}">
-                    <a16:rowId xmlns:a16="http://schemas.microsoft.com/office/drawing/2014/main" val="10002"/>
-                  </a:ext>
-                </a:extLst>
               </a:tr>
               <a:tr h="487680">
                 <a:tc>
                   <a:txBody>
-                    <a:bodyPr/>
+                    <a:bodyPr wrap="square"/>
                     <a:lstStyle/>
                     <a:p>
                       <a:r>
@@ -23093,7 +22894,7 @@
                 </a:tc>
                 <a:tc>
                   <a:txBody>
-                    <a:bodyPr/>
+                    <a:bodyPr wrap="square"/>
                     <a:lstStyle/>
                     <a:p>
                       <a:r>
@@ -23115,7 +22916,7 @@
                 </a:tc>
                 <a:tc>
                   <a:txBody>
-                    <a:bodyPr/>
+                    <a:bodyPr wrap="square"/>
                     <a:lstStyle/>
                     <a:p>
                       <a:r>
@@ -23137,7 +22938,7 @@
                 </a:tc>
                 <a:tc>
                   <a:txBody>
-                    <a:bodyPr/>
+                    <a:bodyPr wrap="square"/>
                     <a:lstStyle/>
                     <a:p>
                       <a:r>
@@ -23157,16 +22958,11 @@
                     </a:solidFill>
                   </a:tcPr>
                 </a:tc>
-                <a:extLst>
-                  <a:ext uri="{0D108BD9-81ED-4DB2-BD59-A6C34878D82A}">
-                    <a16:rowId xmlns:a16="http://schemas.microsoft.com/office/drawing/2014/main" val="10003"/>
-                  </a:ext>
-                </a:extLst>
               </a:tr>
               <a:tr h="487680">
                 <a:tc>
                   <a:txBody>
-                    <a:bodyPr/>
+                    <a:bodyPr wrap="square"/>
                     <a:lstStyle/>
                     <a:p>
                       <a:r>
@@ -23188,7 +22984,7 @@
                 </a:tc>
                 <a:tc>
                   <a:txBody>
-                    <a:bodyPr/>
+                    <a:bodyPr wrap="square"/>
                     <a:lstStyle/>
                     <a:p>
                       <a:r>
@@ -23210,7 +23006,7 @@
                 </a:tc>
                 <a:tc>
                   <a:txBody>
-                    <a:bodyPr/>
+                    <a:bodyPr wrap="square"/>
                     <a:lstStyle/>
                     <a:p>
                       <a:r>
@@ -23232,7 +23028,7 @@
                 </a:tc>
                 <a:tc>
                   <a:txBody>
-                    <a:bodyPr/>
+                    <a:bodyPr wrap="square"/>
                     <a:lstStyle/>
                     <a:p>
                       <a:r>
@@ -23252,16 +23048,11 @@
                     </a:solidFill>
                   </a:tcPr>
                 </a:tc>
-                <a:extLst>
-                  <a:ext uri="{0D108BD9-81ED-4DB2-BD59-A6C34878D82A}">
-                    <a16:rowId xmlns:a16="http://schemas.microsoft.com/office/drawing/2014/main" val="10004"/>
-                  </a:ext>
-                </a:extLst>
               </a:tr>
               <a:tr h="487680">
                 <a:tc>
                   <a:txBody>
-                    <a:bodyPr/>
+                    <a:bodyPr wrap="square"/>
                     <a:lstStyle/>
                     <a:p>
                       <a:r>
@@ -23283,7 +23074,7 @@
                 </a:tc>
                 <a:tc>
                   <a:txBody>
-                    <a:bodyPr/>
+                    <a:bodyPr wrap="square"/>
                     <a:lstStyle/>
                     <a:p>
                       <a:r>
@@ -23305,7 +23096,7 @@
                 </a:tc>
                 <a:tc>
                   <a:txBody>
-                    <a:bodyPr/>
+                    <a:bodyPr wrap="square"/>
                     <a:lstStyle/>
                     <a:p>
                       <a:r>
@@ -23327,7 +23118,7 @@
                 </a:tc>
                 <a:tc>
                   <a:txBody>
-                    <a:bodyPr/>
+                    <a:bodyPr wrap="square"/>
                     <a:lstStyle/>
                     <a:p>
                       <a:r>
@@ -23347,11 +23138,6 @@
                     </a:solidFill>
                   </a:tcPr>
                 </a:tc>
-                <a:extLst>
-                  <a:ext uri="{0D108BD9-81ED-4DB2-BD59-A6C34878D82A}">
-                    <a16:rowId xmlns:a16="http://schemas.microsoft.com/office/drawing/2014/main" val="10005"/>
-                  </a:ext>
-                </a:extLst>
               </a:tr>
             </a:tbl>
           </a:graphicData>
@@ -23394,7 +23180,7 @@
           </a:fontRef>
         </p:style>
         <p:txBody>
-          <a:bodyPr wrap="square" rtlCol="0" anchor="ctr"/>
+          <a:bodyPr rtlCol="0" anchor="ctr" wrap="square"/>
           <a:lstStyle/>
           <a:p>
             <a:pPr algn="ctr"/>
@@ -23437,7 +23223,7 @@
 </file>
 
 <file path=ppt/slides/slide30.xml><?xml version="1.0" encoding="utf-8"?>
-<p:sld xmlns:a="http://schemas.openxmlformats.org/drawingml/2006/main" xmlns:r="http://schemas.openxmlformats.org/officeDocument/2006/relationships" xmlns:p="http://schemas.openxmlformats.org/presentationml/2006/main">
+<p:sld xmlns:a="http://schemas.openxmlformats.org/drawingml/2006/main" xmlns:p="http://schemas.openxmlformats.org/presentationml/2006/main" xmlns:r="http://schemas.openxmlformats.org/officeDocument/2006/relationships">
   <p:cSld>
     <p:bg>
       <p:bgPr>
@@ -23453,14 +23239,7 @@
         <p:cNvGrpSpPr/>
         <p:nvPr/>
       </p:nvGrpSpPr>
-      <p:grpSpPr>
-        <a:xfrm>
-          <a:off x="0" y="0"/>
-          <a:ext cx="0" cy="0"/>
-          <a:chOff x="0" y="0"/>
-          <a:chExt cx="0" cy="0"/>
-        </a:xfrm>
-      </p:grpSpPr>
+      <p:grpSpPr/>
       <p:sp>
         <p:nvSpPr>
           <p:cNvPr id="2" name="TextBox 1"/>
@@ -23569,7 +23348,6 @@
           <a:lstStyle/>
           <a:p>
             <a:pPr algn="ctr"/>
-            <a:endParaRPr/>
           </a:p>
         </p:txBody>
       </p:sp>
@@ -23684,7 +23462,6 @@
           <a:lstStyle/>
           <a:p>
             <a:pPr algn="ctr"/>
-            <a:endParaRPr/>
           </a:p>
         </p:txBody>
       </p:sp>
@@ -23729,7 +23506,6 @@
           <a:lstStyle/>
           <a:p>
             <a:pPr algn="ctr"/>
-            <a:endParaRPr/>
           </a:p>
         </p:txBody>
       </p:sp>
@@ -23896,7 +23672,6 @@
           <a:lstStyle/>
           <a:p>
             <a:pPr algn="ctr"/>
-            <a:endParaRPr/>
           </a:p>
         </p:txBody>
       </p:sp>
@@ -23941,7 +23716,6 @@
           <a:lstStyle/>
           <a:p>
             <a:pPr algn="ctr"/>
-            <a:endParaRPr/>
           </a:p>
         </p:txBody>
       </p:sp>
@@ -24099,7 +23873,6 @@
           <a:lstStyle/>
           <a:p>
             <a:pPr algn="ctr"/>
-            <a:endParaRPr/>
           </a:p>
         </p:txBody>
       </p:sp>
@@ -24144,7 +23917,6 @@
           <a:lstStyle/>
           <a:p>
             <a:pPr algn="ctr"/>
-            <a:endParaRPr/>
           </a:p>
         </p:txBody>
       </p:sp>
@@ -24305,7 +24077,7 @@
           </a:fontRef>
         </p:style>
         <p:txBody>
-          <a:bodyPr wrap="square" rtlCol="0" anchor="ctr"/>
+          <a:bodyPr rtlCol="0" anchor="ctr" wrap="square"/>
           <a:lstStyle/>
           <a:p>
             <a:pPr algn="ctr"/>
@@ -24330,7 +24102,7 @@
 </file>
 
 <file path=ppt/slides/slide31.xml><?xml version="1.0" encoding="utf-8"?>
-<p:sld xmlns:a="http://schemas.openxmlformats.org/drawingml/2006/main" xmlns:r="http://schemas.openxmlformats.org/officeDocument/2006/relationships" xmlns:p="http://schemas.openxmlformats.org/presentationml/2006/main">
+<p:sld xmlns:a="http://schemas.openxmlformats.org/drawingml/2006/main" xmlns:p="http://schemas.openxmlformats.org/presentationml/2006/main" xmlns:r="http://schemas.openxmlformats.org/officeDocument/2006/relationships">
   <p:cSld>
     <p:bg>
       <p:bgPr>
@@ -24346,14 +24118,7 @@
         <p:cNvGrpSpPr/>
         <p:nvPr/>
       </p:nvGrpSpPr>
-      <p:grpSpPr>
-        <a:xfrm>
-          <a:off x="0" y="0"/>
-          <a:ext cx="0" cy="0"/>
-          <a:chOff x="0" y="0"/>
-          <a:chExt cx="0" cy="0"/>
-        </a:xfrm>
-      </p:grpSpPr>
+      <p:grpSpPr/>
       <p:sp>
         <p:nvSpPr>
           <p:cNvPr id="2" name="TextBox 1"/>
@@ -24462,7 +24227,6 @@
           <a:lstStyle/>
           <a:p>
             <a:pPr algn="ctr"/>
-            <a:endParaRPr/>
           </a:p>
         </p:txBody>
       </p:sp>
@@ -24577,7 +24341,6 @@
           <a:lstStyle/>
           <a:p>
             <a:pPr algn="ctr"/>
-            <a:endParaRPr/>
           </a:p>
         </p:txBody>
       </p:sp>
@@ -24622,7 +24385,6 @@
           <a:lstStyle/>
           <a:p>
             <a:pPr algn="ctr"/>
-            <a:endParaRPr/>
           </a:p>
         </p:txBody>
       </p:sp>
@@ -24789,7 +24551,6 @@
           <a:lstStyle/>
           <a:p>
             <a:pPr algn="ctr"/>
-            <a:endParaRPr/>
           </a:p>
         </p:txBody>
       </p:sp>
@@ -24834,7 +24595,6 @@
           <a:lstStyle/>
           <a:p>
             <a:pPr algn="ctr"/>
-            <a:endParaRPr/>
           </a:p>
         </p:txBody>
       </p:sp>
@@ -25001,7 +24761,6 @@
           <a:lstStyle/>
           <a:p>
             <a:pPr algn="ctr"/>
-            <a:endParaRPr/>
           </a:p>
         </p:txBody>
       </p:sp>
@@ -25046,7 +24805,6 @@
           <a:lstStyle/>
           <a:p>
             <a:pPr algn="ctr"/>
-            <a:endParaRPr/>
           </a:p>
         </p:txBody>
       </p:sp>
@@ -25213,7 +24971,6 @@
           <a:lstStyle/>
           <a:p>
             <a:pPr algn="ctr"/>
-            <a:endParaRPr/>
           </a:p>
         </p:txBody>
       </p:sp>
@@ -25258,7 +25015,6 @@
           <a:lstStyle/>
           <a:p>
             <a:pPr algn="ctr"/>
-            <a:endParaRPr/>
           </a:p>
         </p:txBody>
       </p:sp>
@@ -25416,7 +25172,6 @@
           <a:lstStyle/>
           <a:p>
             <a:pPr algn="ctr"/>
-            <a:endParaRPr/>
           </a:p>
         </p:txBody>
       </p:sp>
@@ -25461,7 +25216,6 @@
           <a:lstStyle/>
           <a:p>
             <a:pPr algn="ctr"/>
-            <a:endParaRPr/>
           </a:p>
         </p:txBody>
       </p:sp>
@@ -25613,7 +25367,7 @@
           </a:fontRef>
         </p:style>
         <p:txBody>
-          <a:bodyPr wrap="square" rtlCol="0" anchor="ctr"/>
+          <a:bodyPr rtlCol="0" anchor="ctr" wrap="square"/>
           <a:lstStyle/>
           <a:p>
             <a:pPr algn="ctr"/>
@@ -25647,7 +25401,7 @@
 </file>
 
 <file path=ppt/slides/slide32.xml><?xml version="1.0" encoding="utf-8"?>
-<p:sld xmlns:a="http://schemas.openxmlformats.org/drawingml/2006/main" xmlns:r="http://schemas.openxmlformats.org/officeDocument/2006/relationships" xmlns:p="http://schemas.openxmlformats.org/presentationml/2006/main">
+<p:sld xmlns:a="http://schemas.openxmlformats.org/drawingml/2006/main" xmlns:p="http://schemas.openxmlformats.org/presentationml/2006/main" xmlns:r="http://schemas.openxmlformats.org/officeDocument/2006/relationships">
   <p:cSld>
     <p:bg>
       <p:bgPr>
@@ -25663,14 +25417,7 @@
         <p:cNvGrpSpPr/>
         <p:nvPr/>
       </p:nvGrpSpPr>
-      <p:grpSpPr>
-        <a:xfrm>
-          <a:off x="0" y="0"/>
-          <a:ext cx="0" cy="0"/>
-          <a:chOff x="0" y="0"/>
-          <a:chExt cx="0" cy="0"/>
-        </a:xfrm>
-      </p:grpSpPr>
+      <p:grpSpPr/>
       <p:sp>
         <p:nvSpPr>
           <p:cNvPr id="2" name="TextBox 1"/>
@@ -25779,7 +25526,6 @@
           <a:lstStyle/>
           <a:p>
             <a:pPr algn="ctr"/>
-            <a:endParaRPr/>
           </a:p>
         </p:txBody>
       </p:sp>
@@ -25826,7 +25572,6 @@
           <a:lstStyle/>
           <a:p>
             <a:pPr algn="ctr"/>
-            <a:endParaRPr/>
           </a:p>
         </p:txBody>
       </p:sp>
@@ -25871,7 +25616,6 @@
           <a:lstStyle/>
           <a:p>
             <a:pPr algn="ctr"/>
-            <a:endParaRPr/>
           </a:p>
         </p:txBody>
       </p:sp>
@@ -25963,7 +25707,6 @@
           <a:lstStyle/>
           <a:p>
             <a:pPr algn="ctr"/>
-            <a:endParaRPr/>
           </a:p>
         </p:txBody>
       </p:sp>
@@ -26008,7 +25751,6 @@
           <a:lstStyle/>
           <a:p>
             <a:pPr algn="ctr"/>
-            <a:endParaRPr/>
           </a:p>
         </p:txBody>
       </p:sp>
@@ -26100,7 +25842,6 @@
           <a:lstStyle/>
           <a:p>
             <a:pPr algn="ctr"/>
-            <a:endParaRPr/>
           </a:p>
         </p:txBody>
       </p:sp>
@@ -26145,7 +25886,6 @@
           <a:lstStyle/>
           <a:p>
             <a:pPr algn="ctr"/>
-            <a:endParaRPr/>
           </a:p>
         </p:txBody>
       </p:sp>
@@ -26237,7 +25977,6 @@
           <a:lstStyle/>
           <a:p>
             <a:pPr algn="ctr"/>
-            <a:endParaRPr/>
           </a:p>
         </p:txBody>
       </p:sp>
@@ -26282,7 +26021,6 @@
           <a:lstStyle/>
           <a:p>
             <a:pPr algn="ctr"/>
-            <a:endParaRPr/>
           </a:p>
         </p:txBody>
       </p:sp>
@@ -26374,7 +26112,6 @@
           <a:lstStyle/>
           <a:p>
             <a:pPr algn="ctr"/>
-            <a:endParaRPr/>
           </a:p>
         </p:txBody>
       </p:sp>
@@ -26419,7 +26156,6 @@
           <a:lstStyle/>
           <a:p>
             <a:pPr algn="ctr"/>
-            <a:endParaRPr/>
           </a:p>
         </p:txBody>
       </p:sp>
@@ -26529,7 +26265,6 @@
           <a:lstStyle/>
           <a:p>
             <a:pPr algn="ctr"/>
-            <a:endParaRPr/>
           </a:p>
         </p:txBody>
       </p:sp>
@@ -26574,7 +26309,6 @@
           <a:lstStyle/>
           <a:p>
             <a:pPr algn="ctr"/>
-            <a:endParaRPr/>
           </a:p>
         </p:txBody>
       </p:sp>
@@ -26660,12 +26394,12 @@
           </a:fontRef>
         </p:style>
         <p:txBody>
-          <a:bodyPr wrap="square" rtlCol="0" anchor="ctr"/>
+          <a:bodyPr rtlCol="0" anchor="ctr" wrap="square"/>
           <a:lstStyle/>
           <a:p>
             <a:pPr algn="ctr"/>
             <a:r>
-              <a:rPr sz="1600" b="0" dirty="0">
+              <a:rPr sz="1600" b="0">
                 <a:solidFill>
                   <a:srgbClr val="F2F2F2"/>
                 </a:solidFill>
@@ -26685,7 +26419,7 @@
 </file>
 
 <file path=ppt/slides/slide33.xml><?xml version="1.0" encoding="utf-8"?>
-<p:sld xmlns:a="http://schemas.openxmlformats.org/drawingml/2006/main" xmlns:r="http://schemas.openxmlformats.org/officeDocument/2006/relationships" xmlns:p="http://schemas.openxmlformats.org/presentationml/2006/main">
+<p:sld xmlns:a="http://schemas.openxmlformats.org/drawingml/2006/main" xmlns:p="http://schemas.openxmlformats.org/presentationml/2006/main" xmlns:r="http://schemas.openxmlformats.org/officeDocument/2006/relationships">
   <p:cSld>
     <p:bg>
       <p:bgPr>
@@ -26701,14 +26435,7 @@
         <p:cNvGrpSpPr/>
         <p:nvPr/>
       </p:nvGrpSpPr>
-      <p:grpSpPr>
-        <a:xfrm>
-          <a:off x="0" y="0"/>
-          <a:ext cx="0" cy="0"/>
-          <a:chOff x="0" y="0"/>
-          <a:chExt cx="0" cy="0"/>
-        </a:xfrm>
-      </p:grpSpPr>
+      <p:grpSpPr/>
       <p:sp>
         <p:nvSpPr>
           <p:cNvPr id="2" name="TextBox 1"/>
@@ -26783,7 +26510,6 @@
           <a:lstStyle/>
           <a:p>
             <a:pPr algn="ctr"/>
-            <a:endParaRPr/>
           </a:p>
         </p:txBody>
       </p:sp>
@@ -26796,7 +26522,7 @@
           <p:nvPr/>
         </p:nvPicPr>
         <p:blipFill>
-          <a:blip r:embed="rId3"/>
+          <a:blip r:embed="rId2"/>
           <a:stretch>
             <a:fillRect/>
           </a:stretch>
@@ -26979,7 +26705,7 @@
           </a:fontRef>
         </p:style>
         <p:txBody>
-          <a:bodyPr wrap="square" rtlCol="0" anchor="ctr"/>
+          <a:bodyPr rtlCol="0" anchor="ctr" wrap="square"/>
           <a:lstStyle/>
           <a:p>
             <a:pPr algn="ctr"/>
@@ -27004,7 +26730,7 @@
           <p:nvPr/>
         </p:nvPicPr>
         <p:blipFill>
-          <a:blip r:embed="rId4"/>
+          <a:blip r:embed="rId3"/>
           <a:stretch>
             <a:fillRect/>
           </a:stretch>
@@ -27034,7 +26760,7 @@
 </file>
 
 <file path=ppt/slides/slide4.xml><?xml version="1.0" encoding="utf-8"?>
-<p:sld xmlns:a="http://schemas.openxmlformats.org/drawingml/2006/main" xmlns:r="http://schemas.openxmlformats.org/officeDocument/2006/relationships" xmlns:p="http://schemas.openxmlformats.org/presentationml/2006/main">
+<p:sld xmlns:a="http://schemas.openxmlformats.org/drawingml/2006/main" xmlns:p="http://schemas.openxmlformats.org/presentationml/2006/main" xmlns:r="http://schemas.openxmlformats.org/officeDocument/2006/relationships">
   <p:cSld>
     <p:bg>
       <p:bgPr>
@@ -27050,14 +26776,7 @@
         <p:cNvGrpSpPr/>
         <p:nvPr/>
       </p:nvGrpSpPr>
-      <p:grpSpPr>
-        <a:xfrm>
-          <a:off x="0" y="0"/>
-          <a:ext cx="0" cy="0"/>
-          <a:chOff x="0" y="0"/>
-          <a:chExt cx="0" cy="0"/>
-        </a:xfrm>
-      </p:grpSpPr>
+      <p:grpSpPr/>
       <p:sp>
         <p:nvSpPr>
           <p:cNvPr id="2" name="TextBox 1"/>
@@ -27166,7 +26885,6 @@
           <a:lstStyle/>
           <a:p>
             <a:pPr algn="ctr"/>
-            <a:endParaRPr/>
           </a:p>
         </p:txBody>
       </p:sp>
@@ -27213,7 +26931,6 @@
           <a:lstStyle/>
           <a:p>
             <a:pPr algn="ctr"/>
-            <a:endParaRPr/>
           </a:p>
         </p:txBody>
       </p:sp>
@@ -27260,7 +26977,6 @@
           <a:lstStyle/>
           <a:p>
             <a:pPr algn="ctr"/>
-            <a:endParaRPr/>
           </a:p>
         </p:txBody>
       </p:sp>
@@ -27307,7 +27023,6 @@
           <a:lstStyle/>
           <a:p>
             <a:pPr algn="ctr"/>
-            <a:endParaRPr/>
           </a:p>
         </p:txBody>
       </p:sp>
@@ -27354,7 +27069,6 @@
           <a:lstStyle/>
           <a:p>
             <a:pPr algn="ctr"/>
-            <a:endParaRPr/>
           </a:p>
         </p:txBody>
       </p:sp>
@@ -27401,7 +27115,6 @@
           <a:lstStyle/>
           <a:p>
             <a:pPr algn="ctr"/>
-            <a:endParaRPr/>
           </a:p>
         </p:txBody>
       </p:sp>
@@ -27448,7 +27161,6 @@
           <a:lstStyle/>
           <a:p>
             <a:pPr algn="ctr"/>
-            <a:endParaRPr/>
           </a:p>
         </p:txBody>
       </p:sp>
@@ -27495,7 +27207,6 @@
           <a:lstStyle/>
           <a:p>
             <a:pPr algn="ctr"/>
-            <a:endParaRPr/>
           </a:p>
         </p:txBody>
       </p:sp>
@@ -27542,7 +27253,6 @@
           <a:lstStyle/>
           <a:p>
             <a:pPr algn="ctr"/>
-            <a:endParaRPr/>
           </a:p>
         </p:txBody>
       </p:sp>
@@ -27589,7 +27299,6 @@
           <a:lstStyle/>
           <a:p>
             <a:pPr algn="ctr"/>
-            <a:endParaRPr/>
           </a:p>
         </p:txBody>
       </p:sp>
@@ -27636,7 +27345,6 @@
           <a:lstStyle/>
           <a:p>
             <a:pPr algn="ctr"/>
-            <a:endParaRPr/>
           </a:p>
         </p:txBody>
       </p:sp>
@@ -27683,7 +27391,6 @@
           <a:lstStyle/>
           <a:p>
             <a:pPr algn="ctr"/>
-            <a:endParaRPr/>
           </a:p>
         </p:txBody>
       </p:sp>
@@ -27730,7 +27437,6 @@
           <a:lstStyle/>
           <a:p>
             <a:pPr algn="ctr"/>
-            <a:endParaRPr/>
           </a:p>
         </p:txBody>
       </p:sp>
@@ -27777,7 +27483,6 @@
           <a:lstStyle/>
           <a:p>
             <a:pPr algn="ctr"/>
-            <a:endParaRPr/>
           </a:p>
         </p:txBody>
       </p:sp>
@@ -27824,7 +27529,6 @@
           <a:lstStyle/>
           <a:p>
             <a:pPr algn="ctr"/>
-            <a:endParaRPr/>
           </a:p>
         </p:txBody>
       </p:sp>
@@ -27871,7 +27575,6 @@
           <a:lstStyle/>
           <a:p>
             <a:pPr algn="ctr"/>
-            <a:endParaRPr/>
           </a:p>
         </p:txBody>
       </p:sp>
@@ -27918,7 +27621,6 @@
           <a:lstStyle/>
           <a:p>
             <a:pPr algn="ctr"/>
-            <a:endParaRPr/>
           </a:p>
         </p:txBody>
       </p:sp>
@@ -27965,7 +27667,6 @@
           <a:lstStyle/>
           <a:p>
             <a:pPr algn="ctr"/>
-            <a:endParaRPr/>
           </a:p>
         </p:txBody>
       </p:sp>
@@ -28012,7 +27713,6 @@
           <a:lstStyle/>
           <a:p>
             <a:pPr algn="ctr"/>
-            <a:endParaRPr/>
           </a:p>
         </p:txBody>
       </p:sp>
@@ -28059,7 +27759,6 @@
           <a:lstStyle/>
           <a:p>
             <a:pPr algn="ctr"/>
-            <a:endParaRPr/>
           </a:p>
         </p:txBody>
       </p:sp>
@@ -28106,7 +27805,6 @@
           <a:lstStyle/>
           <a:p>
             <a:pPr algn="ctr"/>
-            <a:endParaRPr/>
           </a:p>
         </p:txBody>
       </p:sp>
@@ -28153,7 +27851,6 @@
           <a:lstStyle/>
           <a:p>
             <a:pPr algn="ctr"/>
-            <a:endParaRPr/>
           </a:p>
         </p:txBody>
       </p:sp>
@@ -28200,7 +27897,6 @@
           <a:lstStyle/>
           <a:p>
             <a:pPr algn="ctr"/>
-            <a:endParaRPr/>
           </a:p>
         </p:txBody>
       </p:sp>
@@ -28247,7 +27943,6 @@
           <a:lstStyle/>
           <a:p>
             <a:pPr algn="ctr"/>
-            <a:endParaRPr/>
           </a:p>
         </p:txBody>
       </p:sp>
@@ -28294,7 +27989,6 @@
           <a:lstStyle/>
           <a:p>
             <a:pPr algn="ctr"/>
-            <a:endParaRPr/>
           </a:p>
         </p:txBody>
       </p:sp>
@@ -28341,7 +28035,6 @@
           <a:lstStyle/>
           <a:p>
             <a:pPr algn="ctr"/>
-            <a:endParaRPr/>
           </a:p>
         </p:txBody>
       </p:sp>
@@ -28388,7 +28081,6 @@
           <a:lstStyle/>
           <a:p>
             <a:pPr algn="ctr"/>
-            <a:endParaRPr/>
           </a:p>
         </p:txBody>
       </p:sp>
@@ -28435,7 +28127,6 @@
           <a:lstStyle/>
           <a:p>
             <a:pPr algn="ctr"/>
-            <a:endParaRPr/>
           </a:p>
         </p:txBody>
       </p:sp>
@@ -28482,7 +28173,6 @@
           <a:lstStyle/>
           <a:p>
             <a:pPr algn="ctr"/>
-            <a:endParaRPr/>
           </a:p>
         </p:txBody>
       </p:sp>
@@ -28529,7 +28219,6 @@
           <a:lstStyle/>
           <a:p>
             <a:pPr algn="ctr"/>
-            <a:endParaRPr/>
           </a:p>
         </p:txBody>
       </p:sp>
@@ -28576,7 +28265,6 @@
           <a:lstStyle/>
           <a:p>
             <a:pPr algn="ctr"/>
-            <a:endParaRPr/>
           </a:p>
         </p:txBody>
       </p:sp>
@@ -28623,7 +28311,6 @@
           <a:lstStyle/>
           <a:p>
             <a:pPr algn="ctr"/>
-            <a:endParaRPr/>
           </a:p>
         </p:txBody>
       </p:sp>
@@ -28670,7 +28357,6 @@
           <a:lstStyle/>
           <a:p>
             <a:pPr algn="ctr"/>
-            <a:endParaRPr/>
           </a:p>
         </p:txBody>
       </p:sp>
@@ -28717,7 +28403,6 @@
           <a:lstStyle/>
           <a:p>
             <a:pPr algn="ctr"/>
-            <a:endParaRPr/>
           </a:p>
         </p:txBody>
       </p:sp>
@@ -28764,7 +28449,6 @@
           <a:lstStyle/>
           <a:p>
             <a:pPr algn="ctr"/>
-            <a:endParaRPr/>
           </a:p>
         </p:txBody>
       </p:sp>
@@ -28811,7 +28495,6 @@
           <a:lstStyle/>
           <a:p>
             <a:pPr algn="ctr"/>
-            <a:endParaRPr/>
           </a:p>
         </p:txBody>
       </p:sp>
@@ -28858,7 +28541,6 @@
           <a:lstStyle/>
           <a:p>
             <a:pPr algn="ctr"/>
-            <a:endParaRPr/>
           </a:p>
         </p:txBody>
       </p:sp>
@@ -28905,7 +28587,6 @@
           <a:lstStyle/>
           <a:p>
             <a:pPr algn="ctr"/>
-            <a:endParaRPr/>
           </a:p>
         </p:txBody>
       </p:sp>
@@ -28952,7 +28633,6 @@
           <a:lstStyle/>
           <a:p>
             <a:pPr algn="ctr"/>
-            <a:endParaRPr/>
           </a:p>
         </p:txBody>
       </p:sp>
@@ -28999,7 +28679,6 @@
           <a:lstStyle/>
           <a:p>
             <a:pPr algn="ctr"/>
-            <a:endParaRPr/>
           </a:p>
         </p:txBody>
       </p:sp>
@@ -29046,7 +28725,6 @@
           <a:lstStyle/>
           <a:p>
             <a:pPr algn="ctr"/>
-            <a:endParaRPr/>
           </a:p>
         </p:txBody>
       </p:sp>
@@ -29093,7 +28771,6 @@
           <a:lstStyle/>
           <a:p>
             <a:pPr algn="ctr"/>
-            <a:endParaRPr/>
           </a:p>
         </p:txBody>
       </p:sp>
@@ -29140,7 +28817,6 @@
           <a:lstStyle/>
           <a:p>
             <a:pPr algn="ctr"/>
-            <a:endParaRPr/>
           </a:p>
         </p:txBody>
       </p:sp>
@@ -29187,7 +28863,6 @@
           <a:lstStyle/>
           <a:p>
             <a:pPr algn="ctr"/>
-            <a:endParaRPr/>
           </a:p>
         </p:txBody>
       </p:sp>
@@ -29234,7 +28909,6 @@
           <a:lstStyle/>
           <a:p>
             <a:pPr algn="ctr"/>
-            <a:endParaRPr/>
           </a:p>
         </p:txBody>
       </p:sp>
@@ -29281,7 +28955,6 @@
           <a:lstStyle/>
           <a:p>
             <a:pPr algn="ctr"/>
-            <a:endParaRPr/>
           </a:p>
         </p:txBody>
       </p:sp>
@@ -29328,7 +29001,6 @@
           <a:lstStyle/>
           <a:p>
             <a:pPr algn="ctr"/>
-            <a:endParaRPr/>
           </a:p>
         </p:txBody>
       </p:sp>
@@ -29375,7 +29047,6 @@
           <a:lstStyle/>
           <a:p>
             <a:pPr algn="ctr"/>
-            <a:endParaRPr/>
           </a:p>
         </p:txBody>
       </p:sp>
@@ -29422,7 +29093,6 @@
           <a:lstStyle/>
           <a:p>
             <a:pPr algn="ctr"/>
-            <a:endParaRPr/>
           </a:p>
         </p:txBody>
       </p:sp>
@@ -29469,7 +29139,6 @@
           <a:lstStyle/>
           <a:p>
             <a:pPr algn="ctr"/>
-            <a:endParaRPr/>
           </a:p>
         </p:txBody>
       </p:sp>
@@ -29516,7 +29185,6 @@
           <a:lstStyle/>
           <a:p>
             <a:pPr algn="ctr"/>
-            <a:endParaRPr/>
           </a:p>
         </p:txBody>
       </p:sp>
@@ -29563,7 +29231,6 @@
           <a:lstStyle/>
           <a:p>
             <a:pPr algn="ctr"/>
-            <a:endParaRPr/>
           </a:p>
         </p:txBody>
       </p:sp>
@@ -29610,7 +29277,6 @@
           <a:lstStyle/>
           <a:p>
             <a:pPr algn="ctr"/>
-            <a:endParaRPr/>
           </a:p>
         </p:txBody>
       </p:sp>
@@ -29657,7 +29323,6 @@
           <a:lstStyle/>
           <a:p>
             <a:pPr algn="ctr"/>
-            <a:endParaRPr/>
           </a:p>
         </p:txBody>
       </p:sp>
@@ -29704,7 +29369,6 @@
           <a:lstStyle/>
           <a:p>
             <a:pPr algn="ctr"/>
-            <a:endParaRPr/>
           </a:p>
         </p:txBody>
       </p:sp>
@@ -29749,7 +29413,6 @@
           <a:lstStyle/>
           <a:p>
             <a:pPr algn="ctr"/>
-            <a:endParaRPr/>
           </a:p>
         </p:txBody>
       </p:sp>
@@ -29830,7 +29493,6 @@
           <a:lstStyle/>
           <a:p>
             <a:pPr algn="ctr"/>
-            <a:endParaRPr/>
           </a:p>
         </p:txBody>
       </p:sp>
@@ -29905,7 +29567,7 @@
           </a:fontRef>
         </p:style>
         <p:txBody>
-          <a:bodyPr wrap="square" lIns="45720" tIns="27432" rIns="45720" bIns="27432" rtlCol="0" anchor="ctr"/>
+          <a:bodyPr rtlCol="0" anchor="ctr" wrap="square" lIns="45720" rIns="45720" tIns="27432" bIns="27432"/>
           <a:lstStyle/>
           <a:p>
             <a:pPr algn="ctr"/>
@@ -29982,7 +29644,7 @@
           </a:fontRef>
         </p:style>
         <p:txBody>
-          <a:bodyPr wrap="square" lIns="45720" tIns="27432" rIns="45720" bIns="27432" rtlCol="0" anchor="ctr"/>
+          <a:bodyPr rtlCol="0" anchor="ctr" wrap="square" lIns="45720" rIns="45720" tIns="27432" bIns="27432"/>
           <a:lstStyle/>
           <a:p>
             <a:pPr algn="ctr"/>
@@ -30283,7 +29945,7 @@
           </a:fontRef>
         </p:style>
         <p:txBody>
-          <a:bodyPr wrap="square" lIns="45720" tIns="27432" rIns="45720" bIns="27432" rtlCol="0" anchor="ctr"/>
+          <a:bodyPr rtlCol="0" anchor="ctr" wrap="square" lIns="45720" rIns="45720" tIns="27432" bIns="27432"/>
           <a:lstStyle/>
           <a:p>
             <a:pPr algn="ctr"/>
@@ -30422,7 +30084,7 @@
 </file>
 
 <file path=ppt/slides/slide5.xml><?xml version="1.0" encoding="utf-8"?>
-<p:sld xmlns:a="http://schemas.openxmlformats.org/drawingml/2006/main" xmlns:r="http://schemas.openxmlformats.org/officeDocument/2006/relationships" xmlns:p="http://schemas.openxmlformats.org/presentationml/2006/main">
+<p:sld xmlns:a="http://schemas.openxmlformats.org/drawingml/2006/main" xmlns:p="http://schemas.openxmlformats.org/presentationml/2006/main" xmlns:r="http://schemas.openxmlformats.org/officeDocument/2006/relationships">
   <p:cSld>
     <p:bg>
       <p:bgPr>
@@ -30438,14 +30100,7 @@
         <p:cNvGrpSpPr/>
         <p:nvPr/>
       </p:nvGrpSpPr>
-      <p:grpSpPr>
-        <a:xfrm>
-          <a:off x="0" y="0"/>
-          <a:ext cx="0" cy="0"/>
-          <a:chOff x="0" y="0"/>
-          <a:chExt cx="0" cy="0"/>
-        </a:xfrm>
-      </p:grpSpPr>
+      <p:grpSpPr/>
       <p:sp>
         <p:nvSpPr>
           <p:cNvPr id="2" name="TextBox 1"/>
@@ -30554,7 +30209,6 @@
           <a:lstStyle/>
           <a:p>
             <a:pPr algn="ctr"/>
-            <a:endParaRPr/>
           </a:p>
         </p:txBody>
       </p:sp>
@@ -30668,7 +30322,7 @@
           </a:fontRef>
         </p:style>
         <p:txBody>
-          <a:bodyPr wrap="none" lIns="201168" tIns="137160" rIns="137160" bIns="109728" rtlCol="0" anchor="ctr"/>
+          <a:bodyPr rtlCol="0" anchor="ctr" wrap="none" lIns="201168" tIns="137160" rIns="137160" bIns="109728"/>
           <a:lstStyle/>
           <a:p>
             <a:pPr algn="ctr">
@@ -30804,7 +30458,6 @@
           <a:lstStyle/>
           <a:p>
             <a:pPr algn="ctr"/>
-            <a:endParaRPr/>
           </a:p>
         </p:txBody>
       </p:sp>
@@ -30881,7 +30534,7 @@
           </a:fontRef>
         </p:style>
         <p:txBody>
-          <a:bodyPr wrap="square" lIns="45720" tIns="27432" rIns="45720" bIns="27432" rtlCol="0" anchor="ctr"/>
+          <a:bodyPr rtlCol="0" anchor="ctr" wrap="square" lIns="45720" rIns="45720" tIns="27432" bIns="27432"/>
           <a:lstStyle/>
           <a:p>
             <a:pPr algn="ctr"/>
@@ -30970,7 +30623,7 @@
           </a:fontRef>
         </p:style>
         <p:txBody>
-          <a:bodyPr wrap="square" lIns="45720" tIns="27432" rIns="45720" bIns="27432" rtlCol="0" anchor="ctr"/>
+          <a:bodyPr rtlCol="0" anchor="ctr" wrap="square" lIns="45720" rIns="45720" tIns="27432" bIns="27432"/>
           <a:lstStyle/>
           <a:p>
             <a:pPr algn="ctr"/>
@@ -31025,7 +30678,7 @@
           </a:fontRef>
         </p:style>
         <p:txBody>
-          <a:bodyPr wrap="square" lIns="45720" tIns="27432" rIns="45720" bIns="27432" rtlCol="0" anchor="ctr"/>
+          <a:bodyPr rtlCol="0" anchor="ctr" wrap="square" lIns="45720" rIns="45720" tIns="27432" bIns="27432"/>
           <a:lstStyle/>
           <a:p>
             <a:pPr algn="ctr"/>
@@ -31080,7 +30733,7 @@
           </a:fontRef>
         </p:style>
         <p:txBody>
-          <a:bodyPr wrap="square" lIns="45720" tIns="27432" rIns="45720" bIns="27432" rtlCol="0" anchor="ctr"/>
+          <a:bodyPr rtlCol="0" anchor="ctr" wrap="square" lIns="45720" rIns="45720" tIns="27432" bIns="27432"/>
           <a:lstStyle/>
           <a:p>
             <a:pPr algn="ctr"/>
@@ -31135,7 +30788,7 @@
           </a:fontRef>
         </p:style>
         <p:txBody>
-          <a:bodyPr wrap="square" lIns="45720" tIns="27432" rIns="45720" bIns="27432" rtlCol="0" anchor="ctr"/>
+          <a:bodyPr rtlCol="0" anchor="ctr" wrap="square" lIns="45720" rIns="45720" tIns="27432" bIns="27432"/>
           <a:lstStyle/>
           <a:p>
             <a:pPr algn="ctr"/>
@@ -31224,7 +30877,7 @@
           </a:fontRef>
         </p:style>
         <p:txBody>
-          <a:bodyPr wrap="square" lIns="45720" tIns="27432" rIns="45720" bIns="27432" rtlCol="0" anchor="ctr"/>
+          <a:bodyPr rtlCol="0" anchor="ctr" wrap="square" lIns="45720" rIns="45720" tIns="27432" bIns="27432"/>
           <a:lstStyle/>
           <a:p>
             <a:pPr algn="ctr"/>
@@ -31279,7 +30932,7 @@
           </a:fontRef>
         </p:style>
         <p:txBody>
-          <a:bodyPr wrap="square" lIns="45720" tIns="27432" rIns="45720" bIns="27432" rtlCol="0" anchor="ctr"/>
+          <a:bodyPr rtlCol="0" anchor="ctr" wrap="square" lIns="45720" rIns="45720" tIns="27432" bIns="27432"/>
           <a:lstStyle/>
           <a:p>
             <a:pPr algn="ctr"/>
@@ -31334,7 +30987,7 @@
           </a:fontRef>
         </p:style>
         <p:txBody>
-          <a:bodyPr wrap="square" lIns="45720" tIns="27432" rIns="45720" bIns="27432" rtlCol="0" anchor="ctr"/>
+          <a:bodyPr rtlCol="0" anchor="ctr" wrap="square" lIns="45720" rIns="45720" tIns="27432" bIns="27432"/>
           <a:lstStyle/>
           <a:p>
             <a:pPr algn="ctr"/>
@@ -31389,7 +31042,7 @@
           </a:fontRef>
         </p:style>
         <p:txBody>
-          <a:bodyPr wrap="square" lIns="45720" tIns="27432" rIns="45720" bIns="27432" rtlCol="0" anchor="ctr"/>
+          <a:bodyPr rtlCol="0" anchor="ctr" wrap="square" lIns="45720" rIns="45720" tIns="27432" bIns="27432"/>
           <a:lstStyle/>
           <a:p>
             <a:pPr algn="ctr"/>
@@ -31478,7 +31131,7 @@
           </a:fontRef>
         </p:style>
         <p:txBody>
-          <a:bodyPr wrap="square" lIns="45720" tIns="27432" rIns="45720" bIns="27432" rtlCol="0" anchor="ctr"/>
+          <a:bodyPr rtlCol="0" anchor="ctr" wrap="square" lIns="45720" rIns="45720" tIns="27432" bIns="27432"/>
           <a:lstStyle/>
           <a:p>
             <a:pPr algn="ctr"/>
@@ -31533,7 +31186,7 @@
           </a:fontRef>
         </p:style>
         <p:txBody>
-          <a:bodyPr wrap="square" lIns="45720" tIns="27432" rIns="45720" bIns="27432" rtlCol="0" anchor="ctr"/>
+          <a:bodyPr rtlCol="0" anchor="ctr" wrap="square" lIns="45720" rIns="45720" tIns="27432" bIns="27432"/>
           <a:lstStyle/>
           <a:p>
             <a:pPr algn="ctr"/>
@@ -31588,7 +31241,7 @@
           </a:fontRef>
         </p:style>
         <p:txBody>
-          <a:bodyPr wrap="square" lIns="45720" tIns="27432" rIns="45720" bIns="27432" rtlCol="0" anchor="ctr"/>
+          <a:bodyPr rtlCol="0" anchor="ctr" wrap="square" lIns="45720" rIns="45720" tIns="27432" bIns="27432"/>
           <a:lstStyle/>
           <a:p>
             <a:pPr algn="ctr"/>
@@ -31643,7 +31296,7 @@
           </a:fontRef>
         </p:style>
         <p:txBody>
-          <a:bodyPr wrap="square" lIns="45720" tIns="27432" rIns="45720" bIns="27432" rtlCol="0" anchor="ctr"/>
+          <a:bodyPr rtlCol="0" anchor="ctr" wrap="square" lIns="45720" rIns="45720" tIns="27432" bIns="27432"/>
           <a:lstStyle/>
           <a:p>
             <a:pPr algn="ctr"/>
@@ -31732,7 +31385,7 @@
           </a:fontRef>
         </p:style>
         <p:txBody>
-          <a:bodyPr wrap="square" lIns="45720" tIns="27432" rIns="45720" bIns="27432" rtlCol="0" anchor="ctr"/>
+          <a:bodyPr rtlCol="0" anchor="ctr" wrap="square" lIns="45720" rIns="45720" tIns="27432" bIns="27432"/>
           <a:lstStyle/>
           <a:p>
             <a:pPr algn="ctr"/>
@@ -31787,7 +31440,7 @@
           </a:fontRef>
         </p:style>
         <p:txBody>
-          <a:bodyPr wrap="square" lIns="45720" tIns="27432" rIns="45720" bIns="27432" rtlCol="0" anchor="ctr"/>
+          <a:bodyPr rtlCol="0" anchor="ctr" wrap="square" lIns="45720" rIns="45720" tIns="27432" bIns="27432"/>
           <a:lstStyle/>
           <a:p>
             <a:pPr algn="ctr"/>
@@ -31842,7 +31495,7 @@
           </a:fontRef>
         </p:style>
         <p:txBody>
-          <a:bodyPr wrap="square" lIns="45720" tIns="27432" rIns="45720" bIns="27432" rtlCol="0" anchor="ctr"/>
+          <a:bodyPr rtlCol="0" anchor="ctr" wrap="square" lIns="45720" rIns="45720" tIns="27432" bIns="27432"/>
           <a:lstStyle/>
           <a:p>
             <a:pPr algn="ctr"/>
@@ -31860,14 +31513,14 @@
       </p:sp>
       <p:sp>
         <p:nvSpPr>
-          <p:cNvPr id="32" name="TextBox 31"/>
+          <p:cNvPr id="30" name="TextBox 29"/>
           <p:cNvSpPr txBox="1"/>
           <p:nvPr/>
         </p:nvSpPr>
         <p:spPr>
           <a:xfrm>
             <a:off x="7562088" y="4242816"/>
-            <a:ext cx="2103120" cy="246221"/>
+            <a:ext cx="2103120" cy="246888"/>
           </a:xfrm>
           <a:prstGeom prst="rect">
             <a:avLst/>
@@ -31882,7 +31535,7 @@
           <a:p>
             <a:pPr algn="r"/>
             <a:r>
-              <a:rPr lang="en-US" sz="1000" i="1" dirty="0">
+              <a:rPr sz="1000" i="1">
                 <a:solidFill>
                   <a:srgbClr val="8D8D8D"/>
                 </a:solidFill>
@@ -31890,18 +31543,12 @@
               </a:rPr>
               <a:t>Each cell is a q output</a:t>
             </a:r>
-            <a:endParaRPr sz="1000" i="1" dirty="0">
-              <a:solidFill>
-                <a:srgbClr val="8D8D8D"/>
-              </a:solidFill>
-              <a:latin typeface="Aptos"/>
-            </a:endParaRPr>
-          </a:p>
-        </p:txBody>
-      </p:sp>
-      <p:sp>
-        <p:nvSpPr>
-          <p:cNvPr id="33" name="TextBox 32"/>
+          </a:p>
+        </p:txBody>
+      </p:sp>
+      <p:sp>
+        <p:nvSpPr>
+          <p:cNvPr id="31" name="TextBox 30"/>
           <p:cNvSpPr txBox="1"/>
           <p:nvPr/>
         </p:nvSpPr>
@@ -31942,7 +31589,7 @@
 </file>
 
 <file path=ppt/slides/slide6.xml><?xml version="1.0" encoding="utf-8"?>
-<p:sld xmlns:a="http://schemas.openxmlformats.org/drawingml/2006/main" xmlns:r="http://schemas.openxmlformats.org/officeDocument/2006/relationships" xmlns:p="http://schemas.openxmlformats.org/presentationml/2006/main">
+<p:sld xmlns:a="http://schemas.openxmlformats.org/drawingml/2006/main" xmlns:p="http://schemas.openxmlformats.org/presentationml/2006/main" xmlns:r="http://schemas.openxmlformats.org/officeDocument/2006/relationships">
   <p:cSld>
     <p:bg>
       <p:bgPr>
@@ -31958,14 +31605,7 @@
         <p:cNvGrpSpPr/>
         <p:nvPr/>
       </p:nvGrpSpPr>
-      <p:grpSpPr>
-        <a:xfrm>
-          <a:off x="0" y="0"/>
-          <a:ext cx="0" cy="0"/>
-          <a:chOff x="0" y="0"/>
-          <a:chExt cx="0" cy="0"/>
-        </a:xfrm>
-      </p:grpSpPr>
+      <p:grpSpPr/>
       <p:sp>
         <p:nvSpPr>
           <p:cNvPr id="2" name="TextBox 1"/>
@@ -32074,7 +31714,6 @@
           <a:lstStyle/>
           <a:p>
             <a:pPr algn="ctr"/>
-            <a:endParaRPr/>
           </a:p>
         </p:txBody>
       </p:sp>
@@ -32136,39 +31775,15 @@
                 <a:tableStyleId>{5C22544A-7EE6-4342-B048-85BDC9FD1C3A}</a:tableStyleId>
               </a:tblPr>
               <a:tblGrid>
-                <a:gridCol w="2103120">
-                  <a:extLst>
-                    <a:ext uri="{9D8B030D-6E8A-4147-A177-3AD203B41FA5}">
-                      <a16:colId xmlns:a16="http://schemas.microsoft.com/office/drawing/2014/main" val="20000"/>
-                    </a:ext>
-                  </a:extLst>
-                </a:gridCol>
-                <a:gridCol w="1737360">
-                  <a:extLst>
-                    <a:ext uri="{9D8B030D-6E8A-4147-A177-3AD203B41FA5}">
-                      <a16:colId xmlns:a16="http://schemas.microsoft.com/office/drawing/2014/main" val="20001"/>
-                    </a:ext>
-                  </a:extLst>
-                </a:gridCol>
-                <a:gridCol w="3931920">
-                  <a:extLst>
-                    <a:ext uri="{9D8B030D-6E8A-4147-A177-3AD203B41FA5}">
-                      <a16:colId xmlns:a16="http://schemas.microsoft.com/office/drawing/2014/main" val="20002"/>
-                    </a:ext>
-                  </a:extLst>
-                </a:gridCol>
-                <a:gridCol w="3291840">
-                  <a:extLst>
-                    <a:ext uri="{9D8B030D-6E8A-4147-A177-3AD203B41FA5}">
-                      <a16:colId xmlns:a16="http://schemas.microsoft.com/office/drawing/2014/main" val="20003"/>
-                    </a:ext>
-                  </a:extLst>
-                </a:gridCol>
+                <a:gridCol w="2103120"/>
+                <a:gridCol w="1737360"/>
+                <a:gridCol w="3931920"/>
+                <a:gridCol w="3291840"/>
               </a:tblGrid>
               <a:tr h="441960">
                 <a:tc>
                   <a:txBody>
-                    <a:bodyPr/>
+                    <a:bodyPr wrap="square"/>
                     <a:lstStyle/>
                     <a:p>
                       <a:r>
@@ -32190,7 +31805,7 @@
                 </a:tc>
                 <a:tc>
                   <a:txBody>
-                    <a:bodyPr/>
+                    <a:bodyPr wrap="square"/>
                     <a:lstStyle/>
                     <a:p>
                       <a:r>
@@ -32212,7 +31827,7 @@
                 </a:tc>
                 <a:tc>
                   <a:txBody>
-                    <a:bodyPr/>
+                    <a:bodyPr wrap="square"/>
                     <a:lstStyle/>
                     <a:p>
                       <a:r>
@@ -32234,7 +31849,7 @@
                 </a:tc>
                 <a:tc>
                   <a:txBody>
-                    <a:bodyPr/>
+                    <a:bodyPr wrap="square"/>
                     <a:lstStyle/>
                     <a:p>
                       <a:r>
@@ -32254,16 +31869,11 @@
                     </a:solidFill>
                   </a:tcPr>
                 </a:tc>
-                <a:extLst>
-                  <a:ext uri="{0D108BD9-81ED-4DB2-BD59-A6C34878D82A}">
-                    <a16:rowId xmlns:a16="http://schemas.microsoft.com/office/drawing/2014/main" val="10000"/>
-                  </a:ext>
-                </a:extLst>
               </a:tr>
               <a:tr h="441960">
                 <a:tc>
                   <a:txBody>
-                    <a:bodyPr/>
+                    <a:bodyPr wrap="square"/>
                     <a:lstStyle/>
                     <a:p>
                       <a:r>
@@ -32285,7 +31895,7 @@
                 </a:tc>
                 <a:tc>
                   <a:txBody>
-                    <a:bodyPr/>
+                    <a:bodyPr wrap="square"/>
                     <a:lstStyle/>
                     <a:p>
                       <a:r>
@@ -32307,7 +31917,7 @@
                 </a:tc>
                 <a:tc>
                   <a:txBody>
-                    <a:bodyPr/>
+                    <a:bodyPr wrap="square"/>
                     <a:lstStyle/>
                     <a:p>
                       <a:r>
@@ -32329,7 +31939,7 @@
                 </a:tc>
                 <a:tc>
                   <a:txBody>
-                    <a:bodyPr/>
+                    <a:bodyPr wrap="square"/>
                     <a:lstStyle/>
                     <a:p>
                       <a:r>
@@ -32349,16 +31959,11 @@
                     </a:solidFill>
                   </a:tcPr>
                 </a:tc>
-                <a:extLst>
-                  <a:ext uri="{0D108BD9-81ED-4DB2-BD59-A6C34878D82A}">
-                    <a16:rowId xmlns:a16="http://schemas.microsoft.com/office/drawing/2014/main" val="10001"/>
-                  </a:ext>
-                </a:extLst>
               </a:tr>
               <a:tr h="441960">
                 <a:tc>
                   <a:txBody>
-                    <a:bodyPr/>
+                    <a:bodyPr wrap="square"/>
                     <a:lstStyle/>
                     <a:p>
                       <a:r>
@@ -32380,7 +31985,7 @@
                 </a:tc>
                 <a:tc>
                   <a:txBody>
-                    <a:bodyPr/>
+                    <a:bodyPr wrap="square"/>
                     <a:lstStyle/>
                     <a:p>
                       <a:r>
@@ -32402,7 +32007,7 @@
                 </a:tc>
                 <a:tc>
                   <a:txBody>
-                    <a:bodyPr/>
+                    <a:bodyPr wrap="square"/>
                     <a:lstStyle/>
                     <a:p>
                       <a:r>
@@ -32424,7 +32029,7 @@
                 </a:tc>
                 <a:tc>
                   <a:txBody>
-                    <a:bodyPr/>
+                    <a:bodyPr wrap="square"/>
                     <a:lstStyle/>
                     <a:p>
                       <a:r>
@@ -32453,16 +32058,11 @@
                     </a:solidFill>
                   </a:tcPr>
                 </a:tc>
-                <a:extLst>
-                  <a:ext uri="{0D108BD9-81ED-4DB2-BD59-A6C34878D82A}">
-                    <a16:rowId xmlns:a16="http://schemas.microsoft.com/office/drawing/2014/main" val="10002"/>
-                  </a:ext>
-                </a:extLst>
               </a:tr>
               <a:tr h="441960">
                 <a:tc>
                   <a:txBody>
-                    <a:bodyPr/>
+                    <a:bodyPr wrap="square"/>
                     <a:lstStyle/>
                     <a:p>
                       <a:r>
@@ -32484,7 +32084,7 @@
                 </a:tc>
                 <a:tc>
                   <a:txBody>
-                    <a:bodyPr/>
+                    <a:bodyPr wrap="square"/>
                     <a:lstStyle/>
                     <a:p>
                       <a:r>
@@ -32506,7 +32106,7 @@
                 </a:tc>
                 <a:tc>
                   <a:txBody>
-                    <a:bodyPr/>
+                    <a:bodyPr wrap="square"/>
                     <a:lstStyle/>
                     <a:p>
                       <a:r>
@@ -32528,7 +32128,7 @@
                 </a:tc>
                 <a:tc>
                   <a:txBody>
-                    <a:bodyPr/>
+                    <a:bodyPr wrap="square"/>
                     <a:lstStyle/>
                     <a:p>
                       <a:r>
@@ -32557,16 +32157,11 @@
                     </a:solidFill>
                   </a:tcPr>
                 </a:tc>
-                <a:extLst>
-                  <a:ext uri="{0D108BD9-81ED-4DB2-BD59-A6C34878D82A}">
-                    <a16:rowId xmlns:a16="http://schemas.microsoft.com/office/drawing/2014/main" val="10003"/>
-                  </a:ext>
-                </a:extLst>
               </a:tr>
               <a:tr h="441960">
                 <a:tc>
                   <a:txBody>
-                    <a:bodyPr/>
+                    <a:bodyPr wrap="square"/>
                     <a:lstStyle/>
                     <a:p>
                       <a:r>
@@ -32588,7 +32183,7 @@
                 </a:tc>
                 <a:tc>
                   <a:txBody>
-                    <a:bodyPr/>
+                    <a:bodyPr wrap="square"/>
                     <a:lstStyle/>
                     <a:p>
                       <a:r>
@@ -32610,7 +32205,7 @@
                 </a:tc>
                 <a:tc>
                   <a:txBody>
-                    <a:bodyPr/>
+                    <a:bodyPr wrap="square"/>
                     <a:lstStyle/>
                     <a:p>
                       <a:r>
@@ -32632,7 +32227,7 @@
                 </a:tc>
                 <a:tc>
                   <a:txBody>
-                    <a:bodyPr/>
+                    <a:bodyPr wrap="square"/>
                     <a:lstStyle/>
                     <a:p>
                       <a:r>
@@ -32652,16 +32247,11 @@
                     </a:solidFill>
                   </a:tcPr>
                 </a:tc>
-                <a:extLst>
-                  <a:ext uri="{0D108BD9-81ED-4DB2-BD59-A6C34878D82A}">
-                    <a16:rowId xmlns:a16="http://schemas.microsoft.com/office/drawing/2014/main" val="10004"/>
-                  </a:ext>
-                </a:extLst>
               </a:tr>
               <a:tr h="441960">
                 <a:tc>
                   <a:txBody>
-                    <a:bodyPr/>
+                    <a:bodyPr wrap="square"/>
                     <a:lstStyle/>
                     <a:p>
                       <a:r>
@@ -32683,7 +32273,7 @@
                 </a:tc>
                 <a:tc>
                   <a:txBody>
-                    <a:bodyPr/>
+                    <a:bodyPr wrap="square"/>
                     <a:lstStyle/>
                     <a:p>
                       <a:r>
@@ -32705,7 +32295,7 @@
                 </a:tc>
                 <a:tc>
                   <a:txBody>
-                    <a:bodyPr/>
+                    <a:bodyPr wrap="square"/>
                     <a:lstStyle/>
                     <a:p>
                       <a:r>
@@ -32727,7 +32317,7 @@
                 </a:tc>
                 <a:tc>
                   <a:txBody>
-                    <a:bodyPr/>
+                    <a:bodyPr wrap="square"/>
                     <a:lstStyle/>
                     <a:p>
                       <a:r>
@@ -32747,11 +32337,6 @@
                     </a:solidFill>
                   </a:tcPr>
                 </a:tc>
-                <a:extLst>
-                  <a:ext uri="{0D108BD9-81ED-4DB2-BD59-A6C34878D82A}">
-                    <a16:rowId xmlns:a16="http://schemas.microsoft.com/office/drawing/2014/main" val="10005"/>
-                  </a:ext>
-                </a:extLst>
               </a:tr>
             </a:tbl>
           </a:graphicData>
@@ -32796,7 +32381,7 @@
           </a:fontRef>
         </p:style>
         <p:txBody>
-          <a:bodyPr wrap="square" rtlCol="0" anchor="ctr"/>
+          <a:bodyPr rtlCol="0" anchor="ctr" wrap="square"/>
           <a:lstStyle/>
           <a:p>
             <a:pPr algn="ctr"/>
@@ -32839,7 +32424,7 @@
 </file>
 
 <file path=ppt/slides/slide7.xml><?xml version="1.0" encoding="utf-8"?>
-<p:sld xmlns:a="http://schemas.openxmlformats.org/drawingml/2006/main" xmlns:r="http://schemas.openxmlformats.org/officeDocument/2006/relationships" xmlns:p="http://schemas.openxmlformats.org/presentationml/2006/main">
+<p:sld xmlns:a="http://schemas.openxmlformats.org/drawingml/2006/main" xmlns:p="http://schemas.openxmlformats.org/presentationml/2006/main" xmlns:r="http://schemas.openxmlformats.org/officeDocument/2006/relationships">
   <p:cSld>
     <p:bg>
       <p:bgPr>
@@ -32855,14 +32440,7 @@
         <p:cNvGrpSpPr/>
         <p:nvPr/>
       </p:nvGrpSpPr>
-      <p:grpSpPr>
-        <a:xfrm>
-          <a:off x="0" y="0"/>
-          <a:ext cx="0" cy="0"/>
-          <a:chOff x="0" y="0"/>
-          <a:chExt cx="0" cy="0"/>
-        </a:xfrm>
-      </p:grpSpPr>
+      <p:grpSpPr/>
       <p:sp>
         <p:nvSpPr>
           <p:cNvPr id="2" name="TextBox 1"/>
@@ -32971,7 +32549,6 @@
           <a:lstStyle/>
           <a:p>
             <a:pPr algn="ctr"/>
-            <a:endParaRPr/>
           </a:p>
         </p:txBody>
       </p:sp>
@@ -32984,7 +32561,7 @@
           <p:nvPr/>
         </p:nvPicPr>
         <p:blipFill>
-          <a:blip r:embed="rId3"/>
+          <a:blip r:embed="rId2"/>
           <a:stretch>
             <a:fillRect/>
           </a:stretch>
@@ -33160,7 +32737,7 @@
           </a:fontRef>
         </p:style>
         <p:txBody>
-          <a:bodyPr wrap="square" lIns="45720" tIns="27432" rIns="45720" bIns="27432" rtlCol="0" anchor="ctr"/>
+          <a:bodyPr rtlCol="0" anchor="ctr" wrap="square" lIns="45720" rIns="45720" tIns="27432" bIns="27432"/>
           <a:lstStyle/>
           <a:p>
             <a:pPr algn="ctr"/>
@@ -33250,7 +32827,7 @@
           </a:fontRef>
         </p:style>
         <p:txBody>
-          <a:bodyPr wrap="square" lIns="45720" tIns="27432" rIns="45720" bIns="27432" rtlCol="0" anchor="ctr"/>
+          <a:bodyPr rtlCol="0" anchor="ctr" wrap="square" lIns="45720" rIns="45720" tIns="27432" bIns="27432"/>
           <a:lstStyle/>
           <a:p>
             <a:pPr algn="ctr"/>
@@ -33340,7 +32917,7 @@
           </a:fontRef>
         </p:style>
         <p:txBody>
-          <a:bodyPr wrap="square" lIns="45720" tIns="27432" rIns="45720" bIns="27432" rtlCol="0" anchor="ctr"/>
+          <a:bodyPr rtlCol="0" anchor="ctr" wrap="square" lIns="45720" rIns="45720" tIns="27432" bIns="27432"/>
           <a:lstStyle/>
           <a:p>
             <a:pPr algn="ctr"/>
@@ -33442,7 +33019,7 @@
           </a:fontRef>
         </p:style>
         <p:txBody>
-          <a:bodyPr wrap="square" lIns="45720" tIns="27432" rIns="45720" bIns="27432" rtlCol="0" anchor="ctr"/>
+          <a:bodyPr rtlCol="0" anchor="ctr" wrap="square" lIns="45720" rIns="45720" tIns="27432" bIns="27432"/>
           <a:lstStyle/>
           <a:p>
             <a:pPr algn="ctr"/>
@@ -33519,7 +33096,7 @@
           </a:fontRef>
         </p:style>
         <p:txBody>
-          <a:bodyPr wrap="none" lIns="201168" tIns="137160" rIns="137160" bIns="109728" rtlCol="0" anchor="ctr"/>
+          <a:bodyPr rtlCol="0" anchor="ctr" wrap="none" lIns="201168" tIns="137160" rIns="137160" bIns="109728"/>
           <a:lstStyle/>
           <a:p>
             <a:pPr algn="ctr">
@@ -33624,7 +33201,7 @@
           </a:fontRef>
         </p:style>
         <p:txBody>
-          <a:bodyPr wrap="square" rtlCol="0" anchor="ctr"/>
+          <a:bodyPr rtlCol="0" anchor="ctr" wrap="square"/>
           <a:lstStyle/>
           <a:p>
             <a:pPr algn="ctr"/>
@@ -33667,7 +33244,7 @@
 </file>
 
 <file path=ppt/slides/slide8.xml><?xml version="1.0" encoding="utf-8"?>
-<p:sld xmlns:a="http://schemas.openxmlformats.org/drawingml/2006/main" xmlns:r="http://schemas.openxmlformats.org/officeDocument/2006/relationships" xmlns:p="http://schemas.openxmlformats.org/presentationml/2006/main">
+<p:sld xmlns:a="http://schemas.openxmlformats.org/drawingml/2006/main" xmlns:p="http://schemas.openxmlformats.org/presentationml/2006/main" xmlns:r="http://schemas.openxmlformats.org/officeDocument/2006/relationships">
   <p:cSld>
     <p:bg>
       <p:bgPr>
@@ -33683,14 +33260,7 @@
         <p:cNvGrpSpPr/>
         <p:nvPr/>
       </p:nvGrpSpPr>
-      <p:grpSpPr>
-        <a:xfrm>
-          <a:off x="0" y="0"/>
-          <a:ext cx="0" cy="0"/>
-          <a:chOff x="0" y="0"/>
-          <a:chExt cx="0" cy="0"/>
-        </a:xfrm>
-      </p:grpSpPr>
+      <p:grpSpPr/>
       <p:sp>
         <p:nvSpPr>
           <p:cNvPr id="2" name="TextBox 1"/>
@@ -33799,7 +33369,6 @@
           <a:lstStyle/>
           <a:p>
             <a:pPr algn="ctr"/>
-            <a:endParaRPr/>
           </a:p>
         </p:txBody>
       </p:sp>
@@ -33846,7 +33415,6 @@
           <a:lstStyle/>
           <a:p>
             <a:pPr algn="ctr"/>
-            <a:endParaRPr/>
           </a:p>
         </p:txBody>
       </p:sp>
@@ -33891,7 +33459,6 @@
           <a:lstStyle/>
           <a:p>
             <a:pPr algn="ctr"/>
-            <a:endParaRPr/>
           </a:p>
         </p:txBody>
       </p:sp>
@@ -33966,7 +33533,7 @@
           </a:fontRef>
         </p:style>
         <p:txBody>
-          <a:bodyPr wrap="none" lIns="201168" tIns="137160" rIns="137160" bIns="109728" rtlCol="0" anchor="ctr"/>
+          <a:bodyPr rtlCol="0" anchor="ctr" wrap="none" lIns="201168" tIns="137160" rIns="137160" bIns="109728"/>
           <a:lstStyle/>
           <a:p>
             <a:pPr algn="ctr">
@@ -34168,7 +33735,6 @@
           <a:lstStyle/>
           <a:p>
             <a:pPr algn="ctr"/>
-            <a:endParaRPr/>
           </a:p>
         </p:txBody>
       </p:sp>
@@ -34213,7 +33779,6 @@
           <a:lstStyle/>
           <a:p>
             <a:pPr algn="ctr"/>
-            <a:endParaRPr/>
           </a:p>
         </p:txBody>
       </p:sp>
@@ -34290,7 +33855,7 @@
           </a:fontRef>
         </p:style>
         <p:txBody>
-          <a:bodyPr wrap="square" lIns="45720" tIns="27432" rIns="45720" bIns="27432" rtlCol="0" anchor="ctr"/>
+          <a:bodyPr rtlCol="0" anchor="ctr" wrap="square" lIns="45720" rIns="45720" tIns="27432" bIns="27432"/>
           <a:lstStyle/>
           <a:p>
             <a:pPr algn="ctr"/>
@@ -34345,7 +33910,7 @@
           </a:fontRef>
         </p:style>
         <p:txBody>
-          <a:bodyPr wrap="square" lIns="45720" tIns="27432" rIns="45720" bIns="27432" rtlCol="0" anchor="ctr"/>
+          <a:bodyPr rtlCol="0" anchor="ctr" wrap="square" lIns="45720" rIns="45720" tIns="27432" bIns="27432"/>
           <a:lstStyle/>
           <a:p>
             <a:pPr algn="ctr"/>
@@ -34400,7 +33965,7 @@
           </a:fontRef>
         </p:style>
         <p:txBody>
-          <a:bodyPr wrap="square" lIns="45720" tIns="27432" rIns="45720" bIns="27432" rtlCol="0" anchor="ctr"/>
+          <a:bodyPr rtlCol="0" anchor="ctr" wrap="square" lIns="45720" rIns="45720" tIns="27432" bIns="27432"/>
           <a:lstStyle/>
           <a:p>
             <a:pPr algn="ctr"/>
@@ -34455,7 +34020,7 @@
           </a:fontRef>
         </p:style>
         <p:txBody>
-          <a:bodyPr wrap="square" lIns="45720" tIns="27432" rIns="45720" bIns="27432" rtlCol="0" anchor="ctr"/>
+          <a:bodyPr rtlCol="0" anchor="ctr" wrap="square" lIns="45720" rIns="45720" tIns="27432" bIns="27432"/>
           <a:lstStyle/>
           <a:p>
             <a:pPr algn="ctr"/>
@@ -34510,7 +34075,7 @@
           </a:fontRef>
         </p:style>
         <p:txBody>
-          <a:bodyPr wrap="square" lIns="45720" tIns="27432" rIns="45720" bIns="27432" rtlCol="0" anchor="ctr"/>
+          <a:bodyPr rtlCol="0" anchor="ctr" wrap="square" lIns="45720" rIns="45720" tIns="27432" bIns="27432"/>
           <a:lstStyle/>
           <a:p>
             <a:pPr algn="ctr"/>
@@ -34565,7 +34130,7 @@
           </a:fontRef>
         </p:style>
         <p:txBody>
-          <a:bodyPr wrap="square" lIns="45720" tIns="27432" rIns="45720" bIns="27432" rtlCol="0" anchor="ctr"/>
+          <a:bodyPr rtlCol="0" anchor="ctr" wrap="square" lIns="45720" rIns="45720" tIns="27432" bIns="27432"/>
           <a:lstStyle/>
           <a:p>
             <a:pPr algn="ctr"/>
@@ -34620,7 +34185,7 @@
           </a:fontRef>
         </p:style>
         <p:txBody>
-          <a:bodyPr wrap="square" lIns="45720" tIns="27432" rIns="45720" bIns="27432" rtlCol="0" anchor="ctr"/>
+          <a:bodyPr rtlCol="0" anchor="ctr" wrap="square" lIns="45720" rIns="45720" tIns="27432" bIns="27432"/>
           <a:lstStyle/>
           <a:p>
             <a:pPr algn="ctr"/>
@@ -34675,7 +34240,7 @@
           </a:fontRef>
         </p:style>
         <p:txBody>
-          <a:bodyPr wrap="square" lIns="45720" tIns="27432" rIns="45720" bIns="27432" rtlCol="0" anchor="ctr"/>
+          <a:bodyPr rtlCol="0" anchor="ctr" wrap="square" lIns="45720" rIns="45720" tIns="27432" bIns="27432"/>
           <a:lstStyle/>
           <a:p>
             <a:pPr algn="ctr"/>
@@ -34730,7 +34295,7 @@
           </a:fontRef>
         </p:style>
         <p:txBody>
-          <a:bodyPr wrap="square" lIns="45720" tIns="27432" rIns="45720" bIns="27432" rtlCol="0" anchor="ctr"/>
+          <a:bodyPr rtlCol="0" anchor="ctr" wrap="square" lIns="45720" rIns="45720" tIns="27432" bIns="27432"/>
           <a:lstStyle/>
           <a:p>
             <a:pPr algn="ctr"/>
@@ -34840,7 +34405,7 @@
           </a:fontRef>
         </p:style>
         <p:txBody>
-          <a:bodyPr wrap="square" rtlCol="0" anchor="ctr"/>
+          <a:bodyPr rtlCol="0" anchor="ctr" wrap="square"/>
           <a:lstStyle/>
           <a:p>
             <a:pPr algn="ctr"/>
@@ -34883,7 +34448,7 @@
 </file>
 
 <file path=ppt/slides/slide9.xml><?xml version="1.0" encoding="utf-8"?>
-<p:sld xmlns:a="http://schemas.openxmlformats.org/drawingml/2006/main" xmlns:r="http://schemas.openxmlformats.org/officeDocument/2006/relationships" xmlns:p="http://schemas.openxmlformats.org/presentationml/2006/main">
+<p:sld xmlns:a="http://schemas.openxmlformats.org/drawingml/2006/main" xmlns:p="http://schemas.openxmlformats.org/presentationml/2006/main" xmlns:r="http://schemas.openxmlformats.org/officeDocument/2006/relationships">
   <p:cSld>
     <p:bg>
       <p:bgPr>
@@ -34899,14 +34464,7 @@
         <p:cNvGrpSpPr/>
         <p:nvPr/>
       </p:nvGrpSpPr>
-      <p:grpSpPr>
-        <a:xfrm>
-          <a:off x="0" y="0"/>
-          <a:ext cx="0" cy="0"/>
-          <a:chOff x="0" y="0"/>
-          <a:chExt cx="0" cy="0"/>
-        </a:xfrm>
-      </p:grpSpPr>
+      <p:grpSpPr/>
       <p:sp>
         <p:nvSpPr>
           <p:cNvPr id="2" name="TextBox 1"/>
@@ -35015,7 +34573,6 @@
           <a:lstStyle/>
           <a:p>
             <a:pPr algn="ctr"/>
-            <a:endParaRPr/>
           </a:p>
         </p:txBody>
       </p:sp>
@@ -35028,7 +34585,7 @@
           <p:nvPr/>
         </p:nvPicPr>
         <p:blipFill>
-          <a:blip r:embed="rId3"/>
+          <a:blip r:embed="rId2"/>
           <a:stretch>
             <a:fillRect/>
           </a:stretch>
@@ -35240,7 +34797,7 @@
           </a:fontRef>
         </p:style>
         <p:txBody>
-          <a:bodyPr wrap="square" lIns="73152" rIns="73152" rtlCol="0" anchor="ctr"/>
+          <a:bodyPr rtlCol="0" anchor="ctr" wrap="square" lIns="73152" rIns="73152"/>
           <a:lstStyle/>
           <a:p>
             <a:pPr algn="ctr"/>
@@ -35309,7 +34866,7 @@
           </a:fontRef>
         </p:style>
         <p:txBody>
-          <a:bodyPr wrap="square" lIns="73152" rIns="73152" rtlCol="0" anchor="ctr"/>
+          <a:bodyPr rtlCol="0" anchor="ctr" wrap="square" lIns="73152" rIns="73152"/>
           <a:lstStyle/>
           <a:p>
             <a:pPr algn="ctr"/>
@@ -35378,7 +34935,7 @@
           </a:fontRef>
         </p:style>
         <p:txBody>
-          <a:bodyPr wrap="square" lIns="73152" rIns="73152" rtlCol="0" anchor="ctr"/>
+          <a:bodyPr rtlCol="0" anchor="ctr" wrap="square" lIns="73152" rIns="73152"/>
           <a:lstStyle/>
           <a:p>
             <a:pPr algn="ctr"/>
@@ -35447,7 +35004,7 @@
           </a:fontRef>
         </p:style>
         <p:txBody>
-          <a:bodyPr wrap="square" lIns="73152" rIns="73152" rtlCol="0" anchor="ctr"/>
+          <a:bodyPr rtlCol="0" anchor="ctr" wrap="square" lIns="73152" rIns="73152"/>
           <a:lstStyle/>
           <a:p>
             <a:pPr algn="ctr"/>
@@ -35818,44 +35375,44 @@
         <a:sysClr val="window" lastClr="FFFFFF"/>
       </a:lt1>
       <a:dk2>
-        <a:srgbClr val="0E2841"/>
+        <a:srgbClr val="1F497D"/>
       </a:dk2>
       <a:lt2>
-        <a:srgbClr val="E8E8E8"/>
+        <a:srgbClr val="EEECE1"/>
       </a:lt2>
       <a:accent1>
-        <a:srgbClr val="156082"/>
+        <a:srgbClr val="4F81BD"/>
       </a:accent1>
       <a:accent2>
-        <a:srgbClr val="E97132"/>
+        <a:srgbClr val="C0504D"/>
       </a:accent2>
       <a:accent3>
-        <a:srgbClr val="196B24"/>
+        <a:srgbClr val="9BBB59"/>
       </a:accent3>
       <a:accent4>
-        <a:srgbClr val="0F9ED5"/>
+        <a:srgbClr val="8064A2"/>
       </a:accent4>
       <a:accent5>
-        <a:srgbClr val="A02B93"/>
+        <a:srgbClr val="4BACC6"/>
       </a:accent5>
       <a:accent6>
-        <a:srgbClr val="4EA72E"/>
+        <a:srgbClr val="F79646"/>
       </a:accent6>
       <a:hlink>
-        <a:srgbClr val="467886"/>
+        <a:srgbClr val="0000FF"/>
       </a:hlink>
       <a:folHlink>
-        <a:srgbClr val="96607D"/>
+        <a:srgbClr val="800080"/>
       </a:folHlink>
     </a:clrScheme>
     <a:fontScheme name="Office">
       <a:majorFont>
-        <a:latin typeface="Aptos Display" panose="02110004020202020204"/>
+        <a:latin typeface="Calibri"/>
         <a:ea typeface=""/>
         <a:cs typeface=""/>
-        <a:font script="Jpan" typeface="游ゴシック Light"/>
+        <a:font script="Jpan" typeface="ＭＳ Ｐゴシック"/>
         <a:font script="Hang" typeface="맑은 고딕"/>
-        <a:font script="Hans" typeface="等线 Light"/>
+        <a:font script="Hans" typeface="宋体"/>
         <a:font script="Hant" typeface="新細明體"/>
         <a:font script="Arab" typeface="Times New Roman"/>
         <a:font script="Hebr" typeface="Times New Roman"/>
@@ -35883,31 +35440,14 @@
         <a:font script="Viet" typeface="Times New Roman"/>
         <a:font script="Uigh" typeface="Microsoft Uighur"/>
         <a:font script="Geor" typeface="Sylfaen"/>
-        <a:font script="Armn" typeface="Arial"/>
-        <a:font script="Bugi" typeface="Leelawadee UI"/>
-        <a:font script="Bopo" typeface="Microsoft JhengHei"/>
-        <a:font script="Java" typeface="Javanese Text"/>
-        <a:font script="Lisu" typeface="Segoe UI"/>
-        <a:font script="Mymr" typeface="Myanmar Text"/>
-        <a:font script="Nkoo" typeface="Ebrima"/>
-        <a:font script="Olck" typeface="Nirmala UI"/>
-        <a:font script="Osma" typeface="Ebrima"/>
-        <a:font script="Phag" typeface="Phagspa"/>
-        <a:font script="Syrn" typeface="Estrangelo Edessa"/>
-        <a:font script="Syrj" typeface="Estrangelo Edessa"/>
-        <a:font script="Syre" typeface="Estrangelo Edessa"/>
-        <a:font script="Sora" typeface="Nirmala UI"/>
-        <a:font script="Tale" typeface="Microsoft Tai Le"/>
-        <a:font script="Talu" typeface="Microsoft New Tai Lue"/>
-        <a:font script="Tfng" typeface="Ebrima"/>
       </a:majorFont>
       <a:minorFont>
-        <a:latin typeface="Aptos" panose="02110004020202020204"/>
+        <a:latin typeface="Calibri"/>
         <a:ea typeface=""/>
         <a:cs typeface=""/>
-        <a:font script="Jpan" typeface="游ゴシック"/>
+        <a:font script="Jpan" typeface="ＭＳ Ｐゴシック"/>
         <a:font script="Hang" typeface="맑은 고딕"/>
-        <a:font script="Hans" typeface="等线"/>
+        <a:font script="Hans" typeface="宋体"/>
         <a:font script="Hant" typeface="新細明體"/>
         <a:font script="Arab" typeface="Arial"/>
         <a:font script="Hebr" typeface="Arial"/>
@@ -35935,23 +35475,6 @@
         <a:font script="Viet" typeface="Arial"/>
         <a:font script="Uigh" typeface="Microsoft Uighur"/>
         <a:font script="Geor" typeface="Sylfaen"/>
-        <a:font script="Armn" typeface="Arial"/>
-        <a:font script="Bugi" typeface="Leelawadee UI"/>
-        <a:font script="Bopo" typeface="Microsoft JhengHei"/>
-        <a:font script="Java" typeface="Javanese Text"/>
-        <a:font script="Lisu" typeface="Segoe UI"/>
-        <a:font script="Mymr" typeface="Myanmar Text"/>
-        <a:font script="Nkoo" typeface="Ebrima"/>
-        <a:font script="Olck" typeface="Nirmala UI"/>
-        <a:font script="Osma" typeface="Ebrima"/>
-        <a:font script="Phag" typeface="Phagspa"/>
-        <a:font script="Syrn" typeface="Estrangelo Edessa"/>
-        <a:font script="Syrj" typeface="Estrangelo Edessa"/>
-        <a:font script="Syre" typeface="Estrangelo Edessa"/>
-        <a:font script="Sora" typeface="Nirmala UI"/>
-        <a:font script="Tale" typeface="Microsoft Tai Le"/>
-        <a:font script="Talu" typeface="Microsoft New Tai Lue"/>
-        <a:font script="Tfng" typeface="Ebrima"/>
       </a:minorFont>
     </a:fontScheme>
     <a:fmtScheme name="Office">
@@ -35963,136 +35486,180 @@
           <a:gsLst>
             <a:gs pos="0">
               <a:schemeClr val="phClr">
-                <a:lumMod val="110000"/>
-                <a:satMod val="105000"/>
-                <a:tint val="67000"/>
+                <a:tint val="50000"/>
+                <a:satMod val="300000"/>
               </a:schemeClr>
             </a:gs>
-            <a:gs pos="50000">
+            <a:gs pos="35000">
               <a:schemeClr val="phClr">
-                <a:lumMod val="105000"/>
-                <a:satMod val="103000"/>
-                <a:tint val="73000"/>
+                <a:tint val="37000"/>
+                <a:satMod val="300000"/>
               </a:schemeClr>
             </a:gs>
             <a:gs pos="100000">
               <a:schemeClr val="phClr">
-                <a:lumMod val="105000"/>
-                <a:satMod val="109000"/>
-                <a:tint val="81000"/>
+                <a:tint val="15000"/>
+                <a:satMod val="350000"/>
               </a:schemeClr>
             </a:gs>
           </a:gsLst>
-          <a:lin ang="5400000" scaled="0"/>
+          <a:lin ang="16200000" scaled="1"/>
         </a:gradFill>
         <a:gradFill rotWithShape="1">
           <a:gsLst>
             <a:gs pos="0">
               <a:schemeClr val="phClr">
-                <a:satMod val="103000"/>
-                <a:lumMod val="102000"/>
-                <a:tint val="94000"/>
-              </a:schemeClr>
-            </a:gs>
-            <a:gs pos="50000">
-              <a:schemeClr val="phClr">
-                <a:satMod val="110000"/>
-                <a:lumMod val="100000"/>
+                <a:tint val="100000"/>
                 <a:shade val="100000"/>
+                <a:satMod val="130000"/>
               </a:schemeClr>
             </a:gs>
             <a:gs pos="100000">
               <a:schemeClr val="phClr">
-                <a:lumMod val="99000"/>
-                <a:satMod val="120000"/>
-                <a:shade val="78000"/>
+                <a:tint val="50000"/>
+                <a:shade val="100000"/>
+                <a:satMod val="350000"/>
               </a:schemeClr>
             </a:gs>
           </a:gsLst>
-          <a:lin ang="5400000" scaled="0"/>
+          <a:lin ang="16200000" scaled="0"/>
         </a:gradFill>
       </a:fillStyleLst>
       <a:lnStyleLst>
-        <a:ln w="12700" cap="flat" cmpd="sng" algn="ctr">
+        <a:ln w="9525" cap="flat" cmpd="sng" algn="ctr">
           <a:solidFill>
-            <a:schemeClr val="phClr"/>
+            <a:schemeClr val="phClr">
+              <a:shade val="95000"/>
+              <a:satMod val="105000"/>
+            </a:schemeClr>
           </a:solidFill>
           <a:prstDash val="solid"/>
-          <a:miter lim="800000"/>
-        </a:ln>
-        <a:ln w="19050" cap="flat" cmpd="sng" algn="ctr">
-          <a:solidFill>
-            <a:schemeClr val="phClr"/>
-          </a:solidFill>
-          <a:prstDash val="solid"/>
-          <a:miter lim="800000"/>
         </a:ln>
         <a:ln w="25400" cap="flat" cmpd="sng" algn="ctr">
           <a:solidFill>
             <a:schemeClr val="phClr"/>
           </a:solidFill>
           <a:prstDash val="solid"/>
-          <a:miter lim="800000"/>
+        </a:ln>
+        <a:ln w="38100" cap="flat" cmpd="sng" algn="ctr">
+          <a:solidFill>
+            <a:schemeClr val="phClr"/>
+          </a:solidFill>
+          <a:prstDash val="solid"/>
         </a:ln>
       </a:lnStyleLst>
       <a:effectStyleLst>
         <a:effectStyle>
-          <a:effectLst/>
-        </a:effectStyle>
-        <a:effectStyle>
-          <a:effectLst/>
+          <a:effectLst>
+            <a:outerShdw blurRad="40000" dist="20000" dir="5400000" rotWithShape="0">
+              <a:srgbClr val="000000">
+                <a:alpha val="38000"/>
+              </a:srgbClr>
+            </a:outerShdw>
+          </a:effectLst>
         </a:effectStyle>
         <a:effectStyle>
           <a:effectLst>
-            <a:outerShdw blurRad="57150" dist="19050" dir="5400000" algn="ctr" rotWithShape="0">
+            <a:outerShdw blurRad="40000" dist="23000" dir="5400000" rotWithShape="0">
               <a:srgbClr val="000000">
-                <a:alpha val="63000"/>
+                <a:alpha val="35000"/>
               </a:srgbClr>
             </a:outerShdw>
           </a:effectLst>
+        </a:effectStyle>
+        <a:effectStyle>
+          <a:effectLst>
+            <a:outerShdw blurRad="40000" dist="23000" dir="5400000" rotWithShape="0">
+              <a:srgbClr val="000000">
+                <a:alpha val="35000"/>
+              </a:srgbClr>
+            </a:outerShdw>
+          </a:effectLst>
+          <a:scene3d>
+            <a:camera prst="orthographicFront">
+              <a:rot lat="0" lon="0" rev="0"/>
+            </a:camera>
+            <a:lightRig rig="threePt" dir="t">
+              <a:rot lat="0" lon="0" rev="1200000"/>
+            </a:lightRig>
+          </a:scene3d>
+          <a:sp3d>
+            <a:bevelT w="63500" h="25400"/>
+          </a:sp3d>
         </a:effectStyle>
       </a:effectStyleLst>
       <a:bgFillStyleLst>
         <a:solidFill>
           <a:schemeClr val="phClr"/>
         </a:solidFill>
-        <a:solidFill>
-          <a:schemeClr val="phClr">
-            <a:tint val="95000"/>
-            <a:satMod val="170000"/>
-          </a:schemeClr>
-        </a:solidFill>
         <a:gradFill rotWithShape="1">
           <a:gsLst>
             <a:gs pos="0">
               <a:schemeClr val="phClr">
-                <a:tint val="93000"/>
-                <a:satMod val="150000"/>
-                <a:shade val="98000"/>
-                <a:lumMod val="102000"/>
+                <a:tint val="40000"/>
+                <a:satMod val="350000"/>
               </a:schemeClr>
             </a:gs>
-            <a:gs pos="50000">
+            <a:gs pos="40000">
               <a:schemeClr val="phClr">
-                <a:tint val="98000"/>
-                <a:satMod val="130000"/>
-                <a:shade val="90000"/>
-                <a:lumMod val="103000"/>
+                <a:tint val="45000"/>
+                <a:shade val="99000"/>
+                <a:satMod val="350000"/>
               </a:schemeClr>
             </a:gs>
             <a:gs pos="100000">
               <a:schemeClr val="phClr">
-                <a:shade val="63000"/>
-                <a:satMod val="120000"/>
+                <a:shade val="20000"/>
+                <a:satMod val="255000"/>
               </a:schemeClr>
             </a:gs>
           </a:gsLst>
-          <a:lin ang="5400000" scaled="0"/>
+          <a:path path="circle">
+            <a:fillToRect l="50000" t="-80000" r="50000" b="180000"/>
+          </a:path>
+        </a:gradFill>
+        <a:gradFill rotWithShape="1">
+          <a:gsLst>
+            <a:gs pos="0">
+              <a:schemeClr val="phClr">
+                <a:tint val="80000"/>
+                <a:satMod val="300000"/>
+              </a:schemeClr>
+            </a:gs>
+            <a:gs pos="100000">
+              <a:schemeClr val="phClr">
+                <a:shade val="30000"/>
+                <a:satMod val="200000"/>
+              </a:schemeClr>
+            </a:gs>
+          </a:gsLst>
+          <a:path path="circle">
+            <a:fillToRect l="50000" t="50000" r="50000" b="50000"/>
+          </a:path>
         </a:gradFill>
       </a:bgFillStyleLst>
     </a:fmtScheme>
   </a:themeElements>
   <a:objectDefaults>
+    <a:spDef>
+      <a:spPr/>
+      <a:bodyPr/>
+      <a:lstStyle/>
+      <a:style>
+        <a:lnRef idx="1">
+          <a:schemeClr val="accent1"/>
+        </a:lnRef>
+        <a:fillRef idx="3">
+          <a:schemeClr val="accent1"/>
+        </a:fillRef>
+        <a:effectRef idx="2">
+          <a:schemeClr val="accent1"/>
+        </a:effectRef>
+        <a:fontRef idx="minor">
+          <a:schemeClr val="lt1"/>
+        </a:fontRef>
+      </a:style>
+    </a:spDef>
     <a:lnDef>
       <a:spPr/>
       <a:bodyPr/>
@@ -36114,10 +35681,5 @@
     </a:lnDef>
   </a:objectDefaults>
   <a:extraClrSchemeLst/>
-  <a:extLst>
-    <a:ext uri="{05A4C25C-085E-4340-85A3-A5531E510DB2}">
-      <thm15:themeFamily xmlns:thm15="http://schemas.microsoft.com/office/thememl/2012/main" name="Office Theme" id="{2E142A2C-CD16-42D6-873A-C26D2A0506FA}" vid="{1BDDFF52-6CD6-40A5-AB3C-68EB2F1E4D0A}"/>
-    </a:ext>
-  </a:extLst>
 </a:theme>
 </file>